--- a/Working Documents/2026_COMPAAPM_Figures.pptx
+++ b/Working Documents/2026_COMPAAPM_Figures.pptx
@@ -7,7 +7,12 @@
   <p:sldIdLst>
     <p:sldId id="258" r:id="rId2"/>
     <p:sldId id="259" r:id="rId3"/>
-    <p:sldId id="257" r:id="rId4"/>
+    <p:sldId id="261" r:id="rId4"/>
+    <p:sldId id="263" r:id="rId5"/>
+    <p:sldId id="264" r:id="rId6"/>
+    <p:sldId id="265" r:id="rId7"/>
+    <p:sldId id="257" r:id="rId8"/>
+    <p:sldId id="260" r:id="rId9"/>
   </p:sldIdLst>
   <p:sldSz cx="12192000" cy="6858000"/>
   <p:notesSz cx="6858000" cy="9144000"/>
@@ -106,7 +111,2256 @@
       </a:defRPr>
     </a:lvl9pPr>
   </p:defaultTextStyle>
+  <p:extLst>
+    <p:ext uri="{EFAFB233-063F-42B5-8137-9DF3F51BA10A}">
+      <p15:sldGuideLst xmlns:p15="http://schemas.microsoft.com/office/powerpoint/2012/main"/>
+    </p:ext>
+  </p:extLst>
 </p:presentation>
+</file>
+
+<file path=ppt/charts/chart1.xml><?xml version="1.0" encoding="utf-8"?>
+<c:chartSpace xmlns:c="http://schemas.openxmlformats.org/drawingml/2006/chart" xmlns:a="http://schemas.openxmlformats.org/drawingml/2006/main" xmlns:r="http://schemas.openxmlformats.org/officeDocument/2006/relationships" xmlns:c16r2="http://schemas.microsoft.com/office/drawing/2015/06/chart">
+  <c:date1904 val="0"/>
+  <c:lang val="en-US"/>
+  <c:roundedCorners val="0"/>
+  <mc:AlternateContent xmlns:mc="http://schemas.openxmlformats.org/markup-compatibility/2006">
+    <mc:Choice xmlns:c14="http://schemas.microsoft.com/office/drawing/2007/8/2/chart" Requires="c14">
+      <c14:style val="101"/>
+    </mc:Choice>
+    <mc:Fallback>
+      <c:style val="1"/>
+    </mc:Fallback>
+  </mc:AlternateContent>
+  <c:chart>
+    <c:autoTitleDeleted val="1"/>
+    <c:plotArea>
+      <c:layout/>
+      <c:lineChart>
+        <c:grouping val="standard"/>
+        <c:varyColors val="0"/>
+        <c:ser>
+          <c:idx val="0"/>
+          <c:order val="0"/>
+          <c:spPr>
+            <a:ln w="19050" cap="flat" cmpd="sng" algn="ctr">
+              <a:solidFill>
+                <a:schemeClr val="dk1"/>
+              </a:solidFill>
+              <a:prstDash val="solid"/>
+              <a:miter lim="800000"/>
+            </a:ln>
+            <a:effectLst/>
+          </c:spPr>
+          <c:marker>
+            <c:symbol val="none"/>
+          </c:marker>
+          <c:val>
+            <c:numRef>
+              <c:f>Sheet1!$B$2:$B$479</c:f>
+              <c:numCache>
+                <c:formatCode>General</c:formatCode>
+                <c:ptCount val="478"/>
+                <c:pt idx="0">
+                  <c:v>5.3133800000000004E-3</c:v>
+                </c:pt>
+                <c:pt idx="1">
+                  <c:v>1.0018325719077599E-2</c:v>
+                </c:pt>
+                <c:pt idx="2">
+                  <c:v>1.62151514381551E-2</c:v>
+                </c:pt>
+                <c:pt idx="3">
+                  <c:v>2.3946877157232701E-2</c:v>
+                </c:pt>
+                <c:pt idx="4">
+                  <c:v>3.3188902876310301E-2</c:v>
+                </c:pt>
+                <c:pt idx="5">
+                  <c:v>4.3876628595387802E-2</c:v>
+                </c:pt>
+                <c:pt idx="6">
+                  <c:v>5.5939154314465403E-2</c:v>
+                </c:pt>
+                <c:pt idx="7">
+                  <c:v>6.9331580033543005E-2</c:v>
+                </c:pt>
+                <c:pt idx="8">
+                  <c:v>8.4055105752620499E-2</c:v>
+                </c:pt>
+                <c:pt idx="9">
+                  <c:v>0.100161131471698</c:v>
+                </c:pt>
+                <c:pt idx="10">
+                  <c:v>0.117734257190776</c:v>
+                </c:pt>
+                <c:pt idx="11">
+                  <c:v>0.136863382909853</c:v>
+                </c:pt>
+                <c:pt idx="12">
+                  <c:v>0.15760150862893099</c:v>
+                </c:pt>
+                <c:pt idx="13">
+                  <c:v>0.17992463434800801</c:v>
+                </c:pt>
+                <c:pt idx="14">
+                  <c:v>0.20370476006708599</c:v>
+                </c:pt>
+                <c:pt idx="15">
+                  <c:v>0.22870488578616399</c:v>
+                </c:pt>
+                <c:pt idx="16">
+                  <c:v>0.25458301150524099</c:v>
+                </c:pt>
+                <c:pt idx="17">
+                  <c:v>0.280927137224319</c:v>
+                </c:pt>
+                <c:pt idx="18">
+                  <c:v>0.30729726294339599</c:v>
+                </c:pt>
+                <c:pt idx="19">
+                  <c:v>0.33326838866247399</c:v>
+                </c:pt>
+                <c:pt idx="20">
+                  <c:v>0.35847451438155098</c:v>
+                </c:pt>
+                <c:pt idx="21">
+                  <c:v>0.382631640100629</c:v>
+                </c:pt>
+                <c:pt idx="22">
+                  <c:v>0.40555276581970701</c:v>
+                </c:pt>
+                <c:pt idx="23">
+                  <c:v>0.42714089153878398</c:v>
+                </c:pt>
+                <c:pt idx="24">
+                  <c:v>0.44737101725786199</c:v>
+                </c:pt>
+                <c:pt idx="25">
+                  <c:v>0.466265142976939</c:v>
+                </c:pt>
+                <c:pt idx="26">
+                  <c:v>0.48386126869601698</c:v>
+                </c:pt>
+                <c:pt idx="27">
+                  <c:v>0.50020039441509401</c:v>
+                </c:pt>
+                <c:pt idx="28">
+                  <c:v>0.51530452013417205</c:v>
+                </c:pt>
+                <c:pt idx="29">
+                  <c:v>0.52918164585325</c:v>
+                </c:pt>
+                <c:pt idx="30">
+                  <c:v>0.54183477157232696</c:v>
+                </c:pt>
+                <c:pt idx="31">
+                  <c:v>0.55327189729140502</c:v>
+                </c:pt>
+                <c:pt idx="32">
+                  <c:v>0.56352302301048196</c:v>
+                </c:pt>
+                <c:pt idx="33">
+                  <c:v>0.57265214872956005</c:v>
+                </c:pt>
+                <c:pt idx="34">
+                  <c:v>0.58075727444863701</c:v>
+                </c:pt>
+                <c:pt idx="35">
+                  <c:v>0.58796140016771503</c:v>
+                </c:pt>
+                <c:pt idx="36">
+                  <c:v>0.59440252588679299</c:v>
+                </c:pt>
+                <c:pt idx="37">
+                  <c:v>0.60020965160587003</c:v>
+                </c:pt>
+                <c:pt idx="38">
+                  <c:v>0.60548977732494802</c:v>
+                </c:pt>
+                <c:pt idx="39">
+                  <c:v>0.61031490304402503</c:v>
+                </c:pt>
+                <c:pt idx="40">
+                  <c:v>0.614718028763103</c:v>
+                </c:pt>
+                <c:pt idx="41">
+                  <c:v>0.61870115448217999</c:v>
+                </c:pt>
+                <c:pt idx="42">
+                  <c:v>0.622248280201258</c:v>
+                </c:pt>
+                <c:pt idx="43">
+                  <c:v>0.62534540592033605</c:v>
+                </c:pt>
+                <c:pt idx="44">
+                  <c:v>0.62799153163941301</c:v>
+                </c:pt>
+                <c:pt idx="45">
+                  <c:v>0.63021565735849105</c:v>
+                </c:pt>
+                <c:pt idx="46">
+                  <c:v>0.63207278307756798</c:v>
+                </c:pt>
+                <c:pt idx="47">
+                  <c:v>0.633639908796646</c:v>
+                </c:pt>
+                <c:pt idx="48">
+                  <c:v>0.63500403451572296</c:v>
+                </c:pt>
+                <c:pt idx="49">
+                  <c:v>0.63624016023480101</c:v>
+                </c:pt>
+                <c:pt idx="50">
+                  <c:v>0.63740128595387902</c:v>
+                </c:pt>
+                <c:pt idx="51">
+                  <c:v>0.63850241167295596</c:v>
+                </c:pt>
+                <c:pt idx="52">
+                  <c:v>0.63952453739203396</c:v>
+                </c:pt>
+                <c:pt idx="53">
+                  <c:v>0.64041766311111104</c:v>
+                </c:pt>
+                <c:pt idx="54">
+                  <c:v>0.64111378883018899</c:v>
+                </c:pt>
+                <c:pt idx="55">
+                  <c:v>0.64154591454926602</c:v>
+                </c:pt>
+                <c:pt idx="56">
+                  <c:v>0.64166204026834395</c:v>
+                </c:pt>
+                <c:pt idx="57">
+                  <c:v>0.64143416598742098</c:v>
+                </c:pt>
+                <c:pt idx="58">
+                  <c:v>0.64086329170649903</c:v>
+                </c:pt>
+                <c:pt idx="59">
+                  <c:v>0.63997441742557704</c:v>
+                </c:pt>
+                <c:pt idx="60">
+                  <c:v>0.63880554314465399</c:v>
+                </c:pt>
+                <c:pt idx="61">
+                  <c:v>0.63739466886373197</c:v>
+                </c:pt>
+                <c:pt idx="62">
+                  <c:v>0.63576979458280902</c:v>
+                </c:pt>
+                <c:pt idx="63">
+                  <c:v>0.63393992030188695</c:v>
+                </c:pt>
+                <c:pt idx="64">
+                  <c:v>0.63190004602096395</c:v>
+                </c:pt>
+                <c:pt idx="65">
+                  <c:v>0.62963017174004199</c:v>
+                </c:pt>
+                <c:pt idx="66">
+                  <c:v>0.62711029745911995</c:v>
+                </c:pt>
+                <c:pt idx="67">
+                  <c:v>0.62432942317819695</c:v>
+                </c:pt>
+                <c:pt idx="68">
+                  <c:v>0.62129354889727495</c:v>
+                </c:pt>
+                <c:pt idx="69">
+                  <c:v>0.61802667461635197</c:v>
+                </c:pt>
+                <c:pt idx="70">
+                  <c:v>0.61456880033543004</c:v>
+                </c:pt>
+                <c:pt idx="71">
+                  <c:v>0.61096192605450705</c:v>
+                </c:pt>
+                <c:pt idx="72">
+                  <c:v>0.60724205177358503</c:v>
+                </c:pt>
+                <c:pt idx="73">
+                  <c:v>0.60342317749266305</c:v>
+                </c:pt>
+                <c:pt idx="74">
+                  <c:v>0.59949530321174005</c:v>
+                </c:pt>
+                <c:pt idx="75">
+                  <c:v>0.59541742893081795</c:v>
+                </c:pt>
+                <c:pt idx="76">
+                  <c:v>0.59113355464989503</c:v>
+                </c:pt>
+                <c:pt idx="77">
+                  <c:v>0.58657968036897301</c:v>
+                </c:pt>
+                <c:pt idx="78">
+                  <c:v>0.58170780608804995</c:v>
+                </c:pt>
+                <c:pt idx="79">
+                  <c:v>0.57649593180712799</c:v>
+                </c:pt>
+                <c:pt idx="80">
+                  <c:v>0.57096005752620604</c:v>
+                </c:pt>
+                <c:pt idx="81">
+                  <c:v>0.56515618324528305</c:v>
+                </c:pt>
+                <c:pt idx="82">
+                  <c:v>0.55917230896436099</c:v>
+                </c:pt>
+                <c:pt idx="83">
+                  <c:v>0.55310843468343796</c:v>
+                </c:pt>
+                <c:pt idx="84">
+                  <c:v>0.547062560402516</c:v>
+                </c:pt>
+                <c:pt idx="85">
+                  <c:v>0.54111068612159297</c:v>
+                </c:pt>
+                <c:pt idx="86">
+                  <c:v>0.53529281184067101</c:v>
+                </c:pt>
+                <c:pt idx="87">
+                  <c:v>0.52961093755974797</c:v>
+                </c:pt>
+                <c:pt idx="88">
+                  <c:v>0.52403506327882599</c:v>
+                </c:pt>
+                <c:pt idx="89">
+                  <c:v>0.51852318899790395</c:v>
+                </c:pt>
+                <c:pt idx="90">
+                  <c:v>0.51303031471698102</c:v>
+                </c:pt>
+                <c:pt idx="91">
+                  <c:v>0.50753344043605897</c:v>
+                </c:pt>
+                <c:pt idx="92">
+                  <c:v>0.50203456615513598</c:v>
+                </c:pt>
+                <c:pt idx="93">
+                  <c:v>0.49656269187421398</c:v>
+                </c:pt>
+                <c:pt idx="94">
+                  <c:v>0.49115981759329103</c:v>
+                </c:pt>
+                <c:pt idx="95">
+                  <c:v>0.48586294331236901</c:v>
+                </c:pt>
+                <c:pt idx="96">
+                  <c:v>0.48068306903144697</c:v>
+                </c:pt>
+                <c:pt idx="97">
+                  <c:v>0.47558919475052402</c:v>
+                </c:pt>
+                <c:pt idx="98">
+                  <c:v>0.47050332046960203</c:v>
+                </c:pt>
+                <c:pt idx="99">
+                  <c:v>0.465302446188679</c:v>
+                </c:pt>
+                <c:pt idx="100">
+                  <c:v>0.45984357190775699</c:v>
+                </c:pt>
+                <c:pt idx="101">
+                  <c:v>0.45398869762683403</c:v>
+                </c:pt>
+                <c:pt idx="102">
+                  <c:v>0.44763382334591201</c:v>
+                </c:pt>
+                <c:pt idx="103">
+                  <c:v>0.44073294906499</c:v>
+                </c:pt>
+                <c:pt idx="104">
+                  <c:v>0.433313074784067</c:v>
+                </c:pt>
+                <c:pt idx="105">
+                  <c:v>0.42546820050314499</c:v>
+                </c:pt>
+                <c:pt idx="106">
+                  <c:v>0.41734332622222198</c:v>
+                </c:pt>
+                <c:pt idx="107">
+                  <c:v>0.40910345194129999</c:v>
+                </c:pt>
+                <c:pt idx="108">
+                  <c:v>0.40089557766037698</c:v>
+                </c:pt>
+                <c:pt idx="109">
+                  <c:v>0.39282270337945502</c:v>
+                </c:pt>
+                <c:pt idx="110">
+                  <c:v>0.38492082909853298</c:v>
+                </c:pt>
+                <c:pt idx="111">
+                  <c:v>0.37715695481761002</c:v>
+                </c:pt>
+                <c:pt idx="112">
+                  <c:v>0.36944608053668798</c:v>
+                </c:pt>
+                <c:pt idx="113">
+                  <c:v>0.36168020625576502</c:v>
+                </c:pt>
+                <c:pt idx="114">
+                  <c:v>0.353761331974843</c:v>
+                </c:pt>
+                <c:pt idx="115">
+                  <c:v>0.34563645769391999</c:v>
+                </c:pt>
+                <c:pt idx="116">
+                  <c:v>0.33731458341299803</c:v>
+                </c:pt>
+                <c:pt idx="117">
+                  <c:v>0.32886770913207503</c:v>
+                </c:pt>
+                <c:pt idx="118">
+                  <c:v>0.320419834851153</c:v>
+                </c:pt>
+                <c:pt idx="119">
+                  <c:v>0.31211296057023102</c:v>
+                </c:pt>
+                <c:pt idx="120">
+                  <c:v>0.30407308628930801</c:v>
+                </c:pt>
+                <c:pt idx="121">
+                  <c:v>0.29637521200838601</c:v>
+                </c:pt>
+                <c:pt idx="122">
+                  <c:v>0.289028337727463</c:v>
+                </c:pt>
+                <c:pt idx="123">
+                  <c:v>0.281971463446541</c:v>
+                </c:pt>
+                <c:pt idx="124">
+                  <c:v>0.27509358916561899</c:v>
+                </c:pt>
+                <c:pt idx="125">
+                  <c:v>0.26827171488469598</c:v>
+                </c:pt>
+                <c:pt idx="126">
+                  <c:v>0.26140584060377398</c:v>
+                </c:pt>
+                <c:pt idx="127">
+                  <c:v>0.254455966322851</c:v>
+                </c:pt>
+                <c:pt idx="128">
+                  <c:v>0.24745909204192901</c:v>
+                </c:pt>
+                <c:pt idx="129">
+                  <c:v>0.24051821776100599</c:v>
+                </c:pt>
+                <c:pt idx="130">
+                  <c:v>0.233783343480084</c:v>
+                </c:pt>
+                <c:pt idx="131">
+                  <c:v>0.22739346919916101</c:v>
+                </c:pt>
+                <c:pt idx="132">
+                  <c:v>0.221436594918239</c:v>
+                </c:pt>
+                <c:pt idx="133">
+                  <c:v>0.215901720637317</c:v>
+                </c:pt>
+                <c:pt idx="134">
+                  <c:v>0.21066084635639401</c:v>
+                </c:pt>
+                <c:pt idx="135">
+                  <c:v>0.205482972075472</c:v>
+                </c:pt>
+                <c:pt idx="136">
+                  <c:v>0.20007609779454899</c:v>
+                </c:pt>
+                <c:pt idx="137">
+                  <c:v>0.19415122351362701</c:v>
+                </c:pt>
+                <c:pt idx="138">
+                  <c:v>0.187490349232704</c:v>
+                </c:pt>
+                <c:pt idx="139">
+                  <c:v>0.180016474951782</c:v>
+                </c:pt>
+                <c:pt idx="140">
+                  <c:v>0.17181260067085999</c:v>
+                </c:pt>
+                <c:pt idx="141">
+                  <c:v>0.16312172638993699</c:v>
+                </c:pt>
+                <c:pt idx="142">
+                  <c:v>0.154294852109015</c:v>
+                </c:pt>
+                <c:pt idx="143">
+                  <c:v>0.14569897782809199</c:v>
+                </c:pt>
+                <c:pt idx="144">
+                  <c:v>0.13761510354716999</c:v>
+                </c:pt>
+                <c:pt idx="145">
+                  <c:v>0.13013922926624699</c:v>
+                </c:pt>
+                <c:pt idx="146">
+                  <c:v>0.123113354985325</c:v>
+                </c:pt>
+                <c:pt idx="147">
+                  <c:v>0.116117480704403</c:v>
+                </c:pt>
+                <c:pt idx="148">
+                  <c:v>0.10851860642348</c:v>
+                </c:pt>
+                <c:pt idx="149">
+                  <c:v>9.9576832142557706E-2</c:v>
+                </c:pt>
+                <c:pt idx="150">
+                  <c:v>8.8599357861635197E-2</c:v>
+                </c:pt>
+                <c:pt idx="151">
+                  <c:v>7.5091383580712795E-2</c:v>
+                </c:pt>
+                <c:pt idx="152">
+                  <c:v>5.8896209299790399E-2</c:v>
+                </c:pt>
+                <c:pt idx="153">
+                  <c:v>4.0286635018867901E-2</c:v>
+                </c:pt>
+                <c:pt idx="154">
+                  <c:v>1.9989860737945502E-2</c:v>
+                </c:pt>
+                <c:pt idx="155">
+                  <c:v>-8.6444154297693899E-4</c:v>
+                </c:pt>
+                <c:pt idx="156">
+                  <c:v>-2.0875087823899401E-2</c:v>
+                </c:pt>
+                <c:pt idx="157">
+                  <c:v>-3.8563862104821801E-2</c:v>
+                </c:pt>
+                <c:pt idx="158">
+                  <c:v>-5.2605736385744201E-2</c:v>
+                </c:pt>
+                <c:pt idx="159">
+                  <c:v>-6.2048110666666698E-2</c:v>
+                </c:pt>
+                <c:pt idx="160">
+                  <c:v>-6.6473984947589104E-2</c:v>
+                </c:pt>
+                <c:pt idx="161">
+                  <c:v>-6.6065359228511505E-2</c:v>
+                </c:pt>
+                <c:pt idx="162">
+                  <c:v>-6.1551933509433998E-2</c:v>
+                </c:pt>
+                <c:pt idx="163">
+                  <c:v>-5.4060407790356403E-2</c:v>
+                </c:pt>
+                <c:pt idx="164">
+                  <c:v>-4.49028820712788E-2</c:v>
+                </c:pt>
+                <c:pt idx="165">
+                  <c:v>-3.5358056352201302E-2</c:v>
+                </c:pt>
+                <c:pt idx="166">
+                  <c:v>-2.64890306331237E-2</c:v>
+                </c:pt>
+                <c:pt idx="167">
+                  <c:v>-1.9026404914046099E-2</c:v>
+                </c:pt>
+                <c:pt idx="168">
+                  <c:v>-1.33257791949686E-2</c:v>
+                </c:pt>
+                <c:pt idx="169">
+                  <c:v>-9.3941434758909904E-3</c:v>
+                </c:pt>
+                <c:pt idx="170">
+                  <c:v>-6.97035775681342E-3</c:v>
+                </c:pt>
+                <c:pt idx="171">
+                  <c:v>-5.6368120377358498E-3</c:v>
+                </c:pt>
+                <c:pt idx="172">
+                  <c:v>-4.93863631865828E-3</c:v>
+                </c:pt>
+                <c:pt idx="173">
+                  <c:v>-4.4861105995807104E-3</c:v>
+                </c:pt>
+                <c:pt idx="174">
+                  <c:v>-4.0223148805031399E-3</c:v>
+                </c:pt>
+                <c:pt idx="175">
+                  <c:v>-3.44641916142558E-3</c:v>
+                </c:pt>
+                <c:pt idx="176">
+                  <c:v>-2.7943334423480102E-3</c:v>
+                </c:pt>
+                <c:pt idx="177">
+                  <c:v>-2.18780772327044E-3</c:v>
+                </c:pt>
+                <c:pt idx="178">
+                  <c:v>-1.7696020041928699E-3</c:v>
+                </c:pt>
+                <c:pt idx="179">
+                  <c:v>-1.6437262851152999E-3</c:v>
+                </c:pt>
+                <c:pt idx="180">
+                  <c:v>-1.83602056603774E-3</c:v>
+                </c:pt>
+                <c:pt idx="181">
+                  <c:v>-2.28342484696017E-3</c:v>
+                </c:pt>
+                <c:pt idx="182">
+                  <c:v>-2.8519991278825999E-3</c:v>
+                </c:pt>
+                <c:pt idx="183">
+                  <c:v>-3.3760134088050299E-3</c:v>
+                </c:pt>
+                <c:pt idx="184">
+                  <c:v>-3.7055376897274601E-3</c:v>
+                </c:pt>
+                <c:pt idx="185">
+                  <c:v>-3.7480319706499001E-3</c:v>
+                </c:pt>
+                <c:pt idx="186">
+                  <c:v>-3.49236625157233E-3</c:v>
+                </c:pt>
+                <c:pt idx="187">
+                  <c:v>-3.0087305324947599E-3</c:v>
+                </c:pt>
+                <c:pt idx="188">
+                  <c:v>-2.4259048134171899E-3</c:v>
+                </c:pt>
+                <c:pt idx="189">
+                  <c:v>-1.89353909433962E-3</c:v>
+                </c:pt>
+                <c:pt idx="190">
+                  <c:v>-1.5410433752620499E-3</c:v>
+                </c:pt>
+                <c:pt idx="191">
+                  <c:v>-1.4444876561844899E-3</c:v>
+                </c:pt>
+                <c:pt idx="192">
+                  <c:v>-1.6093419371069201E-3</c:v>
+                </c:pt>
+                <c:pt idx="193">
+                  <c:v>-1.9724562180293498E-3</c:v>
+                </c:pt>
+                <c:pt idx="194">
+                  <c:v>-2.4218704989517801E-3</c:v>
+                </c:pt>
+                <c:pt idx="195">
+                  <c:v>-2.8285047798742098E-3</c:v>
+                </c:pt>
+                <c:pt idx="196">
+                  <c:v>-3.08127906079665E-3</c:v>
+                </c:pt>
+                <c:pt idx="197">
+                  <c:v>-3.1160433417190799E-3</c:v>
+                </c:pt>
+                <c:pt idx="198">
+                  <c:v>-2.93066762264151E-3</c:v>
+                </c:pt>
+                <c:pt idx="199">
+                  <c:v>-2.5825319035639401E-3</c:v>
+                </c:pt>
+                <c:pt idx="200">
+                  <c:v>-2.1699061844863698E-3</c:v>
+                </c:pt>
+                <c:pt idx="201">
+                  <c:v>-1.80328046540881E-3</c:v>
+                </c:pt>
+                <c:pt idx="202">
+                  <c:v>-1.5749347463312399E-3</c:v>
+                </c:pt>
+                <c:pt idx="203">
+                  <c:v>-1.5351590272536699E-3</c:v>
+                </c:pt>
+                <c:pt idx="204">
+                  <c:v>-1.6806533081760999E-3</c:v>
+                </c:pt>
+                <c:pt idx="205">
+                  <c:v>-1.95790758909853E-3</c:v>
+                </c:pt>
+                <c:pt idx="206">
+                  <c:v>-2.27994187002096E-3</c:v>
+                </c:pt>
+                <c:pt idx="207">
+                  <c:v>-2.5516961509434001E-3</c:v>
+                </c:pt>
+                <c:pt idx="208">
+                  <c:v>-2.6970104318658301E-3</c:v>
+                </c:pt>
+                <c:pt idx="209">
+                  <c:v>-2.6792247127882599E-3</c:v>
+                </c:pt>
+                <c:pt idx="210">
+                  <c:v>-2.5095989937106902E-3</c:v>
+                </c:pt>
+                <c:pt idx="211">
+                  <c:v>-2.2417732746331199E-3</c:v>
+                </c:pt>
+                <c:pt idx="212">
+                  <c:v>-1.9544375555555602E-3</c:v>
+                </c:pt>
+                <c:pt idx="213">
+                  <c:v>-1.7280618364779901E-3</c:v>
+                </c:pt>
+                <c:pt idx="214">
+                  <c:v>-1.62229611740042E-3</c:v>
+                </c:pt>
+                <c:pt idx="215">
+                  <c:v>-1.6600603983228501E-3</c:v>
+                </c:pt>
+                <c:pt idx="216">
+                  <c:v>-1.82217467924528E-3</c:v>
+                </c:pt>
+                <c:pt idx="217">
+                  <c:v>-2.05372896016771E-3</c:v>
+                </c:pt>
+                <c:pt idx="218">
+                  <c:v>-2.2803632410901501E-3</c:v>
+                </c:pt>
+                <c:pt idx="219">
+                  <c:v>-2.42963752201258E-3</c:v>
+                </c:pt>
+                <c:pt idx="220">
+                  <c:v>-2.45160180293501E-3</c:v>
+                </c:pt>
+                <c:pt idx="221">
+                  <c:v>-2.3325960838574398E-3</c:v>
+                </c:pt>
+                <c:pt idx="222">
+                  <c:v>-2.0984203647798701E-3</c:v>
+                </c:pt>
+                <c:pt idx="223">
+                  <c:v>-1.8062946457023099E-3</c:v>
+                </c:pt>
+                <c:pt idx="224">
+                  <c:v>-1.52812892662474E-3</c:v>
+                </c:pt>
+                <c:pt idx="225">
+                  <c:v>-1.33005220754717E-3</c:v>
+                </c:pt>
+                <c:pt idx="226">
+                  <c:v>-1.2539844884695999E-3</c:v>
+                </c:pt>
+                <c:pt idx="227">
+                  <c:v>-1.30621576939203E-3</c:v>
+                </c:pt>
+                <c:pt idx="228">
+                  <c:v>-1.4558660503144699E-3</c:v>
+                </c:pt>
+                <c:pt idx="229">
+                  <c:v>-1.6435803312369001E-3</c:v>
+                </c:pt>
+                <c:pt idx="230">
+                  <c:v>-1.79795461215933E-3</c:v>
+                </c:pt>
+                <c:pt idx="231">
+                  <c:v>-1.8555388930817599E-3</c:v>
+                </c:pt>
+                <c:pt idx="232">
+                  <c:v>-1.77873317400419E-3</c:v>
+                </c:pt>
+                <c:pt idx="233">
+                  <c:v>-1.5666974549266299E-3</c:v>
+                </c:pt>
+                <c:pt idx="234">
+                  <c:v>-1.25575073584906E-3</c:v>
+                </c:pt>
+                <c:pt idx="235">
+                  <c:v>-9.0920201677148905E-4</c:v>
+                </c:pt>
+                <c:pt idx="236">
+                  <c:v>-5.9961929769392097E-4</c:v>
+                </c:pt>
+                <c:pt idx="237">
+                  <c:v>-3.8910907861635199E-4</c:v>
+                </c:pt>
+                <c:pt idx="238">
+                  <c:v>-3.1305185953878402E-4</c:v>
+                </c:pt>
+                <c:pt idx="239">
+                  <c:v>-3.7133744046121602E-4</c:v>
+                </c:pt>
+                <c:pt idx="240">
+                  <c:v>-5.2903822138364797E-4</c:v>
+                </c:pt>
+                <c:pt idx="241">
+                  <c:v>-7.2620870230608004E-4</c:v>
+                </c:pt>
+                <c:pt idx="242">
+                  <c:v>-8.9439598322851204E-4</c:v>
+                </c:pt>
+                <c:pt idx="243">
+                  <c:v>-9.75508264150944E-4</c:v>
+                </c:pt>
+                <c:pt idx="244">
+                  <c:v>-9.3776354507337499E-4</c:v>
+                </c:pt>
+                <c:pt idx="245">
+                  <c:v>-7.8408282599580698E-4</c:v>
+                </c:pt>
+                <c:pt idx="246">
+                  <c:v>-5.5067550691823897E-4</c:v>
+                </c:pt>
+                <c:pt idx="247">
+                  <c:v>-2.9651638784067102E-4</c:v>
+                </c:pt>
+                <c:pt idx="248" formatCode="0.00E+00">
+                  <c:v>-8.6973668763102902E-5</c:v>
+                </c:pt>
+                <c:pt idx="249" formatCode="0.00E+00">
+                  <c:v>2.38670503144652E-5</c:v>
+                </c:pt>
+                <c:pt idx="250" formatCode="0.00E+00">
+                  <c:v>7.5177693920333403E-6</c:v>
+                </c:pt>
+                <c:pt idx="251">
+                  <c:v>-1.3159951153039799E-4</c:v>
+                </c:pt>
+                <c:pt idx="252">
+                  <c:v>-3.5774479245282998E-4</c:v>
+                </c:pt>
+                <c:pt idx="253">
+                  <c:v>-6.1385307337526195E-4</c:v>
+                </c:pt>
+                <c:pt idx="254">
+                  <c:v>-8.3718135429769404E-4</c:v>
+                </c:pt>
+                <c:pt idx="255">
+                  <c:v>-9.7631263522012597E-4</c:v>
+                </c:pt>
+                <c:pt idx="256">
+                  <c:v>-1.0048089161425601E-3</c:v>
+                </c:pt>
+                <c:pt idx="257">
+                  <c:v>-9.2783019706499002E-4</c:v>
+                </c:pt>
+                <c:pt idx="258">
+                  <c:v>-7.7998747798742199E-4</c:v>
+                </c:pt>
+                <c:pt idx="259">
+                  <c:v>-6.1519675890985297E-4</c:v>
+                </c:pt>
+                <c:pt idx="260">
+                  <c:v>-4.9144314983228497E-4</c:v>
+                </c:pt>
+                <c:pt idx="261">
+                  <c:v>-4.5482022075471701E-4</c:v>
+                </c:pt>
+                <c:pt idx="262">
+                  <c:v>-5.2720860167714901E-4</c:v>
+                </c:pt>
+                <c:pt idx="263">
+                  <c:v>-7.00621882599581E-4</c:v>
+                </c:pt>
+                <c:pt idx="264">
+                  <c:v>-9.3943516352201295E-4</c:v>
+                </c:pt>
+                <c:pt idx="265">
+                  <c:v>-1.1900634444444399E-3</c:v>
+                </c:pt>
+                <c:pt idx="266">
+                  <c:v>-1.3958497253668801E-3</c:v>
+                </c:pt>
+                <c:pt idx="267">
+                  <c:v>-1.5130130062893099E-3</c:v>
+                </c:pt>
+                <c:pt idx="268">
+                  <c:v>-1.5227072872117399E-3</c:v>
+                </c:pt>
+                <c:pt idx="269">
+                  <c:v>-1.43536056813417E-3</c:v>
+                </c:pt>
+                <c:pt idx="270">
+                  <c:v>-1.2866338490565999E-3</c:v>
+                </c:pt>
+                <c:pt idx="271">
+                  <c:v>-1.12661912997904E-3</c:v>
+                </c:pt>
+                <c:pt idx="272">
+                  <c:v>-1.0057904109014701E-3</c:v>
+                </c:pt>
+                <c:pt idx="273">
+                  <c:v>-9.6113769182389996E-4</c:v>
+                </c:pt>
+                <c:pt idx="274">
+                  <c:v>-1.00592897274633E-3</c:v>
+                </c:pt>
+                <c:pt idx="275">
+                  <c:v>-1.1259792536687601E-3</c:v>
+                </c:pt>
+                <c:pt idx="276">
+                  <c:v>-1.2837305345911999E-3</c:v>
+                </c:pt>
+                <c:pt idx="277">
+                  <c:v>-1.42896381551363E-3</c:v>
+                </c:pt>
+                <c:pt idx="278">
+                  <c:v>-1.5128930964360601E-3</c:v>
+                </c:pt>
+                <c:pt idx="279">
+                  <c:v>-1.5016373773584901E-3</c:v>
+                </c:pt>
+                <c:pt idx="280">
+                  <c:v>-1.38551765828092E-3</c:v>
+                </c:pt>
+                <c:pt idx="281">
+                  <c:v>-1.1817769392033499E-3</c:v>
+                </c:pt>
+                <c:pt idx="282">
+                  <c:v>-9.2999322012578603E-4</c:v>
+                </c:pt>
+                <c:pt idx="283">
+                  <c:v>-6.8134650104821799E-4</c:v>
+                </c:pt>
+                <c:pt idx="284">
+                  <c:v>-4.8470128197064999E-4</c:v>
+                </c:pt>
+                <c:pt idx="285">
+                  <c:v>-3.7338206289308197E-4</c:v>
+                </c:pt>
+                <c:pt idx="286">
+                  <c:v>-3.5630634381551401E-4</c:v>
+                </c:pt>
+                <c:pt idx="287">
+                  <c:v>-4.15888624737946E-4</c:v>
+                </c:pt>
+                <c:pt idx="288">
+                  <c:v>-5.1320490566037803E-4</c:v>
+                </c:pt>
+                <c:pt idx="289">
+                  <c:v>-5.98955286582809E-4</c:v>
+                </c:pt>
+                <c:pt idx="290">
+                  <c:v>-6.2717096750524099E-4</c:v>
+                </c:pt>
+                <c:pt idx="291">
+                  <c:v>-5.6789334842767298E-4</c:v>
+                </c:pt>
+                <c:pt idx="292">
+                  <c:v>-4.15342029350105E-4</c:v>
+                </c:pt>
+                <c:pt idx="293">
+                  <c:v>-1.89358310272537E-4</c:v>
+                </c:pt>
+                <c:pt idx="294" formatCode="0.00E+00">
+                  <c:v>7.0210408805031297E-5</c:v>
+                </c:pt>
+                <c:pt idx="295">
+                  <c:v>3.1460612788259898E-4</c:v>
+                </c:pt>
+                <c:pt idx="296">
+                  <c:v>4.99632846960167E-4</c:v>
+                </c:pt>
+                <c:pt idx="297">
+                  <c:v>5.9777856603773598E-4</c:v>
+                </c:pt>
+                <c:pt idx="298">
+                  <c:v>6.0570428511530397E-4</c:v>
+                </c:pt>
+                <c:pt idx="299">
+                  <c:v>5.44960004192872E-4</c:v>
+                </c:pt>
+                <c:pt idx="300">
+                  <c:v>4.5595572327043998E-4</c:v>
+                </c:pt>
+                <c:pt idx="301">
+                  <c:v>3.8662844234800802E-4</c:v>
+                </c:pt>
+                <c:pt idx="302">
+                  <c:v>3.7912116142557598E-4</c:v>
+                </c:pt>
+                <c:pt idx="303">
+                  <c:v>4.5792288050314401E-4</c:v>
+                </c:pt>
+                <c:pt idx="304">
+                  <c:v>6.2282859958071295E-4</c:v>
+                </c:pt>
+                <c:pt idx="305">
+                  <c:v>8.48614318658281E-4</c:v>
+                </c:pt>
+                <c:pt idx="306">
+                  <c:v>1.09144003773585E-3</c:v>
+                </c:pt>
+                <c:pt idx="307">
+                  <c:v>1.3003157568134199E-3</c:v>
+                </c:pt>
+                <c:pt idx="308">
+                  <c:v>1.4303114758909899E-3</c:v>
+                </c:pt>
+                <c:pt idx="309">
+                  <c:v>1.4541971949685499E-3</c:v>
+                </c:pt>
+                <c:pt idx="310">
+                  <c:v>1.36926291404612E-3</c:v>
+                </c:pt>
+                <c:pt idx="311">
+                  <c:v>1.1976886331236899E-3</c:v>
+                </c:pt>
+                <c:pt idx="312">
+                  <c:v>9.8023435220125793E-4</c:v>
+                </c:pt>
+                <c:pt idx="313">
+                  <c:v>7.6529007127882601E-4</c:v>
+                </c:pt>
+                <c:pt idx="314">
+                  <c:v>5.9602579035639397E-4</c:v>
+                </c:pt>
+                <c:pt idx="315">
+                  <c:v>4.9936150943396195E-4</c:v>
+                </c:pt>
+                <c:pt idx="316">
+                  <c:v>4.7946722851152998E-4</c:v>
+                </c:pt>
+                <c:pt idx="317">
+                  <c:v>5.1765294758909796E-4</c:v>
+                </c:pt>
+                <c:pt idx="318">
+                  <c:v>5.7843866666666601E-4</c:v>
+                </c:pt>
+                <c:pt idx="319">
+                  <c:v>6.2000438574423501E-4</c:v>
+                </c:pt>
+                <c:pt idx="320">
+                  <c:v>6.0613010482180301E-4</c:v>
+                </c:pt>
+                <c:pt idx="321">
+                  <c:v>5.1629582389937098E-4</c:v>
+                </c:pt>
+                <c:pt idx="322">
+                  <c:v>3.5113754297693897E-4</c:v>
+                </c:pt>
+                <c:pt idx="323">
+                  <c:v>1.3191826205450699E-4</c:v>
+                </c:pt>
+                <c:pt idx="324">
+                  <c:v>-1.05727018867925E-4</c:v>
+                </c:pt>
+                <c:pt idx="325">
+                  <c:v>-3.2199529979035698E-4</c:v>
+                </c:pt>
+                <c:pt idx="326">
+                  <c:v>-4.8416158071278801E-4</c:v>
+                </c:pt>
+                <c:pt idx="327">
+                  <c:v>-5.7575646163522004E-4</c:v>
+                </c:pt>
+                <c:pt idx="328">
+                  <c:v>-6.0113274255765197E-4</c:v>
+                </c:pt>
+                <c:pt idx="329">
+                  <c:v>-5.8418922348008398E-4</c:v>
+                </c:pt>
+                <c:pt idx="330">
+                  <c:v>-5.6167050440251597E-4</c:v>
+                </c:pt>
+                <c:pt idx="331">
+                  <c:v>-5.7296018532494795E-4</c:v>
+                </c:pt>
+                <c:pt idx="332">
+                  <c:v>-6.4924706624738002E-4</c:v>
+                </c:pt>
+                <c:pt idx="333">
+                  <c:v>-8.0505854716981205E-4</c:v>
+                </c:pt>
+                <c:pt idx="334">
+                  <c:v>-1.0344548280922399E-3</c:v>
+                </c:pt>
+                <c:pt idx="335">
+                  <c:v>-1.3128501090146801E-3</c:v>
+                </c:pt>
+                <c:pt idx="336">
+                  <c:v>-1.60391538993711E-3</c:v>
+                </c:pt>
+                <c:pt idx="337">
+                  <c:v>-1.8695726708595399E-3</c:v>
+                </c:pt>
+                <c:pt idx="338">
+                  <c:v>-2.0802969517819698E-3</c:v>
+                </c:pt>
+                <c:pt idx="339">
+                  <c:v>-2.2229112327044002E-3</c:v>
+                </c:pt>
+                <c:pt idx="340">
+                  <c:v>-2.3035955136268401E-3</c:v>
+                </c:pt>
+                <c:pt idx="341">
+                  <c:v>-2.34545979454927E-3</c:v>
+                </c:pt>
+                <c:pt idx="342">
+                  <c:v>-2.3813240754716998E-3</c:v>
+                </c:pt>
+                <c:pt idx="343">
+                  <c:v>-2.4438583563941301E-3</c:v>
+                </c:pt>
+                <c:pt idx="344">
+                  <c:v>-2.5558626373165601E-3</c:v>
+                </c:pt>
+                <c:pt idx="345">
+                  <c:v>-2.7234169182389898E-3</c:v>
+                </c:pt>
+                <c:pt idx="346">
+                  <c:v>-2.9337711991614299E-3</c:v>
+                </c:pt>
+                <c:pt idx="347">
+                  <c:v>-3.1585754800838601E-3</c:v>
+                </c:pt>
+                <c:pt idx="348">
+                  <c:v>-3.3614797610062898E-3</c:v>
+                </c:pt>
+                <c:pt idx="349">
+                  <c:v>-3.5080240419287198E-3</c:v>
+                </c:pt>
+                <c:pt idx="350">
+                  <c:v>-3.5751283228511498E-3</c:v>
+                </c:pt>
+                <c:pt idx="351">
+                  <c:v>-3.5573126037735901E-3</c:v>
+                </c:pt>
+                <c:pt idx="352">
+                  <c:v>-3.4681768846960199E-3</c:v>
+                </c:pt>
+                <c:pt idx="353">
+                  <c:v>-3.3365811656184499E-3</c:v>
+                </c:pt>
+                <c:pt idx="354">
+                  <c:v>-3.1986254465408799E-3</c:v>
+                </c:pt>
+                <c:pt idx="355">
+                  <c:v>-3.0877697274633098E-3</c:v>
+                </c:pt>
+                <c:pt idx="356">
+                  <c:v>-3.0257640083857398E-3</c:v>
+                </c:pt>
+                <c:pt idx="357">
+                  <c:v>-3.0169082893081798E-3</c:v>
+                </c:pt>
+                <c:pt idx="358">
+                  <c:v>-3.04724257023061E-3</c:v>
+                </c:pt>
+                <c:pt idx="359">
+                  <c:v>-3.0888068511530399E-3</c:v>
+                </c:pt>
+                <c:pt idx="360">
+                  <c:v>-3.1077811320754699E-3</c:v>
+                </c:pt>
+                <c:pt idx="361">
+                  <c:v>-3.0740954129979E-3</c:v>
+                </c:pt>
+                <c:pt idx="362">
+                  <c:v>-2.9699996939203401E-3</c:v>
+                </c:pt>
+                <c:pt idx="363">
+                  <c:v>-2.79510397484277E-3</c:v>
+                </c:pt>
+                <c:pt idx="364">
+                  <c:v>-2.5664982557652002E-3</c:v>
+                </c:pt>
+                <c:pt idx="365">
+                  <c:v>-2.3140125366876299E-3</c:v>
+                </c:pt>
+                <c:pt idx="366">
+                  <c:v>-2.0719368176100599E-3</c:v>
+                </c:pt>
+                <c:pt idx="367">
+                  <c:v>-1.8697010985325E-3</c:v>
+                </c:pt>
+                <c:pt idx="368">
+                  <c:v>-1.72395537945493E-3</c:v>
+                </c:pt>
+                <c:pt idx="369">
+                  <c:v>-1.63449266037736E-3</c:v>
+                </c:pt>
+                <c:pt idx="370">
+                  <c:v>-1.58498794129979E-3</c:v>
+                </c:pt>
+                <c:pt idx="371">
+                  <c:v>-1.5483682222222201E-3</c:v>
+                </c:pt>
+                <c:pt idx="372">
+                  <c:v>-1.4952835031446501E-3</c:v>
+                </c:pt>
+                <c:pt idx="373">
+                  <c:v>-1.4032347840670901E-3</c:v>
+                </c:pt>
+                <c:pt idx="374">
+                  <c:v>-1.2637490649895201E-3</c:v>
+                </c:pt>
+                <c:pt idx="375">
+                  <c:v>-1.0855133459119501E-3</c:v>
+                </c:pt>
+                <c:pt idx="376">
+                  <c:v>-8.9251962683438196E-4</c:v>
+                </c:pt>
+                <c:pt idx="377">
+                  <c:v>-7.1769730775681395E-4</c:v>
+                </c:pt>
+                <c:pt idx="378">
+                  <c:v>-5.9379118867924604E-4</c:v>
+                </c:pt>
+                <c:pt idx="379">
+                  <c:v>-5.4402446960167801E-4</c:v>
+                </c:pt>
+                <c:pt idx="380">
+                  <c:v>-5.7518775052410901E-4</c:v>
+                </c:pt>
+                <c:pt idx="381">
+                  <c:v>-6.7511003144654104E-4</c:v>
+                </c:pt>
+                <c:pt idx="382">
+                  <c:v>-8.1527571236897302E-4</c:v>
+                </c:pt>
+                <c:pt idx="383">
+                  <c:v>-9.57937593291405E-4</c:v>
+                </c:pt>
+                <c:pt idx="384">
+                  <c:v>-1.06583087421384E-3</c:v>
+                </c:pt>
+                <c:pt idx="385">
+                  <c:v>-1.1118541551362699E-3</c:v>
+                </c:pt>
+                <c:pt idx="386">
+                  <c:v>-1.0860734360586999E-3</c:v>
+                </c:pt>
+                <c:pt idx="387">
+                  <c:v>-9.9812871698113292E-4</c:v>
+                </c:pt>
+                <c:pt idx="388">
+                  <c:v>-8.7435999790356404E-4</c:v>
+                </c:pt>
+                <c:pt idx="389">
+                  <c:v>-7.5046827882599605E-4</c:v>
+                </c:pt>
+                <c:pt idx="390">
+                  <c:v>-6.6171955974842801E-4</c:v>
+                </c:pt>
+                <c:pt idx="391">
+                  <c:v>-6.3340554067086005E-4</c:v>
+                </c:pt>
+                <c:pt idx="392">
+                  <c:v>-6.7414822159329196E-4</c:v>
+                </c:pt>
+                <c:pt idx="393">
+                  <c:v>-7.7386480251572399E-4</c:v>
+                </c:pt>
+                <c:pt idx="394">
+                  <c:v>-9.0690468343815496E-4</c:v>
+                </c:pt>
+                <c:pt idx="395">
+                  <c:v>-1.03945796436059E-3</c:v>
+                </c:pt>
+                <c:pt idx="396">
+                  <c:v>-1.13917124528302E-3</c:v>
+                </c:pt>
+                <c:pt idx="397">
+                  <c:v>-1.1843015262054501E-3</c:v>
+                </c:pt>
+                <c:pt idx="398">
+                  <c:v>-1.1698758071278801E-3</c:v>
+                </c:pt>
+                <c:pt idx="399">
+                  <c:v>-1.10916408805031E-3</c:v>
+                </c:pt>
+                <c:pt idx="400">
+                  <c:v>-1.0300883689727501E-3</c:v>
+                </c:pt>
+                <c:pt idx="401">
+                  <c:v>-9.6760164989517902E-4</c:v>
+                </c:pt>
+                <c:pt idx="402">
+                  <c:v>-9.5419993081761003E-4</c:v>
+                </c:pt>
+                <c:pt idx="403">
+                  <c:v>-1.0112252117400399E-3</c:v>
+                </c:pt>
+                <c:pt idx="404">
+                  <c:v>-1.14335649266247E-3</c:v>
+                </c:pt>
+                <c:pt idx="405">
+                  <c:v>-1.3377897735849099E-3</c:v>
+                </c:pt>
+                <c:pt idx="406">
+                  <c:v>-1.56827805450734E-3</c:v>
+                </c:pt>
+                <c:pt idx="407">
+                  <c:v>-1.80286233542977E-3</c:v>
+                </c:pt>
+                <c:pt idx="408">
+                  <c:v>-2.0130666163522002E-3</c:v>
+                </c:pt>
+                <c:pt idx="409">
+                  <c:v>-2.1820308972746302E-3</c:v>
+                </c:pt>
+                <c:pt idx="410">
+                  <c:v>-2.3092351781970701E-3</c:v>
+                </c:pt>
+                <c:pt idx="411">
+                  <c:v>-2.4104694591194999E-3</c:v>
+                </c:pt>
+                <c:pt idx="412">
+                  <c:v>-2.5131537400419298E-3</c:v>
+                </c:pt>
+                <c:pt idx="413">
+                  <c:v>-2.64835802096436E-3</c:v>
+                </c:pt>
+                <c:pt idx="414">
+                  <c:v>-2.8417023018867901E-3</c:v>
+                </c:pt>
+                <c:pt idx="415">
+                  <c:v>-3.1058465828092199E-3</c:v>
+                </c:pt>
+                <c:pt idx="416">
+                  <c:v>-3.43655086373166E-3</c:v>
+                </c:pt>
+                <c:pt idx="417">
+                  <c:v>-3.8135451446540901E-3</c:v>
+                </c:pt>
+                <c:pt idx="418">
+                  <c:v>-4.20577942557652E-3</c:v>
+                </c:pt>
+                <c:pt idx="419">
+                  <c:v>-4.5796937064989498E-3</c:v>
+                </c:pt>
+                <c:pt idx="420">
+                  <c:v>-4.9080679874213802E-3</c:v>
+                </c:pt>
+                <c:pt idx="421">
+                  <c:v>-5.17705226834382E-3</c:v>
+                </c:pt>
+                <c:pt idx="422">
+                  <c:v>-5.38924654926625E-3</c:v>
+                </c:pt>
+                <c:pt idx="423">
+                  <c:v>-5.56216083018868E-3</c:v>
+                </c:pt>
+                <c:pt idx="424">
+                  <c:v>-5.7224051111111097E-3</c:v>
+                </c:pt>
+                <c:pt idx="425">
+                  <c:v>-5.8973993920335404E-3</c:v>
+                </c:pt>
+                <c:pt idx="426">
+                  <c:v>-6.1069736729559799E-3</c:v>
+                </c:pt>
+                <c:pt idx="427">
+                  <c:v>-6.3572979538784099E-3</c:v>
+                </c:pt>
+                <c:pt idx="428">
+                  <c:v>-6.6389522348008403E-3</c:v>
+                </c:pt>
+                <c:pt idx="429">
+                  <c:v>-6.9295865157232702E-3</c:v>
+                </c:pt>
+                <c:pt idx="430">
+                  <c:v>-7.2004707966457004E-3</c:v>
+                </c:pt>
+                <c:pt idx="431">
+                  <c:v>-7.4249550775681399E-3</c:v>
+                </c:pt>
+                <c:pt idx="432">
+                  <c:v>-7.5864693584905699E-3</c:v>
+                </c:pt>
+                <c:pt idx="433">
+                  <c:v>-7.6835736394129999E-3</c:v>
+                </c:pt>
+                <c:pt idx="434">
+                  <c:v>-7.7306079203354298E-3</c:v>
+                </c:pt>
+                <c:pt idx="435">
+                  <c:v>-7.7536922012578597E-3</c:v>
+                </c:pt>
+                <c:pt idx="436">
+                  <c:v>-7.7832264821802903E-3</c:v>
+                </c:pt>
+                <c:pt idx="437">
+                  <c:v>-7.8449007631027304E-3</c:v>
+                </c:pt>
+                <c:pt idx="438">
+                  <c:v>-7.9519950440251602E-3</c:v>
+                </c:pt>
+                <c:pt idx="439">
+                  <c:v>-8.1011693249475897E-3</c:v>
+                </c:pt>
+                <c:pt idx="440">
+                  <c:v>-8.2730036058700201E-3</c:v>
+                </c:pt>
+                <c:pt idx="441">
+                  <c:v>-8.4371978867924507E-3</c:v>
+                </c:pt>
+                <c:pt idx="442">
+                  <c:v>-8.5610321677148903E-3</c:v>
+                </c:pt>
+                <c:pt idx="443">
+                  <c:v>-8.6187164486373202E-3</c:v>
+                </c:pt>
+                <c:pt idx="444">
+                  <c:v>-8.5988507295597493E-3</c:v>
+                </c:pt>
+                <c:pt idx="445">
+                  <c:v>-8.5078950104821808E-3</c:v>
+                </c:pt>
+                <c:pt idx="446">
+                  <c:v>-8.3685192914046101E-3</c:v>
+                </c:pt>
+                <c:pt idx="447">
+                  <c:v>-8.2133235723270501E-3</c:v>
+                </c:pt>
+                <c:pt idx="448">
+                  <c:v>-8.0756778532494796E-3</c:v>
+                </c:pt>
+                <c:pt idx="449">
+                  <c:v>-7.9803021341719096E-3</c:v>
+                </c:pt>
+                <c:pt idx="450">
+                  <c:v>-7.9363464150943395E-3</c:v>
+                </c:pt>
+                <c:pt idx="451">
+                  <c:v>-7.9350106960167695E-3</c:v>
+                </c:pt>
+                <c:pt idx="452">
+                  <c:v>-7.9522649769392002E-3</c:v>
+                </c:pt>
+                <c:pt idx="453">
+                  <c:v>-7.9560992578616395E-3</c:v>
+                </c:pt>
+                <c:pt idx="454">
+                  <c:v>-7.91584353878407E-3</c:v>
+                </c:pt>
+                <c:pt idx="455">
+                  <c:v>-7.8109778197064999E-3</c:v>
+                </c:pt>
+                <c:pt idx="456">
+                  <c:v>-7.6366721006289303E-3</c:v>
+                </c:pt>
+                <c:pt idx="457">
+                  <c:v>-7.4043163815513601E-3</c:v>
+                </c:pt>
+                <c:pt idx="458">
+                  <c:v>-7.1368806624737902E-3</c:v>
+                </c:pt>
+                <c:pt idx="459">
+                  <c:v>-6.8605749433962304E-3</c:v>
+                </c:pt>
+                <c:pt idx="460">
+                  <c:v>-6.5955392243186601E-3</c:v>
+                </c:pt>
+                <c:pt idx="461">
+                  <c:v>-6.3486335052410896E-3</c:v>
+                </c:pt>
+                <c:pt idx="462">
+                  <c:v>-6.1110177861635204E-3</c:v>
+                </c:pt>
+                <c:pt idx="463">
+                  <c:v>-5.8616120670859501E-3</c:v>
+                </c:pt>
+                <c:pt idx="464">
+                  <c:v>-5.5757963480083904E-3</c:v>
+                </c:pt>
+                <c:pt idx="465">
+                  <c:v>-5.2366706289308203E-3</c:v>
+                </c:pt>
+                <c:pt idx="466">
+                  <c:v>-4.8452049098532497E-3</c:v>
+                </c:pt>
+                <c:pt idx="467">
+                  <c:v>-4.4251691907756796E-3</c:v>
+                </c:pt>
+                <c:pt idx="468">
+                  <c:v>-4.01994347169811E-3</c:v>
+                </c:pt>
+                <c:pt idx="469">
+                  <c:v>-3.6802377526205499E-3</c:v>
+                </c:pt>
+                <c:pt idx="470">
+                  <c:v>-3.44456203354298E-3</c:v>
+                </c:pt>
+                <c:pt idx="471">
+                  <c:v>-3.31624631446541E-3</c:v>
+                </c:pt>
+                <c:pt idx="472">
+                  <c:v>-3.2428005953878398E-3</c:v>
+                </c:pt>
+                <c:pt idx="473">
+                  <c:v>-3.1031048763102702E-3</c:v>
+                </c:pt>
+                <c:pt idx="474">
+                  <c:v>-2.7069191572326999E-3</c:v>
+                </c:pt>
+                <c:pt idx="475">
+                  <c:v>-1.8085534381551401E-3</c:v>
+                </c:pt>
+                <c:pt idx="476">
+                  <c:v>-1.3314971907756799E-4</c:v>
+                </c:pt>
+                <c:pt idx="477">
+                  <c:v>2.5891780000000001E-3</c:v>
+                </c:pt>
+              </c:numCache>
+            </c:numRef>
+          </c:val>
+          <c:smooth val="0"/>
+          <c:extLst>
+            <c:ext xmlns:c16="http://schemas.microsoft.com/office/drawing/2014/chart" uri="{C3380CC4-5D6E-409C-BE32-E72D297353CC}">
+              <c16:uniqueId val="{00000000-4BB7-4D98-8366-ABF69F32E714}"/>
+            </c:ext>
+          </c:extLst>
+        </c:ser>
+        <c:dLbls>
+          <c:showLegendKey val="0"/>
+          <c:showVal val="0"/>
+          <c:showCatName val="0"/>
+          <c:showSerName val="0"/>
+          <c:showPercent val="0"/>
+          <c:showBubbleSize val="0"/>
+        </c:dLbls>
+        <c:smooth val="0"/>
+        <c:axId val="1656463199"/>
+        <c:axId val="1656453119"/>
+      </c:lineChart>
+      <c:catAx>
+        <c:axId val="1656463199"/>
+        <c:scaling>
+          <c:orientation val="minMax"/>
+        </c:scaling>
+        <c:delete val="1"/>
+        <c:axPos val="b"/>
+        <c:title>
+          <c:tx>
+            <c:rich>
+              <a:bodyPr rot="0" spcFirstLastPara="1" vertOverflow="ellipsis" vert="horz" wrap="square" anchor="ctr" anchorCtr="1"/>
+              <a:lstStyle/>
+              <a:p>
+                <a:pPr>
+                  <a:defRPr sz="1000" b="0" i="0" u="none" strike="noStrike" kern="1200" baseline="0">
+                    <a:solidFill>
+                      <a:schemeClr val="tx1">
+                        <a:lumMod val="65000"/>
+                        <a:lumOff val="35000"/>
+                      </a:schemeClr>
+                    </a:solidFill>
+                    <a:latin typeface="+mn-lt"/>
+                    <a:ea typeface="+mn-ea"/>
+                    <a:cs typeface="+mn-cs"/>
+                  </a:defRPr>
+                </a:pPr>
+                <a:r>
+                  <a:rPr lang="en-CA"/>
+                  <a:t>Time (s)</a:t>
+                </a:r>
+              </a:p>
+            </c:rich>
+          </c:tx>
+          <c:overlay val="0"/>
+          <c:spPr>
+            <a:noFill/>
+            <a:ln>
+              <a:noFill/>
+            </a:ln>
+            <a:effectLst/>
+          </c:spPr>
+          <c:txPr>
+            <a:bodyPr rot="0" spcFirstLastPara="1" vertOverflow="ellipsis" vert="horz" wrap="square" anchor="ctr" anchorCtr="1"/>
+            <a:lstStyle/>
+            <a:p>
+              <a:pPr>
+                <a:defRPr sz="1000" b="0" i="0" u="none" strike="noStrike" kern="1200" baseline="0">
+                  <a:solidFill>
+                    <a:schemeClr val="tx1">
+                      <a:lumMod val="65000"/>
+                      <a:lumOff val="35000"/>
+                    </a:schemeClr>
+                  </a:solidFill>
+                  <a:latin typeface="+mn-lt"/>
+                  <a:ea typeface="+mn-ea"/>
+                  <a:cs typeface="+mn-cs"/>
+                </a:defRPr>
+              </a:pPr>
+              <a:endParaRPr lang="en-US"/>
+            </a:p>
+          </c:txPr>
+        </c:title>
+        <c:majorTickMark val="out"/>
+        <c:minorTickMark val="none"/>
+        <c:tickLblPos val="nextTo"/>
+        <c:crossAx val="1656453119"/>
+        <c:crosses val="autoZero"/>
+        <c:auto val="1"/>
+        <c:lblAlgn val="ctr"/>
+        <c:lblOffset val="100"/>
+        <c:noMultiLvlLbl val="0"/>
+      </c:catAx>
+      <c:valAx>
+        <c:axId val="1656453119"/>
+        <c:scaling>
+          <c:orientation val="minMax"/>
+        </c:scaling>
+        <c:delete val="1"/>
+        <c:axPos val="l"/>
+        <c:majorGridlines>
+          <c:spPr>
+            <a:ln w="9525" cap="flat" cmpd="sng" algn="ctr">
+              <a:solidFill>
+                <a:schemeClr val="tx1">
+                  <a:lumMod val="15000"/>
+                  <a:lumOff val="85000"/>
+                </a:schemeClr>
+              </a:solidFill>
+              <a:round/>
+            </a:ln>
+            <a:effectLst/>
+          </c:spPr>
+        </c:majorGridlines>
+        <c:title>
+          <c:tx>
+            <c:rich>
+              <a:bodyPr rot="-5400000" spcFirstLastPara="1" vertOverflow="ellipsis" vert="horz" wrap="square" anchor="ctr" anchorCtr="1"/>
+              <a:lstStyle/>
+              <a:p>
+                <a:pPr>
+                  <a:defRPr sz="1000" b="0" i="0" u="none" strike="noStrike" kern="1200" baseline="0">
+                    <a:solidFill>
+                      <a:schemeClr val="tx1">
+                        <a:lumMod val="65000"/>
+                        <a:lumOff val="35000"/>
+                      </a:schemeClr>
+                    </a:solidFill>
+                    <a:latin typeface="+mn-lt"/>
+                    <a:ea typeface="+mn-ea"/>
+                    <a:cs typeface="+mn-cs"/>
+                  </a:defRPr>
+                </a:pPr>
+                <a:r>
+                  <a:rPr lang="en-CA" dirty="0"/>
+                  <a:t>Flow Velocity</a:t>
+                </a:r>
+                <a:r>
+                  <a:rPr lang="en-CA" baseline="0" dirty="0"/>
+                  <a:t> (m/s)</a:t>
+                </a:r>
+                <a:endParaRPr lang="en-CA" dirty="0"/>
+              </a:p>
+            </c:rich>
+          </c:tx>
+          <c:overlay val="0"/>
+          <c:spPr>
+            <a:noFill/>
+            <a:ln>
+              <a:noFill/>
+            </a:ln>
+            <a:effectLst/>
+          </c:spPr>
+          <c:txPr>
+            <a:bodyPr rot="-5400000" spcFirstLastPara="1" vertOverflow="ellipsis" vert="horz" wrap="square" anchor="ctr" anchorCtr="1"/>
+            <a:lstStyle/>
+            <a:p>
+              <a:pPr>
+                <a:defRPr sz="1000" b="0" i="0" u="none" strike="noStrike" kern="1200" baseline="0">
+                  <a:solidFill>
+                    <a:schemeClr val="tx1">
+                      <a:lumMod val="65000"/>
+                      <a:lumOff val="35000"/>
+                    </a:schemeClr>
+                  </a:solidFill>
+                  <a:latin typeface="+mn-lt"/>
+                  <a:ea typeface="+mn-ea"/>
+                  <a:cs typeface="+mn-cs"/>
+                </a:defRPr>
+              </a:pPr>
+              <a:endParaRPr lang="en-CA"/>
+            </a:p>
+          </c:txPr>
+        </c:title>
+        <c:numFmt formatCode="General" sourceLinked="1"/>
+        <c:majorTickMark val="out"/>
+        <c:minorTickMark val="none"/>
+        <c:tickLblPos val="nextTo"/>
+        <c:crossAx val="1656463199"/>
+        <c:crosses val="autoZero"/>
+        <c:crossBetween val="between"/>
+      </c:valAx>
+      <c:spPr>
+        <a:noFill/>
+        <a:ln>
+          <a:noFill/>
+        </a:ln>
+        <a:effectLst/>
+      </c:spPr>
+    </c:plotArea>
+    <c:plotVisOnly val="1"/>
+    <c:dispBlanksAs val="gap"/>
+    <c:showDLblsOverMax val="0"/>
+    <c:extLst>
+      <c:ext xmlns:c16r3="http://schemas.microsoft.com/office/drawing/2017/03/chart" uri="{56B9EC1D-385E-4148-901F-78D8002777C0}">
+        <c16r3:dataDisplayOptions16>
+          <c16r3:dispNaAsBlank val="1"/>
+        </c16r3:dataDisplayOptions16>
+      </c:ext>
+    </c:extLst>
+  </c:chart>
+  <c:spPr>
+    <a:noFill/>
+    <a:ln>
+      <a:noFill/>
+    </a:ln>
+    <a:effectLst/>
+  </c:spPr>
+  <c:txPr>
+    <a:bodyPr/>
+    <a:lstStyle/>
+    <a:p>
+      <a:pPr>
+        <a:defRPr/>
+      </a:pPr>
+      <a:endParaRPr lang="en-US"/>
+    </a:p>
+  </c:txPr>
+  <c:externalData r:id="rId3">
+    <c:autoUpdate val="0"/>
+  </c:externalData>
+</c:chartSpace>
+</file>
+
+<file path=ppt/charts/colors1.xml><?xml version="1.0" encoding="utf-8"?>
+<cs:colorStyle xmlns:cs="http://schemas.microsoft.com/office/drawing/2012/chartStyle" xmlns:a="http://schemas.openxmlformats.org/drawingml/2006/main" meth="cycle" id="20">
+  <a:schemeClr val="dk1"/>
+  <cs:variation>
+    <a:tint val="88500"/>
+  </cs:variation>
+  <cs:variation>
+    <a:tint val="55000"/>
+  </cs:variation>
+  <cs:variation>
+    <a:tint val="75000"/>
+  </cs:variation>
+  <cs:variation>
+    <a:tint val="98500"/>
+  </cs:variation>
+  <cs:variation>
+    <a:tint val="30000"/>
+  </cs:variation>
+  <cs:variation>
+    <a:tint val="60000"/>
+  </cs:variation>
+  <cs:variation>
+    <a:tint val="80000"/>
+  </cs:variation>
+</cs:colorStyle>
+</file>
+
+<file path=ppt/charts/style1.xml><?xml version="1.0" encoding="utf-8"?>
+<cs:chartStyle xmlns:cs="http://schemas.microsoft.com/office/drawing/2012/chartStyle" xmlns:a="http://schemas.openxmlformats.org/drawingml/2006/main" id="227">
+  <cs:axisTitle>
+    <cs:lnRef idx="0"/>
+    <cs:fillRef idx="0"/>
+    <cs:effectRef idx="0"/>
+    <cs:fontRef idx="minor">
+      <a:schemeClr val="tx1">
+        <a:lumMod val="65000"/>
+        <a:lumOff val="35000"/>
+      </a:schemeClr>
+    </cs:fontRef>
+    <cs:defRPr sz="1000" kern="1200"/>
+  </cs:axisTitle>
+  <cs:categoryAxis>
+    <cs:lnRef idx="0"/>
+    <cs:fillRef idx="0"/>
+    <cs:effectRef idx="0"/>
+    <cs:fontRef idx="minor">
+      <a:schemeClr val="tx1">
+        <a:lumMod val="65000"/>
+        <a:lumOff val="35000"/>
+      </a:schemeClr>
+    </cs:fontRef>
+    <cs:spPr>
+      <a:ln w="9525" cap="flat" cmpd="sng" algn="ctr">
+        <a:solidFill>
+          <a:schemeClr val="tx1">
+            <a:lumMod val="15000"/>
+            <a:lumOff val="85000"/>
+          </a:schemeClr>
+        </a:solidFill>
+        <a:round/>
+      </a:ln>
+    </cs:spPr>
+    <cs:defRPr sz="900" kern="1200"/>
+  </cs:categoryAxis>
+  <cs:chartArea mods="allowNoFillOverride allowNoLineOverride">
+    <cs:lnRef idx="0"/>
+    <cs:fillRef idx="0"/>
+    <cs:effectRef idx="0"/>
+    <cs:fontRef idx="minor">
+      <a:schemeClr val="tx1"/>
+    </cs:fontRef>
+    <cs:spPr>
+      <a:solidFill>
+        <a:schemeClr val="bg1"/>
+      </a:solidFill>
+      <a:ln w="9525" cap="flat" cmpd="sng" algn="ctr">
+        <a:solidFill>
+          <a:schemeClr val="tx1">
+            <a:lumMod val="15000"/>
+            <a:lumOff val="85000"/>
+          </a:schemeClr>
+        </a:solidFill>
+        <a:round/>
+      </a:ln>
+    </cs:spPr>
+    <cs:defRPr sz="1000" kern="1200"/>
+  </cs:chartArea>
+  <cs:dataLabel>
+    <cs:lnRef idx="0"/>
+    <cs:fillRef idx="0"/>
+    <cs:effectRef idx="0"/>
+    <cs:fontRef idx="minor">
+      <a:schemeClr val="tx1">
+        <a:lumMod val="75000"/>
+        <a:lumOff val="25000"/>
+      </a:schemeClr>
+    </cs:fontRef>
+    <cs:defRPr sz="900" kern="1200"/>
+  </cs:dataLabel>
+  <cs:dataLabelCallout>
+    <cs:lnRef idx="0"/>
+    <cs:fillRef idx="0"/>
+    <cs:effectRef idx="0"/>
+    <cs:fontRef idx="minor">
+      <a:schemeClr val="dk1">
+        <a:lumMod val="65000"/>
+        <a:lumOff val="35000"/>
+      </a:schemeClr>
+    </cs:fontRef>
+    <cs:spPr>
+      <a:solidFill>
+        <a:schemeClr val="lt1"/>
+      </a:solidFill>
+      <a:ln>
+        <a:solidFill>
+          <a:schemeClr val="dk1">
+            <a:lumMod val="25000"/>
+            <a:lumOff val="75000"/>
+          </a:schemeClr>
+        </a:solidFill>
+      </a:ln>
+    </cs:spPr>
+    <cs:defRPr sz="900" kern="1200"/>
+    <cs:bodyPr rot="0" spcFirstLastPara="1" vertOverflow="clip" horzOverflow="clip" vert="horz" wrap="square" lIns="36576" tIns="18288" rIns="36576" bIns="18288" anchor="ctr" anchorCtr="1">
+      <a:spAutoFit/>
+    </cs:bodyPr>
+  </cs:dataLabelCallout>
+  <cs:dataPoint>
+    <cs:lnRef idx="0"/>
+    <cs:fillRef idx="1">
+      <cs:styleClr val="auto"/>
+    </cs:fillRef>
+    <cs:effectRef idx="0"/>
+    <cs:fontRef idx="minor">
+      <a:schemeClr val="tx1"/>
+    </cs:fontRef>
+    <cs:spPr>
+      <a:solidFill>
+        <a:schemeClr val="phClr"/>
+      </a:solidFill>
+    </cs:spPr>
+  </cs:dataPoint>
+  <cs:dataPoint3D>
+    <cs:lnRef idx="0"/>
+    <cs:fillRef idx="1">
+      <cs:styleClr val="auto"/>
+    </cs:fillRef>
+    <cs:effectRef idx="0"/>
+    <cs:fontRef idx="minor">
+      <a:schemeClr val="tx1"/>
+    </cs:fontRef>
+    <cs:spPr>
+      <a:solidFill>
+        <a:schemeClr val="phClr"/>
+      </a:solidFill>
+    </cs:spPr>
+  </cs:dataPoint3D>
+  <cs:dataPointLine>
+    <cs:lnRef idx="0">
+      <cs:styleClr val="auto"/>
+    </cs:lnRef>
+    <cs:fillRef idx="1"/>
+    <cs:effectRef idx="0"/>
+    <cs:fontRef idx="minor">
+      <a:schemeClr val="tx1"/>
+    </cs:fontRef>
+    <cs:spPr>
+      <a:ln w="28575" cap="rnd">
+        <a:solidFill>
+          <a:schemeClr val="phClr"/>
+        </a:solidFill>
+        <a:round/>
+      </a:ln>
+    </cs:spPr>
+  </cs:dataPointLine>
+  <cs:dataPointMarker>
+    <cs:lnRef idx="0">
+      <cs:styleClr val="auto"/>
+    </cs:lnRef>
+    <cs:fillRef idx="1">
+      <cs:styleClr val="auto"/>
+    </cs:fillRef>
+    <cs:effectRef idx="0"/>
+    <cs:fontRef idx="minor">
+      <a:schemeClr val="tx1"/>
+    </cs:fontRef>
+    <cs:spPr>
+      <a:solidFill>
+        <a:schemeClr val="phClr"/>
+      </a:solidFill>
+      <a:ln w="9525">
+        <a:solidFill>
+          <a:schemeClr val="phClr"/>
+        </a:solidFill>
+      </a:ln>
+    </cs:spPr>
+  </cs:dataPointMarker>
+  <cs:dataPointMarkerLayout symbol="circle" size="5"/>
+  <cs:dataPointWireframe>
+    <cs:lnRef idx="0">
+      <cs:styleClr val="auto"/>
+    </cs:lnRef>
+    <cs:fillRef idx="1"/>
+    <cs:effectRef idx="0"/>
+    <cs:fontRef idx="minor">
+      <a:schemeClr val="tx1"/>
+    </cs:fontRef>
+    <cs:spPr>
+      <a:ln w="9525" cap="rnd">
+        <a:solidFill>
+          <a:schemeClr val="phClr"/>
+        </a:solidFill>
+        <a:round/>
+      </a:ln>
+    </cs:spPr>
+  </cs:dataPointWireframe>
+  <cs:dataTable>
+    <cs:lnRef idx="0"/>
+    <cs:fillRef idx="0"/>
+    <cs:effectRef idx="0"/>
+    <cs:fontRef idx="minor">
+      <a:schemeClr val="tx1">
+        <a:lumMod val="65000"/>
+        <a:lumOff val="35000"/>
+      </a:schemeClr>
+    </cs:fontRef>
+    <cs:spPr>
+      <a:noFill/>
+      <a:ln w="9525" cap="flat" cmpd="sng" algn="ctr">
+        <a:solidFill>
+          <a:schemeClr val="tx1">
+            <a:lumMod val="15000"/>
+            <a:lumOff val="85000"/>
+          </a:schemeClr>
+        </a:solidFill>
+        <a:round/>
+      </a:ln>
+    </cs:spPr>
+    <cs:defRPr sz="900" kern="1200"/>
+  </cs:dataTable>
+  <cs:downBar>
+    <cs:lnRef idx="0"/>
+    <cs:fillRef idx="0"/>
+    <cs:effectRef idx="0"/>
+    <cs:fontRef idx="minor">
+      <a:schemeClr val="dk1"/>
+    </cs:fontRef>
+    <cs:spPr>
+      <a:solidFill>
+        <a:schemeClr val="dk1">
+          <a:lumMod val="65000"/>
+          <a:lumOff val="35000"/>
+        </a:schemeClr>
+      </a:solidFill>
+      <a:ln w="9525">
+        <a:solidFill>
+          <a:schemeClr val="tx1">
+            <a:lumMod val="65000"/>
+            <a:lumOff val="35000"/>
+          </a:schemeClr>
+        </a:solidFill>
+      </a:ln>
+    </cs:spPr>
+  </cs:downBar>
+  <cs:dropLine>
+    <cs:lnRef idx="0"/>
+    <cs:fillRef idx="0"/>
+    <cs:effectRef idx="0"/>
+    <cs:fontRef idx="minor">
+      <a:schemeClr val="tx1"/>
+    </cs:fontRef>
+    <cs:spPr>
+      <a:ln w="9525" cap="flat" cmpd="sng" algn="ctr">
+        <a:solidFill>
+          <a:schemeClr val="tx1">
+            <a:lumMod val="35000"/>
+            <a:lumOff val="65000"/>
+          </a:schemeClr>
+        </a:solidFill>
+        <a:round/>
+      </a:ln>
+    </cs:spPr>
+  </cs:dropLine>
+  <cs:errorBar>
+    <cs:lnRef idx="0"/>
+    <cs:fillRef idx="0"/>
+    <cs:effectRef idx="0"/>
+    <cs:fontRef idx="minor">
+      <a:schemeClr val="tx1"/>
+    </cs:fontRef>
+    <cs:spPr>
+      <a:ln w="9525" cap="flat" cmpd="sng" algn="ctr">
+        <a:solidFill>
+          <a:schemeClr val="tx1">
+            <a:lumMod val="65000"/>
+            <a:lumOff val="35000"/>
+          </a:schemeClr>
+        </a:solidFill>
+        <a:round/>
+      </a:ln>
+    </cs:spPr>
+  </cs:errorBar>
+  <cs:floor>
+    <cs:lnRef idx="0"/>
+    <cs:fillRef idx="0"/>
+    <cs:effectRef idx="0"/>
+    <cs:fontRef idx="minor">
+      <a:schemeClr val="tx1"/>
+    </cs:fontRef>
+    <cs:spPr>
+      <a:noFill/>
+      <a:ln>
+        <a:noFill/>
+      </a:ln>
+    </cs:spPr>
+  </cs:floor>
+  <cs:gridlineMajor>
+    <cs:lnRef idx="0"/>
+    <cs:fillRef idx="0"/>
+    <cs:effectRef idx="0"/>
+    <cs:fontRef idx="minor">
+      <a:schemeClr val="tx1"/>
+    </cs:fontRef>
+    <cs:spPr>
+      <a:ln w="9525" cap="flat" cmpd="sng" algn="ctr">
+        <a:solidFill>
+          <a:schemeClr val="tx1">
+            <a:lumMod val="15000"/>
+            <a:lumOff val="85000"/>
+          </a:schemeClr>
+        </a:solidFill>
+        <a:round/>
+      </a:ln>
+    </cs:spPr>
+  </cs:gridlineMajor>
+  <cs:gridlineMinor>
+    <cs:lnRef idx="0"/>
+    <cs:fillRef idx="0"/>
+    <cs:effectRef idx="0"/>
+    <cs:fontRef idx="minor">
+      <a:schemeClr val="tx1"/>
+    </cs:fontRef>
+    <cs:spPr>
+      <a:ln w="9525" cap="flat" cmpd="sng" algn="ctr">
+        <a:solidFill>
+          <a:schemeClr val="tx1">
+            <a:lumMod val="5000"/>
+            <a:lumOff val="95000"/>
+          </a:schemeClr>
+        </a:solidFill>
+        <a:round/>
+      </a:ln>
+    </cs:spPr>
+  </cs:gridlineMinor>
+  <cs:hiLoLine>
+    <cs:lnRef idx="0"/>
+    <cs:fillRef idx="0"/>
+    <cs:effectRef idx="0"/>
+    <cs:fontRef idx="minor">
+      <a:schemeClr val="tx1"/>
+    </cs:fontRef>
+    <cs:spPr>
+      <a:ln w="9525" cap="flat" cmpd="sng" algn="ctr">
+        <a:solidFill>
+          <a:schemeClr val="tx1">
+            <a:lumMod val="75000"/>
+            <a:lumOff val="25000"/>
+          </a:schemeClr>
+        </a:solidFill>
+        <a:round/>
+      </a:ln>
+    </cs:spPr>
+  </cs:hiLoLine>
+  <cs:leaderLine>
+    <cs:lnRef idx="0"/>
+    <cs:fillRef idx="0"/>
+    <cs:effectRef idx="0"/>
+    <cs:fontRef idx="minor">
+      <a:schemeClr val="tx1"/>
+    </cs:fontRef>
+    <cs:spPr>
+      <a:ln w="9525" cap="flat" cmpd="sng" algn="ctr">
+        <a:solidFill>
+          <a:schemeClr val="tx1">
+            <a:lumMod val="35000"/>
+            <a:lumOff val="65000"/>
+          </a:schemeClr>
+        </a:solidFill>
+        <a:round/>
+      </a:ln>
+    </cs:spPr>
+  </cs:leaderLine>
+  <cs:legend>
+    <cs:lnRef idx="0"/>
+    <cs:fillRef idx="0"/>
+    <cs:effectRef idx="0"/>
+    <cs:fontRef idx="minor">
+      <a:schemeClr val="tx1">
+        <a:lumMod val="65000"/>
+        <a:lumOff val="35000"/>
+      </a:schemeClr>
+    </cs:fontRef>
+    <cs:defRPr sz="900" kern="1200"/>
+  </cs:legend>
+  <cs:plotArea mods="allowNoFillOverride allowNoLineOverride">
+    <cs:lnRef idx="0"/>
+    <cs:fillRef idx="0"/>
+    <cs:effectRef idx="0"/>
+    <cs:fontRef idx="minor">
+      <a:schemeClr val="tx1"/>
+    </cs:fontRef>
+  </cs:plotArea>
+  <cs:plotArea3D mods="allowNoFillOverride allowNoLineOverride">
+    <cs:lnRef idx="0"/>
+    <cs:fillRef idx="0"/>
+    <cs:effectRef idx="0"/>
+    <cs:fontRef idx="minor">
+      <a:schemeClr val="tx1"/>
+    </cs:fontRef>
+  </cs:plotArea3D>
+  <cs:seriesAxis>
+    <cs:lnRef idx="0"/>
+    <cs:fillRef idx="0"/>
+    <cs:effectRef idx="0"/>
+    <cs:fontRef idx="minor">
+      <a:schemeClr val="tx1">
+        <a:lumMod val="65000"/>
+        <a:lumOff val="35000"/>
+      </a:schemeClr>
+    </cs:fontRef>
+    <cs:defRPr sz="900" kern="1200"/>
+  </cs:seriesAxis>
+  <cs:seriesLine>
+    <cs:lnRef idx="0"/>
+    <cs:fillRef idx="0"/>
+    <cs:effectRef idx="0"/>
+    <cs:fontRef idx="minor">
+      <a:schemeClr val="tx1"/>
+    </cs:fontRef>
+    <cs:spPr>
+      <a:ln w="9525" cap="flat" cmpd="sng" algn="ctr">
+        <a:solidFill>
+          <a:schemeClr val="tx1">
+            <a:lumMod val="35000"/>
+            <a:lumOff val="65000"/>
+          </a:schemeClr>
+        </a:solidFill>
+        <a:round/>
+      </a:ln>
+    </cs:spPr>
+  </cs:seriesLine>
+  <cs:title>
+    <cs:lnRef idx="0"/>
+    <cs:fillRef idx="0"/>
+    <cs:effectRef idx="0"/>
+    <cs:fontRef idx="minor">
+      <a:schemeClr val="tx1">
+        <a:lumMod val="65000"/>
+        <a:lumOff val="35000"/>
+      </a:schemeClr>
+    </cs:fontRef>
+    <cs:defRPr sz="1400" b="0" kern="1200" spc="0" baseline="0"/>
+  </cs:title>
+  <cs:trendline>
+    <cs:lnRef idx="0">
+      <cs:styleClr val="auto"/>
+    </cs:lnRef>
+    <cs:fillRef idx="0"/>
+    <cs:effectRef idx="0"/>
+    <cs:fontRef idx="minor">
+      <a:schemeClr val="tx1"/>
+    </cs:fontRef>
+    <cs:spPr>
+      <a:ln w="19050" cap="rnd">
+        <a:solidFill>
+          <a:schemeClr val="phClr"/>
+        </a:solidFill>
+        <a:prstDash val="sysDot"/>
+      </a:ln>
+    </cs:spPr>
+  </cs:trendline>
+  <cs:trendlineLabel>
+    <cs:lnRef idx="0"/>
+    <cs:fillRef idx="0"/>
+    <cs:effectRef idx="0"/>
+    <cs:fontRef idx="minor">
+      <a:schemeClr val="tx1">
+        <a:lumMod val="65000"/>
+        <a:lumOff val="35000"/>
+      </a:schemeClr>
+    </cs:fontRef>
+    <cs:defRPr sz="900" kern="1200"/>
+  </cs:trendlineLabel>
+  <cs:upBar>
+    <cs:lnRef idx="0"/>
+    <cs:fillRef idx="0"/>
+    <cs:effectRef idx="0"/>
+    <cs:fontRef idx="minor">
+      <a:schemeClr val="dk1"/>
+    </cs:fontRef>
+    <cs:spPr>
+      <a:solidFill>
+        <a:schemeClr val="lt1"/>
+      </a:solidFill>
+      <a:ln w="9525">
+        <a:solidFill>
+          <a:schemeClr val="tx1">
+            <a:lumMod val="15000"/>
+            <a:lumOff val="85000"/>
+          </a:schemeClr>
+        </a:solidFill>
+      </a:ln>
+    </cs:spPr>
+  </cs:upBar>
+  <cs:valueAxis>
+    <cs:lnRef idx="0"/>
+    <cs:fillRef idx="0"/>
+    <cs:effectRef idx="0"/>
+    <cs:fontRef idx="minor">
+      <a:schemeClr val="tx1">
+        <a:lumMod val="65000"/>
+        <a:lumOff val="35000"/>
+      </a:schemeClr>
+    </cs:fontRef>
+    <cs:defRPr sz="900" kern="1200"/>
+  </cs:valueAxis>
+  <cs:wall>
+    <cs:lnRef idx="0"/>
+    <cs:fillRef idx="0"/>
+    <cs:effectRef idx="0"/>
+    <cs:fontRef idx="minor">
+      <a:schemeClr val="tx1"/>
+    </cs:fontRef>
+    <cs:spPr>
+      <a:noFill/>
+      <a:ln>
+        <a:noFill/>
+      </a:ln>
+    </cs:spPr>
+  </cs:wall>
+</cs:chartStyle>
 </file>
 
 <file path=ppt/slideLayouts/slideLayout1.xml><?xml version="1.0" encoding="utf-8"?>
@@ -258,7 +2512,7 @@
           <a:p>
             <a:fld id="{F350ADBE-E2B5-49AB-99FC-12956E870A1F}" type="datetimeFigureOut">
               <a:rPr lang="en-CA" smtClean="0"/>
-              <a:t>12-Jan-2026</a:t>
+              <a:t>2026-01-13</a:t>
             </a:fld>
             <a:endParaRPr lang="en-CA"/>
           </a:p>
@@ -458,7 +2712,7 @@
           <a:p>
             <a:fld id="{F350ADBE-E2B5-49AB-99FC-12956E870A1F}" type="datetimeFigureOut">
               <a:rPr lang="en-CA" smtClean="0"/>
-              <a:t>12-Jan-2026</a:t>
+              <a:t>2026-01-13</a:t>
             </a:fld>
             <a:endParaRPr lang="en-CA"/>
           </a:p>
@@ -668,7 +2922,7 @@
           <a:p>
             <a:fld id="{F350ADBE-E2B5-49AB-99FC-12956E870A1F}" type="datetimeFigureOut">
               <a:rPr lang="en-CA" smtClean="0"/>
-              <a:t>12-Jan-2026</a:t>
+              <a:t>2026-01-13</a:t>
             </a:fld>
             <a:endParaRPr lang="en-CA"/>
           </a:p>
@@ -868,7 +3122,7 @@
           <a:p>
             <a:fld id="{F350ADBE-E2B5-49AB-99FC-12956E870A1F}" type="datetimeFigureOut">
               <a:rPr lang="en-CA" smtClean="0"/>
-              <a:t>12-Jan-2026</a:t>
+              <a:t>2026-01-13</a:t>
             </a:fld>
             <a:endParaRPr lang="en-CA"/>
           </a:p>
@@ -1144,7 +3398,7 @@
           <a:p>
             <a:fld id="{F350ADBE-E2B5-49AB-99FC-12956E870A1F}" type="datetimeFigureOut">
               <a:rPr lang="en-CA" smtClean="0"/>
-              <a:t>12-Jan-2026</a:t>
+              <a:t>2026-01-13</a:t>
             </a:fld>
             <a:endParaRPr lang="en-CA"/>
           </a:p>
@@ -1412,7 +3666,7 @@
           <a:p>
             <a:fld id="{F350ADBE-E2B5-49AB-99FC-12956E870A1F}" type="datetimeFigureOut">
               <a:rPr lang="en-CA" smtClean="0"/>
-              <a:t>12-Jan-2026</a:t>
+              <a:t>2026-01-13</a:t>
             </a:fld>
             <a:endParaRPr lang="en-CA"/>
           </a:p>
@@ -1827,7 +4081,7 @@
           <a:p>
             <a:fld id="{F350ADBE-E2B5-49AB-99FC-12956E870A1F}" type="datetimeFigureOut">
               <a:rPr lang="en-CA" smtClean="0"/>
-              <a:t>12-Jan-2026</a:t>
+              <a:t>2026-01-13</a:t>
             </a:fld>
             <a:endParaRPr lang="en-CA"/>
           </a:p>
@@ -1969,7 +4223,7 @@
           <a:p>
             <a:fld id="{F350ADBE-E2B5-49AB-99FC-12956E870A1F}" type="datetimeFigureOut">
               <a:rPr lang="en-CA" smtClean="0"/>
-              <a:t>12-Jan-2026</a:t>
+              <a:t>2026-01-13</a:t>
             </a:fld>
             <a:endParaRPr lang="en-CA"/>
           </a:p>
@@ -2082,7 +4336,7 @@
           <a:p>
             <a:fld id="{F350ADBE-E2B5-49AB-99FC-12956E870A1F}" type="datetimeFigureOut">
               <a:rPr lang="en-CA" smtClean="0"/>
-              <a:t>12-Jan-2026</a:t>
+              <a:t>2026-01-13</a:t>
             </a:fld>
             <a:endParaRPr lang="en-CA"/>
           </a:p>
@@ -2395,7 +4649,7 @@
           <a:p>
             <a:fld id="{F350ADBE-E2B5-49AB-99FC-12956E870A1F}" type="datetimeFigureOut">
               <a:rPr lang="en-CA" smtClean="0"/>
-              <a:t>12-Jan-2026</a:t>
+              <a:t>2026-01-13</a:t>
             </a:fld>
             <a:endParaRPr lang="en-CA"/>
           </a:p>
@@ -2684,7 +4938,7 @@
           <a:p>
             <a:fld id="{F350ADBE-E2B5-49AB-99FC-12956E870A1F}" type="datetimeFigureOut">
               <a:rPr lang="en-CA" smtClean="0"/>
-              <a:t>12-Jan-2026</a:t>
+              <a:t>2026-01-13</a:t>
             </a:fld>
             <a:endParaRPr lang="en-CA"/>
           </a:p>
@@ -2927,7 +5181,7 @@
           <a:p>
             <a:fld id="{F350ADBE-E2B5-49AB-99FC-12956E870A1F}" type="datetimeFigureOut">
               <a:rPr lang="en-CA" smtClean="0"/>
-              <a:t>12-Jan-2026</a:t>
+              <a:t>2026-01-13</a:t>
             </a:fld>
             <a:endParaRPr lang="en-CA"/>
           </a:p>
@@ -3434,6 +5688,43 @@
           </a:prstGeom>
         </p:spPr>
       </p:pic>
+      <p:sp>
+        <p:nvSpPr>
+          <p:cNvPr id="2" name="TextBox 1">
+            <a:extLst>
+              <a:ext uri="{FF2B5EF4-FFF2-40B4-BE49-F238E27FC236}">
+                <a16:creationId xmlns:a16="http://schemas.microsoft.com/office/drawing/2014/main" id="{5A4E51DC-5833-B2FB-62BD-D83E9A9C4997}"/>
+              </a:ext>
+            </a:extLst>
+          </p:cNvPr>
+          <p:cNvSpPr txBox="1"/>
+          <p:nvPr/>
+        </p:nvSpPr>
+        <p:spPr>
+          <a:xfrm>
+            <a:off x="5735781" y="3410527"/>
+            <a:ext cx="1260000" cy="138499"/>
+          </a:xfrm>
+          <a:prstGeom prst="rect">
+            <a:avLst/>
+          </a:prstGeom>
+          <a:solidFill>
+            <a:schemeClr val="bg1"/>
+          </a:solidFill>
+        </p:spPr>
+        <p:txBody>
+          <a:bodyPr wrap="square" lIns="0" tIns="0" rIns="0" bIns="0" rtlCol="0">
+            <a:spAutoFit/>
+          </a:bodyPr>
+          <a:lstStyle/>
+          <a:p>
+            <a:r>
+              <a:rPr lang="en-CA" sz="900" dirty="0"/>
+              <a:t>as patient is repositioned</a:t>
+            </a:r>
+          </a:p>
+        </p:txBody>
+      </p:sp>
     </p:spTree>
     <p:extLst>
       <p:ext uri="{BB962C8B-B14F-4D97-AF65-F5344CB8AC3E}">
@@ -3448,6 +5739,293 @@
 </file>
 
 <file path=ppt/slides/slide3.xml><?xml version="1.0" encoding="utf-8"?>
+<p:sld xmlns:a="http://schemas.openxmlformats.org/drawingml/2006/main" xmlns:r="http://schemas.openxmlformats.org/officeDocument/2006/relationships" xmlns:p="http://schemas.openxmlformats.org/presentationml/2006/main">
+  <p:cSld>
+    <p:spTree>
+      <p:nvGrpSpPr>
+        <p:cNvPr id="1" name=""/>
+        <p:cNvGrpSpPr/>
+        <p:nvPr/>
+      </p:nvGrpSpPr>
+      <p:grpSpPr>
+        <a:xfrm>
+          <a:off x="0" y="0"/>
+          <a:ext cx="0" cy="0"/>
+          <a:chOff x="0" y="0"/>
+          <a:chExt cx="0" cy="0"/>
+        </a:xfrm>
+      </p:grpSpPr>
+      <p:sp>
+        <p:nvSpPr>
+          <p:cNvPr id="2" name="Title 1">
+            <a:extLst>
+              <a:ext uri="{FF2B5EF4-FFF2-40B4-BE49-F238E27FC236}">
+                <a16:creationId xmlns:a16="http://schemas.microsoft.com/office/drawing/2014/main" id="{8B360F7C-7028-7537-3FA4-A0EBAF2F799B}"/>
+              </a:ext>
+            </a:extLst>
+          </p:cNvPr>
+          <p:cNvSpPr>
+            <a:spLocks noGrp="1"/>
+          </p:cNvSpPr>
+          <p:nvPr>
+            <p:ph type="title"/>
+          </p:nvPr>
+        </p:nvSpPr>
+        <p:spPr/>
+        <p:txBody>
+          <a:bodyPr/>
+          <a:lstStyle/>
+          <a:p>
+            <a:r>
+              <a:rPr lang="en-CA" dirty="0"/>
+              <a:t>Could include</a:t>
+            </a:r>
+          </a:p>
+        </p:txBody>
+      </p:sp>
+      <p:sp>
+        <p:nvSpPr>
+          <p:cNvPr id="3" name="Content Placeholder 2">
+            <a:extLst>
+              <a:ext uri="{FF2B5EF4-FFF2-40B4-BE49-F238E27FC236}">
+                <a16:creationId xmlns:a16="http://schemas.microsoft.com/office/drawing/2014/main" id="{44114007-DFDA-9DD5-10CE-E26BCDA59E4C}"/>
+              </a:ext>
+            </a:extLst>
+          </p:cNvPr>
+          <p:cNvSpPr>
+            <a:spLocks noGrp="1"/>
+          </p:cNvSpPr>
+          <p:nvPr>
+            <p:ph idx="1"/>
+          </p:nvPr>
+        </p:nvSpPr>
+        <p:spPr/>
+        <p:txBody>
+          <a:bodyPr/>
+          <a:lstStyle/>
+          <a:p>
+            <a:r>
+              <a:rPr lang="en-CA" dirty="0"/>
+              <a:t>Vessel figures</a:t>
+            </a:r>
+          </a:p>
+          <a:p>
+            <a:endParaRPr lang="en-CA" dirty="0"/>
+          </a:p>
+        </p:txBody>
+      </p:sp>
+    </p:spTree>
+    <p:extLst>
+      <p:ext uri="{BB962C8B-B14F-4D97-AF65-F5344CB8AC3E}">
+        <p14:creationId xmlns:p14="http://schemas.microsoft.com/office/powerpoint/2010/main" val="4224543117"/>
+      </p:ext>
+    </p:extLst>
+  </p:cSld>
+  <p:clrMapOvr>
+    <a:masterClrMapping/>
+  </p:clrMapOvr>
+</p:sld>
+</file>
+
+<file path=ppt/slides/slide4.xml><?xml version="1.0" encoding="utf-8"?>
+<p:sld xmlns:a="http://schemas.openxmlformats.org/drawingml/2006/main" xmlns:r="http://schemas.openxmlformats.org/officeDocument/2006/relationships" xmlns:p="http://schemas.openxmlformats.org/presentationml/2006/main">
+  <p:cSld>
+    <p:spTree>
+      <p:nvGrpSpPr>
+        <p:cNvPr id="1" name=""/>
+        <p:cNvGrpSpPr/>
+        <p:nvPr/>
+      </p:nvGrpSpPr>
+      <p:grpSpPr>
+        <a:xfrm>
+          <a:off x="0" y="0"/>
+          <a:ext cx="0" cy="0"/>
+          <a:chOff x="0" y="0"/>
+          <a:chExt cx="0" cy="0"/>
+        </a:xfrm>
+      </p:grpSpPr>
+      <p:pic>
+        <p:nvPicPr>
+          <p:cNvPr id="3" name="Picture 2" descr="A graph of different sizes and colors&#10;&#10;AI-generated content may be incorrect.">
+            <a:extLst>
+              <a:ext uri="{FF2B5EF4-FFF2-40B4-BE49-F238E27FC236}">
+                <a16:creationId xmlns:a16="http://schemas.microsoft.com/office/drawing/2014/main" id="{959C1D7B-939F-3FE8-23D7-05241B75EAF7}"/>
+              </a:ext>
+            </a:extLst>
+          </p:cNvPr>
+          <p:cNvPicPr>
+            <a:picLocks noChangeAspect="1"/>
+          </p:cNvPicPr>
+          <p:nvPr/>
+        </p:nvPicPr>
+        <p:blipFill>
+          <a:blip r:embed="rId2">
+            <a:extLst>
+              <a:ext uri="{28A0092B-C50C-407E-A947-70E740481C1C}">
+                <a14:useLocalDpi xmlns:a14="http://schemas.microsoft.com/office/drawing/2010/main" val="0"/>
+              </a:ext>
+            </a:extLst>
+          </a:blip>
+          <a:stretch>
+            <a:fillRect/>
+          </a:stretch>
+        </p:blipFill>
+        <p:spPr>
+          <a:xfrm>
+            <a:off x="1456200" y="0"/>
+            <a:ext cx="9279599" cy="6858000"/>
+          </a:xfrm>
+          <a:prstGeom prst="rect">
+            <a:avLst/>
+          </a:prstGeom>
+        </p:spPr>
+      </p:pic>
+    </p:spTree>
+    <p:extLst>
+      <p:ext uri="{BB962C8B-B14F-4D97-AF65-F5344CB8AC3E}">
+        <p14:creationId xmlns:p14="http://schemas.microsoft.com/office/powerpoint/2010/main" val="2150192680"/>
+      </p:ext>
+    </p:extLst>
+  </p:cSld>
+  <p:clrMapOvr>
+    <a:masterClrMapping/>
+  </p:clrMapOvr>
+</p:sld>
+</file>
+
+<file path=ppt/slides/slide5.xml><?xml version="1.0" encoding="utf-8"?>
+<p:sld xmlns:a="http://schemas.openxmlformats.org/drawingml/2006/main" xmlns:r="http://schemas.openxmlformats.org/officeDocument/2006/relationships" xmlns:p="http://schemas.openxmlformats.org/presentationml/2006/main">
+  <p:cSld>
+    <p:spTree>
+      <p:nvGrpSpPr>
+        <p:cNvPr id="1" name=""/>
+        <p:cNvGrpSpPr/>
+        <p:nvPr/>
+      </p:nvGrpSpPr>
+      <p:grpSpPr>
+        <a:xfrm>
+          <a:off x="0" y="0"/>
+          <a:ext cx="0" cy="0"/>
+          <a:chOff x="0" y="0"/>
+          <a:chExt cx="0" cy="0"/>
+        </a:xfrm>
+      </p:grpSpPr>
+      <p:pic>
+        <p:nvPicPr>
+          <p:cNvPr id="5" name="Picture 4" descr="A graph of the different types of organs&#10;&#10;AI-generated content may be incorrect.">
+            <a:extLst>
+              <a:ext uri="{FF2B5EF4-FFF2-40B4-BE49-F238E27FC236}">
+                <a16:creationId xmlns:a16="http://schemas.microsoft.com/office/drawing/2014/main" id="{D252DDAA-922E-4ABC-6812-CC24F5F6947B}"/>
+              </a:ext>
+            </a:extLst>
+          </p:cNvPr>
+          <p:cNvPicPr>
+            <a:picLocks noChangeAspect="1"/>
+          </p:cNvPicPr>
+          <p:nvPr/>
+        </p:nvPicPr>
+        <p:blipFill>
+          <a:blip r:embed="rId2">
+            <a:extLst>
+              <a:ext uri="{28A0092B-C50C-407E-A947-70E740481C1C}">
+                <a14:useLocalDpi xmlns:a14="http://schemas.microsoft.com/office/drawing/2010/main" val="0"/>
+              </a:ext>
+            </a:extLst>
+          </a:blip>
+          <a:stretch>
+            <a:fillRect/>
+          </a:stretch>
+        </p:blipFill>
+        <p:spPr>
+          <a:xfrm>
+            <a:off x="1045531" y="531412"/>
+            <a:ext cx="4934204" cy="3892750"/>
+          </a:xfrm>
+          <a:prstGeom prst="rect">
+            <a:avLst/>
+          </a:prstGeom>
+        </p:spPr>
+      </p:pic>
+    </p:spTree>
+    <p:extLst>
+      <p:ext uri="{BB962C8B-B14F-4D97-AF65-F5344CB8AC3E}">
+        <p14:creationId xmlns:p14="http://schemas.microsoft.com/office/powerpoint/2010/main" val="1506447302"/>
+      </p:ext>
+    </p:extLst>
+  </p:cSld>
+  <p:clrMapOvr>
+    <a:masterClrMapping/>
+  </p:clrMapOvr>
+</p:sld>
+</file>
+
+<file path=ppt/slides/slide6.xml><?xml version="1.0" encoding="utf-8"?>
+<p:sld xmlns:a="http://schemas.openxmlformats.org/drawingml/2006/main" xmlns:r="http://schemas.openxmlformats.org/officeDocument/2006/relationships" xmlns:p="http://schemas.openxmlformats.org/presentationml/2006/main">
+  <p:cSld>
+    <p:spTree>
+      <p:nvGrpSpPr>
+        <p:cNvPr id="1" name=""/>
+        <p:cNvGrpSpPr/>
+        <p:nvPr/>
+      </p:nvGrpSpPr>
+      <p:grpSpPr>
+        <a:xfrm>
+          <a:off x="0" y="0"/>
+          <a:ext cx="0" cy="0"/>
+          <a:chOff x="0" y="0"/>
+          <a:chExt cx="0" cy="0"/>
+        </a:xfrm>
+      </p:grpSpPr>
+      <p:pic>
+        <p:nvPicPr>
+          <p:cNvPr id="7" name="Picture 6" descr="A diagram of the internal organs&#10;&#10;AI-generated content may be incorrect.">
+            <a:extLst>
+              <a:ext uri="{FF2B5EF4-FFF2-40B4-BE49-F238E27FC236}">
+                <a16:creationId xmlns:a16="http://schemas.microsoft.com/office/drawing/2014/main" id="{AFBC44A3-1F55-DC0C-E51C-FBAE085F6B88}"/>
+              </a:ext>
+            </a:extLst>
+          </p:cNvPr>
+          <p:cNvPicPr>
+            <a:picLocks noChangeAspect="1"/>
+          </p:cNvPicPr>
+          <p:nvPr/>
+        </p:nvPicPr>
+        <p:blipFill>
+          <a:blip r:embed="rId2">
+            <a:extLst>
+              <a:ext uri="{28A0092B-C50C-407E-A947-70E740481C1C}">
+                <a14:useLocalDpi xmlns:a14="http://schemas.microsoft.com/office/drawing/2010/main" val="0"/>
+              </a:ext>
+            </a:extLst>
+          </a:blip>
+          <a:stretch>
+            <a:fillRect/>
+          </a:stretch>
+        </p:blipFill>
+        <p:spPr>
+          <a:xfrm>
+            <a:off x="1008960" y="0"/>
+            <a:ext cx="9483926" cy="6858000"/>
+          </a:xfrm>
+          <a:prstGeom prst="rect">
+            <a:avLst/>
+          </a:prstGeom>
+        </p:spPr>
+      </p:pic>
+    </p:spTree>
+    <p:extLst>
+      <p:ext uri="{BB962C8B-B14F-4D97-AF65-F5344CB8AC3E}">
+        <p14:creationId xmlns:p14="http://schemas.microsoft.com/office/powerpoint/2010/main" val="1549143262"/>
+      </p:ext>
+    </p:extLst>
+  </p:cSld>
+  <p:clrMapOvr>
+    <a:masterClrMapping/>
+  </p:clrMapOvr>
+</p:sld>
+</file>
+
+<file path=ppt/slides/slide7.xml><?xml version="1.0" encoding="utf-8"?>
 <p:sld xmlns:a="http://schemas.openxmlformats.org/drawingml/2006/main" xmlns:r="http://schemas.openxmlformats.org/officeDocument/2006/relationships" xmlns:p="http://schemas.openxmlformats.org/presentationml/2006/main">
   <p:cSld>
     <p:spTree>
@@ -3574,7 +6152,7 @@
         </p:blipFill>
         <p:spPr>
           <a:xfrm>
-            <a:off x="363421" y="2372097"/>
+            <a:off x="391130" y="2372097"/>
             <a:ext cx="3667637" cy="666843"/>
           </a:xfrm>
           <a:prstGeom prst="rect">
@@ -3586,6 +6164,4121 @@
     <p:extLst>
       <p:ext uri="{BB962C8B-B14F-4D97-AF65-F5344CB8AC3E}">
         <p14:creationId xmlns:p14="http://schemas.microsoft.com/office/powerpoint/2010/main" val="99427836"/>
+      </p:ext>
+    </p:extLst>
+  </p:cSld>
+  <p:clrMapOvr>
+    <a:masterClrMapping/>
+  </p:clrMapOvr>
+</p:sld>
+</file>
+
+<file path=ppt/slides/slide8.xml><?xml version="1.0" encoding="utf-8"?>
+<p:sld xmlns:a="http://schemas.openxmlformats.org/drawingml/2006/main" xmlns:r="http://schemas.openxmlformats.org/officeDocument/2006/relationships" xmlns:p="http://schemas.openxmlformats.org/presentationml/2006/main">
+  <p:cSld>
+    <p:spTree>
+      <p:nvGrpSpPr>
+        <p:cNvPr id="1" name=""/>
+        <p:cNvGrpSpPr/>
+        <p:nvPr/>
+      </p:nvGrpSpPr>
+      <p:grpSpPr>
+        <a:xfrm>
+          <a:off x="0" y="0"/>
+          <a:ext cx="0" cy="0"/>
+          <a:chOff x="0" y="0"/>
+          <a:chExt cx="0" cy="0"/>
+        </a:xfrm>
+      </p:grpSpPr>
+      <p:sp>
+        <p:nvSpPr>
+          <p:cNvPr id="27" name="Rectangle 26">
+            <a:extLst>
+              <a:ext uri="{FF2B5EF4-FFF2-40B4-BE49-F238E27FC236}">
+                <a16:creationId xmlns:a16="http://schemas.microsoft.com/office/drawing/2014/main" id="{57056D16-3DEC-43A8-FABC-D63943F89337}"/>
+              </a:ext>
+            </a:extLst>
+          </p:cNvPr>
+          <p:cNvSpPr/>
+          <p:nvPr/>
+        </p:nvSpPr>
+        <p:spPr>
+          <a:xfrm>
+            <a:off x="3546764" y="2159314"/>
+            <a:ext cx="535706" cy="544946"/>
+          </a:xfrm>
+          <a:prstGeom prst="rect">
+            <a:avLst/>
+          </a:prstGeom>
+          <a:solidFill>
+            <a:srgbClr val="FF0000"/>
+          </a:solidFill>
+          <a:ln>
+            <a:noFill/>
+          </a:ln>
+        </p:spPr>
+        <p:style>
+          <a:lnRef idx="2">
+            <a:schemeClr val="accent1">
+              <a:shade val="15000"/>
+            </a:schemeClr>
+          </a:lnRef>
+          <a:fillRef idx="1">
+            <a:schemeClr val="accent1"/>
+          </a:fillRef>
+          <a:effectRef idx="0">
+            <a:schemeClr val="accent1"/>
+          </a:effectRef>
+          <a:fontRef idx="minor">
+            <a:schemeClr val="lt1"/>
+          </a:fontRef>
+        </p:style>
+        <p:txBody>
+          <a:bodyPr rtlCol="0" anchor="ctr"/>
+          <a:lstStyle/>
+          <a:p>
+            <a:pPr algn="ctr"/>
+            <a:endParaRPr lang="en-CA"/>
+          </a:p>
+        </p:txBody>
+      </p:sp>
+      <p:graphicFrame>
+        <p:nvGraphicFramePr>
+          <p:cNvPr id="3" name="Table 2">
+            <a:extLst>
+              <a:ext uri="{FF2B5EF4-FFF2-40B4-BE49-F238E27FC236}">
+                <a16:creationId xmlns:a16="http://schemas.microsoft.com/office/drawing/2014/main" id="{6B554BAB-4071-740F-5DE5-7050F352FCC1}"/>
+              </a:ext>
+            </a:extLst>
+          </p:cNvPr>
+          <p:cNvGraphicFramePr>
+            <a:graphicFrameLocks noGrp="1"/>
+          </p:cNvGraphicFramePr>
+          <p:nvPr>
+            <p:extLst>
+              <p:ext uri="{D42A27DB-BD31-4B8C-83A1-F6EECF244321}">
+                <p14:modId xmlns:p14="http://schemas.microsoft.com/office/powerpoint/2010/main" val="598246970"/>
+              </p:ext>
+            </p:extLst>
+          </p:nvPr>
+        </p:nvGraphicFramePr>
+        <p:xfrm>
+          <a:off x="2854035" y="2123592"/>
+          <a:ext cx="6483930" cy="628844"/>
+        </p:xfrm>
+        <a:graphic>
+          <a:graphicData uri="http://schemas.openxmlformats.org/drawingml/2006/table">
+            <a:tbl>
+              <a:tblPr firstRow="1" bandRow="1">
+                <a:tableStyleId>{5C22544A-7EE6-4342-B048-85BDC9FD1C3A}</a:tableStyleId>
+              </a:tblPr>
+              <a:tblGrid>
+                <a:gridCol w="648393">
+                  <a:extLst>
+                    <a:ext uri="{9D8B030D-6E8A-4147-A177-3AD203B41FA5}">
+                      <a16:colId xmlns:a16="http://schemas.microsoft.com/office/drawing/2014/main" val="2331374839"/>
+                    </a:ext>
+                  </a:extLst>
+                </a:gridCol>
+                <a:gridCol w="648393">
+                  <a:extLst>
+                    <a:ext uri="{9D8B030D-6E8A-4147-A177-3AD203B41FA5}">
+                      <a16:colId xmlns:a16="http://schemas.microsoft.com/office/drawing/2014/main" val="3047030589"/>
+                    </a:ext>
+                  </a:extLst>
+                </a:gridCol>
+                <a:gridCol w="648393">
+                  <a:extLst>
+                    <a:ext uri="{9D8B030D-6E8A-4147-A177-3AD203B41FA5}">
+                      <a16:colId xmlns:a16="http://schemas.microsoft.com/office/drawing/2014/main" val="2837905681"/>
+                    </a:ext>
+                  </a:extLst>
+                </a:gridCol>
+                <a:gridCol w="648393">
+                  <a:extLst>
+                    <a:ext uri="{9D8B030D-6E8A-4147-A177-3AD203B41FA5}">
+                      <a16:colId xmlns:a16="http://schemas.microsoft.com/office/drawing/2014/main" val="2543869212"/>
+                    </a:ext>
+                  </a:extLst>
+                </a:gridCol>
+                <a:gridCol w="648393">
+                  <a:extLst>
+                    <a:ext uri="{9D8B030D-6E8A-4147-A177-3AD203B41FA5}">
+                      <a16:colId xmlns:a16="http://schemas.microsoft.com/office/drawing/2014/main" val="2243421271"/>
+                    </a:ext>
+                  </a:extLst>
+                </a:gridCol>
+                <a:gridCol w="648393">
+                  <a:extLst>
+                    <a:ext uri="{9D8B030D-6E8A-4147-A177-3AD203B41FA5}">
+                      <a16:colId xmlns:a16="http://schemas.microsoft.com/office/drawing/2014/main" val="183586060"/>
+                    </a:ext>
+                  </a:extLst>
+                </a:gridCol>
+                <a:gridCol w="648393">
+                  <a:extLst>
+                    <a:ext uri="{9D8B030D-6E8A-4147-A177-3AD203B41FA5}">
+                      <a16:colId xmlns:a16="http://schemas.microsoft.com/office/drawing/2014/main" val="1151400591"/>
+                    </a:ext>
+                  </a:extLst>
+                </a:gridCol>
+                <a:gridCol w="648393">
+                  <a:extLst>
+                    <a:ext uri="{9D8B030D-6E8A-4147-A177-3AD203B41FA5}">
+                      <a16:colId xmlns:a16="http://schemas.microsoft.com/office/drawing/2014/main" val="2814794531"/>
+                    </a:ext>
+                  </a:extLst>
+                </a:gridCol>
+                <a:gridCol w="648393">
+                  <a:extLst>
+                    <a:ext uri="{9D8B030D-6E8A-4147-A177-3AD203B41FA5}">
+                      <a16:colId xmlns:a16="http://schemas.microsoft.com/office/drawing/2014/main" val="1306673768"/>
+                    </a:ext>
+                  </a:extLst>
+                </a:gridCol>
+                <a:gridCol w="648393">
+                  <a:extLst>
+                    <a:ext uri="{9D8B030D-6E8A-4147-A177-3AD203B41FA5}">
+                      <a16:colId xmlns:a16="http://schemas.microsoft.com/office/drawing/2014/main" val="2401572614"/>
+                    </a:ext>
+                  </a:extLst>
+                </a:gridCol>
+              </a:tblGrid>
+              <a:tr h="628844">
+                <a:tc>
+                  <a:txBody>
+                    <a:bodyPr/>
+                    <a:lstStyle/>
+                    <a:p>
+                      <a:endParaRPr lang="en-CA">
+                        <a:solidFill>
+                          <a:schemeClr val="tx1"/>
+                        </a:solidFill>
+                      </a:endParaRPr>
+                    </a:p>
+                  </a:txBody>
+                  <a:tcPr>
+                    <a:lnL w="12700" cap="flat" cmpd="sng" algn="ctr">
+                      <a:solidFill>
+                        <a:schemeClr val="tx1"/>
+                      </a:solidFill>
+                      <a:prstDash val="solid"/>
+                      <a:round/>
+                      <a:headEnd type="none" w="med" len="med"/>
+                      <a:tailEnd type="none" w="med" len="med"/>
+                    </a:lnL>
+                    <a:lnR w="12700" cap="flat" cmpd="sng" algn="ctr">
+                      <a:solidFill>
+                        <a:schemeClr val="tx1"/>
+                      </a:solidFill>
+                      <a:prstDash val="solid"/>
+                      <a:round/>
+                      <a:headEnd type="none" w="med" len="med"/>
+                      <a:tailEnd type="none" w="med" len="med"/>
+                    </a:lnR>
+                    <a:lnT w="12700" cap="flat" cmpd="sng" algn="ctr">
+                      <a:solidFill>
+                        <a:schemeClr val="tx1"/>
+                      </a:solidFill>
+                      <a:prstDash val="solid"/>
+                      <a:round/>
+                      <a:headEnd type="none" w="med" len="med"/>
+                      <a:tailEnd type="none" w="med" len="med"/>
+                    </a:lnT>
+                    <a:lnB w="12700" cap="flat" cmpd="sng" algn="ctr">
+                      <a:solidFill>
+                        <a:schemeClr val="tx1"/>
+                      </a:solidFill>
+                      <a:prstDash val="solid"/>
+                      <a:round/>
+                      <a:headEnd type="none" w="med" len="med"/>
+                      <a:tailEnd type="none" w="med" len="med"/>
+                    </a:lnB>
+                    <a:noFill/>
+                  </a:tcPr>
+                </a:tc>
+                <a:tc>
+                  <a:txBody>
+                    <a:bodyPr/>
+                    <a:lstStyle/>
+                    <a:p>
+                      <a:endParaRPr lang="en-CA" dirty="0">
+                        <a:solidFill>
+                          <a:schemeClr val="tx1"/>
+                        </a:solidFill>
+                      </a:endParaRPr>
+                    </a:p>
+                  </a:txBody>
+                  <a:tcPr>
+                    <a:lnL w="12700" cap="flat" cmpd="sng" algn="ctr">
+                      <a:solidFill>
+                        <a:schemeClr val="tx1"/>
+                      </a:solidFill>
+                      <a:prstDash val="solid"/>
+                      <a:round/>
+                      <a:headEnd type="none" w="med" len="med"/>
+                      <a:tailEnd type="none" w="med" len="med"/>
+                    </a:lnL>
+                    <a:lnR w="12700" cap="flat" cmpd="sng" algn="ctr">
+                      <a:solidFill>
+                        <a:schemeClr val="tx1"/>
+                      </a:solidFill>
+                      <a:prstDash val="solid"/>
+                      <a:round/>
+                      <a:headEnd type="none" w="med" len="med"/>
+                      <a:tailEnd type="none" w="med" len="med"/>
+                    </a:lnR>
+                    <a:lnT w="12700" cap="flat" cmpd="sng" algn="ctr">
+                      <a:solidFill>
+                        <a:schemeClr val="tx1"/>
+                      </a:solidFill>
+                      <a:prstDash val="solid"/>
+                      <a:round/>
+                      <a:headEnd type="none" w="med" len="med"/>
+                      <a:tailEnd type="none" w="med" len="med"/>
+                    </a:lnT>
+                    <a:lnB w="12700" cap="flat" cmpd="sng" algn="ctr">
+                      <a:solidFill>
+                        <a:schemeClr val="tx1"/>
+                      </a:solidFill>
+                      <a:prstDash val="solid"/>
+                      <a:round/>
+                      <a:headEnd type="none" w="med" len="med"/>
+                      <a:tailEnd type="none" w="med" len="med"/>
+                    </a:lnB>
+                    <a:noFill/>
+                  </a:tcPr>
+                </a:tc>
+                <a:tc>
+                  <a:txBody>
+                    <a:bodyPr/>
+                    <a:lstStyle/>
+                    <a:p>
+                      <a:endParaRPr lang="en-CA" dirty="0">
+                        <a:solidFill>
+                          <a:schemeClr val="tx1"/>
+                        </a:solidFill>
+                      </a:endParaRPr>
+                    </a:p>
+                  </a:txBody>
+                  <a:tcPr>
+                    <a:lnL w="12700" cap="flat" cmpd="sng" algn="ctr">
+                      <a:solidFill>
+                        <a:schemeClr val="tx1"/>
+                      </a:solidFill>
+                      <a:prstDash val="solid"/>
+                      <a:round/>
+                      <a:headEnd type="none" w="med" len="med"/>
+                      <a:tailEnd type="none" w="med" len="med"/>
+                    </a:lnL>
+                    <a:lnR w="12700" cap="flat" cmpd="sng" algn="ctr">
+                      <a:solidFill>
+                        <a:schemeClr val="tx1"/>
+                      </a:solidFill>
+                      <a:prstDash val="solid"/>
+                      <a:round/>
+                      <a:headEnd type="none" w="med" len="med"/>
+                      <a:tailEnd type="none" w="med" len="med"/>
+                    </a:lnR>
+                    <a:lnT w="12700" cap="flat" cmpd="sng" algn="ctr">
+                      <a:solidFill>
+                        <a:schemeClr val="tx1"/>
+                      </a:solidFill>
+                      <a:prstDash val="solid"/>
+                      <a:round/>
+                      <a:headEnd type="none" w="med" len="med"/>
+                      <a:tailEnd type="none" w="med" len="med"/>
+                    </a:lnT>
+                    <a:lnB w="12700" cap="flat" cmpd="sng" algn="ctr">
+                      <a:solidFill>
+                        <a:schemeClr val="tx1"/>
+                      </a:solidFill>
+                      <a:prstDash val="solid"/>
+                      <a:round/>
+                      <a:headEnd type="none" w="med" len="med"/>
+                      <a:tailEnd type="none" w="med" len="med"/>
+                    </a:lnB>
+                    <a:noFill/>
+                  </a:tcPr>
+                </a:tc>
+                <a:tc>
+                  <a:txBody>
+                    <a:bodyPr/>
+                    <a:lstStyle/>
+                    <a:p>
+                      <a:endParaRPr lang="en-CA">
+                        <a:solidFill>
+                          <a:schemeClr val="tx1"/>
+                        </a:solidFill>
+                      </a:endParaRPr>
+                    </a:p>
+                  </a:txBody>
+                  <a:tcPr>
+                    <a:lnL w="12700" cap="flat" cmpd="sng" algn="ctr">
+                      <a:solidFill>
+                        <a:schemeClr val="tx1"/>
+                      </a:solidFill>
+                      <a:prstDash val="solid"/>
+                      <a:round/>
+                      <a:headEnd type="none" w="med" len="med"/>
+                      <a:tailEnd type="none" w="med" len="med"/>
+                    </a:lnL>
+                    <a:lnR w="12700" cap="flat" cmpd="sng" algn="ctr">
+                      <a:solidFill>
+                        <a:schemeClr val="tx1"/>
+                      </a:solidFill>
+                      <a:prstDash val="solid"/>
+                      <a:round/>
+                      <a:headEnd type="none" w="med" len="med"/>
+                      <a:tailEnd type="none" w="med" len="med"/>
+                    </a:lnR>
+                    <a:lnT w="12700" cap="flat" cmpd="sng" algn="ctr">
+                      <a:solidFill>
+                        <a:schemeClr val="tx1"/>
+                      </a:solidFill>
+                      <a:prstDash val="solid"/>
+                      <a:round/>
+                      <a:headEnd type="none" w="med" len="med"/>
+                      <a:tailEnd type="none" w="med" len="med"/>
+                    </a:lnT>
+                    <a:lnB w="12700" cap="flat" cmpd="sng" algn="ctr">
+                      <a:solidFill>
+                        <a:schemeClr val="tx1"/>
+                      </a:solidFill>
+                      <a:prstDash val="solid"/>
+                      <a:round/>
+                      <a:headEnd type="none" w="med" len="med"/>
+                      <a:tailEnd type="none" w="med" len="med"/>
+                    </a:lnB>
+                    <a:noFill/>
+                  </a:tcPr>
+                </a:tc>
+                <a:tc>
+                  <a:txBody>
+                    <a:bodyPr/>
+                    <a:lstStyle/>
+                    <a:p>
+                      <a:endParaRPr lang="en-CA" dirty="0">
+                        <a:solidFill>
+                          <a:schemeClr val="tx1"/>
+                        </a:solidFill>
+                      </a:endParaRPr>
+                    </a:p>
+                  </a:txBody>
+                  <a:tcPr>
+                    <a:lnL w="12700" cap="flat" cmpd="sng" algn="ctr">
+                      <a:solidFill>
+                        <a:schemeClr val="tx1"/>
+                      </a:solidFill>
+                      <a:prstDash val="solid"/>
+                      <a:round/>
+                      <a:headEnd type="none" w="med" len="med"/>
+                      <a:tailEnd type="none" w="med" len="med"/>
+                    </a:lnL>
+                    <a:lnR w="12700" cap="flat" cmpd="sng" algn="ctr">
+                      <a:solidFill>
+                        <a:schemeClr val="tx1"/>
+                      </a:solidFill>
+                      <a:prstDash val="solid"/>
+                      <a:round/>
+                      <a:headEnd type="none" w="med" len="med"/>
+                      <a:tailEnd type="none" w="med" len="med"/>
+                    </a:lnR>
+                    <a:lnT w="12700" cap="flat" cmpd="sng" algn="ctr">
+                      <a:solidFill>
+                        <a:schemeClr val="tx1"/>
+                      </a:solidFill>
+                      <a:prstDash val="solid"/>
+                      <a:round/>
+                      <a:headEnd type="none" w="med" len="med"/>
+                      <a:tailEnd type="none" w="med" len="med"/>
+                    </a:lnT>
+                    <a:lnB w="12700" cap="flat" cmpd="sng" algn="ctr">
+                      <a:solidFill>
+                        <a:schemeClr val="tx1"/>
+                      </a:solidFill>
+                      <a:prstDash val="solid"/>
+                      <a:round/>
+                      <a:headEnd type="none" w="med" len="med"/>
+                      <a:tailEnd type="none" w="med" len="med"/>
+                    </a:lnB>
+                    <a:noFill/>
+                  </a:tcPr>
+                </a:tc>
+                <a:tc>
+                  <a:txBody>
+                    <a:bodyPr/>
+                    <a:lstStyle/>
+                    <a:p>
+                      <a:endParaRPr lang="en-CA" dirty="0">
+                        <a:solidFill>
+                          <a:schemeClr val="tx1"/>
+                        </a:solidFill>
+                      </a:endParaRPr>
+                    </a:p>
+                  </a:txBody>
+                  <a:tcPr>
+                    <a:lnL w="12700" cap="flat" cmpd="sng" algn="ctr">
+                      <a:solidFill>
+                        <a:schemeClr val="tx1"/>
+                      </a:solidFill>
+                      <a:prstDash val="solid"/>
+                      <a:round/>
+                      <a:headEnd type="none" w="med" len="med"/>
+                      <a:tailEnd type="none" w="med" len="med"/>
+                    </a:lnL>
+                    <a:lnR w="12700" cap="flat" cmpd="sng" algn="ctr">
+                      <a:solidFill>
+                        <a:schemeClr val="tx1"/>
+                      </a:solidFill>
+                      <a:prstDash val="solid"/>
+                      <a:round/>
+                      <a:headEnd type="none" w="med" len="med"/>
+                      <a:tailEnd type="none" w="med" len="med"/>
+                    </a:lnR>
+                    <a:lnT w="12700" cap="flat" cmpd="sng" algn="ctr">
+                      <a:solidFill>
+                        <a:schemeClr val="tx1"/>
+                      </a:solidFill>
+                      <a:prstDash val="solid"/>
+                      <a:round/>
+                      <a:headEnd type="none" w="med" len="med"/>
+                      <a:tailEnd type="none" w="med" len="med"/>
+                    </a:lnT>
+                    <a:lnB w="12700" cap="flat" cmpd="sng" algn="ctr">
+                      <a:solidFill>
+                        <a:schemeClr val="tx1"/>
+                      </a:solidFill>
+                      <a:prstDash val="solid"/>
+                      <a:round/>
+                      <a:headEnd type="none" w="med" len="med"/>
+                      <a:tailEnd type="none" w="med" len="med"/>
+                    </a:lnB>
+                    <a:noFill/>
+                  </a:tcPr>
+                </a:tc>
+                <a:tc>
+                  <a:txBody>
+                    <a:bodyPr/>
+                    <a:lstStyle/>
+                    <a:p>
+                      <a:endParaRPr lang="en-CA">
+                        <a:solidFill>
+                          <a:schemeClr val="tx1"/>
+                        </a:solidFill>
+                      </a:endParaRPr>
+                    </a:p>
+                  </a:txBody>
+                  <a:tcPr>
+                    <a:lnL w="12700" cap="flat" cmpd="sng" algn="ctr">
+                      <a:solidFill>
+                        <a:schemeClr val="tx1"/>
+                      </a:solidFill>
+                      <a:prstDash val="solid"/>
+                      <a:round/>
+                      <a:headEnd type="none" w="med" len="med"/>
+                      <a:tailEnd type="none" w="med" len="med"/>
+                    </a:lnL>
+                    <a:lnR w="12700" cap="flat" cmpd="sng" algn="ctr">
+                      <a:solidFill>
+                        <a:schemeClr val="tx1"/>
+                      </a:solidFill>
+                      <a:prstDash val="solid"/>
+                      <a:round/>
+                      <a:headEnd type="none" w="med" len="med"/>
+                      <a:tailEnd type="none" w="med" len="med"/>
+                    </a:lnR>
+                    <a:lnT w="12700" cap="flat" cmpd="sng" algn="ctr">
+                      <a:solidFill>
+                        <a:schemeClr val="tx1"/>
+                      </a:solidFill>
+                      <a:prstDash val="solid"/>
+                      <a:round/>
+                      <a:headEnd type="none" w="med" len="med"/>
+                      <a:tailEnd type="none" w="med" len="med"/>
+                    </a:lnT>
+                    <a:lnB w="12700" cap="flat" cmpd="sng" algn="ctr">
+                      <a:solidFill>
+                        <a:schemeClr val="tx1"/>
+                      </a:solidFill>
+                      <a:prstDash val="solid"/>
+                      <a:round/>
+                      <a:headEnd type="none" w="med" len="med"/>
+                      <a:tailEnd type="none" w="med" len="med"/>
+                    </a:lnB>
+                    <a:noFill/>
+                  </a:tcPr>
+                </a:tc>
+                <a:tc>
+                  <a:txBody>
+                    <a:bodyPr/>
+                    <a:lstStyle/>
+                    <a:p>
+                      <a:endParaRPr lang="en-CA">
+                        <a:solidFill>
+                          <a:schemeClr val="tx1"/>
+                        </a:solidFill>
+                      </a:endParaRPr>
+                    </a:p>
+                  </a:txBody>
+                  <a:tcPr>
+                    <a:lnL w="12700" cap="flat" cmpd="sng" algn="ctr">
+                      <a:solidFill>
+                        <a:schemeClr val="tx1"/>
+                      </a:solidFill>
+                      <a:prstDash val="solid"/>
+                      <a:round/>
+                      <a:headEnd type="none" w="med" len="med"/>
+                      <a:tailEnd type="none" w="med" len="med"/>
+                    </a:lnL>
+                    <a:lnR w="12700" cap="flat" cmpd="sng" algn="ctr">
+                      <a:solidFill>
+                        <a:schemeClr val="tx1"/>
+                      </a:solidFill>
+                      <a:prstDash val="solid"/>
+                      <a:round/>
+                      <a:headEnd type="none" w="med" len="med"/>
+                      <a:tailEnd type="none" w="med" len="med"/>
+                    </a:lnR>
+                    <a:lnT w="12700" cap="flat" cmpd="sng" algn="ctr">
+                      <a:solidFill>
+                        <a:schemeClr val="tx1"/>
+                      </a:solidFill>
+                      <a:prstDash val="solid"/>
+                      <a:round/>
+                      <a:headEnd type="none" w="med" len="med"/>
+                      <a:tailEnd type="none" w="med" len="med"/>
+                    </a:lnT>
+                    <a:lnB w="12700" cap="flat" cmpd="sng" algn="ctr">
+                      <a:solidFill>
+                        <a:schemeClr val="tx1"/>
+                      </a:solidFill>
+                      <a:prstDash val="solid"/>
+                      <a:round/>
+                      <a:headEnd type="none" w="med" len="med"/>
+                      <a:tailEnd type="none" w="med" len="med"/>
+                    </a:lnB>
+                    <a:noFill/>
+                  </a:tcPr>
+                </a:tc>
+                <a:tc>
+                  <a:txBody>
+                    <a:bodyPr/>
+                    <a:lstStyle/>
+                    <a:p>
+                      <a:endParaRPr lang="en-CA" dirty="0">
+                        <a:solidFill>
+                          <a:schemeClr val="tx1"/>
+                        </a:solidFill>
+                      </a:endParaRPr>
+                    </a:p>
+                  </a:txBody>
+                  <a:tcPr>
+                    <a:lnL w="12700" cap="flat" cmpd="sng" algn="ctr">
+                      <a:solidFill>
+                        <a:schemeClr val="tx1"/>
+                      </a:solidFill>
+                      <a:prstDash val="solid"/>
+                      <a:round/>
+                      <a:headEnd type="none" w="med" len="med"/>
+                      <a:tailEnd type="none" w="med" len="med"/>
+                    </a:lnL>
+                    <a:lnR w="12700" cap="flat" cmpd="sng" algn="ctr">
+                      <a:solidFill>
+                        <a:schemeClr val="tx1"/>
+                      </a:solidFill>
+                      <a:prstDash val="solid"/>
+                      <a:round/>
+                      <a:headEnd type="none" w="med" len="med"/>
+                      <a:tailEnd type="none" w="med" len="med"/>
+                    </a:lnR>
+                    <a:lnT w="12700" cap="flat" cmpd="sng" algn="ctr">
+                      <a:solidFill>
+                        <a:schemeClr val="tx1"/>
+                      </a:solidFill>
+                      <a:prstDash val="solid"/>
+                      <a:round/>
+                      <a:headEnd type="none" w="med" len="med"/>
+                      <a:tailEnd type="none" w="med" len="med"/>
+                    </a:lnT>
+                    <a:lnB w="12700" cap="flat" cmpd="sng" algn="ctr">
+                      <a:solidFill>
+                        <a:schemeClr val="tx1"/>
+                      </a:solidFill>
+                      <a:prstDash val="solid"/>
+                      <a:round/>
+                      <a:headEnd type="none" w="med" len="med"/>
+                      <a:tailEnd type="none" w="med" len="med"/>
+                    </a:lnB>
+                    <a:noFill/>
+                  </a:tcPr>
+                </a:tc>
+                <a:tc>
+                  <a:txBody>
+                    <a:bodyPr/>
+                    <a:lstStyle/>
+                    <a:p>
+                      <a:endParaRPr lang="en-CA" dirty="0">
+                        <a:solidFill>
+                          <a:schemeClr val="tx1"/>
+                        </a:solidFill>
+                      </a:endParaRPr>
+                    </a:p>
+                  </a:txBody>
+                  <a:tcPr>
+                    <a:lnL w="12700" cap="flat" cmpd="sng" algn="ctr">
+                      <a:solidFill>
+                        <a:schemeClr val="tx1"/>
+                      </a:solidFill>
+                      <a:prstDash val="solid"/>
+                      <a:round/>
+                      <a:headEnd type="none" w="med" len="med"/>
+                      <a:tailEnd type="none" w="med" len="med"/>
+                    </a:lnL>
+                    <a:lnR w="12700" cap="flat" cmpd="sng" algn="ctr">
+                      <a:solidFill>
+                        <a:schemeClr val="tx1"/>
+                      </a:solidFill>
+                      <a:prstDash val="solid"/>
+                      <a:round/>
+                      <a:headEnd type="none" w="med" len="med"/>
+                      <a:tailEnd type="none" w="med" len="med"/>
+                    </a:lnR>
+                    <a:lnT w="12700" cap="flat" cmpd="sng" algn="ctr">
+                      <a:solidFill>
+                        <a:schemeClr val="tx1"/>
+                      </a:solidFill>
+                      <a:prstDash val="solid"/>
+                      <a:round/>
+                      <a:headEnd type="none" w="med" len="med"/>
+                      <a:tailEnd type="none" w="med" len="med"/>
+                    </a:lnT>
+                    <a:lnB w="12700" cap="flat" cmpd="sng" algn="ctr">
+                      <a:solidFill>
+                        <a:schemeClr val="tx1"/>
+                      </a:solidFill>
+                      <a:prstDash val="solid"/>
+                      <a:round/>
+                      <a:headEnd type="none" w="med" len="med"/>
+                      <a:tailEnd type="none" w="med" len="med"/>
+                    </a:lnB>
+                    <a:noFill/>
+                  </a:tcPr>
+                </a:tc>
+                <a:extLst>
+                  <a:ext uri="{0D108BD9-81ED-4DB2-BD59-A6C34878D82A}">
+                    <a16:rowId xmlns:a16="http://schemas.microsoft.com/office/drawing/2014/main" val="213617192"/>
+                  </a:ext>
+                </a:extLst>
+              </a:tr>
+            </a:tbl>
+          </a:graphicData>
+        </a:graphic>
+      </p:graphicFrame>
+      <p:cxnSp>
+        <p:nvCxnSpPr>
+          <p:cNvPr id="5" name="Straight Connector 4">
+            <a:extLst>
+              <a:ext uri="{FF2B5EF4-FFF2-40B4-BE49-F238E27FC236}">
+                <a16:creationId xmlns:a16="http://schemas.microsoft.com/office/drawing/2014/main" id="{99127019-DD68-0050-D7E3-E1491BE6A69C}"/>
+              </a:ext>
+            </a:extLst>
+          </p:cNvPr>
+          <p:cNvCxnSpPr>
+            <a:cxnSpLocks/>
+          </p:cNvCxnSpPr>
+          <p:nvPr/>
+        </p:nvCxnSpPr>
+        <p:spPr>
+          <a:xfrm>
+            <a:off x="3814619" y="2549236"/>
+            <a:ext cx="0" cy="628073"/>
+          </a:xfrm>
+          <a:prstGeom prst="line">
+            <a:avLst/>
+          </a:prstGeom>
+          <a:ln>
+            <a:prstDash val="sysDash"/>
+          </a:ln>
+        </p:spPr>
+        <p:style>
+          <a:lnRef idx="2">
+            <a:schemeClr val="dk1"/>
+          </a:lnRef>
+          <a:fillRef idx="0">
+            <a:schemeClr val="dk1"/>
+          </a:fillRef>
+          <a:effectRef idx="1">
+            <a:schemeClr val="dk1"/>
+          </a:effectRef>
+          <a:fontRef idx="minor">
+            <a:schemeClr val="tx1"/>
+          </a:fontRef>
+        </p:style>
+      </p:cxnSp>
+      <p:graphicFrame>
+        <p:nvGraphicFramePr>
+          <p:cNvPr id="6" name="Chart 5">
+            <a:extLst>
+              <a:ext uri="{FF2B5EF4-FFF2-40B4-BE49-F238E27FC236}">
+                <a16:creationId xmlns:a16="http://schemas.microsoft.com/office/drawing/2014/main" id="{08E5977D-6173-091F-478B-40CFAF191A73}"/>
+              </a:ext>
+            </a:extLst>
+          </p:cNvPr>
+          <p:cNvGraphicFramePr>
+            <a:graphicFrameLocks/>
+          </p:cNvGraphicFramePr>
+          <p:nvPr>
+            <p:extLst>
+              <p:ext uri="{D42A27DB-BD31-4B8C-83A1-F6EECF244321}">
+                <p14:modId xmlns:p14="http://schemas.microsoft.com/office/powerpoint/2010/main" val="2095867461"/>
+              </p:ext>
+            </p:extLst>
+          </p:nvPr>
+        </p:nvGraphicFramePr>
+        <p:xfrm>
+          <a:off x="2513119" y="3297382"/>
+          <a:ext cx="2602998" cy="2093192"/>
+        </p:xfrm>
+        <a:graphic>
+          <a:graphicData uri="http://schemas.openxmlformats.org/drawingml/2006/chart">
+            <c:chart xmlns:c="http://schemas.openxmlformats.org/drawingml/2006/chart" xmlns:r="http://schemas.openxmlformats.org/officeDocument/2006/relationships" r:id="rId2"/>
+          </a:graphicData>
+        </a:graphic>
+      </p:graphicFrame>
+      <mc:AlternateContent xmlns:mc="http://schemas.openxmlformats.org/markup-compatibility/2006">
+        <mc:Choice xmlns:a14="http://schemas.microsoft.com/office/drawing/2010/main" Requires="a14">
+          <p:sp>
+            <p:nvSpPr>
+              <p:cNvPr id="7" name="TextBox 6">
+                <a:extLst>
+                  <a:ext uri="{FF2B5EF4-FFF2-40B4-BE49-F238E27FC236}">
+                    <a16:creationId xmlns:a16="http://schemas.microsoft.com/office/drawing/2014/main" id="{D822801D-A2E4-AE8B-85BB-2863F086896C}"/>
+                  </a:ext>
+                </a:extLst>
+              </p:cNvPr>
+              <p:cNvSpPr txBox="1"/>
+              <p:nvPr/>
+            </p:nvSpPr>
+            <p:spPr>
+              <a:xfrm>
+                <a:off x="3583709" y="1772610"/>
+                <a:ext cx="461815" cy="369332"/>
+              </a:xfrm>
+              <a:prstGeom prst="rect">
+                <a:avLst/>
+              </a:prstGeom>
+              <a:noFill/>
+            </p:spPr>
+            <p:txBody>
+              <a:bodyPr wrap="square" rtlCol="0">
+                <a:spAutoFit/>
+              </a:bodyPr>
+              <a:lstStyle/>
+              <a:p>
+                <a14:m>
+                  <m:oMathPara xmlns:m="http://schemas.openxmlformats.org/officeDocument/2006/math">
+                    <m:oMathParaPr>
+                      <m:jc m:val="centerGroup"/>
+                    </m:oMathParaPr>
+                    <m:oMath xmlns:m="http://schemas.openxmlformats.org/officeDocument/2006/math">
+                      <m:sSub>
+                        <m:sSubPr>
+                          <m:ctrlPr>
+                            <a:rPr lang="en-CA" i="1" smtClean="0">
+                              <a:latin typeface="Cambria Math" panose="02040503050406030204" pitchFamily="18" charset="0"/>
+                            </a:rPr>
+                          </m:ctrlPr>
+                        </m:sSubPr>
+                        <m:e>
+                          <m:r>
+                            <a:rPr lang="en-CA" i="1" smtClean="0">
+                              <a:latin typeface="Cambria Math" panose="02040503050406030204" pitchFamily="18" charset="0"/>
+                            </a:rPr>
+                            <m:t>𝑥</m:t>
+                          </m:r>
+                        </m:e>
+                        <m:sub>
+                          <m:r>
+                            <a:rPr lang="en-CA" b="0" i="1" smtClean="0">
+                              <a:latin typeface="Cambria Math" panose="02040503050406030204" pitchFamily="18" charset="0"/>
+                            </a:rPr>
+                            <m:t>𝑖</m:t>
+                          </m:r>
+                        </m:sub>
+                      </m:sSub>
+                    </m:oMath>
+                  </m:oMathPara>
+                </a14:m>
+                <a:endParaRPr lang="en-CA" dirty="0"/>
+              </a:p>
+            </p:txBody>
+          </p:sp>
+        </mc:Choice>
+        <mc:Fallback>
+          <p:sp>
+            <p:nvSpPr>
+              <p:cNvPr id="7" name="TextBox 6">
+                <a:extLst>
+                  <a:ext uri="{FF2B5EF4-FFF2-40B4-BE49-F238E27FC236}">
+                    <a16:creationId xmlns:a16="http://schemas.microsoft.com/office/drawing/2014/main" id="{D822801D-A2E4-AE8B-85BB-2863F086896C}"/>
+                  </a:ext>
+                </a:extLst>
+              </p:cNvPr>
+              <p:cNvSpPr txBox="1">
+                <a:spLocks noRot="1" noChangeAspect="1" noMove="1" noResize="1" noEditPoints="1" noAdjustHandles="1" noChangeArrowheads="1" noChangeShapeType="1" noTextEdit="1"/>
+              </p:cNvSpPr>
+              <p:nvPr/>
+            </p:nvSpPr>
+            <p:spPr>
+              <a:xfrm>
+                <a:off x="3583709" y="1772610"/>
+                <a:ext cx="461815" cy="369332"/>
+              </a:xfrm>
+              <a:prstGeom prst="rect">
+                <a:avLst/>
+              </a:prstGeom>
+              <a:blipFill>
+                <a:blip r:embed="rId3"/>
+                <a:stretch>
+                  <a:fillRect/>
+                </a:stretch>
+              </a:blipFill>
+            </p:spPr>
+            <p:txBody>
+              <a:bodyPr/>
+              <a:lstStyle/>
+              <a:p>
+                <a:r>
+                  <a:rPr lang="en-CA">
+                    <a:noFill/>
+                  </a:rPr>
+                  <a:t> </a:t>
+                </a:r>
+              </a:p>
+            </p:txBody>
+          </p:sp>
+        </mc:Fallback>
+      </mc:AlternateContent>
+      <p:cxnSp>
+        <p:nvCxnSpPr>
+          <p:cNvPr id="8" name="Straight Connector 7">
+            <a:extLst>
+              <a:ext uri="{FF2B5EF4-FFF2-40B4-BE49-F238E27FC236}">
+                <a16:creationId xmlns:a16="http://schemas.microsoft.com/office/drawing/2014/main" id="{C59B6747-0874-FC2C-2E94-CDA53BFF982A}"/>
+              </a:ext>
+            </a:extLst>
+          </p:cNvPr>
+          <p:cNvCxnSpPr>
+            <a:cxnSpLocks/>
+          </p:cNvCxnSpPr>
+          <p:nvPr/>
+        </p:nvCxnSpPr>
+        <p:spPr>
+          <a:xfrm>
+            <a:off x="3375891" y="4165600"/>
+            <a:ext cx="0" cy="918566"/>
+          </a:xfrm>
+          <a:prstGeom prst="line">
+            <a:avLst/>
+          </a:prstGeom>
+          <a:ln>
+            <a:solidFill>
+              <a:srgbClr val="FF0000"/>
+            </a:solidFill>
+            <a:prstDash val="sysDash"/>
+          </a:ln>
+        </p:spPr>
+        <p:style>
+          <a:lnRef idx="2">
+            <a:schemeClr val="dk1"/>
+          </a:lnRef>
+          <a:fillRef idx="0">
+            <a:schemeClr val="dk1"/>
+          </a:fillRef>
+          <a:effectRef idx="1">
+            <a:schemeClr val="dk1"/>
+          </a:effectRef>
+          <a:fontRef idx="minor">
+            <a:schemeClr val="tx1"/>
+          </a:fontRef>
+        </p:style>
+      </p:cxnSp>
+      <mc:AlternateContent xmlns:mc="http://schemas.openxmlformats.org/markup-compatibility/2006">
+        <mc:Choice xmlns:a14="http://schemas.microsoft.com/office/drawing/2010/main" Requires="a14">
+          <p:sp>
+            <p:nvSpPr>
+              <p:cNvPr id="10" name="TextBox 9">
+                <a:extLst>
+                  <a:ext uri="{FF2B5EF4-FFF2-40B4-BE49-F238E27FC236}">
+                    <a16:creationId xmlns:a16="http://schemas.microsoft.com/office/drawing/2014/main" id="{3B45059F-E843-B363-14FC-E2BF5D67B9DD}"/>
+                  </a:ext>
+                </a:extLst>
+              </p:cNvPr>
+              <p:cNvSpPr txBox="1"/>
+              <p:nvPr/>
+            </p:nvSpPr>
+            <p:spPr>
+              <a:xfrm>
+                <a:off x="3144984" y="4991863"/>
+                <a:ext cx="461815" cy="369332"/>
+              </a:xfrm>
+              <a:prstGeom prst="rect">
+                <a:avLst/>
+              </a:prstGeom>
+              <a:noFill/>
+            </p:spPr>
+            <p:txBody>
+              <a:bodyPr wrap="square" rtlCol="0">
+                <a:spAutoFit/>
+              </a:bodyPr>
+              <a:lstStyle/>
+              <a:p>
+                <a14:m>
+                  <m:oMathPara xmlns:m="http://schemas.openxmlformats.org/officeDocument/2006/math">
+                    <m:oMathParaPr>
+                      <m:jc m:val="centerGroup"/>
+                    </m:oMathParaPr>
+                    <m:oMath xmlns:m="http://schemas.openxmlformats.org/officeDocument/2006/math">
+                      <m:sSub>
+                        <m:sSubPr>
+                          <m:ctrlPr>
+                            <a:rPr lang="en-CA" i="1">
+                              <a:solidFill>
+                                <a:srgbClr val="FF0000"/>
+                              </a:solidFill>
+                              <a:latin typeface="Cambria Math" panose="02040503050406030204" pitchFamily="18" charset="0"/>
+                            </a:rPr>
+                          </m:ctrlPr>
+                        </m:sSubPr>
+                        <m:e>
+                          <m:r>
+                            <a:rPr lang="en-CA" i="1">
+                              <a:solidFill>
+                                <a:srgbClr val="FF0000"/>
+                              </a:solidFill>
+                              <a:latin typeface="Cambria Math" panose="02040503050406030204" pitchFamily="18" charset="0"/>
+                            </a:rPr>
+                            <m:t>𝑡</m:t>
+                          </m:r>
+                        </m:e>
+                        <m:sub>
+                          <m:r>
+                            <a:rPr lang="en-CA" i="1">
+                              <a:solidFill>
+                                <a:srgbClr val="FF0000"/>
+                              </a:solidFill>
+                              <a:latin typeface="Cambria Math" panose="02040503050406030204" pitchFamily="18" charset="0"/>
+                            </a:rPr>
+                            <m:t>𝑖</m:t>
+                          </m:r>
+                        </m:sub>
+                      </m:sSub>
+                    </m:oMath>
+                  </m:oMathPara>
+                </a14:m>
+                <a:endParaRPr lang="en-CA" dirty="0">
+                  <a:solidFill>
+                    <a:srgbClr val="FF0000"/>
+                  </a:solidFill>
+                </a:endParaRPr>
+              </a:p>
+            </p:txBody>
+          </p:sp>
+        </mc:Choice>
+        <mc:Fallback>
+          <p:sp>
+            <p:nvSpPr>
+              <p:cNvPr id="10" name="TextBox 9">
+                <a:extLst>
+                  <a:ext uri="{FF2B5EF4-FFF2-40B4-BE49-F238E27FC236}">
+                    <a16:creationId xmlns:a16="http://schemas.microsoft.com/office/drawing/2014/main" id="{3B45059F-E843-B363-14FC-E2BF5D67B9DD}"/>
+                  </a:ext>
+                </a:extLst>
+              </p:cNvPr>
+              <p:cNvSpPr txBox="1">
+                <a:spLocks noRot="1" noChangeAspect="1" noMove="1" noResize="1" noEditPoints="1" noAdjustHandles="1" noChangeArrowheads="1" noChangeShapeType="1" noTextEdit="1"/>
+              </p:cNvSpPr>
+              <p:nvPr/>
+            </p:nvSpPr>
+            <p:spPr>
+              <a:xfrm>
+                <a:off x="3144984" y="4991863"/>
+                <a:ext cx="461815" cy="369332"/>
+              </a:xfrm>
+              <a:prstGeom prst="rect">
+                <a:avLst/>
+              </a:prstGeom>
+              <a:blipFill>
+                <a:blip r:embed="rId4"/>
+                <a:stretch>
+                  <a:fillRect/>
+                </a:stretch>
+              </a:blipFill>
+            </p:spPr>
+            <p:txBody>
+              <a:bodyPr/>
+              <a:lstStyle/>
+              <a:p>
+                <a:r>
+                  <a:rPr lang="en-CA">
+                    <a:noFill/>
+                  </a:rPr>
+                  <a:t> </a:t>
+                </a:r>
+              </a:p>
+            </p:txBody>
+          </p:sp>
+        </mc:Fallback>
+      </mc:AlternateContent>
+      <p:cxnSp>
+        <p:nvCxnSpPr>
+          <p:cNvPr id="13" name="Straight Connector 12">
+            <a:extLst>
+              <a:ext uri="{FF2B5EF4-FFF2-40B4-BE49-F238E27FC236}">
+                <a16:creationId xmlns:a16="http://schemas.microsoft.com/office/drawing/2014/main" id="{EC5AFAA0-04D6-1359-A485-D66B55F82832}"/>
+              </a:ext>
+            </a:extLst>
+          </p:cNvPr>
+          <p:cNvCxnSpPr>
+            <a:cxnSpLocks/>
+          </p:cNvCxnSpPr>
+          <p:nvPr/>
+        </p:nvCxnSpPr>
+        <p:spPr>
+          <a:xfrm>
+            <a:off x="3366655" y="4165600"/>
+            <a:ext cx="1667163" cy="0"/>
+          </a:xfrm>
+          <a:prstGeom prst="line">
+            <a:avLst/>
+          </a:prstGeom>
+          <a:ln>
+            <a:solidFill>
+              <a:srgbClr val="FF0000"/>
+            </a:solidFill>
+            <a:prstDash val="sysDash"/>
+          </a:ln>
+        </p:spPr>
+        <p:style>
+          <a:lnRef idx="2">
+            <a:schemeClr val="dk1"/>
+          </a:lnRef>
+          <a:fillRef idx="0">
+            <a:schemeClr val="dk1"/>
+          </a:fillRef>
+          <a:effectRef idx="1">
+            <a:schemeClr val="dk1"/>
+          </a:effectRef>
+          <a:fontRef idx="minor">
+            <a:schemeClr val="tx1"/>
+          </a:fontRef>
+        </p:style>
+      </p:cxnSp>
+      <p:sp>
+        <p:nvSpPr>
+          <p:cNvPr id="16" name="Left Brace 15">
+            <a:extLst>
+              <a:ext uri="{FF2B5EF4-FFF2-40B4-BE49-F238E27FC236}">
+                <a16:creationId xmlns:a16="http://schemas.microsoft.com/office/drawing/2014/main" id="{1202B802-4218-3B38-45AC-C85780D021B0}"/>
+              </a:ext>
+            </a:extLst>
+          </p:cNvPr>
+          <p:cNvSpPr/>
+          <p:nvPr/>
+        </p:nvSpPr>
+        <p:spPr>
+          <a:xfrm rot="5400000">
+            <a:off x="3693359" y="2041721"/>
+            <a:ext cx="242518" cy="2458924"/>
+          </a:xfrm>
+          <a:prstGeom prst="leftBrace">
+            <a:avLst/>
+          </a:prstGeom>
+        </p:spPr>
+        <p:style>
+          <a:lnRef idx="2">
+            <a:schemeClr val="dk1"/>
+          </a:lnRef>
+          <a:fillRef idx="0">
+            <a:schemeClr val="dk1"/>
+          </a:fillRef>
+          <a:effectRef idx="1">
+            <a:schemeClr val="dk1"/>
+          </a:effectRef>
+          <a:fontRef idx="minor">
+            <a:schemeClr val="tx1"/>
+          </a:fontRef>
+        </p:style>
+        <p:txBody>
+          <a:bodyPr rtlCol="0" anchor="ctr"/>
+          <a:lstStyle/>
+          <a:p>
+            <a:pPr algn="ctr"/>
+            <a:endParaRPr lang="en-CA" dirty="0"/>
+          </a:p>
+        </p:txBody>
+      </p:sp>
+      <mc:AlternateContent xmlns:mc="http://schemas.openxmlformats.org/markup-compatibility/2006">
+        <mc:Choice xmlns:a14="http://schemas.microsoft.com/office/drawing/2010/main" Requires="a14">
+          <p:sp>
+            <p:nvSpPr>
+              <p:cNvPr id="17" name="TextBox 16">
+                <a:extLst>
+                  <a:ext uri="{FF2B5EF4-FFF2-40B4-BE49-F238E27FC236}">
+                    <a16:creationId xmlns:a16="http://schemas.microsoft.com/office/drawing/2014/main" id="{2A229618-F72E-08A5-77AE-29CB53F6D390}"/>
+                  </a:ext>
+                </a:extLst>
+              </p:cNvPr>
+              <p:cNvSpPr txBox="1"/>
+              <p:nvPr/>
+            </p:nvSpPr>
+            <p:spPr>
+              <a:xfrm>
+                <a:off x="5000663" y="3937389"/>
+                <a:ext cx="461815" cy="369332"/>
+              </a:xfrm>
+              <a:prstGeom prst="rect">
+                <a:avLst/>
+              </a:prstGeom>
+              <a:noFill/>
+            </p:spPr>
+            <p:txBody>
+              <a:bodyPr wrap="square" rtlCol="0">
+                <a:spAutoFit/>
+              </a:bodyPr>
+              <a:lstStyle/>
+              <a:p>
+                <a14:m>
+                  <m:oMathPara xmlns:m="http://schemas.openxmlformats.org/officeDocument/2006/math">
+                    <m:oMathParaPr>
+                      <m:jc m:val="centerGroup"/>
+                    </m:oMathParaPr>
+                    <m:oMath xmlns:m="http://schemas.openxmlformats.org/officeDocument/2006/math">
+                      <m:r>
+                        <a:rPr lang="en-CA" b="0" i="1" smtClean="0">
+                          <a:solidFill>
+                            <a:srgbClr val="FF0000"/>
+                          </a:solidFill>
+                          <a:latin typeface="Cambria Math" panose="02040503050406030204" pitchFamily="18" charset="0"/>
+                        </a:rPr>
+                        <m:t>𝑣</m:t>
+                      </m:r>
+                      <m:r>
+                        <a:rPr lang="en-CA" b="0" i="1" smtClean="0">
+                          <a:solidFill>
+                            <a:srgbClr val="FF0000"/>
+                          </a:solidFill>
+                          <a:latin typeface="Cambria Math" panose="02040503050406030204" pitchFamily="18" charset="0"/>
+                        </a:rPr>
+                        <m:t>(</m:t>
+                      </m:r>
+                      <m:sSub>
+                        <m:sSubPr>
+                          <m:ctrlPr>
+                            <a:rPr lang="en-CA" b="0" i="1" smtClean="0">
+                              <a:solidFill>
+                                <a:srgbClr val="FF0000"/>
+                              </a:solidFill>
+                              <a:latin typeface="Cambria Math" panose="02040503050406030204" pitchFamily="18" charset="0"/>
+                            </a:rPr>
+                          </m:ctrlPr>
+                        </m:sSubPr>
+                        <m:e>
+                          <m:r>
+                            <a:rPr lang="en-CA" b="0" i="1" smtClean="0">
+                              <a:solidFill>
+                                <a:srgbClr val="FF0000"/>
+                              </a:solidFill>
+                              <a:latin typeface="Cambria Math" panose="02040503050406030204" pitchFamily="18" charset="0"/>
+                            </a:rPr>
+                            <m:t>𝑡</m:t>
+                          </m:r>
+                        </m:e>
+                        <m:sub>
+                          <m:r>
+                            <a:rPr lang="en-CA" b="0" i="1" smtClean="0">
+                              <a:solidFill>
+                                <a:srgbClr val="FF0000"/>
+                              </a:solidFill>
+                              <a:latin typeface="Cambria Math" panose="02040503050406030204" pitchFamily="18" charset="0"/>
+                            </a:rPr>
+                            <m:t>𝑖</m:t>
+                          </m:r>
+                        </m:sub>
+                      </m:sSub>
+                      <m:r>
+                        <a:rPr lang="en-CA" b="0" i="1" smtClean="0">
+                          <a:solidFill>
+                            <a:srgbClr val="FF0000"/>
+                          </a:solidFill>
+                          <a:latin typeface="Cambria Math" panose="02040503050406030204" pitchFamily="18" charset="0"/>
+                        </a:rPr>
+                        <m:t>)</m:t>
+                      </m:r>
+                    </m:oMath>
+                  </m:oMathPara>
+                </a14:m>
+                <a:endParaRPr lang="en-CA" dirty="0">
+                  <a:solidFill>
+                    <a:srgbClr val="FF0000"/>
+                  </a:solidFill>
+                </a:endParaRPr>
+              </a:p>
+            </p:txBody>
+          </p:sp>
+        </mc:Choice>
+        <mc:Fallback>
+          <p:sp>
+            <p:nvSpPr>
+              <p:cNvPr id="17" name="TextBox 16">
+                <a:extLst>
+                  <a:ext uri="{FF2B5EF4-FFF2-40B4-BE49-F238E27FC236}">
+                    <a16:creationId xmlns:a16="http://schemas.microsoft.com/office/drawing/2014/main" id="{2A229618-F72E-08A5-77AE-29CB53F6D390}"/>
+                  </a:ext>
+                </a:extLst>
+              </p:cNvPr>
+              <p:cNvSpPr txBox="1">
+                <a:spLocks noRot="1" noChangeAspect="1" noMove="1" noResize="1" noEditPoints="1" noAdjustHandles="1" noChangeArrowheads="1" noChangeShapeType="1" noTextEdit="1"/>
+              </p:cNvSpPr>
+              <p:nvPr/>
+            </p:nvSpPr>
+            <p:spPr>
+              <a:xfrm>
+                <a:off x="5000663" y="3937389"/>
+                <a:ext cx="461815" cy="369332"/>
+              </a:xfrm>
+              <a:prstGeom prst="rect">
+                <a:avLst/>
+              </a:prstGeom>
+              <a:blipFill>
+                <a:blip r:embed="rId5"/>
+                <a:stretch>
+                  <a:fillRect r="-47368" b="-13333"/>
+                </a:stretch>
+              </a:blipFill>
+            </p:spPr>
+            <p:txBody>
+              <a:bodyPr/>
+              <a:lstStyle/>
+              <a:p>
+                <a:r>
+                  <a:rPr lang="en-CA">
+                    <a:noFill/>
+                  </a:rPr>
+                  <a:t> </a:t>
+                </a:r>
+              </a:p>
+            </p:txBody>
+          </p:sp>
+        </mc:Fallback>
+      </mc:AlternateContent>
+      <p:sp>
+        <p:nvSpPr>
+          <p:cNvPr id="29" name="Rectangle 28">
+            <a:extLst>
+              <a:ext uri="{FF2B5EF4-FFF2-40B4-BE49-F238E27FC236}">
+                <a16:creationId xmlns:a16="http://schemas.microsoft.com/office/drawing/2014/main" id="{33E3ED2B-51DB-E9CC-F115-F1C2EC0B01B7}"/>
+              </a:ext>
+            </a:extLst>
+          </p:cNvPr>
+          <p:cNvSpPr/>
+          <p:nvPr/>
+        </p:nvSpPr>
+        <p:spPr>
+          <a:xfrm>
+            <a:off x="7458362" y="2159314"/>
+            <a:ext cx="535706" cy="544946"/>
+          </a:xfrm>
+          <a:prstGeom prst="rect">
+            <a:avLst/>
+          </a:prstGeom>
+          <a:solidFill>
+            <a:srgbClr val="FF0000"/>
+          </a:solidFill>
+          <a:ln>
+            <a:noFill/>
+          </a:ln>
+        </p:spPr>
+        <p:style>
+          <a:lnRef idx="2">
+            <a:schemeClr val="accent1">
+              <a:shade val="15000"/>
+            </a:schemeClr>
+          </a:lnRef>
+          <a:fillRef idx="1">
+            <a:schemeClr val="accent1"/>
+          </a:fillRef>
+          <a:effectRef idx="0">
+            <a:schemeClr val="accent1"/>
+          </a:effectRef>
+          <a:fontRef idx="minor">
+            <a:schemeClr val="lt1"/>
+          </a:fontRef>
+        </p:style>
+        <p:txBody>
+          <a:bodyPr rtlCol="0" anchor="ctr"/>
+          <a:lstStyle/>
+          <a:p>
+            <a:pPr algn="ctr"/>
+            <a:endParaRPr lang="en-CA"/>
+          </a:p>
+        </p:txBody>
+      </p:sp>
+      <p:cxnSp>
+        <p:nvCxnSpPr>
+          <p:cNvPr id="20" name="Straight Arrow Connector 19">
+            <a:extLst>
+              <a:ext uri="{FF2B5EF4-FFF2-40B4-BE49-F238E27FC236}">
+                <a16:creationId xmlns:a16="http://schemas.microsoft.com/office/drawing/2014/main" id="{55B42D01-7DFE-1A8E-E8E1-D4444D122F88}"/>
+              </a:ext>
+            </a:extLst>
+          </p:cNvPr>
+          <p:cNvCxnSpPr>
+            <a:cxnSpLocks/>
+          </p:cNvCxnSpPr>
+          <p:nvPr/>
+        </p:nvCxnSpPr>
+        <p:spPr>
+          <a:xfrm>
+            <a:off x="4008581" y="1976909"/>
+            <a:ext cx="3449781" cy="11125"/>
+          </a:xfrm>
+          <a:prstGeom prst="straightConnector1">
+            <a:avLst/>
+          </a:prstGeom>
+          <a:ln>
+            <a:headEnd type="triangle"/>
+            <a:tailEnd type="triangle"/>
+          </a:ln>
+        </p:spPr>
+        <p:style>
+          <a:lnRef idx="2">
+            <a:schemeClr val="dk1"/>
+          </a:lnRef>
+          <a:fillRef idx="0">
+            <a:schemeClr val="dk1"/>
+          </a:fillRef>
+          <a:effectRef idx="1">
+            <a:schemeClr val="dk1"/>
+          </a:effectRef>
+          <a:fontRef idx="minor">
+            <a:schemeClr val="tx1"/>
+          </a:fontRef>
+        </p:style>
+      </p:cxnSp>
+      <p:cxnSp>
+        <p:nvCxnSpPr>
+          <p:cNvPr id="21" name="Straight Connector 20">
+            <a:extLst>
+              <a:ext uri="{FF2B5EF4-FFF2-40B4-BE49-F238E27FC236}">
+                <a16:creationId xmlns:a16="http://schemas.microsoft.com/office/drawing/2014/main" id="{31F260D1-8C14-FB11-ACD4-E9093871CC2B}"/>
+              </a:ext>
+            </a:extLst>
+          </p:cNvPr>
+          <p:cNvCxnSpPr>
+            <a:cxnSpLocks/>
+          </p:cNvCxnSpPr>
+          <p:nvPr/>
+        </p:nvCxnSpPr>
+        <p:spPr>
+          <a:xfrm>
+            <a:off x="7726216" y="2475345"/>
+            <a:ext cx="0" cy="628073"/>
+          </a:xfrm>
+          <a:prstGeom prst="line">
+            <a:avLst/>
+          </a:prstGeom>
+          <a:ln>
+            <a:prstDash val="sysDash"/>
+          </a:ln>
+        </p:spPr>
+        <p:style>
+          <a:lnRef idx="2">
+            <a:schemeClr val="dk1"/>
+          </a:lnRef>
+          <a:fillRef idx="0">
+            <a:schemeClr val="dk1"/>
+          </a:fillRef>
+          <a:effectRef idx="1">
+            <a:schemeClr val="dk1"/>
+          </a:effectRef>
+          <a:fontRef idx="minor">
+            <a:schemeClr val="tx1"/>
+          </a:fontRef>
+        </p:style>
+      </p:cxnSp>
+      <mc:AlternateContent xmlns:mc="http://schemas.openxmlformats.org/markup-compatibility/2006">
+        <mc:Choice xmlns:a14="http://schemas.microsoft.com/office/drawing/2010/main" Requires="a14">
+          <p:sp>
+            <p:nvSpPr>
+              <p:cNvPr id="22" name="TextBox 21">
+                <a:extLst>
+                  <a:ext uri="{FF2B5EF4-FFF2-40B4-BE49-F238E27FC236}">
+                    <a16:creationId xmlns:a16="http://schemas.microsoft.com/office/drawing/2014/main" id="{42366FE2-463A-10A4-8993-EF6CE5F3A793}"/>
+                  </a:ext>
+                </a:extLst>
+              </p:cNvPr>
+              <p:cNvSpPr txBox="1"/>
+              <p:nvPr/>
+            </p:nvSpPr>
+            <p:spPr>
+              <a:xfrm>
+                <a:off x="7495307" y="1761826"/>
+                <a:ext cx="461815" cy="391582"/>
+              </a:xfrm>
+              <a:prstGeom prst="rect">
+                <a:avLst/>
+              </a:prstGeom>
+              <a:noFill/>
+            </p:spPr>
+            <p:txBody>
+              <a:bodyPr wrap="square" rtlCol="0">
+                <a:spAutoFit/>
+              </a:bodyPr>
+              <a:lstStyle/>
+              <a:p>
+                <a14:m>
+                  <m:oMathPara xmlns:m="http://schemas.openxmlformats.org/officeDocument/2006/math">
+                    <m:oMathParaPr>
+                      <m:jc m:val="centerGroup"/>
+                    </m:oMathParaPr>
+                    <m:oMath xmlns:m="http://schemas.openxmlformats.org/officeDocument/2006/math">
+                      <m:sSub>
+                        <m:sSubPr>
+                          <m:ctrlPr>
+                            <a:rPr lang="en-CA" i="1" smtClean="0">
+                              <a:latin typeface="Cambria Math" panose="02040503050406030204" pitchFamily="18" charset="0"/>
+                            </a:rPr>
+                          </m:ctrlPr>
+                        </m:sSubPr>
+                        <m:e>
+                          <m:r>
+                            <a:rPr lang="en-CA" i="1" smtClean="0">
+                              <a:latin typeface="Cambria Math" panose="02040503050406030204" pitchFamily="18" charset="0"/>
+                            </a:rPr>
+                            <m:t>𝑥</m:t>
+                          </m:r>
+                        </m:e>
+                        <m:sub>
+                          <m:r>
+                            <a:rPr lang="en-CA" b="0" i="1" smtClean="0">
+                              <a:latin typeface="Cambria Math" panose="02040503050406030204" pitchFamily="18" charset="0"/>
+                            </a:rPr>
+                            <m:t>𝑓</m:t>
+                          </m:r>
+                        </m:sub>
+                      </m:sSub>
+                    </m:oMath>
+                  </m:oMathPara>
+                </a14:m>
+                <a:endParaRPr lang="en-CA" dirty="0"/>
+              </a:p>
+            </p:txBody>
+          </p:sp>
+        </mc:Choice>
+        <mc:Fallback>
+          <p:sp>
+            <p:nvSpPr>
+              <p:cNvPr id="22" name="TextBox 21">
+                <a:extLst>
+                  <a:ext uri="{FF2B5EF4-FFF2-40B4-BE49-F238E27FC236}">
+                    <a16:creationId xmlns:a16="http://schemas.microsoft.com/office/drawing/2014/main" id="{42366FE2-463A-10A4-8993-EF6CE5F3A793}"/>
+                  </a:ext>
+                </a:extLst>
+              </p:cNvPr>
+              <p:cNvSpPr txBox="1">
+                <a:spLocks noRot="1" noChangeAspect="1" noMove="1" noResize="1" noEditPoints="1" noAdjustHandles="1" noChangeArrowheads="1" noChangeShapeType="1" noTextEdit="1"/>
+              </p:cNvSpPr>
+              <p:nvPr/>
+            </p:nvSpPr>
+            <p:spPr>
+              <a:xfrm>
+                <a:off x="7495307" y="1761826"/>
+                <a:ext cx="461815" cy="391582"/>
+              </a:xfrm>
+              <a:prstGeom prst="rect">
+                <a:avLst/>
+              </a:prstGeom>
+              <a:blipFill>
+                <a:blip r:embed="rId6"/>
+                <a:stretch>
+                  <a:fillRect b="-9375"/>
+                </a:stretch>
+              </a:blipFill>
+            </p:spPr>
+            <p:txBody>
+              <a:bodyPr/>
+              <a:lstStyle/>
+              <a:p>
+                <a:r>
+                  <a:rPr lang="en-CA">
+                    <a:noFill/>
+                  </a:rPr>
+                  <a:t> </a:t>
+                </a:r>
+              </a:p>
+            </p:txBody>
+          </p:sp>
+        </mc:Fallback>
+      </mc:AlternateContent>
+      <mc:AlternateContent xmlns:mc="http://schemas.openxmlformats.org/markup-compatibility/2006">
+        <mc:Choice xmlns:a14="http://schemas.microsoft.com/office/drawing/2010/main" Requires="a14">
+          <p:sp>
+            <p:nvSpPr>
+              <p:cNvPr id="25" name="TextBox 24">
+                <a:extLst>
+                  <a:ext uri="{FF2B5EF4-FFF2-40B4-BE49-F238E27FC236}">
+                    <a16:creationId xmlns:a16="http://schemas.microsoft.com/office/drawing/2014/main" id="{4FF4A71A-B143-0810-2B48-D6C14C656BF9}"/>
+                  </a:ext>
+                </a:extLst>
+              </p:cNvPr>
+              <p:cNvSpPr txBox="1"/>
+              <p:nvPr/>
+            </p:nvSpPr>
+            <p:spPr>
+              <a:xfrm>
+                <a:off x="5502561" y="1676014"/>
+                <a:ext cx="535711" cy="369323"/>
+              </a:xfrm>
+              <a:prstGeom prst="rect">
+                <a:avLst/>
+              </a:prstGeom>
+              <a:noFill/>
+            </p:spPr>
+            <p:txBody>
+              <a:bodyPr wrap="square">
+                <a:spAutoFit/>
+              </a:bodyPr>
+              <a:lstStyle/>
+              <a:p>
+                <a:pPr/>
+                <a14:m>
+                  <m:oMathPara xmlns:m="http://schemas.openxmlformats.org/officeDocument/2006/math">
+                    <m:oMathParaPr>
+                      <m:jc m:val="centerGroup"/>
+                    </m:oMathParaPr>
+                    <m:oMath xmlns:m="http://schemas.openxmlformats.org/officeDocument/2006/math">
+                      <m:r>
+                        <m:rPr>
+                          <m:sty m:val="p"/>
+                        </m:rPr>
+                        <a:rPr lang="en-CA" smtClean="0">
+                          <a:latin typeface="Cambria Math" panose="02040503050406030204" pitchFamily="18" charset="0"/>
+                        </a:rPr>
+                        <m:t>Δ</m:t>
+                      </m:r>
+                      <m:r>
+                        <a:rPr lang="en-CA" i="1">
+                          <a:latin typeface="Cambria Math" panose="02040503050406030204" pitchFamily="18" charset="0"/>
+                        </a:rPr>
+                        <m:t>𝑥</m:t>
+                      </m:r>
+                    </m:oMath>
+                  </m:oMathPara>
+                </a14:m>
+                <a:endParaRPr lang="en-CA" dirty="0"/>
+              </a:p>
+            </p:txBody>
+          </p:sp>
+        </mc:Choice>
+        <mc:Fallback>
+          <p:sp>
+            <p:nvSpPr>
+              <p:cNvPr id="25" name="TextBox 24">
+                <a:extLst>
+                  <a:ext uri="{FF2B5EF4-FFF2-40B4-BE49-F238E27FC236}">
+                    <a16:creationId xmlns:a16="http://schemas.microsoft.com/office/drawing/2014/main" id="{4FF4A71A-B143-0810-2B48-D6C14C656BF9}"/>
+                  </a:ext>
+                </a:extLst>
+              </p:cNvPr>
+              <p:cNvSpPr txBox="1">
+                <a:spLocks noRot="1" noChangeAspect="1" noMove="1" noResize="1" noEditPoints="1" noAdjustHandles="1" noChangeArrowheads="1" noChangeShapeType="1" noTextEdit="1"/>
+              </p:cNvSpPr>
+              <p:nvPr/>
+            </p:nvSpPr>
+            <p:spPr>
+              <a:xfrm>
+                <a:off x="5502561" y="1676014"/>
+                <a:ext cx="535711" cy="369323"/>
+              </a:xfrm>
+              <a:prstGeom prst="rect">
+                <a:avLst/>
+              </a:prstGeom>
+              <a:blipFill>
+                <a:blip r:embed="rId7"/>
+                <a:stretch>
+                  <a:fillRect/>
+                </a:stretch>
+              </a:blipFill>
+            </p:spPr>
+            <p:txBody>
+              <a:bodyPr/>
+              <a:lstStyle/>
+              <a:p>
+                <a:r>
+                  <a:rPr lang="en-CA">
+                    <a:noFill/>
+                  </a:rPr>
+                  <a:t> </a:t>
+                </a:r>
+              </a:p>
+            </p:txBody>
+          </p:sp>
+        </mc:Fallback>
+      </mc:AlternateContent>
+      <mc:AlternateContent xmlns:mc="http://schemas.openxmlformats.org/markup-compatibility/2006">
+        <mc:Choice xmlns:a14="http://schemas.microsoft.com/office/drawing/2010/main" Requires="a14">
+          <p:graphicFrame>
+            <p:nvGraphicFramePr>
+              <p:cNvPr id="28" name="Table 27">
+                <a:extLst>
+                  <a:ext uri="{FF2B5EF4-FFF2-40B4-BE49-F238E27FC236}">
+                    <a16:creationId xmlns:a16="http://schemas.microsoft.com/office/drawing/2014/main" id="{34816CE3-5FF1-006B-6244-FA9FB3AC8FB6}"/>
+                  </a:ext>
+                </a:extLst>
+              </p:cNvPr>
+              <p:cNvGraphicFramePr>
+                <a:graphicFrameLocks noGrp="1"/>
+              </p:cNvGraphicFramePr>
+              <p:nvPr>
+                <p:extLst>
+                  <p:ext uri="{D42A27DB-BD31-4B8C-83A1-F6EECF244321}">
+                    <p14:modId xmlns:p14="http://schemas.microsoft.com/office/powerpoint/2010/main" val="2163234302"/>
+                  </p:ext>
+                </p:extLst>
+              </p:nvPr>
+            </p:nvGraphicFramePr>
+            <p:xfrm>
+              <a:off x="6541652" y="3392443"/>
+              <a:ext cx="2369124" cy="1831855"/>
+            </p:xfrm>
+            <a:graphic>
+              <a:graphicData uri="http://schemas.openxmlformats.org/drawingml/2006/table">
+                <a:tbl>
+                  <a:tblPr firstRow="1" bandRow="1">
+                    <a:tableStyleId>{5C22544A-7EE6-4342-B048-85BDC9FD1C3A}</a:tableStyleId>
+                  </a:tblPr>
+                  <a:tblGrid>
+                    <a:gridCol w="789708">
+                      <a:extLst>
+                        <a:ext uri="{9D8B030D-6E8A-4147-A177-3AD203B41FA5}">
+                          <a16:colId xmlns:a16="http://schemas.microsoft.com/office/drawing/2014/main" val="3638430088"/>
+                        </a:ext>
+                      </a:extLst>
+                    </a:gridCol>
+                    <a:gridCol w="789708">
+                      <a:extLst>
+                        <a:ext uri="{9D8B030D-6E8A-4147-A177-3AD203B41FA5}">
+                          <a16:colId xmlns:a16="http://schemas.microsoft.com/office/drawing/2014/main" val="2870050223"/>
+                        </a:ext>
+                      </a:extLst>
+                    </a:gridCol>
+                    <a:gridCol w="789708">
+                      <a:extLst>
+                        <a:ext uri="{9D8B030D-6E8A-4147-A177-3AD203B41FA5}">
+                          <a16:colId xmlns:a16="http://schemas.microsoft.com/office/drawing/2014/main" val="3677307559"/>
+                        </a:ext>
+                      </a:extLst>
+                    </a:gridCol>
+                  </a:tblGrid>
+                  <a:tr h="366371">
+                    <a:tc>
+                      <a:txBody>
+                        <a:bodyPr/>
+                        <a:lstStyle/>
+                        <a:p>
+                          <a:pPr algn="ctr"/>
+                          <a14:m>
+                            <m:oMathPara xmlns:m="http://schemas.openxmlformats.org/officeDocument/2006/math">
+                              <m:oMathParaPr>
+                                <m:jc m:val="centerGroup"/>
+                              </m:oMathParaPr>
+                              <m:oMath xmlns:m="http://schemas.openxmlformats.org/officeDocument/2006/math">
+                                <m:r>
+                                  <a:rPr lang="en-CA" i="1" smtClean="0">
+                                    <a:solidFill>
+                                      <a:schemeClr val="tx1"/>
+                                    </a:solidFill>
+                                    <a:latin typeface="Cambria Math" panose="02040503050406030204" pitchFamily="18" charset="0"/>
+                                  </a:rPr>
+                                  <m:t>𝑥</m:t>
+                                </m:r>
+                              </m:oMath>
+                            </m:oMathPara>
+                          </a14:m>
+                          <a:endParaRPr lang="en-CA" b="0" i="0" dirty="0">
+                            <a:solidFill>
+                              <a:schemeClr val="tx1"/>
+                            </a:solidFill>
+                            <a:latin typeface="Cambria Math" panose="02040503050406030204" pitchFamily="18" charset="0"/>
+                            <a:ea typeface="Cambria Math" panose="02040503050406030204" pitchFamily="18" charset="0"/>
+                          </a:endParaRPr>
+                        </a:p>
+                      </a:txBody>
+                      <a:tcPr>
+                        <a:lnL w="12700" cmpd="sng">
+                          <a:noFill/>
+                        </a:lnL>
+                        <a:lnR w="19050" cap="flat" cmpd="sng" algn="ctr">
+                          <a:solidFill>
+                            <a:schemeClr val="tx1"/>
+                          </a:solidFill>
+                          <a:prstDash val="solid"/>
+                          <a:round/>
+                          <a:headEnd type="none" w="med" len="med"/>
+                          <a:tailEnd type="none" w="med" len="med"/>
+                        </a:lnR>
+                        <a:lnT w="12700" cmpd="sng">
+                          <a:noFill/>
+                        </a:lnT>
+                        <a:lnB w="19050" cap="flat" cmpd="sng" algn="ctr">
+                          <a:solidFill>
+                            <a:schemeClr val="tx1"/>
+                          </a:solidFill>
+                          <a:prstDash val="solid"/>
+                          <a:round/>
+                          <a:headEnd type="none" w="med" len="med"/>
+                          <a:tailEnd type="none" w="med" len="med"/>
+                        </a:lnB>
+                        <a:lnTlToBr w="12700" cmpd="sng">
+                          <a:noFill/>
+                          <a:prstDash val="solid"/>
+                        </a:lnTlToBr>
+                        <a:lnBlToTr w="12700" cmpd="sng">
+                          <a:noFill/>
+                          <a:prstDash val="solid"/>
+                        </a:lnBlToTr>
+                        <a:solidFill>
+                          <a:schemeClr val="bg2">
+                            <a:lumMod val="90000"/>
+                          </a:schemeClr>
+                        </a:solidFill>
+                      </a:tcPr>
+                    </a:tc>
+                    <a:tc>
+                      <a:txBody>
+                        <a:bodyPr/>
+                        <a:lstStyle/>
+                        <a:p>
+                          <a14:m>
+                            <m:oMathPara xmlns:m="http://schemas.openxmlformats.org/officeDocument/2006/math">
+                              <m:oMathParaPr>
+                                <m:jc m:val="centerGroup"/>
+                              </m:oMathParaPr>
+                              <m:oMath xmlns:m="http://schemas.openxmlformats.org/officeDocument/2006/math">
+                                <m:r>
+                                  <a:rPr lang="en-CA" b="0" i="1" smtClean="0">
+                                    <a:solidFill>
+                                      <a:schemeClr val="tx1"/>
+                                    </a:solidFill>
+                                    <a:latin typeface="Cambria Math" panose="02040503050406030204" pitchFamily="18" charset="0"/>
+                                  </a:rPr>
+                                  <m:t>𝑡</m:t>
+                                </m:r>
+                              </m:oMath>
+                            </m:oMathPara>
+                          </a14:m>
+                          <a:endParaRPr lang="en-CA" b="0" dirty="0">
+                            <a:solidFill>
+                              <a:schemeClr val="tx1"/>
+                            </a:solidFill>
+                          </a:endParaRPr>
+                        </a:p>
+                      </a:txBody>
+                      <a:tcPr>
+                        <a:lnL w="19050" cap="flat" cmpd="sng" algn="ctr">
+                          <a:solidFill>
+                            <a:schemeClr val="tx1"/>
+                          </a:solidFill>
+                          <a:prstDash val="solid"/>
+                          <a:round/>
+                          <a:headEnd type="none" w="med" len="med"/>
+                          <a:tailEnd type="none" w="med" len="med"/>
+                        </a:lnL>
+                        <a:lnR w="19050" cap="flat" cmpd="sng" algn="ctr">
+                          <a:solidFill>
+                            <a:schemeClr val="tx1"/>
+                          </a:solidFill>
+                          <a:prstDash val="solid"/>
+                          <a:round/>
+                          <a:headEnd type="none" w="med" len="med"/>
+                          <a:tailEnd type="none" w="med" len="med"/>
+                        </a:lnR>
+                        <a:lnT w="12700" cmpd="sng">
+                          <a:noFill/>
+                        </a:lnT>
+                        <a:lnB w="19050" cap="flat" cmpd="sng" algn="ctr">
+                          <a:solidFill>
+                            <a:schemeClr val="tx1"/>
+                          </a:solidFill>
+                          <a:prstDash val="solid"/>
+                          <a:round/>
+                          <a:headEnd type="none" w="med" len="med"/>
+                          <a:tailEnd type="none" w="med" len="med"/>
+                        </a:lnB>
+                        <a:lnTlToBr w="12700" cmpd="sng">
+                          <a:noFill/>
+                          <a:prstDash val="solid"/>
+                        </a:lnTlToBr>
+                        <a:lnBlToTr w="12700" cmpd="sng">
+                          <a:noFill/>
+                          <a:prstDash val="solid"/>
+                        </a:lnBlToTr>
+                        <a:solidFill>
+                          <a:schemeClr val="bg2">
+                            <a:lumMod val="90000"/>
+                          </a:schemeClr>
+                        </a:solidFill>
+                      </a:tcPr>
+                    </a:tc>
+                    <a:tc>
+                      <a:txBody>
+                        <a:bodyPr/>
+                        <a:lstStyle/>
+                        <a:p>
+                          <a14:m>
+                            <m:oMathPara xmlns:m="http://schemas.openxmlformats.org/officeDocument/2006/math">
+                              <m:oMathParaPr>
+                                <m:jc m:val="centerGroup"/>
+                              </m:oMathParaPr>
+                              <m:oMath xmlns:m="http://schemas.openxmlformats.org/officeDocument/2006/math">
+                                <m:r>
+                                  <m:rPr>
+                                    <m:sty m:val="p"/>
+                                  </m:rPr>
+                                  <a:rPr lang="en-CA" b="0" i="0" smtClean="0">
+                                    <a:solidFill>
+                                      <a:schemeClr val="tx1"/>
+                                    </a:solidFill>
+                                    <a:latin typeface="Cambria Math" panose="02040503050406030204" pitchFamily="18" charset="0"/>
+                                  </a:rPr>
+                                  <m:t>Δ</m:t>
+                                </m:r>
+                                <m:r>
+                                  <a:rPr lang="en-CA" b="0" i="1" smtClean="0">
+                                    <a:solidFill>
+                                      <a:schemeClr val="tx1"/>
+                                    </a:solidFill>
+                                    <a:latin typeface="Cambria Math" panose="02040503050406030204" pitchFamily="18" charset="0"/>
+                                  </a:rPr>
+                                  <m:t>𝑑</m:t>
+                                </m:r>
+                              </m:oMath>
+                            </m:oMathPara>
+                          </a14:m>
+                          <a:endParaRPr lang="en-CA" b="0" dirty="0">
+                            <a:solidFill>
+                              <a:schemeClr val="tx1"/>
+                            </a:solidFill>
+                          </a:endParaRPr>
+                        </a:p>
+                      </a:txBody>
+                      <a:tcPr>
+                        <a:lnL w="19050" cap="flat" cmpd="sng" algn="ctr">
+                          <a:solidFill>
+                            <a:schemeClr val="tx1"/>
+                          </a:solidFill>
+                          <a:prstDash val="solid"/>
+                          <a:round/>
+                          <a:headEnd type="none" w="med" len="med"/>
+                          <a:tailEnd type="none" w="med" len="med"/>
+                        </a:lnL>
+                        <a:lnR w="12700" cmpd="sng">
+                          <a:noFill/>
+                        </a:lnR>
+                        <a:lnT w="12700" cmpd="sng">
+                          <a:noFill/>
+                        </a:lnT>
+                        <a:lnB w="19050" cap="flat" cmpd="sng" algn="ctr">
+                          <a:solidFill>
+                            <a:schemeClr val="tx1"/>
+                          </a:solidFill>
+                          <a:prstDash val="solid"/>
+                          <a:round/>
+                          <a:headEnd type="none" w="med" len="med"/>
+                          <a:tailEnd type="none" w="med" len="med"/>
+                        </a:lnB>
+                        <a:lnTlToBr w="12700" cmpd="sng">
+                          <a:noFill/>
+                          <a:prstDash val="solid"/>
+                        </a:lnTlToBr>
+                        <a:lnBlToTr w="12700" cmpd="sng">
+                          <a:noFill/>
+                          <a:prstDash val="solid"/>
+                        </a:lnBlToTr>
+                        <a:solidFill>
+                          <a:schemeClr val="bg2">
+                            <a:lumMod val="90000"/>
+                          </a:schemeClr>
+                        </a:solidFill>
+                      </a:tcPr>
+                    </a:tc>
+                    <a:extLst>
+                      <a:ext uri="{0D108BD9-81ED-4DB2-BD59-A6C34878D82A}">
+                        <a16:rowId xmlns:a16="http://schemas.microsoft.com/office/drawing/2014/main" val="1737419790"/>
+                      </a:ext>
+                    </a:extLst>
+                  </a:tr>
+                  <a:tr h="366371">
+                    <a:tc>
+                      <a:txBody>
+                        <a:bodyPr/>
+                        <a:lstStyle/>
+                        <a:p>
+                          <a:pPr algn="ctr"/>
+                          <a:r>
+                            <a:rPr lang="en-CA" dirty="0"/>
+                            <a:t>:</a:t>
+                          </a:r>
+                        </a:p>
+                      </a:txBody>
+                      <a:tcPr>
+                        <a:lnL w="12700" cmpd="sng">
+                          <a:noFill/>
+                        </a:lnL>
+                        <a:lnR w="19050" cap="flat" cmpd="sng" algn="ctr">
+                          <a:solidFill>
+                            <a:schemeClr val="tx1"/>
+                          </a:solidFill>
+                          <a:prstDash val="solid"/>
+                          <a:round/>
+                          <a:headEnd type="none" w="med" len="med"/>
+                          <a:tailEnd type="none" w="med" len="med"/>
+                        </a:lnR>
+                        <a:lnT w="19050" cap="flat" cmpd="sng" algn="ctr">
+                          <a:solidFill>
+                            <a:schemeClr val="tx1"/>
+                          </a:solidFill>
+                          <a:prstDash val="solid"/>
+                          <a:round/>
+                          <a:headEnd type="none" w="med" len="med"/>
+                          <a:tailEnd type="none" w="med" len="med"/>
+                        </a:lnT>
+                        <a:lnB w="19050" cap="flat" cmpd="sng" algn="ctr">
+                          <a:solidFill>
+                            <a:schemeClr val="tx1"/>
+                          </a:solidFill>
+                          <a:prstDash val="solid"/>
+                          <a:round/>
+                          <a:headEnd type="none" w="med" len="med"/>
+                          <a:tailEnd type="none" w="med" len="med"/>
+                        </a:lnB>
+                        <a:lnTlToBr w="12700" cmpd="sng">
+                          <a:noFill/>
+                          <a:prstDash val="solid"/>
+                        </a:lnTlToBr>
+                        <a:lnBlToTr w="12700" cmpd="sng">
+                          <a:noFill/>
+                          <a:prstDash val="solid"/>
+                        </a:lnBlToTr>
+                        <a:noFill/>
+                      </a:tcPr>
+                    </a:tc>
+                    <a:tc>
+                      <a:txBody>
+                        <a:bodyPr/>
+                        <a:lstStyle/>
+                        <a:p>
+                          <a:pPr marL="0" marR="0" lvl="0" indent="0" algn="ctr" defTabSz="914400" rtl="0" eaLnBrk="1" fontAlgn="auto" latinLnBrk="0" hangingPunct="1">
+                            <a:lnSpc>
+                              <a:spcPct val="100000"/>
+                            </a:lnSpc>
+                            <a:spcBef>
+                              <a:spcPts val="0"/>
+                            </a:spcBef>
+                            <a:spcAft>
+                              <a:spcPts val="0"/>
+                            </a:spcAft>
+                            <a:buClrTx/>
+                            <a:buSzTx/>
+                            <a:buFontTx/>
+                            <a:buNone/>
+                            <a:tabLst/>
+                            <a:defRPr/>
+                          </a:pPr>
+                          <a:r>
+                            <a:rPr lang="en-CA" dirty="0"/>
+                            <a:t>:</a:t>
+                          </a:r>
+                        </a:p>
+                      </a:txBody>
+                      <a:tcPr>
+                        <a:lnL w="19050" cap="flat" cmpd="sng" algn="ctr">
+                          <a:solidFill>
+                            <a:schemeClr val="tx1"/>
+                          </a:solidFill>
+                          <a:prstDash val="solid"/>
+                          <a:round/>
+                          <a:headEnd type="none" w="med" len="med"/>
+                          <a:tailEnd type="none" w="med" len="med"/>
+                        </a:lnL>
+                        <a:lnR w="19050" cap="flat" cmpd="sng" algn="ctr">
+                          <a:solidFill>
+                            <a:schemeClr val="tx1"/>
+                          </a:solidFill>
+                          <a:prstDash val="solid"/>
+                          <a:round/>
+                          <a:headEnd type="none" w="med" len="med"/>
+                          <a:tailEnd type="none" w="med" len="med"/>
+                        </a:lnR>
+                        <a:lnT w="19050" cap="flat" cmpd="sng" algn="ctr">
+                          <a:solidFill>
+                            <a:schemeClr val="tx1"/>
+                          </a:solidFill>
+                          <a:prstDash val="solid"/>
+                          <a:round/>
+                          <a:headEnd type="none" w="med" len="med"/>
+                          <a:tailEnd type="none" w="med" len="med"/>
+                        </a:lnT>
+                        <a:lnB w="19050" cap="flat" cmpd="sng" algn="ctr">
+                          <a:solidFill>
+                            <a:schemeClr val="tx1"/>
+                          </a:solidFill>
+                          <a:prstDash val="solid"/>
+                          <a:round/>
+                          <a:headEnd type="none" w="med" len="med"/>
+                          <a:tailEnd type="none" w="med" len="med"/>
+                        </a:lnB>
+                        <a:lnTlToBr w="12700" cmpd="sng">
+                          <a:noFill/>
+                          <a:prstDash val="solid"/>
+                        </a:lnTlToBr>
+                        <a:lnBlToTr w="12700" cmpd="sng">
+                          <a:noFill/>
+                          <a:prstDash val="solid"/>
+                        </a:lnBlToTr>
+                        <a:noFill/>
+                      </a:tcPr>
+                    </a:tc>
+                    <a:tc>
+                      <a:txBody>
+                        <a:bodyPr/>
+                        <a:lstStyle/>
+                        <a:p>
+                          <a:pPr marL="0" marR="0" lvl="0" indent="0" algn="ctr" defTabSz="914400" rtl="0" eaLnBrk="1" fontAlgn="auto" latinLnBrk="0" hangingPunct="1">
+                            <a:lnSpc>
+                              <a:spcPct val="100000"/>
+                            </a:lnSpc>
+                            <a:spcBef>
+                              <a:spcPts val="0"/>
+                            </a:spcBef>
+                            <a:spcAft>
+                              <a:spcPts val="0"/>
+                            </a:spcAft>
+                            <a:buClrTx/>
+                            <a:buSzTx/>
+                            <a:buFontTx/>
+                            <a:buNone/>
+                            <a:tabLst/>
+                            <a:defRPr/>
+                          </a:pPr>
+                          <a:r>
+                            <a:rPr lang="en-CA" dirty="0"/>
+                            <a:t>:</a:t>
+                          </a:r>
+                        </a:p>
+                      </a:txBody>
+                      <a:tcPr>
+                        <a:lnL w="19050" cap="flat" cmpd="sng" algn="ctr">
+                          <a:solidFill>
+                            <a:schemeClr val="tx1"/>
+                          </a:solidFill>
+                          <a:prstDash val="solid"/>
+                          <a:round/>
+                          <a:headEnd type="none" w="med" len="med"/>
+                          <a:tailEnd type="none" w="med" len="med"/>
+                        </a:lnL>
+                        <a:lnR w="12700" cmpd="sng">
+                          <a:noFill/>
+                        </a:lnR>
+                        <a:lnT w="19050" cap="flat" cmpd="sng" algn="ctr">
+                          <a:solidFill>
+                            <a:schemeClr val="tx1"/>
+                          </a:solidFill>
+                          <a:prstDash val="solid"/>
+                          <a:round/>
+                          <a:headEnd type="none" w="med" len="med"/>
+                          <a:tailEnd type="none" w="med" len="med"/>
+                        </a:lnT>
+                        <a:lnB w="19050" cap="flat" cmpd="sng" algn="ctr">
+                          <a:solidFill>
+                            <a:schemeClr val="tx1"/>
+                          </a:solidFill>
+                          <a:prstDash val="solid"/>
+                          <a:round/>
+                          <a:headEnd type="none" w="med" len="med"/>
+                          <a:tailEnd type="none" w="med" len="med"/>
+                        </a:lnB>
+                        <a:lnTlToBr w="12700" cmpd="sng">
+                          <a:noFill/>
+                          <a:prstDash val="solid"/>
+                        </a:lnTlToBr>
+                        <a:lnBlToTr w="12700" cmpd="sng">
+                          <a:noFill/>
+                          <a:prstDash val="solid"/>
+                        </a:lnBlToTr>
+                        <a:noFill/>
+                      </a:tcPr>
+                    </a:tc>
+                    <a:extLst>
+                      <a:ext uri="{0D108BD9-81ED-4DB2-BD59-A6C34878D82A}">
+                        <a16:rowId xmlns:a16="http://schemas.microsoft.com/office/drawing/2014/main" val="1088189741"/>
+                      </a:ext>
+                    </a:extLst>
+                  </a:tr>
+                  <a:tr h="366371">
+                    <a:tc>
+                      <a:txBody>
+                        <a:bodyPr/>
+                        <a:lstStyle/>
+                        <a:p>
+                          <a:pPr marL="0" marR="0" lvl="0" indent="0" algn="ctr" defTabSz="914400" rtl="0" eaLnBrk="1" fontAlgn="auto" latinLnBrk="0" hangingPunct="1">
+                            <a:lnSpc>
+                              <a:spcPct val="100000"/>
+                            </a:lnSpc>
+                            <a:spcBef>
+                              <a:spcPts val="0"/>
+                            </a:spcBef>
+                            <a:spcAft>
+                              <a:spcPts val="0"/>
+                            </a:spcAft>
+                            <a:buClrTx/>
+                            <a:buSzTx/>
+                            <a:buFontTx/>
+                            <a:buNone/>
+                            <a:tabLst/>
+                            <a:defRPr/>
+                          </a:pPr>
+                          <a:r>
+                            <a:rPr lang="en-CA" dirty="0"/>
+                            <a:t>:</a:t>
+                          </a:r>
+                        </a:p>
+                      </a:txBody>
+                      <a:tcPr>
+                        <a:lnL w="12700" cmpd="sng">
+                          <a:noFill/>
+                        </a:lnL>
+                        <a:lnR w="19050" cap="flat" cmpd="sng" algn="ctr">
+                          <a:solidFill>
+                            <a:schemeClr val="tx1"/>
+                          </a:solidFill>
+                          <a:prstDash val="solid"/>
+                          <a:round/>
+                          <a:headEnd type="none" w="med" len="med"/>
+                          <a:tailEnd type="none" w="med" len="med"/>
+                        </a:lnR>
+                        <a:lnT w="19050" cap="flat" cmpd="sng" algn="ctr">
+                          <a:solidFill>
+                            <a:schemeClr val="tx1"/>
+                          </a:solidFill>
+                          <a:prstDash val="solid"/>
+                          <a:round/>
+                          <a:headEnd type="none" w="med" len="med"/>
+                          <a:tailEnd type="none" w="med" len="med"/>
+                        </a:lnT>
+                        <a:lnB w="19050" cap="flat" cmpd="sng" algn="ctr">
+                          <a:solidFill>
+                            <a:schemeClr val="tx1"/>
+                          </a:solidFill>
+                          <a:prstDash val="solid"/>
+                          <a:round/>
+                          <a:headEnd type="none" w="med" len="med"/>
+                          <a:tailEnd type="none" w="med" len="med"/>
+                        </a:lnB>
+                        <a:lnTlToBr w="12700" cmpd="sng">
+                          <a:noFill/>
+                          <a:prstDash val="solid"/>
+                        </a:lnTlToBr>
+                        <a:lnBlToTr w="12700" cmpd="sng">
+                          <a:noFill/>
+                          <a:prstDash val="solid"/>
+                        </a:lnBlToTr>
+                        <a:noFill/>
+                      </a:tcPr>
+                    </a:tc>
+                    <a:tc>
+                      <a:txBody>
+                        <a:bodyPr/>
+                        <a:lstStyle/>
+                        <a:p>
+                          <a:pPr marL="0" marR="0" lvl="0" indent="0" algn="ctr" defTabSz="914400" rtl="0" eaLnBrk="1" fontAlgn="auto" latinLnBrk="0" hangingPunct="1">
+                            <a:lnSpc>
+                              <a:spcPct val="100000"/>
+                            </a:lnSpc>
+                            <a:spcBef>
+                              <a:spcPts val="0"/>
+                            </a:spcBef>
+                            <a:spcAft>
+                              <a:spcPts val="0"/>
+                            </a:spcAft>
+                            <a:buClrTx/>
+                            <a:buSzTx/>
+                            <a:buFontTx/>
+                            <a:buNone/>
+                            <a:tabLst/>
+                            <a:defRPr/>
+                          </a:pPr>
+                          <a:r>
+                            <a:rPr lang="en-CA" dirty="0"/>
+                            <a:t>:</a:t>
+                          </a:r>
+                        </a:p>
+                      </a:txBody>
+                      <a:tcPr>
+                        <a:lnL w="19050" cap="flat" cmpd="sng" algn="ctr">
+                          <a:solidFill>
+                            <a:schemeClr val="tx1"/>
+                          </a:solidFill>
+                          <a:prstDash val="solid"/>
+                          <a:round/>
+                          <a:headEnd type="none" w="med" len="med"/>
+                          <a:tailEnd type="none" w="med" len="med"/>
+                        </a:lnL>
+                        <a:lnR w="19050" cap="flat" cmpd="sng" algn="ctr">
+                          <a:solidFill>
+                            <a:schemeClr val="tx1"/>
+                          </a:solidFill>
+                          <a:prstDash val="solid"/>
+                          <a:round/>
+                          <a:headEnd type="none" w="med" len="med"/>
+                          <a:tailEnd type="none" w="med" len="med"/>
+                        </a:lnR>
+                        <a:lnT w="19050" cap="flat" cmpd="sng" algn="ctr">
+                          <a:solidFill>
+                            <a:schemeClr val="tx1"/>
+                          </a:solidFill>
+                          <a:prstDash val="solid"/>
+                          <a:round/>
+                          <a:headEnd type="none" w="med" len="med"/>
+                          <a:tailEnd type="none" w="med" len="med"/>
+                        </a:lnT>
+                        <a:lnB w="19050" cap="flat" cmpd="sng" algn="ctr">
+                          <a:solidFill>
+                            <a:schemeClr val="tx1"/>
+                          </a:solidFill>
+                          <a:prstDash val="solid"/>
+                          <a:round/>
+                          <a:headEnd type="none" w="med" len="med"/>
+                          <a:tailEnd type="none" w="med" len="med"/>
+                        </a:lnB>
+                        <a:lnTlToBr w="12700" cmpd="sng">
+                          <a:noFill/>
+                          <a:prstDash val="solid"/>
+                        </a:lnTlToBr>
+                        <a:lnBlToTr w="12700" cmpd="sng">
+                          <a:noFill/>
+                          <a:prstDash val="solid"/>
+                        </a:lnBlToTr>
+                        <a:noFill/>
+                      </a:tcPr>
+                    </a:tc>
+                    <a:tc>
+                      <a:txBody>
+                        <a:bodyPr/>
+                        <a:lstStyle/>
+                        <a:p>
+                          <a:pPr marL="0" marR="0" lvl="0" indent="0" algn="ctr" defTabSz="914400" rtl="0" eaLnBrk="1" fontAlgn="auto" latinLnBrk="0" hangingPunct="1">
+                            <a:lnSpc>
+                              <a:spcPct val="100000"/>
+                            </a:lnSpc>
+                            <a:spcBef>
+                              <a:spcPts val="0"/>
+                            </a:spcBef>
+                            <a:spcAft>
+                              <a:spcPts val="0"/>
+                            </a:spcAft>
+                            <a:buClrTx/>
+                            <a:buSzTx/>
+                            <a:buFontTx/>
+                            <a:buNone/>
+                            <a:tabLst/>
+                            <a:defRPr/>
+                          </a:pPr>
+                          <a:r>
+                            <a:rPr lang="en-CA" dirty="0"/>
+                            <a:t>:</a:t>
+                          </a:r>
+                        </a:p>
+                      </a:txBody>
+                      <a:tcPr>
+                        <a:lnL w="19050" cap="flat" cmpd="sng" algn="ctr">
+                          <a:solidFill>
+                            <a:schemeClr val="tx1"/>
+                          </a:solidFill>
+                          <a:prstDash val="solid"/>
+                          <a:round/>
+                          <a:headEnd type="none" w="med" len="med"/>
+                          <a:tailEnd type="none" w="med" len="med"/>
+                        </a:lnL>
+                        <a:lnR w="12700" cmpd="sng">
+                          <a:noFill/>
+                        </a:lnR>
+                        <a:lnT w="19050" cap="flat" cmpd="sng" algn="ctr">
+                          <a:solidFill>
+                            <a:schemeClr val="tx1"/>
+                          </a:solidFill>
+                          <a:prstDash val="solid"/>
+                          <a:round/>
+                          <a:headEnd type="none" w="med" len="med"/>
+                          <a:tailEnd type="none" w="med" len="med"/>
+                        </a:lnT>
+                        <a:lnB w="19050" cap="flat" cmpd="sng" algn="ctr">
+                          <a:solidFill>
+                            <a:schemeClr val="tx1"/>
+                          </a:solidFill>
+                          <a:prstDash val="solid"/>
+                          <a:round/>
+                          <a:headEnd type="none" w="med" len="med"/>
+                          <a:tailEnd type="none" w="med" len="med"/>
+                        </a:lnB>
+                        <a:lnTlToBr w="12700" cmpd="sng">
+                          <a:noFill/>
+                          <a:prstDash val="solid"/>
+                        </a:lnTlToBr>
+                        <a:lnBlToTr w="12700" cmpd="sng">
+                          <a:noFill/>
+                          <a:prstDash val="solid"/>
+                        </a:lnBlToTr>
+                        <a:noFill/>
+                      </a:tcPr>
+                    </a:tc>
+                    <a:extLst>
+                      <a:ext uri="{0D108BD9-81ED-4DB2-BD59-A6C34878D82A}">
+                        <a16:rowId xmlns:a16="http://schemas.microsoft.com/office/drawing/2014/main" val="3424706869"/>
+                      </a:ext>
+                    </a:extLst>
+                  </a:tr>
+                  <a:tr h="366371">
+                    <a:tc>
+                      <a:txBody>
+                        <a:bodyPr/>
+                        <a:lstStyle/>
+                        <a:p>
+                          <a:pPr algn="ctr"/>
+                          <a14:m>
+                            <m:oMathPara xmlns:m="http://schemas.openxmlformats.org/officeDocument/2006/math">
+                              <m:oMathParaPr>
+                                <m:jc m:val="centerGroup"/>
+                              </m:oMathParaPr>
+                              <m:oMath xmlns:m="http://schemas.openxmlformats.org/officeDocument/2006/math">
+                                <m:sSub>
+                                  <m:sSubPr>
+                                    <m:ctrlPr>
+                                      <a:rPr lang="en-CA" i="1" smtClean="0">
+                                        <a:latin typeface="Cambria Math" panose="02040503050406030204" pitchFamily="18" charset="0"/>
+                                      </a:rPr>
+                                    </m:ctrlPr>
+                                  </m:sSubPr>
+                                  <m:e>
+                                    <m:r>
+                                      <a:rPr lang="en-CA" i="1" smtClean="0">
+                                        <a:latin typeface="Cambria Math" panose="02040503050406030204" pitchFamily="18" charset="0"/>
+                                      </a:rPr>
+                                      <m:t>𝑥</m:t>
+                                    </m:r>
+                                  </m:e>
+                                  <m:sub>
+                                    <m:r>
+                                      <a:rPr lang="en-CA" b="0" i="1" smtClean="0">
+                                        <a:latin typeface="Cambria Math" panose="02040503050406030204" pitchFamily="18" charset="0"/>
+                                      </a:rPr>
+                                      <m:t>𝑖</m:t>
+                                    </m:r>
+                                  </m:sub>
+                                </m:sSub>
+                              </m:oMath>
+                            </m:oMathPara>
+                          </a14:m>
+                          <a:endParaRPr lang="en-CA" dirty="0"/>
+                        </a:p>
+                      </a:txBody>
+                      <a:tcPr>
+                        <a:lnL w="12700" cmpd="sng">
+                          <a:noFill/>
+                        </a:lnL>
+                        <a:lnR w="19050" cap="flat" cmpd="sng" algn="ctr">
+                          <a:solidFill>
+                            <a:schemeClr val="tx1"/>
+                          </a:solidFill>
+                          <a:prstDash val="solid"/>
+                          <a:round/>
+                          <a:headEnd type="none" w="med" len="med"/>
+                          <a:tailEnd type="none" w="med" len="med"/>
+                        </a:lnR>
+                        <a:lnT w="19050" cap="flat" cmpd="sng" algn="ctr">
+                          <a:solidFill>
+                            <a:schemeClr val="tx1"/>
+                          </a:solidFill>
+                          <a:prstDash val="solid"/>
+                          <a:round/>
+                          <a:headEnd type="none" w="med" len="med"/>
+                          <a:tailEnd type="none" w="med" len="med"/>
+                        </a:lnT>
+                        <a:lnB w="19050" cap="flat" cmpd="sng" algn="ctr">
+                          <a:solidFill>
+                            <a:schemeClr val="tx1"/>
+                          </a:solidFill>
+                          <a:prstDash val="solid"/>
+                          <a:round/>
+                          <a:headEnd type="none" w="med" len="med"/>
+                          <a:tailEnd type="none" w="med" len="med"/>
+                        </a:lnB>
+                        <a:lnTlToBr w="12700" cmpd="sng">
+                          <a:noFill/>
+                          <a:prstDash val="solid"/>
+                        </a:lnTlToBr>
+                        <a:lnBlToTr w="12700" cmpd="sng">
+                          <a:noFill/>
+                          <a:prstDash val="solid"/>
+                        </a:lnBlToTr>
+                        <a:noFill/>
+                      </a:tcPr>
+                    </a:tc>
+                    <a:tc>
+                      <a:txBody>
+                        <a:bodyPr/>
+                        <a:lstStyle/>
+                        <a:p>
+                          <a:pPr algn="ctr"/>
+                          <a14:m>
+                            <m:oMathPara xmlns:m="http://schemas.openxmlformats.org/officeDocument/2006/math">
+                              <m:oMathParaPr>
+                                <m:jc m:val="centerGroup"/>
+                              </m:oMathParaPr>
+                              <m:oMath xmlns:m="http://schemas.openxmlformats.org/officeDocument/2006/math">
+                                <m:sSub>
+                                  <m:sSubPr>
+                                    <m:ctrlPr>
+                                      <a:rPr lang="en-CA" b="0" i="1" smtClean="0">
+                                        <a:solidFill>
+                                          <a:schemeClr val="tx1"/>
+                                        </a:solidFill>
+                                        <a:latin typeface="Cambria Math" panose="02040503050406030204" pitchFamily="18" charset="0"/>
+                                      </a:rPr>
+                                    </m:ctrlPr>
+                                  </m:sSubPr>
+                                  <m:e>
+                                    <m:r>
+                                      <a:rPr lang="en-CA" b="0" i="1" smtClean="0">
+                                        <a:solidFill>
+                                          <a:schemeClr val="tx1"/>
+                                        </a:solidFill>
+                                        <a:latin typeface="Cambria Math" panose="02040503050406030204" pitchFamily="18" charset="0"/>
+                                      </a:rPr>
+                                      <m:t>𝑡</m:t>
+                                    </m:r>
+                                  </m:e>
+                                  <m:sub>
+                                    <m:r>
+                                      <a:rPr lang="en-CA" b="0" i="1" smtClean="0">
+                                        <a:solidFill>
+                                          <a:schemeClr val="tx1"/>
+                                        </a:solidFill>
+                                        <a:latin typeface="Cambria Math" panose="02040503050406030204" pitchFamily="18" charset="0"/>
+                                      </a:rPr>
+                                      <m:t>𝑖</m:t>
+                                    </m:r>
+                                  </m:sub>
+                                </m:sSub>
+                              </m:oMath>
+                            </m:oMathPara>
+                          </a14:m>
+                          <a:endParaRPr lang="en-CA" dirty="0"/>
+                        </a:p>
+                      </a:txBody>
+                      <a:tcPr>
+                        <a:lnL w="19050" cap="flat" cmpd="sng" algn="ctr">
+                          <a:solidFill>
+                            <a:schemeClr val="tx1"/>
+                          </a:solidFill>
+                          <a:prstDash val="solid"/>
+                          <a:round/>
+                          <a:headEnd type="none" w="med" len="med"/>
+                          <a:tailEnd type="none" w="med" len="med"/>
+                        </a:lnL>
+                        <a:lnR w="19050" cap="flat" cmpd="sng" algn="ctr">
+                          <a:solidFill>
+                            <a:schemeClr val="tx1"/>
+                          </a:solidFill>
+                          <a:prstDash val="solid"/>
+                          <a:round/>
+                          <a:headEnd type="none" w="med" len="med"/>
+                          <a:tailEnd type="none" w="med" len="med"/>
+                        </a:lnR>
+                        <a:lnT w="19050" cap="flat" cmpd="sng" algn="ctr">
+                          <a:solidFill>
+                            <a:schemeClr val="tx1"/>
+                          </a:solidFill>
+                          <a:prstDash val="solid"/>
+                          <a:round/>
+                          <a:headEnd type="none" w="med" len="med"/>
+                          <a:tailEnd type="none" w="med" len="med"/>
+                        </a:lnT>
+                        <a:lnB w="19050" cap="flat" cmpd="sng" algn="ctr">
+                          <a:solidFill>
+                            <a:schemeClr val="tx1"/>
+                          </a:solidFill>
+                          <a:prstDash val="solid"/>
+                          <a:round/>
+                          <a:headEnd type="none" w="med" len="med"/>
+                          <a:tailEnd type="none" w="med" len="med"/>
+                        </a:lnB>
+                        <a:lnTlToBr w="12700" cmpd="sng">
+                          <a:noFill/>
+                          <a:prstDash val="solid"/>
+                        </a:lnTlToBr>
+                        <a:lnBlToTr w="12700" cmpd="sng">
+                          <a:noFill/>
+                          <a:prstDash val="solid"/>
+                        </a:lnBlToTr>
+                        <a:noFill/>
+                      </a:tcPr>
+                    </a:tc>
+                    <a:tc>
+                      <a:txBody>
+                        <a:bodyPr/>
+                        <a:lstStyle/>
+                        <a:p>
+                          <a:pPr algn="ctr"/>
+                          <a14:m>
+                            <m:oMathPara xmlns:m="http://schemas.openxmlformats.org/officeDocument/2006/math">
+                              <m:oMathParaPr>
+                                <m:jc m:val="centerGroup"/>
+                              </m:oMathParaPr>
+                              <m:oMath xmlns:m="http://schemas.openxmlformats.org/officeDocument/2006/math">
+                                <m:r>
+                                  <a:rPr lang="en-CA" b="0" i="1" smtClean="0">
+                                    <a:solidFill>
+                                      <a:srgbClr val="FF0000"/>
+                                    </a:solidFill>
+                                    <a:latin typeface="Cambria Math" panose="02040503050406030204" pitchFamily="18" charset="0"/>
+                                  </a:rPr>
+                                  <m:t>𝑑</m:t>
+                                </m:r>
+                              </m:oMath>
+                            </m:oMathPara>
+                          </a14:m>
+                          <a:endParaRPr lang="en-CA" dirty="0">
+                            <a:solidFill>
+                              <a:srgbClr val="FF0000"/>
+                            </a:solidFill>
+                          </a:endParaRPr>
+                        </a:p>
+                      </a:txBody>
+                      <a:tcPr>
+                        <a:lnL w="19050" cap="flat" cmpd="sng" algn="ctr">
+                          <a:solidFill>
+                            <a:schemeClr val="tx1"/>
+                          </a:solidFill>
+                          <a:prstDash val="solid"/>
+                          <a:round/>
+                          <a:headEnd type="none" w="med" len="med"/>
+                          <a:tailEnd type="none" w="med" len="med"/>
+                        </a:lnL>
+                        <a:lnR w="12700" cmpd="sng">
+                          <a:noFill/>
+                        </a:lnR>
+                        <a:lnT w="19050" cap="flat" cmpd="sng" algn="ctr">
+                          <a:solidFill>
+                            <a:schemeClr val="tx1"/>
+                          </a:solidFill>
+                          <a:prstDash val="solid"/>
+                          <a:round/>
+                          <a:headEnd type="none" w="med" len="med"/>
+                          <a:tailEnd type="none" w="med" len="med"/>
+                        </a:lnT>
+                        <a:lnB w="19050" cap="flat" cmpd="sng" algn="ctr">
+                          <a:solidFill>
+                            <a:schemeClr val="tx1"/>
+                          </a:solidFill>
+                          <a:prstDash val="solid"/>
+                          <a:round/>
+                          <a:headEnd type="none" w="med" len="med"/>
+                          <a:tailEnd type="none" w="med" len="med"/>
+                        </a:lnB>
+                        <a:lnTlToBr w="12700" cmpd="sng">
+                          <a:noFill/>
+                          <a:prstDash val="solid"/>
+                        </a:lnTlToBr>
+                        <a:lnBlToTr w="12700" cmpd="sng">
+                          <a:noFill/>
+                          <a:prstDash val="solid"/>
+                        </a:lnBlToTr>
+                        <a:noFill/>
+                      </a:tcPr>
+                    </a:tc>
+                    <a:extLst>
+                      <a:ext uri="{0D108BD9-81ED-4DB2-BD59-A6C34878D82A}">
+                        <a16:rowId xmlns:a16="http://schemas.microsoft.com/office/drawing/2014/main" val="733683434"/>
+                      </a:ext>
+                    </a:extLst>
+                  </a:tr>
+                  <a:tr h="366371">
+                    <a:tc>
+                      <a:txBody>
+                        <a:bodyPr/>
+                        <a:lstStyle/>
+                        <a:p>
+                          <a:pPr marL="0" marR="0" lvl="0" indent="0" algn="ctr" defTabSz="914400" rtl="0" eaLnBrk="1" fontAlgn="auto" latinLnBrk="0" hangingPunct="1">
+                            <a:lnSpc>
+                              <a:spcPct val="100000"/>
+                            </a:lnSpc>
+                            <a:spcBef>
+                              <a:spcPts val="0"/>
+                            </a:spcBef>
+                            <a:spcAft>
+                              <a:spcPts val="0"/>
+                            </a:spcAft>
+                            <a:buClrTx/>
+                            <a:buSzTx/>
+                            <a:buFontTx/>
+                            <a:buNone/>
+                            <a:tabLst/>
+                            <a:defRPr/>
+                          </a:pPr>
+                          <a:r>
+                            <a:rPr lang="en-CA" dirty="0"/>
+                            <a:t>:</a:t>
+                          </a:r>
+                        </a:p>
+                      </a:txBody>
+                      <a:tcPr>
+                        <a:lnL w="12700" cmpd="sng">
+                          <a:noFill/>
+                        </a:lnL>
+                        <a:lnR w="19050" cap="flat" cmpd="sng" algn="ctr">
+                          <a:solidFill>
+                            <a:schemeClr val="tx1"/>
+                          </a:solidFill>
+                          <a:prstDash val="solid"/>
+                          <a:round/>
+                          <a:headEnd type="none" w="med" len="med"/>
+                          <a:tailEnd type="none" w="med" len="med"/>
+                        </a:lnR>
+                        <a:lnT w="19050" cap="flat" cmpd="sng" algn="ctr">
+                          <a:solidFill>
+                            <a:schemeClr val="tx1"/>
+                          </a:solidFill>
+                          <a:prstDash val="solid"/>
+                          <a:round/>
+                          <a:headEnd type="none" w="med" len="med"/>
+                          <a:tailEnd type="none" w="med" len="med"/>
+                        </a:lnT>
+                        <a:lnB w="19050" cap="flat" cmpd="sng" algn="ctr">
+                          <a:solidFill>
+                            <a:schemeClr val="tx1"/>
+                          </a:solidFill>
+                          <a:prstDash val="solid"/>
+                          <a:round/>
+                          <a:headEnd type="none" w="med" len="med"/>
+                          <a:tailEnd type="none" w="med" len="med"/>
+                        </a:lnB>
+                        <a:lnTlToBr w="12700" cmpd="sng">
+                          <a:noFill/>
+                          <a:prstDash val="solid"/>
+                        </a:lnTlToBr>
+                        <a:lnBlToTr w="12700" cmpd="sng">
+                          <a:noFill/>
+                          <a:prstDash val="solid"/>
+                        </a:lnBlToTr>
+                        <a:noFill/>
+                      </a:tcPr>
+                    </a:tc>
+                    <a:tc>
+                      <a:txBody>
+                        <a:bodyPr/>
+                        <a:lstStyle/>
+                        <a:p>
+                          <a:pPr marL="0" marR="0" lvl="0" indent="0" algn="ctr" defTabSz="914400" rtl="0" eaLnBrk="1" fontAlgn="auto" latinLnBrk="0" hangingPunct="1">
+                            <a:lnSpc>
+                              <a:spcPct val="100000"/>
+                            </a:lnSpc>
+                            <a:spcBef>
+                              <a:spcPts val="0"/>
+                            </a:spcBef>
+                            <a:spcAft>
+                              <a:spcPts val="0"/>
+                            </a:spcAft>
+                            <a:buClrTx/>
+                            <a:buSzTx/>
+                            <a:buFontTx/>
+                            <a:buNone/>
+                            <a:tabLst/>
+                            <a:defRPr/>
+                          </a:pPr>
+                          <a:r>
+                            <a:rPr lang="en-CA" dirty="0"/>
+                            <a:t>:</a:t>
+                          </a:r>
+                        </a:p>
+                      </a:txBody>
+                      <a:tcPr>
+                        <a:lnL w="19050" cap="flat" cmpd="sng" algn="ctr">
+                          <a:solidFill>
+                            <a:schemeClr val="tx1"/>
+                          </a:solidFill>
+                          <a:prstDash val="solid"/>
+                          <a:round/>
+                          <a:headEnd type="none" w="med" len="med"/>
+                          <a:tailEnd type="none" w="med" len="med"/>
+                        </a:lnL>
+                        <a:lnR w="19050" cap="flat" cmpd="sng" algn="ctr">
+                          <a:solidFill>
+                            <a:schemeClr val="tx1"/>
+                          </a:solidFill>
+                          <a:prstDash val="solid"/>
+                          <a:round/>
+                          <a:headEnd type="none" w="med" len="med"/>
+                          <a:tailEnd type="none" w="med" len="med"/>
+                        </a:lnR>
+                        <a:lnT w="19050" cap="flat" cmpd="sng" algn="ctr">
+                          <a:solidFill>
+                            <a:schemeClr val="tx1"/>
+                          </a:solidFill>
+                          <a:prstDash val="solid"/>
+                          <a:round/>
+                          <a:headEnd type="none" w="med" len="med"/>
+                          <a:tailEnd type="none" w="med" len="med"/>
+                        </a:lnT>
+                        <a:lnB w="19050" cap="flat" cmpd="sng" algn="ctr">
+                          <a:solidFill>
+                            <a:schemeClr val="tx1"/>
+                          </a:solidFill>
+                          <a:prstDash val="solid"/>
+                          <a:round/>
+                          <a:headEnd type="none" w="med" len="med"/>
+                          <a:tailEnd type="none" w="med" len="med"/>
+                        </a:lnB>
+                        <a:lnTlToBr w="12700" cmpd="sng">
+                          <a:noFill/>
+                          <a:prstDash val="solid"/>
+                        </a:lnTlToBr>
+                        <a:lnBlToTr w="12700" cmpd="sng">
+                          <a:noFill/>
+                          <a:prstDash val="solid"/>
+                        </a:lnBlToTr>
+                        <a:noFill/>
+                      </a:tcPr>
+                    </a:tc>
+                    <a:tc>
+                      <a:txBody>
+                        <a:bodyPr/>
+                        <a:lstStyle/>
+                        <a:p>
+                          <a:pPr marL="0" marR="0" lvl="0" indent="0" algn="ctr" defTabSz="914400" rtl="0" eaLnBrk="1" fontAlgn="auto" latinLnBrk="0" hangingPunct="1">
+                            <a:lnSpc>
+                              <a:spcPct val="100000"/>
+                            </a:lnSpc>
+                            <a:spcBef>
+                              <a:spcPts val="0"/>
+                            </a:spcBef>
+                            <a:spcAft>
+                              <a:spcPts val="0"/>
+                            </a:spcAft>
+                            <a:buClrTx/>
+                            <a:buSzTx/>
+                            <a:buFontTx/>
+                            <a:buNone/>
+                            <a:tabLst/>
+                            <a:defRPr/>
+                          </a:pPr>
+                          <a:r>
+                            <a:rPr lang="en-CA" dirty="0"/>
+                            <a:t>:</a:t>
+                          </a:r>
+                        </a:p>
+                      </a:txBody>
+                      <a:tcPr>
+                        <a:lnL w="19050" cap="flat" cmpd="sng" algn="ctr">
+                          <a:solidFill>
+                            <a:schemeClr val="tx1"/>
+                          </a:solidFill>
+                          <a:prstDash val="solid"/>
+                          <a:round/>
+                          <a:headEnd type="none" w="med" len="med"/>
+                          <a:tailEnd type="none" w="med" len="med"/>
+                        </a:lnL>
+                        <a:lnR w="12700" cmpd="sng">
+                          <a:noFill/>
+                        </a:lnR>
+                        <a:lnT w="19050" cap="flat" cmpd="sng" algn="ctr">
+                          <a:solidFill>
+                            <a:schemeClr val="tx1"/>
+                          </a:solidFill>
+                          <a:prstDash val="solid"/>
+                          <a:round/>
+                          <a:headEnd type="none" w="med" len="med"/>
+                          <a:tailEnd type="none" w="med" len="med"/>
+                        </a:lnT>
+                        <a:lnB w="19050" cap="flat" cmpd="sng" algn="ctr">
+                          <a:solidFill>
+                            <a:schemeClr val="tx1"/>
+                          </a:solidFill>
+                          <a:prstDash val="solid"/>
+                          <a:round/>
+                          <a:headEnd type="none" w="med" len="med"/>
+                          <a:tailEnd type="none" w="med" len="med"/>
+                        </a:lnB>
+                        <a:lnTlToBr w="12700" cmpd="sng">
+                          <a:noFill/>
+                          <a:prstDash val="solid"/>
+                        </a:lnTlToBr>
+                        <a:lnBlToTr w="12700" cmpd="sng">
+                          <a:noFill/>
+                          <a:prstDash val="solid"/>
+                        </a:lnBlToTr>
+                        <a:noFill/>
+                      </a:tcPr>
+                    </a:tc>
+                    <a:extLst>
+                      <a:ext uri="{0D108BD9-81ED-4DB2-BD59-A6C34878D82A}">
+                        <a16:rowId xmlns:a16="http://schemas.microsoft.com/office/drawing/2014/main" val="2336021074"/>
+                      </a:ext>
+                    </a:extLst>
+                  </a:tr>
+                </a:tbl>
+              </a:graphicData>
+            </a:graphic>
+          </p:graphicFrame>
+        </mc:Choice>
+        <mc:Fallback>
+          <p:graphicFrame>
+            <p:nvGraphicFramePr>
+              <p:cNvPr id="28" name="Table 27">
+                <a:extLst>
+                  <a:ext uri="{FF2B5EF4-FFF2-40B4-BE49-F238E27FC236}">
+                    <a16:creationId xmlns:a16="http://schemas.microsoft.com/office/drawing/2014/main" id="{34816CE3-5FF1-006B-6244-FA9FB3AC8FB6}"/>
+                  </a:ext>
+                </a:extLst>
+              </p:cNvPr>
+              <p:cNvGraphicFramePr>
+                <a:graphicFrameLocks noGrp="1"/>
+              </p:cNvGraphicFramePr>
+              <p:nvPr>
+                <p:extLst>
+                  <p:ext uri="{D42A27DB-BD31-4B8C-83A1-F6EECF244321}">
+                    <p14:modId xmlns:p14="http://schemas.microsoft.com/office/powerpoint/2010/main" val="2163234302"/>
+                  </p:ext>
+                </p:extLst>
+              </p:nvPr>
+            </p:nvGraphicFramePr>
+            <p:xfrm>
+              <a:off x="6541652" y="3392443"/>
+              <a:ext cx="2369124" cy="1831855"/>
+            </p:xfrm>
+            <a:graphic>
+              <a:graphicData uri="http://schemas.openxmlformats.org/drawingml/2006/table">
+                <a:tbl>
+                  <a:tblPr firstRow="1" bandRow="1">
+                    <a:tableStyleId>{5C22544A-7EE6-4342-B048-85BDC9FD1C3A}</a:tableStyleId>
+                  </a:tblPr>
+                  <a:tblGrid>
+                    <a:gridCol w="789708">
+                      <a:extLst>
+                        <a:ext uri="{9D8B030D-6E8A-4147-A177-3AD203B41FA5}">
+                          <a16:colId xmlns:a16="http://schemas.microsoft.com/office/drawing/2014/main" val="3638430088"/>
+                        </a:ext>
+                      </a:extLst>
+                    </a:gridCol>
+                    <a:gridCol w="789708">
+                      <a:extLst>
+                        <a:ext uri="{9D8B030D-6E8A-4147-A177-3AD203B41FA5}">
+                          <a16:colId xmlns:a16="http://schemas.microsoft.com/office/drawing/2014/main" val="2870050223"/>
+                        </a:ext>
+                      </a:extLst>
+                    </a:gridCol>
+                    <a:gridCol w="789708">
+                      <a:extLst>
+                        <a:ext uri="{9D8B030D-6E8A-4147-A177-3AD203B41FA5}">
+                          <a16:colId xmlns:a16="http://schemas.microsoft.com/office/drawing/2014/main" val="3677307559"/>
+                        </a:ext>
+                      </a:extLst>
+                    </a:gridCol>
+                  </a:tblGrid>
+                  <a:tr h="366371">
+                    <a:tc>
+                      <a:txBody>
+                        <a:bodyPr/>
+                        <a:lstStyle/>
+                        <a:p>
+                          <a:endParaRPr lang="en-US"/>
+                        </a:p>
+                      </a:txBody>
+                      <a:tcPr>
+                        <a:lnL w="12700" cmpd="sng">
+                          <a:noFill/>
+                        </a:lnL>
+                        <a:lnR w="19050" cap="flat" cmpd="sng" algn="ctr">
+                          <a:solidFill>
+                            <a:schemeClr val="tx1"/>
+                          </a:solidFill>
+                          <a:prstDash val="solid"/>
+                          <a:round/>
+                          <a:headEnd type="none" w="med" len="med"/>
+                          <a:tailEnd type="none" w="med" len="med"/>
+                        </a:lnR>
+                        <a:lnT w="12700" cmpd="sng">
+                          <a:noFill/>
+                        </a:lnT>
+                        <a:lnB w="19050" cap="flat" cmpd="sng" algn="ctr">
+                          <a:solidFill>
+                            <a:schemeClr val="tx1"/>
+                          </a:solidFill>
+                          <a:prstDash val="solid"/>
+                          <a:round/>
+                          <a:headEnd type="none" w="med" len="med"/>
+                          <a:tailEnd type="none" w="med" len="med"/>
+                        </a:lnB>
+                        <a:lnTlToBr w="12700" cmpd="sng">
+                          <a:noFill/>
+                          <a:prstDash val="solid"/>
+                        </a:lnTlToBr>
+                        <a:lnBlToTr w="12700" cmpd="sng">
+                          <a:noFill/>
+                          <a:prstDash val="solid"/>
+                        </a:lnBlToTr>
+                        <a:blipFill>
+                          <a:blip r:embed="rId8"/>
+                          <a:stretch>
+                            <a:fillRect r="-200769" b="-430000"/>
+                          </a:stretch>
+                        </a:blipFill>
+                      </a:tcPr>
+                    </a:tc>
+                    <a:tc>
+                      <a:txBody>
+                        <a:bodyPr/>
+                        <a:lstStyle/>
+                        <a:p>
+                          <a:endParaRPr lang="en-US"/>
+                        </a:p>
+                      </a:txBody>
+                      <a:tcPr>
+                        <a:lnL w="19050" cap="flat" cmpd="sng" algn="ctr">
+                          <a:solidFill>
+                            <a:schemeClr val="tx1"/>
+                          </a:solidFill>
+                          <a:prstDash val="solid"/>
+                          <a:round/>
+                          <a:headEnd type="none" w="med" len="med"/>
+                          <a:tailEnd type="none" w="med" len="med"/>
+                        </a:lnL>
+                        <a:lnR w="19050" cap="flat" cmpd="sng" algn="ctr">
+                          <a:solidFill>
+                            <a:schemeClr val="tx1"/>
+                          </a:solidFill>
+                          <a:prstDash val="solid"/>
+                          <a:round/>
+                          <a:headEnd type="none" w="med" len="med"/>
+                          <a:tailEnd type="none" w="med" len="med"/>
+                        </a:lnR>
+                        <a:lnT w="12700" cmpd="sng">
+                          <a:noFill/>
+                        </a:lnT>
+                        <a:lnB w="19050" cap="flat" cmpd="sng" algn="ctr">
+                          <a:solidFill>
+                            <a:schemeClr val="tx1"/>
+                          </a:solidFill>
+                          <a:prstDash val="solid"/>
+                          <a:round/>
+                          <a:headEnd type="none" w="med" len="med"/>
+                          <a:tailEnd type="none" w="med" len="med"/>
+                        </a:lnB>
+                        <a:lnTlToBr w="12700" cmpd="sng">
+                          <a:noFill/>
+                          <a:prstDash val="solid"/>
+                        </a:lnTlToBr>
+                        <a:lnBlToTr w="12700" cmpd="sng">
+                          <a:noFill/>
+                          <a:prstDash val="solid"/>
+                        </a:lnBlToTr>
+                        <a:blipFill>
+                          <a:blip r:embed="rId8"/>
+                          <a:stretch>
+                            <a:fillRect l="-100775" r="-102326" b="-430000"/>
+                          </a:stretch>
+                        </a:blipFill>
+                      </a:tcPr>
+                    </a:tc>
+                    <a:tc>
+                      <a:txBody>
+                        <a:bodyPr/>
+                        <a:lstStyle/>
+                        <a:p>
+                          <a:endParaRPr lang="en-US"/>
+                        </a:p>
+                      </a:txBody>
+                      <a:tcPr>
+                        <a:lnL w="19050" cap="flat" cmpd="sng" algn="ctr">
+                          <a:solidFill>
+                            <a:schemeClr val="tx1"/>
+                          </a:solidFill>
+                          <a:prstDash val="solid"/>
+                          <a:round/>
+                          <a:headEnd type="none" w="med" len="med"/>
+                          <a:tailEnd type="none" w="med" len="med"/>
+                        </a:lnL>
+                        <a:lnR w="12700" cmpd="sng">
+                          <a:noFill/>
+                        </a:lnR>
+                        <a:lnT w="12700" cmpd="sng">
+                          <a:noFill/>
+                        </a:lnT>
+                        <a:lnB w="19050" cap="flat" cmpd="sng" algn="ctr">
+                          <a:solidFill>
+                            <a:schemeClr val="tx1"/>
+                          </a:solidFill>
+                          <a:prstDash val="solid"/>
+                          <a:round/>
+                          <a:headEnd type="none" w="med" len="med"/>
+                          <a:tailEnd type="none" w="med" len="med"/>
+                        </a:lnB>
+                        <a:lnTlToBr w="12700" cmpd="sng">
+                          <a:noFill/>
+                          <a:prstDash val="solid"/>
+                        </a:lnTlToBr>
+                        <a:lnBlToTr w="12700" cmpd="sng">
+                          <a:noFill/>
+                          <a:prstDash val="solid"/>
+                        </a:lnBlToTr>
+                        <a:blipFill>
+                          <a:blip r:embed="rId8"/>
+                          <a:stretch>
+                            <a:fillRect l="-199231" r="-1538" b="-430000"/>
+                          </a:stretch>
+                        </a:blipFill>
+                      </a:tcPr>
+                    </a:tc>
+                    <a:extLst>
+                      <a:ext uri="{0D108BD9-81ED-4DB2-BD59-A6C34878D82A}">
+                        <a16:rowId xmlns:a16="http://schemas.microsoft.com/office/drawing/2014/main" val="1737419790"/>
+                      </a:ext>
+                    </a:extLst>
+                  </a:tr>
+                  <a:tr h="366371">
+                    <a:tc>
+                      <a:txBody>
+                        <a:bodyPr/>
+                        <a:lstStyle/>
+                        <a:p>
+                          <a:pPr algn="ctr"/>
+                          <a:r>
+                            <a:rPr lang="en-CA" dirty="0"/>
+                            <a:t>:</a:t>
+                          </a:r>
+                        </a:p>
+                      </a:txBody>
+                      <a:tcPr>
+                        <a:lnL w="12700" cmpd="sng">
+                          <a:noFill/>
+                        </a:lnL>
+                        <a:lnR w="19050" cap="flat" cmpd="sng" algn="ctr">
+                          <a:solidFill>
+                            <a:schemeClr val="tx1"/>
+                          </a:solidFill>
+                          <a:prstDash val="solid"/>
+                          <a:round/>
+                          <a:headEnd type="none" w="med" len="med"/>
+                          <a:tailEnd type="none" w="med" len="med"/>
+                        </a:lnR>
+                        <a:lnT w="19050" cap="flat" cmpd="sng" algn="ctr">
+                          <a:solidFill>
+                            <a:schemeClr val="tx1"/>
+                          </a:solidFill>
+                          <a:prstDash val="solid"/>
+                          <a:round/>
+                          <a:headEnd type="none" w="med" len="med"/>
+                          <a:tailEnd type="none" w="med" len="med"/>
+                        </a:lnT>
+                        <a:lnB w="19050" cap="flat" cmpd="sng" algn="ctr">
+                          <a:solidFill>
+                            <a:schemeClr val="tx1"/>
+                          </a:solidFill>
+                          <a:prstDash val="solid"/>
+                          <a:round/>
+                          <a:headEnd type="none" w="med" len="med"/>
+                          <a:tailEnd type="none" w="med" len="med"/>
+                        </a:lnB>
+                        <a:lnTlToBr w="12700" cmpd="sng">
+                          <a:noFill/>
+                          <a:prstDash val="solid"/>
+                        </a:lnTlToBr>
+                        <a:lnBlToTr w="12700" cmpd="sng">
+                          <a:noFill/>
+                          <a:prstDash val="solid"/>
+                        </a:lnBlToTr>
+                        <a:noFill/>
+                      </a:tcPr>
+                    </a:tc>
+                    <a:tc>
+                      <a:txBody>
+                        <a:bodyPr/>
+                        <a:lstStyle/>
+                        <a:p>
+                          <a:pPr marL="0" marR="0" lvl="0" indent="0" algn="ctr" defTabSz="914400" rtl="0" eaLnBrk="1" fontAlgn="auto" latinLnBrk="0" hangingPunct="1">
+                            <a:lnSpc>
+                              <a:spcPct val="100000"/>
+                            </a:lnSpc>
+                            <a:spcBef>
+                              <a:spcPts val="0"/>
+                            </a:spcBef>
+                            <a:spcAft>
+                              <a:spcPts val="0"/>
+                            </a:spcAft>
+                            <a:buClrTx/>
+                            <a:buSzTx/>
+                            <a:buFontTx/>
+                            <a:buNone/>
+                            <a:tabLst/>
+                            <a:defRPr/>
+                          </a:pPr>
+                          <a:r>
+                            <a:rPr lang="en-CA" dirty="0"/>
+                            <a:t>:</a:t>
+                          </a:r>
+                        </a:p>
+                      </a:txBody>
+                      <a:tcPr>
+                        <a:lnL w="19050" cap="flat" cmpd="sng" algn="ctr">
+                          <a:solidFill>
+                            <a:schemeClr val="tx1"/>
+                          </a:solidFill>
+                          <a:prstDash val="solid"/>
+                          <a:round/>
+                          <a:headEnd type="none" w="med" len="med"/>
+                          <a:tailEnd type="none" w="med" len="med"/>
+                        </a:lnL>
+                        <a:lnR w="19050" cap="flat" cmpd="sng" algn="ctr">
+                          <a:solidFill>
+                            <a:schemeClr val="tx1"/>
+                          </a:solidFill>
+                          <a:prstDash val="solid"/>
+                          <a:round/>
+                          <a:headEnd type="none" w="med" len="med"/>
+                          <a:tailEnd type="none" w="med" len="med"/>
+                        </a:lnR>
+                        <a:lnT w="19050" cap="flat" cmpd="sng" algn="ctr">
+                          <a:solidFill>
+                            <a:schemeClr val="tx1"/>
+                          </a:solidFill>
+                          <a:prstDash val="solid"/>
+                          <a:round/>
+                          <a:headEnd type="none" w="med" len="med"/>
+                          <a:tailEnd type="none" w="med" len="med"/>
+                        </a:lnT>
+                        <a:lnB w="19050" cap="flat" cmpd="sng" algn="ctr">
+                          <a:solidFill>
+                            <a:schemeClr val="tx1"/>
+                          </a:solidFill>
+                          <a:prstDash val="solid"/>
+                          <a:round/>
+                          <a:headEnd type="none" w="med" len="med"/>
+                          <a:tailEnd type="none" w="med" len="med"/>
+                        </a:lnB>
+                        <a:lnTlToBr w="12700" cmpd="sng">
+                          <a:noFill/>
+                          <a:prstDash val="solid"/>
+                        </a:lnTlToBr>
+                        <a:lnBlToTr w="12700" cmpd="sng">
+                          <a:noFill/>
+                          <a:prstDash val="solid"/>
+                        </a:lnBlToTr>
+                        <a:noFill/>
+                      </a:tcPr>
+                    </a:tc>
+                    <a:tc>
+                      <a:txBody>
+                        <a:bodyPr/>
+                        <a:lstStyle/>
+                        <a:p>
+                          <a:pPr marL="0" marR="0" lvl="0" indent="0" algn="ctr" defTabSz="914400" rtl="0" eaLnBrk="1" fontAlgn="auto" latinLnBrk="0" hangingPunct="1">
+                            <a:lnSpc>
+                              <a:spcPct val="100000"/>
+                            </a:lnSpc>
+                            <a:spcBef>
+                              <a:spcPts val="0"/>
+                            </a:spcBef>
+                            <a:spcAft>
+                              <a:spcPts val="0"/>
+                            </a:spcAft>
+                            <a:buClrTx/>
+                            <a:buSzTx/>
+                            <a:buFontTx/>
+                            <a:buNone/>
+                            <a:tabLst/>
+                            <a:defRPr/>
+                          </a:pPr>
+                          <a:r>
+                            <a:rPr lang="en-CA" dirty="0"/>
+                            <a:t>:</a:t>
+                          </a:r>
+                        </a:p>
+                      </a:txBody>
+                      <a:tcPr>
+                        <a:lnL w="19050" cap="flat" cmpd="sng" algn="ctr">
+                          <a:solidFill>
+                            <a:schemeClr val="tx1"/>
+                          </a:solidFill>
+                          <a:prstDash val="solid"/>
+                          <a:round/>
+                          <a:headEnd type="none" w="med" len="med"/>
+                          <a:tailEnd type="none" w="med" len="med"/>
+                        </a:lnL>
+                        <a:lnR w="12700" cmpd="sng">
+                          <a:noFill/>
+                        </a:lnR>
+                        <a:lnT w="19050" cap="flat" cmpd="sng" algn="ctr">
+                          <a:solidFill>
+                            <a:schemeClr val="tx1"/>
+                          </a:solidFill>
+                          <a:prstDash val="solid"/>
+                          <a:round/>
+                          <a:headEnd type="none" w="med" len="med"/>
+                          <a:tailEnd type="none" w="med" len="med"/>
+                        </a:lnT>
+                        <a:lnB w="19050" cap="flat" cmpd="sng" algn="ctr">
+                          <a:solidFill>
+                            <a:schemeClr val="tx1"/>
+                          </a:solidFill>
+                          <a:prstDash val="solid"/>
+                          <a:round/>
+                          <a:headEnd type="none" w="med" len="med"/>
+                          <a:tailEnd type="none" w="med" len="med"/>
+                        </a:lnB>
+                        <a:lnTlToBr w="12700" cmpd="sng">
+                          <a:noFill/>
+                          <a:prstDash val="solid"/>
+                        </a:lnTlToBr>
+                        <a:lnBlToTr w="12700" cmpd="sng">
+                          <a:noFill/>
+                          <a:prstDash val="solid"/>
+                        </a:lnBlToTr>
+                        <a:noFill/>
+                      </a:tcPr>
+                    </a:tc>
+                    <a:extLst>
+                      <a:ext uri="{0D108BD9-81ED-4DB2-BD59-A6C34878D82A}">
+                        <a16:rowId xmlns:a16="http://schemas.microsoft.com/office/drawing/2014/main" val="1088189741"/>
+                      </a:ext>
+                    </a:extLst>
+                  </a:tr>
+                  <a:tr h="366371">
+                    <a:tc>
+                      <a:txBody>
+                        <a:bodyPr/>
+                        <a:lstStyle/>
+                        <a:p>
+                          <a:pPr marL="0" marR="0" lvl="0" indent="0" algn="ctr" defTabSz="914400" rtl="0" eaLnBrk="1" fontAlgn="auto" latinLnBrk="0" hangingPunct="1">
+                            <a:lnSpc>
+                              <a:spcPct val="100000"/>
+                            </a:lnSpc>
+                            <a:spcBef>
+                              <a:spcPts val="0"/>
+                            </a:spcBef>
+                            <a:spcAft>
+                              <a:spcPts val="0"/>
+                            </a:spcAft>
+                            <a:buClrTx/>
+                            <a:buSzTx/>
+                            <a:buFontTx/>
+                            <a:buNone/>
+                            <a:tabLst/>
+                            <a:defRPr/>
+                          </a:pPr>
+                          <a:r>
+                            <a:rPr lang="en-CA" dirty="0"/>
+                            <a:t>:</a:t>
+                          </a:r>
+                        </a:p>
+                      </a:txBody>
+                      <a:tcPr>
+                        <a:lnL w="12700" cmpd="sng">
+                          <a:noFill/>
+                        </a:lnL>
+                        <a:lnR w="19050" cap="flat" cmpd="sng" algn="ctr">
+                          <a:solidFill>
+                            <a:schemeClr val="tx1"/>
+                          </a:solidFill>
+                          <a:prstDash val="solid"/>
+                          <a:round/>
+                          <a:headEnd type="none" w="med" len="med"/>
+                          <a:tailEnd type="none" w="med" len="med"/>
+                        </a:lnR>
+                        <a:lnT w="19050" cap="flat" cmpd="sng" algn="ctr">
+                          <a:solidFill>
+                            <a:schemeClr val="tx1"/>
+                          </a:solidFill>
+                          <a:prstDash val="solid"/>
+                          <a:round/>
+                          <a:headEnd type="none" w="med" len="med"/>
+                          <a:tailEnd type="none" w="med" len="med"/>
+                        </a:lnT>
+                        <a:lnB w="19050" cap="flat" cmpd="sng" algn="ctr">
+                          <a:solidFill>
+                            <a:schemeClr val="tx1"/>
+                          </a:solidFill>
+                          <a:prstDash val="solid"/>
+                          <a:round/>
+                          <a:headEnd type="none" w="med" len="med"/>
+                          <a:tailEnd type="none" w="med" len="med"/>
+                        </a:lnB>
+                        <a:lnTlToBr w="12700" cmpd="sng">
+                          <a:noFill/>
+                          <a:prstDash val="solid"/>
+                        </a:lnTlToBr>
+                        <a:lnBlToTr w="12700" cmpd="sng">
+                          <a:noFill/>
+                          <a:prstDash val="solid"/>
+                        </a:lnBlToTr>
+                        <a:noFill/>
+                      </a:tcPr>
+                    </a:tc>
+                    <a:tc>
+                      <a:txBody>
+                        <a:bodyPr/>
+                        <a:lstStyle/>
+                        <a:p>
+                          <a:pPr marL="0" marR="0" lvl="0" indent="0" algn="ctr" defTabSz="914400" rtl="0" eaLnBrk="1" fontAlgn="auto" latinLnBrk="0" hangingPunct="1">
+                            <a:lnSpc>
+                              <a:spcPct val="100000"/>
+                            </a:lnSpc>
+                            <a:spcBef>
+                              <a:spcPts val="0"/>
+                            </a:spcBef>
+                            <a:spcAft>
+                              <a:spcPts val="0"/>
+                            </a:spcAft>
+                            <a:buClrTx/>
+                            <a:buSzTx/>
+                            <a:buFontTx/>
+                            <a:buNone/>
+                            <a:tabLst/>
+                            <a:defRPr/>
+                          </a:pPr>
+                          <a:r>
+                            <a:rPr lang="en-CA" dirty="0"/>
+                            <a:t>:</a:t>
+                          </a:r>
+                        </a:p>
+                      </a:txBody>
+                      <a:tcPr>
+                        <a:lnL w="19050" cap="flat" cmpd="sng" algn="ctr">
+                          <a:solidFill>
+                            <a:schemeClr val="tx1"/>
+                          </a:solidFill>
+                          <a:prstDash val="solid"/>
+                          <a:round/>
+                          <a:headEnd type="none" w="med" len="med"/>
+                          <a:tailEnd type="none" w="med" len="med"/>
+                        </a:lnL>
+                        <a:lnR w="19050" cap="flat" cmpd="sng" algn="ctr">
+                          <a:solidFill>
+                            <a:schemeClr val="tx1"/>
+                          </a:solidFill>
+                          <a:prstDash val="solid"/>
+                          <a:round/>
+                          <a:headEnd type="none" w="med" len="med"/>
+                          <a:tailEnd type="none" w="med" len="med"/>
+                        </a:lnR>
+                        <a:lnT w="19050" cap="flat" cmpd="sng" algn="ctr">
+                          <a:solidFill>
+                            <a:schemeClr val="tx1"/>
+                          </a:solidFill>
+                          <a:prstDash val="solid"/>
+                          <a:round/>
+                          <a:headEnd type="none" w="med" len="med"/>
+                          <a:tailEnd type="none" w="med" len="med"/>
+                        </a:lnT>
+                        <a:lnB w="19050" cap="flat" cmpd="sng" algn="ctr">
+                          <a:solidFill>
+                            <a:schemeClr val="tx1"/>
+                          </a:solidFill>
+                          <a:prstDash val="solid"/>
+                          <a:round/>
+                          <a:headEnd type="none" w="med" len="med"/>
+                          <a:tailEnd type="none" w="med" len="med"/>
+                        </a:lnB>
+                        <a:lnTlToBr w="12700" cmpd="sng">
+                          <a:noFill/>
+                          <a:prstDash val="solid"/>
+                        </a:lnTlToBr>
+                        <a:lnBlToTr w="12700" cmpd="sng">
+                          <a:noFill/>
+                          <a:prstDash val="solid"/>
+                        </a:lnBlToTr>
+                        <a:noFill/>
+                      </a:tcPr>
+                    </a:tc>
+                    <a:tc>
+                      <a:txBody>
+                        <a:bodyPr/>
+                        <a:lstStyle/>
+                        <a:p>
+                          <a:pPr marL="0" marR="0" lvl="0" indent="0" algn="ctr" defTabSz="914400" rtl="0" eaLnBrk="1" fontAlgn="auto" latinLnBrk="0" hangingPunct="1">
+                            <a:lnSpc>
+                              <a:spcPct val="100000"/>
+                            </a:lnSpc>
+                            <a:spcBef>
+                              <a:spcPts val="0"/>
+                            </a:spcBef>
+                            <a:spcAft>
+                              <a:spcPts val="0"/>
+                            </a:spcAft>
+                            <a:buClrTx/>
+                            <a:buSzTx/>
+                            <a:buFontTx/>
+                            <a:buNone/>
+                            <a:tabLst/>
+                            <a:defRPr/>
+                          </a:pPr>
+                          <a:r>
+                            <a:rPr lang="en-CA" dirty="0"/>
+                            <a:t>:</a:t>
+                          </a:r>
+                        </a:p>
+                      </a:txBody>
+                      <a:tcPr>
+                        <a:lnL w="19050" cap="flat" cmpd="sng" algn="ctr">
+                          <a:solidFill>
+                            <a:schemeClr val="tx1"/>
+                          </a:solidFill>
+                          <a:prstDash val="solid"/>
+                          <a:round/>
+                          <a:headEnd type="none" w="med" len="med"/>
+                          <a:tailEnd type="none" w="med" len="med"/>
+                        </a:lnL>
+                        <a:lnR w="12700" cmpd="sng">
+                          <a:noFill/>
+                        </a:lnR>
+                        <a:lnT w="19050" cap="flat" cmpd="sng" algn="ctr">
+                          <a:solidFill>
+                            <a:schemeClr val="tx1"/>
+                          </a:solidFill>
+                          <a:prstDash val="solid"/>
+                          <a:round/>
+                          <a:headEnd type="none" w="med" len="med"/>
+                          <a:tailEnd type="none" w="med" len="med"/>
+                        </a:lnT>
+                        <a:lnB w="19050" cap="flat" cmpd="sng" algn="ctr">
+                          <a:solidFill>
+                            <a:schemeClr val="tx1"/>
+                          </a:solidFill>
+                          <a:prstDash val="solid"/>
+                          <a:round/>
+                          <a:headEnd type="none" w="med" len="med"/>
+                          <a:tailEnd type="none" w="med" len="med"/>
+                        </a:lnB>
+                        <a:lnTlToBr w="12700" cmpd="sng">
+                          <a:noFill/>
+                          <a:prstDash val="solid"/>
+                        </a:lnTlToBr>
+                        <a:lnBlToTr w="12700" cmpd="sng">
+                          <a:noFill/>
+                          <a:prstDash val="solid"/>
+                        </a:lnBlToTr>
+                        <a:noFill/>
+                      </a:tcPr>
+                    </a:tc>
+                    <a:extLst>
+                      <a:ext uri="{0D108BD9-81ED-4DB2-BD59-A6C34878D82A}">
+                        <a16:rowId xmlns:a16="http://schemas.microsoft.com/office/drawing/2014/main" val="3424706869"/>
+                      </a:ext>
+                    </a:extLst>
+                  </a:tr>
+                  <a:tr h="366371">
+                    <a:tc>
+                      <a:txBody>
+                        <a:bodyPr/>
+                        <a:lstStyle/>
+                        <a:p>
+                          <a:endParaRPr lang="en-US"/>
+                        </a:p>
+                      </a:txBody>
+                      <a:tcPr>
+                        <a:lnL w="12700" cmpd="sng">
+                          <a:noFill/>
+                        </a:lnL>
+                        <a:lnR w="19050" cap="flat" cmpd="sng" algn="ctr">
+                          <a:solidFill>
+                            <a:schemeClr val="tx1"/>
+                          </a:solidFill>
+                          <a:prstDash val="solid"/>
+                          <a:round/>
+                          <a:headEnd type="none" w="med" len="med"/>
+                          <a:tailEnd type="none" w="med" len="med"/>
+                        </a:lnR>
+                        <a:lnT w="19050" cap="flat" cmpd="sng" algn="ctr">
+                          <a:solidFill>
+                            <a:schemeClr val="tx1"/>
+                          </a:solidFill>
+                          <a:prstDash val="solid"/>
+                          <a:round/>
+                          <a:headEnd type="none" w="med" len="med"/>
+                          <a:tailEnd type="none" w="med" len="med"/>
+                        </a:lnT>
+                        <a:lnB w="19050" cap="flat" cmpd="sng" algn="ctr">
+                          <a:solidFill>
+                            <a:schemeClr val="tx1"/>
+                          </a:solidFill>
+                          <a:prstDash val="solid"/>
+                          <a:round/>
+                          <a:headEnd type="none" w="med" len="med"/>
+                          <a:tailEnd type="none" w="med" len="med"/>
+                        </a:lnB>
+                        <a:lnTlToBr w="12700" cmpd="sng">
+                          <a:noFill/>
+                          <a:prstDash val="solid"/>
+                        </a:lnTlToBr>
+                        <a:lnBlToTr w="12700" cmpd="sng">
+                          <a:noFill/>
+                          <a:prstDash val="solid"/>
+                        </a:lnBlToTr>
+                        <a:blipFill>
+                          <a:blip r:embed="rId8"/>
+                          <a:stretch>
+                            <a:fillRect t="-296721" r="-200769" b="-124590"/>
+                          </a:stretch>
+                        </a:blipFill>
+                      </a:tcPr>
+                    </a:tc>
+                    <a:tc>
+                      <a:txBody>
+                        <a:bodyPr/>
+                        <a:lstStyle/>
+                        <a:p>
+                          <a:endParaRPr lang="en-US"/>
+                        </a:p>
+                      </a:txBody>
+                      <a:tcPr>
+                        <a:lnL w="19050" cap="flat" cmpd="sng" algn="ctr">
+                          <a:solidFill>
+                            <a:schemeClr val="tx1"/>
+                          </a:solidFill>
+                          <a:prstDash val="solid"/>
+                          <a:round/>
+                          <a:headEnd type="none" w="med" len="med"/>
+                          <a:tailEnd type="none" w="med" len="med"/>
+                        </a:lnL>
+                        <a:lnR w="19050" cap="flat" cmpd="sng" algn="ctr">
+                          <a:solidFill>
+                            <a:schemeClr val="tx1"/>
+                          </a:solidFill>
+                          <a:prstDash val="solid"/>
+                          <a:round/>
+                          <a:headEnd type="none" w="med" len="med"/>
+                          <a:tailEnd type="none" w="med" len="med"/>
+                        </a:lnR>
+                        <a:lnT w="19050" cap="flat" cmpd="sng" algn="ctr">
+                          <a:solidFill>
+                            <a:schemeClr val="tx1"/>
+                          </a:solidFill>
+                          <a:prstDash val="solid"/>
+                          <a:round/>
+                          <a:headEnd type="none" w="med" len="med"/>
+                          <a:tailEnd type="none" w="med" len="med"/>
+                        </a:lnT>
+                        <a:lnB w="19050" cap="flat" cmpd="sng" algn="ctr">
+                          <a:solidFill>
+                            <a:schemeClr val="tx1"/>
+                          </a:solidFill>
+                          <a:prstDash val="solid"/>
+                          <a:round/>
+                          <a:headEnd type="none" w="med" len="med"/>
+                          <a:tailEnd type="none" w="med" len="med"/>
+                        </a:lnB>
+                        <a:lnTlToBr w="12700" cmpd="sng">
+                          <a:noFill/>
+                          <a:prstDash val="solid"/>
+                        </a:lnTlToBr>
+                        <a:lnBlToTr w="12700" cmpd="sng">
+                          <a:noFill/>
+                          <a:prstDash val="solid"/>
+                        </a:lnBlToTr>
+                        <a:blipFill>
+                          <a:blip r:embed="rId8"/>
+                          <a:stretch>
+                            <a:fillRect l="-100775" t="-296721" r="-102326" b="-124590"/>
+                          </a:stretch>
+                        </a:blipFill>
+                      </a:tcPr>
+                    </a:tc>
+                    <a:tc>
+                      <a:txBody>
+                        <a:bodyPr/>
+                        <a:lstStyle/>
+                        <a:p>
+                          <a:endParaRPr lang="en-US"/>
+                        </a:p>
+                      </a:txBody>
+                      <a:tcPr>
+                        <a:lnL w="19050" cap="flat" cmpd="sng" algn="ctr">
+                          <a:solidFill>
+                            <a:schemeClr val="tx1"/>
+                          </a:solidFill>
+                          <a:prstDash val="solid"/>
+                          <a:round/>
+                          <a:headEnd type="none" w="med" len="med"/>
+                          <a:tailEnd type="none" w="med" len="med"/>
+                        </a:lnL>
+                        <a:lnR w="12700" cmpd="sng">
+                          <a:noFill/>
+                        </a:lnR>
+                        <a:lnT w="19050" cap="flat" cmpd="sng" algn="ctr">
+                          <a:solidFill>
+                            <a:schemeClr val="tx1"/>
+                          </a:solidFill>
+                          <a:prstDash val="solid"/>
+                          <a:round/>
+                          <a:headEnd type="none" w="med" len="med"/>
+                          <a:tailEnd type="none" w="med" len="med"/>
+                        </a:lnT>
+                        <a:lnB w="19050" cap="flat" cmpd="sng" algn="ctr">
+                          <a:solidFill>
+                            <a:schemeClr val="tx1"/>
+                          </a:solidFill>
+                          <a:prstDash val="solid"/>
+                          <a:round/>
+                          <a:headEnd type="none" w="med" len="med"/>
+                          <a:tailEnd type="none" w="med" len="med"/>
+                        </a:lnB>
+                        <a:lnTlToBr w="12700" cmpd="sng">
+                          <a:noFill/>
+                          <a:prstDash val="solid"/>
+                        </a:lnTlToBr>
+                        <a:lnBlToTr w="12700" cmpd="sng">
+                          <a:noFill/>
+                          <a:prstDash val="solid"/>
+                        </a:lnBlToTr>
+                        <a:blipFill>
+                          <a:blip r:embed="rId8"/>
+                          <a:stretch>
+                            <a:fillRect l="-199231" t="-296721" r="-1538" b="-124590"/>
+                          </a:stretch>
+                        </a:blipFill>
+                      </a:tcPr>
+                    </a:tc>
+                    <a:extLst>
+                      <a:ext uri="{0D108BD9-81ED-4DB2-BD59-A6C34878D82A}">
+                        <a16:rowId xmlns:a16="http://schemas.microsoft.com/office/drawing/2014/main" val="733683434"/>
+                      </a:ext>
+                    </a:extLst>
+                  </a:tr>
+                  <a:tr h="366371">
+                    <a:tc>
+                      <a:txBody>
+                        <a:bodyPr/>
+                        <a:lstStyle/>
+                        <a:p>
+                          <a:pPr marL="0" marR="0" lvl="0" indent="0" algn="ctr" defTabSz="914400" rtl="0" eaLnBrk="1" fontAlgn="auto" latinLnBrk="0" hangingPunct="1">
+                            <a:lnSpc>
+                              <a:spcPct val="100000"/>
+                            </a:lnSpc>
+                            <a:spcBef>
+                              <a:spcPts val="0"/>
+                            </a:spcBef>
+                            <a:spcAft>
+                              <a:spcPts val="0"/>
+                            </a:spcAft>
+                            <a:buClrTx/>
+                            <a:buSzTx/>
+                            <a:buFontTx/>
+                            <a:buNone/>
+                            <a:tabLst/>
+                            <a:defRPr/>
+                          </a:pPr>
+                          <a:r>
+                            <a:rPr lang="en-CA" dirty="0"/>
+                            <a:t>:</a:t>
+                          </a:r>
+                        </a:p>
+                      </a:txBody>
+                      <a:tcPr>
+                        <a:lnL w="12700" cmpd="sng">
+                          <a:noFill/>
+                        </a:lnL>
+                        <a:lnR w="19050" cap="flat" cmpd="sng" algn="ctr">
+                          <a:solidFill>
+                            <a:schemeClr val="tx1"/>
+                          </a:solidFill>
+                          <a:prstDash val="solid"/>
+                          <a:round/>
+                          <a:headEnd type="none" w="med" len="med"/>
+                          <a:tailEnd type="none" w="med" len="med"/>
+                        </a:lnR>
+                        <a:lnT w="19050" cap="flat" cmpd="sng" algn="ctr">
+                          <a:solidFill>
+                            <a:schemeClr val="tx1"/>
+                          </a:solidFill>
+                          <a:prstDash val="solid"/>
+                          <a:round/>
+                          <a:headEnd type="none" w="med" len="med"/>
+                          <a:tailEnd type="none" w="med" len="med"/>
+                        </a:lnT>
+                        <a:lnB w="19050" cap="flat" cmpd="sng" algn="ctr">
+                          <a:solidFill>
+                            <a:schemeClr val="tx1"/>
+                          </a:solidFill>
+                          <a:prstDash val="solid"/>
+                          <a:round/>
+                          <a:headEnd type="none" w="med" len="med"/>
+                          <a:tailEnd type="none" w="med" len="med"/>
+                        </a:lnB>
+                        <a:lnTlToBr w="12700" cmpd="sng">
+                          <a:noFill/>
+                          <a:prstDash val="solid"/>
+                        </a:lnTlToBr>
+                        <a:lnBlToTr w="12700" cmpd="sng">
+                          <a:noFill/>
+                          <a:prstDash val="solid"/>
+                        </a:lnBlToTr>
+                        <a:noFill/>
+                      </a:tcPr>
+                    </a:tc>
+                    <a:tc>
+                      <a:txBody>
+                        <a:bodyPr/>
+                        <a:lstStyle/>
+                        <a:p>
+                          <a:pPr marL="0" marR="0" lvl="0" indent="0" algn="ctr" defTabSz="914400" rtl="0" eaLnBrk="1" fontAlgn="auto" latinLnBrk="0" hangingPunct="1">
+                            <a:lnSpc>
+                              <a:spcPct val="100000"/>
+                            </a:lnSpc>
+                            <a:spcBef>
+                              <a:spcPts val="0"/>
+                            </a:spcBef>
+                            <a:spcAft>
+                              <a:spcPts val="0"/>
+                            </a:spcAft>
+                            <a:buClrTx/>
+                            <a:buSzTx/>
+                            <a:buFontTx/>
+                            <a:buNone/>
+                            <a:tabLst/>
+                            <a:defRPr/>
+                          </a:pPr>
+                          <a:r>
+                            <a:rPr lang="en-CA" dirty="0"/>
+                            <a:t>:</a:t>
+                          </a:r>
+                        </a:p>
+                      </a:txBody>
+                      <a:tcPr>
+                        <a:lnL w="19050" cap="flat" cmpd="sng" algn="ctr">
+                          <a:solidFill>
+                            <a:schemeClr val="tx1"/>
+                          </a:solidFill>
+                          <a:prstDash val="solid"/>
+                          <a:round/>
+                          <a:headEnd type="none" w="med" len="med"/>
+                          <a:tailEnd type="none" w="med" len="med"/>
+                        </a:lnL>
+                        <a:lnR w="19050" cap="flat" cmpd="sng" algn="ctr">
+                          <a:solidFill>
+                            <a:schemeClr val="tx1"/>
+                          </a:solidFill>
+                          <a:prstDash val="solid"/>
+                          <a:round/>
+                          <a:headEnd type="none" w="med" len="med"/>
+                          <a:tailEnd type="none" w="med" len="med"/>
+                        </a:lnR>
+                        <a:lnT w="19050" cap="flat" cmpd="sng" algn="ctr">
+                          <a:solidFill>
+                            <a:schemeClr val="tx1"/>
+                          </a:solidFill>
+                          <a:prstDash val="solid"/>
+                          <a:round/>
+                          <a:headEnd type="none" w="med" len="med"/>
+                          <a:tailEnd type="none" w="med" len="med"/>
+                        </a:lnT>
+                        <a:lnB w="19050" cap="flat" cmpd="sng" algn="ctr">
+                          <a:solidFill>
+                            <a:schemeClr val="tx1"/>
+                          </a:solidFill>
+                          <a:prstDash val="solid"/>
+                          <a:round/>
+                          <a:headEnd type="none" w="med" len="med"/>
+                          <a:tailEnd type="none" w="med" len="med"/>
+                        </a:lnB>
+                        <a:lnTlToBr w="12700" cmpd="sng">
+                          <a:noFill/>
+                          <a:prstDash val="solid"/>
+                        </a:lnTlToBr>
+                        <a:lnBlToTr w="12700" cmpd="sng">
+                          <a:noFill/>
+                          <a:prstDash val="solid"/>
+                        </a:lnBlToTr>
+                        <a:noFill/>
+                      </a:tcPr>
+                    </a:tc>
+                    <a:tc>
+                      <a:txBody>
+                        <a:bodyPr/>
+                        <a:lstStyle/>
+                        <a:p>
+                          <a:pPr marL="0" marR="0" lvl="0" indent="0" algn="ctr" defTabSz="914400" rtl="0" eaLnBrk="1" fontAlgn="auto" latinLnBrk="0" hangingPunct="1">
+                            <a:lnSpc>
+                              <a:spcPct val="100000"/>
+                            </a:lnSpc>
+                            <a:spcBef>
+                              <a:spcPts val="0"/>
+                            </a:spcBef>
+                            <a:spcAft>
+                              <a:spcPts val="0"/>
+                            </a:spcAft>
+                            <a:buClrTx/>
+                            <a:buSzTx/>
+                            <a:buFontTx/>
+                            <a:buNone/>
+                            <a:tabLst/>
+                            <a:defRPr/>
+                          </a:pPr>
+                          <a:r>
+                            <a:rPr lang="en-CA" dirty="0"/>
+                            <a:t>:</a:t>
+                          </a:r>
+                        </a:p>
+                      </a:txBody>
+                      <a:tcPr>
+                        <a:lnL w="19050" cap="flat" cmpd="sng" algn="ctr">
+                          <a:solidFill>
+                            <a:schemeClr val="tx1"/>
+                          </a:solidFill>
+                          <a:prstDash val="solid"/>
+                          <a:round/>
+                          <a:headEnd type="none" w="med" len="med"/>
+                          <a:tailEnd type="none" w="med" len="med"/>
+                        </a:lnL>
+                        <a:lnR w="12700" cmpd="sng">
+                          <a:noFill/>
+                        </a:lnR>
+                        <a:lnT w="19050" cap="flat" cmpd="sng" algn="ctr">
+                          <a:solidFill>
+                            <a:schemeClr val="tx1"/>
+                          </a:solidFill>
+                          <a:prstDash val="solid"/>
+                          <a:round/>
+                          <a:headEnd type="none" w="med" len="med"/>
+                          <a:tailEnd type="none" w="med" len="med"/>
+                        </a:lnT>
+                        <a:lnB w="19050" cap="flat" cmpd="sng" algn="ctr">
+                          <a:solidFill>
+                            <a:schemeClr val="tx1"/>
+                          </a:solidFill>
+                          <a:prstDash val="solid"/>
+                          <a:round/>
+                          <a:headEnd type="none" w="med" len="med"/>
+                          <a:tailEnd type="none" w="med" len="med"/>
+                        </a:lnB>
+                        <a:lnTlToBr w="12700" cmpd="sng">
+                          <a:noFill/>
+                          <a:prstDash val="solid"/>
+                        </a:lnTlToBr>
+                        <a:lnBlToTr w="12700" cmpd="sng">
+                          <a:noFill/>
+                          <a:prstDash val="solid"/>
+                        </a:lnBlToTr>
+                        <a:noFill/>
+                      </a:tcPr>
+                    </a:tc>
+                    <a:extLst>
+                      <a:ext uri="{0D108BD9-81ED-4DB2-BD59-A6C34878D82A}">
+                        <a16:rowId xmlns:a16="http://schemas.microsoft.com/office/drawing/2014/main" val="2336021074"/>
+                      </a:ext>
+                    </a:extLst>
+                  </a:tr>
+                </a:tbl>
+              </a:graphicData>
+            </a:graphic>
+          </p:graphicFrame>
+        </mc:Fallback>
+      </mc:AlternateContent>
+      <p:sp>
+        <p:nvSpPr>
+          <p:cNvPr id="31" name="Left Brace 30">
+            <a:extLst>
+              <a:ext uri="{FF2B5EF4-FFF2-40B4-BE49-F238E27FC236}">
+                <a16:creationId xmlns:a16="http://schemas.microsoft.com/office/drawing/2014/main" id="{624EEF76-798B-7DB0-231D-881ADEC0D007}"/>
+              </a:ext>
+            </a:extLst>
+          </p:cNvPr>
+          <p:cNvSpPr/>
+          <p:nvPr/>
+        </p:nvSpPr>
+        <p:spPr>
+          <a:xfrm rot="5400000">
+            <a:off x="7604955" y="2014371"/>
+            <a:ext cx="242518" cy="2458924"/>
+          </a:xfrm>
+          <a:prstGeom prst="leftBrace">
+            <a:avLst/>
+          </a:prstGeom>
+        </p:spPr>
+        <p:style>
+          <a:lnRef idx="2">
+            <a:schemeClr val="dk1"/>
+          </a:lnRef>
+          <a:fillRef idx="0">
+            <a:schemeClr val="dk1"/>
+          </a:fillRef>
+          <a:effectRef idx="1">
+            <a:schemeClr val="dk1"/>
+          </a:effectRef>
+          <a:fontRef idx="minor">
+            <a:schemeClr val="tx1"/>
+          </a:fontRef>
+        </p:style>
+        <p:txBody>
+          <a:bodyPr rtlCol="0" anchor="ctr"/>
+          <a:lstStyle/>
+          <a:p>
+            <a:pPr algn="ctr"/>
+            <a:endParaRPr lang="en-CA" dirty="0"/>
+          </a:p>
+        </p:txBody>
+      </p:sp>
+      <p:pic>
+        <p:nvPicPr>
+          <p:cNvPr id="34" name="Picture 33">
+            <a:extLst>
+              <a:ext uri="{FF2B5EF4-FFF2-40B4-BE49-F238E27FC236}">
+                <a16:creationId xmlns:a16="http://schemas.microsoft.com/office/drawing/2014/main" id="{FD1903B0-E01B-BE50-8655-6429F3F40C28}"/>
+              </a:ext>
+            </a:extLst>
+          </p:cNvPr>
+          <p:cNvPicPr>
+            <a:picLocks noChangeAspect="1"/>
+          </p:cNvPicPr>
+          <p:nvPr/>
+        </p:nvPicPr>
+        <p:blipFill>
+          <a:blip r:embed="rId9"/>
+          <a:stretch>
+            <a:fillRect/>
+          </a:stretch>
+        </p:blipFill>
+        <p:spPr>
+          <a:xfrm>
+            <a:off x="3066799" y="5403599"/>
+            <a:ext cx="1495634" cy="400106"/>
+          </a:xfrm>
+          <a:prstGeom prst="rect">
+            <a:avLst/>
+          </a:prstGeom>
+        </p:spPr>
+      </p:pic>
+      <p:pic>
+        <p:nvPicPr>
+          <p:cNvPr id="36" name="Picture 35">
+            <a:extLst>
+              <a:ext uri="{FF2B5EF4-FFF2-40B4-BE49-F238E27FC236}">
+                <a16:creationId xmlns:a16="http://schemas.microsoft.com/office/drawing/2014/main" id="{8B79A86C-94DF-86AA-A73C-1BF97E940E0D}"/>
+              </a:ext>
+            </a:extLst>
+          </p:cNvPr>
+          <p:cNvPicPr>
+            <a:picLocks noChangeAspect="1"/>
+          </p:cNvPicPr>
+          <p:nvPr/>
+        </p:nvPicPr>
+        <p:blipFill>
+          <a:blip r:embed="rId10"/>
+          <a:stretch>
+            <a:fillRect/>
+          </a:stretch>
+        </p:blipFill>
+        <p:spPr>
+          <a:xfrm>
+            <a:off x="3294689" y="830988"/>
+            <a:ext cx="5487166" cy="600159"/>
+          </a:xfrm>
+          <a:prstGeom prst="rect">
+            <a:avLst/>
+          </a:prstGeom>
+        </p:spPr>
+      </p:pic>
+      <p:cxnSp>
+        <p:nvCxnSpPr>
+          <p:cNvPr id="38" name="Straight Arrow Connector 37">
+            <a:extLst>
+              <a:ext uri="{FF2B5EF4-FFF2-40B4-BE49-F238E27FC236}">
+                <a16:creationId xmlns:a16="http://schemas.microsoft.com/office/drawing/2014/main" id="{5E5B60A7-2685-E188-828D-3BDED4D59FDA}"/>
+              </a:ext>
+            </a:extLst>
+          </p:cNvPr>
+          <p:cNvCxnSpPr/>
+          <p:nvPr/>
+        </p:nvCxnSpPr>
+        <p:spPr>
+          <a:xfrm>
+            <a:off x="2752436" y="2842759"/>
+            <a:ext cx="392548" cy="0"/>
+          </a:xfrm>
+          <a:prstGeom prst="straightConnector1">
+            <a:avLst/>
+          </a:prstGeom>
+          <a:ln>
+            <a:solidFill>
+              <a:schemeClr val="tx1"/>
+            </a:solidFill>
+            <a:tailEnd type="triangle"/>
+          </a:ln>
+        </p:spPr>
+        <p:style>
+          <a:lnRef idx="2">
+            <a:schemeClr val="accent1"/>
+          </a:lnRef>
+          <a:fillRef idx="0">
+            <a:schemeClr val="accent1"/>
+          </a:fillRef>
+          <a:effectRef idx="1">
+            <a:schemeClr val="accent1"/>
+          </a:effectRef>
+          <a:fontRef idx="minor">
+            <a:schemeClr val="tx1"/>
+          </a:fontRef>
+        </p:style>
+      </p:cxnSp>
+      <p:sp>
+        <p:nvSpPr>
+          <p:cNvPr id="39" name="TextBox 38">
+            <a:extLst>
+              <a:ext uri="{FF2B5EF4-FFF2-40B4-BE49-F238E27FC236}">
+                <a16:creationId xmlns:a16="http://schemas.microsoft.com/office/drawing/2014/main" id="{DAA1C07E-8EE3-C2F3-FECB-AA3095A7891A}"/>
+              </a:ext>
+            </a:extLst>
+          </p:cNvPr>
+          <p:cNvSpPr txBox="1"/>
+          <p:nvPr/>
+        </p:nvSpPr>
+        <p:spPr>
+          <a:xfrm>
+            <a:off x="2057264" y="2704260"/>
+            <a:ext cx="720710" cy="276999"/>
+          </a:xfrm>
+          <a:prstGeom prst="rect">
+            <a:avLst/>
+          </a:prstGeom>
+          <a:noFill/>
+        </p:spPr>
+        <p:txBody>
+          <a:bodyPr wrap="none" rtlCol="0">
+            <a:spAutoFit/>
+          </a:bodyPr>
+          <a:lstStyle/>
+          <a:p>
+            <a:r>
+              <a:rPr lang="en-CA" sz="1200" dirty="0"/>
+              <a:t>Position</a:t>
+            </a:r>
+          </a:p>
+        </p:txBody>
+      </p:sp>
+    </p:spTree>
+    <p:extLst>
+      <p:ext uri="{BB962C8B-B14F-4D97-AF65-F5344CB8AC3E}">
+        <p14:creationId xmlns:p14="http://schemas.microsoft.com/office/powerpoint/2010/main" val="1265942448"/>
       </p:ext>
     </p:extLst>
   </p:cSld>

--- a/Working Documents/2026_COMPAAPM_Figures.pptx
+++ b/Working Documents/2026_COMPAAPM_Figures.pptx
@@ -1788,7 +1788,6 @@
     </c:plotArea>
     <c:plotVisOnly val="1"/>
     <c:dispBlanksAs val="gap"/>
-    <c:showDLblsOverMax val="0"/>
     <c:extLst>
       <c:ext xmlns:c16r3="http://schemas.microsoft.com/office/drawing/2017/03/chart" uri="{56B9EC1D-385E-4148-901F-78D8002777C0}">
         <c16r3:dataDisplayOptions16>
@@ -1796,6 +1795,7 @@
         </c16r3:dataDisplayOptions16>
       </c:ext>
     </c:extLst>
+    <c:showDLblsOverMax val="0"/>
   </c:chart>
   <c:spPr>
     <a:noFill/>
@@ -2512,7 +2512,7 @@
           <a:p>
             <a:fld id="{F350ADBE-E2B5-49AB-99FC-12956E870A1F}" type="datetimeFigureOut">
               <a:rPr lang="en-CA" smtClean="0"/>
-              <a:t>2026-01-13</a:t>
+              <a:t>19-Jan-2026</a:t>
             </a:fld>
             <a:endParaRPr lang="en-CA"/>
           </a:p>
@@ -2712,7 +2712,7 @@
           <a:p>
             <a:fld id="{F350ADBE-E2B5-49AB-99FC-12956E870A1F}" type="datetimeFigureOut">
               <a:rPr lang="en-CA" smtClean="0"/>
-              <a:t>2026-01-13</a:t>
+              <a:t>19-Jan-2026</a:t>
             </a:fld>
             <a:endParaRPr lang="en-CA"/>
           </a:p>
@@ -2922,7 +2922,7 @@
           <a:p>
             <a:fld id="{F350ADBE-E2B5-49AB-99FC-12956E870A1F}" type="datetimeFigureOut">
               <a:rPr lang="en-CA" smtClean="0"/>
-              <a:t>2026-01-13</a:t>
+              <a:t>19-Jan-2026</a:t>
             </a:fld>
             <a:endParaRPr lang="en-CA"/>
           </a:p>
@@ -3122,7 +3122,7 @@
           <a:p>
             <a:fld id="{F350ADBE-E2B5-49AB-99FC-12956E870A1F}" type="datetimeFigureOut">
               <a:rPr lang="en-CA" smtClean="0"/>
-              <a:t>2026-01-13</a:t>
+              <a:t>19-Jan-2026</a:t>
             </a:fld>
             <a:endParaRPr lang="en-CA"/>
           </a:p>
@@ -3398,7 +3398,7 @@
           <a:p>
             <a:fld id="{F350ADBE-E2B5-49AB-99FC-12956E870A1F}" type="datetimeFigureOut">
               <a:rPr lang="en-CA" smtClean="0"/>
-              <a:t>2026-01-13</a:t>
+              <a:t>19-Jan-2026</a:t>
             </a:fld>
             <a:endParaRPr lang="en-CA"/>
           </a:p>
@@ -3666,7 +3666,7 @@
           <a:p>
             <a:fld id="{F350ADBE-E2B5-49AB-99FC-12956E870A1F}" type="datetimeFigureOut">
               <a:rPr lang="en-CA" smtClean="0"/>
-              <a:t>2026-01-13</a:t>
+              <a:t>19-Jan-2026</a:t>
             </a:fld>
             <a:endParaRPr lang="en-CA"/>
           </a:p>
@@ -4081,7 +4081,7 @@
           <a:p>
             <a:fld id="{F350ADBE-E2B5-49AB-99FC-12956E870A1F}" type="datetimeFigureOut">
               <a:rPr lang="en-CA" smtClean="0"/>
-              <a:t>2026-01-13</a:t>
+              <a:t>19-Jan-2026</a:t>
             </a:fld>
             <a:endParaRPr lang="en-CA"/>
           </a:p>
@@ -4223,7 +4223,7 @@
           <a:p>
             <a:fld id="{F350ADBE-E2B5-49AB-99FC-12956E870A1F}" type="datetimeFigureOut">
               <a:rPr lang="en-CA" smtClean="0"/>
-              <a:t>2026-01-13</a:t>
+              <a:t>19-Jan-2026</a:t>
             </a:fld>
             <a:endParaRPr lang="en-CA"/>
           </a:p>
@@ -4336,7 +4336,7 @@
           <a:p>
             <a:fld id="{F350ADBE-E2B5-49AB-99FC-12956E870A1F}" type="datetimeFigureOut">
               <a:rPr lang="en-CA" smtClean="0"/>
-              <a:t>2026-01-13</a:t>
+              <a:t>19-Jan-2026</a:t>
             </a:fld>
             <a:endParaRPr lang="en-CA"/>
           </a:p>
@@ -4649,7 +4649,7 @@
           <a:p>
             <a:fld id="{F350ADBE-E2B5-49AB-99FC-12956E870A1F}" type="datetimeFigureOut">
               <a:rPr lang="en-CA" smtClean="0"/>
-              <a:t>2026-01-13</a:t>
+              <a:t>19-Jan-2026</a:t>
             </a:fld>
             <a:endParaRPr lang="en-CA"/>
           </a:p>
@@ -4938,7 +4938,7 @@
           <a:p>
             <a:fld id="{F350ADBE-E2B5-49AB-99FC-12956E870A1F}" type="datetimeFigureOut">
               <a:rPr lang="en-CA" smtClean="0"/>
-              <a:t>2026-01-13</a:t>
+              <a:t>19-Jan-2026</a:t>
             </a:fld>
             <a:endParaRPr lang="en-CA"/>
           </a:p>
@@ -5181,7 +5181,7 @@
           <a:p>
             <a:fld id="{F350ADBE-E2B5-49AB-99FC-12956E870A1F}" type="datetimeFigureOut">
               <a:rPr lang="en-CA" smtClean="0"/>
-              <a:t>2026-01-13</a:t>
+              <a:t>19-Jan-2026</a:t>
             </a:fld>
             <a:endParaRPr lang="en-CA"/>
           </a:p>
@@ -5600,10 +5600,10 @@
       </p:grpSpPr>
       <p:pic>
         <p:nvPicPr>
-          <p:cNvPr id="3" name="Picture 2">
+          <p:cNvPr id="4" name="Picture 3">
             <a:extLst>
               <a:ext uri="{FF2B5EF4-FFF2-40B4-BE49-F238E27FC236}">
-                <a16:creationId xmlns:a16="http://schemas.microsoft.com/office/drawing/2014/main" id="{6BDCBC90-B634-0417-D665-00AFED56BAF9}"/>
+                <a16:creationId xmlns:a16="http://schemas.microsoft.com/office/drawing/2014/main" id="{4ABD7512-512B-0C92-2838-2937AA8FDACA}"/>
               </a:ext>
             </a:extLst>
           </p:cNvPr>
@@ -5620,8 +5620,8 @@
         </p:blipFill>
         <p:spPr>
           <a:xfrm>
-            <a:off x="2670368" y="2290916"/>
-            <a:ext cx="6615102" cy="2672577"/>
+            <a:off x="2535638" y="2044015"/>
+            <a:ext cx="6856165" cy="2769969"/>
           </a:xfrm>
           <a:prstGeom prst="rect">
             <a:avLst/>
@@ -6012,6 +6012,214 @@
           </a:prstGeom>
         </p:spPr>
       </p:pic>
+      <p:sp>
+        <p:nvSpPr>
+          <p:cNvPr id="4" name="Rectangle 3">
+            <a:extLst>
+              <a:ext uri="{FF2B5EF4-FFF2-40B4-BE49-F238E27FC236}">
+                <a16:creationId xmlns:a16="http://schemas.microsoft.com/office/drawing/2014/main" id="{0A7F124E-722A-2352-39DE-35F1A29F3054}"/>
+              </a:ext>
+            </a:extLst>
+          </p:cNvPr>
+          <p:cNvSpPr/>
+          <p:nvPr/>
+        </p:nvSpPr>
+        <p:spPr>
+          <a:xfrm>
+            <a:off x="1699114" y="2122173"/>
+            <a:ext cx="2273118" cy="776749"/>
+          </a:xfrm>
+          <a:prstGeom prst="rect">
+            <a:avLst/>
+          </a:prstGeom>
+          <a:noFill/>
+          <a:ln w="57150">
+            <a:solidFill>
+              <a:schemeClr val="tx1"/>
+            </a:solidFill>
+          </a:ln>
+        </p:spPr>
+        <p:style>
+          <a:lnRef idx="2">
+            <a:schemeClr val="accent1">
+              <a:shade val="15000"/>
+            </a:schemeClr>
+          </a:lnRef>
+          <a:fillRef idx="1">
+            <a:schemeClr val="accent1"/>
+          </a:fillRef>
+          <a:effectRef idx="0">
+            <a:schemeClr val="accent1"/>
+          </a:effectRef>
+          <a:fontRef idx="minor">
+            <a:schemeClr val="lt1"/>
+          </a:fontRef>
+        </p:style>
+        <p:txBody>
+          <a:bodyPr rtlCol="0" anchor="ctr"/>
+          <a:lstStyle/>
+          <a:p>
+            <a:pPr algn="ctr"/>
+            <a:endParaRPr lang="en-CA"/>
+          </a:p>
+        </p:txBody>
+      </p:sp>
+      <p:sp>
+        <p:nvSpPr>
+          <p:cNvPr id="5" name="Rectangle 4">
+            <a:extLst>
+              <a:ext uri="{FF2B5EF4-FFF2-40B4-BE49-F238E27FC236}">
+                <a16:creationId xmlns:a16="http://schemas.microsoft.com/office/drawing/2014/main" id="{202D1C0C-F508-A3BF-D2BD-176276A9B456}"/>
+              </a:ext>
+            </a:extLst>
+          </p:cNvPr>
+          <p:cNvSpPr/>
+          <p:nvPr/>
+        </p:nvSpPr>
+        <p:spPr>
+          <a:xfrm>
+            <a:off x="7675665" y="2122172"/>
+            <a:ext cx="2273118" cy="776749"/>
+          </a:xfrm>
+          <a:prstGeom prst="rect">
+            <a:avLst/>
+          </a:prstGeom>
+          <a:noFill/>
+          <a:ln w="57150">
+            <a:solidFill>
+              <a:schemeClr val="tx1"/>
+            </a:solidFill>
+          </a:ln>
+        </p:spPr>
+        <p:style>
+          <a:lnRef idx="2">
+            <a:schemeClr val="accent1">
+              <a:shade val="15000"/>
+            </a:schemeClr>
+          </a:lnRef>
+          <a:fillRef idx="1">
+            <a:schemeClr val="accent1"/>
+          </a:fillRef>
+          <a:effectRef idx="0">
+            <a:schemeClr val="accent1"/>
+          </a:effectRef>
+          <a:fontRef idx="minor">
+            <a:schemeClr val="lt1"/>
+          </a:fontRef>
+        </p:style>
+        <p:txBody>
+          <a:bodyPr rtlCol="0" anchor="ctr"/>
+          <a:lstStyle/>
+          <a:p>
+            <a:pPr algn="ctr"/>
+            <a:endParaRPr lang="en-CA"/>
+          </a:p>
+        </p:txBody>
+      </p:sp>
+      <p:sp>
+        <p:nvSpPr>
+          <p:cNvPr id="6" name="Rectangle 5">
+            <a:extLst>
+              <a:ext uri="{FF2B5EF4-FFF2-40B4-BE49-F238E27FC236}">
+                <a16:creationId xmlns:a16="http://schemas.microsoft.com/office/drawing/2014/main" id="{21CB7D3E-A308-DA9F-66DE-C4C219A083D1}"/>
+              </a:ext>
+            </a:extLst>
+          </p:cNvPr>
+          <p:cNvSpPr/>
+          <p:nvPr/>
+        </p:nvSpPr>
+        <p:spPr>
+          <a:xfrm>
+            <a:off x="4862444" y="1055372"/>
+            <a:ext cx="862853" cy="789904"/>
+          </a:xfrm>
+          <a:prstGeom prst="rect">
+            <a:avLst/>
+          </a:prstGeom>
+          <a:noFill/>
+          <a:ln w="57150">
+            <a:solidFill>
+              <a:schemeClr val="tx1"/>
+            </a:solidFill>
+          </a:ln>
+        </p:spPr>
+        <p:style>
+          <a:lnRef idx="2">
+            <a:schemeClr val="accent1">
+              <a:shade val="15000"/>
+            </a:schemeClr>
+          </a:lnRef>
+          <a:fillRef idx="1">
+            <a:schemeClr val="accent1"/>
+          </a:fillRef>
+          <a:effectRef idx="0">
+            <a:schemeClr val="accent1"/>
+          </a:effectRef>
+          <a:fontRef idx="minor">
+            <a:schemeClr val="lt1"/>
+          </a:fontRef>
+        </p:style>
+        <p:txBody>
+          <a:bodyPr rtlCol="0" anchor="ctr"/>
+          <a:lstStyle/>
+          <a:p>
+            <a:pPr algn="ctr"/>
+            <a:endParaRPr lang="en-CA"/>
+          </a:p>
+        </p:txBody>
+      </p:sp>
+      <p:sp>
+        <p:nvSpPr>
+          <p:cNvPr id="9" name="Rectangle 8">
+            <a:extLst>
+              <a:ext uri="{FF2B5EF4-FFF2-40B4-BE49-F238E27FC236}">
+                <a16:creationId xmlns:a16="http://schemas.microsoft.com/office/drawing/2014/main" id="{988A8A81-3959-C3EF-B8E0-8629D6D12386}"/>
+              </a:ext>
+            </a:extLst>
+          </p:cNvPr>
+          <p:cNvSpPr/>
+          <p:nvPr/>
+        </p:nvSpPr>
+        <p:spPr>
+          <a:xfrm>
+            <a:off x="5945720" y="1055372"/>
+            <a:ext cx="862853" cy="789904"/>
+          </a:xfrm>
+          <a:prstGeom prst="rect">
+            <a:avLst/>
+          </a:prstGeom>
+          <a:noFill/>
+          <a:ln w="57150">
+            <a:solidFill>
+              <a:schemeClr val="tx1"/>
+            </a:solidFill>
+          </a:ln>
+        </p:spPr>
+        <p:style>
+          <a:lnRef idx="2">
+            <a:schemeClr val="accent1">
+              <a:shade val="15000"/>
+            </a:schemeClr>
+          </a:lnRef>
+          <a:fillRef idx="1">
+            <a:schemeClr val="accent1"/>
+          </a:fillRef>
+          <a:effectRef idx="0">
+            <a:schemeClr val="accent1"/>
+          </a:effectRef>
+          <a:fontRef idx="minor">
+            <a:schemeClr val="lt1"/>
+          </a:fontRef>
+        </p:style>
+        <p:txBody>
+          <a:bodyPr rtlCol="0" anchor="ctr"/>
+          <a:lstStyle/>
+          <a:p>
+            <a:pPr algn="ctr"/>
+            <a:endParaRPr lang="en-CA"/>
+          </a:p>
+        </p:txBody>
+      </p:sp>
     </p:spTree>
     <p:extLst>
       <p:ext uri="{BB962C8B-B14F-4D97-AF65-F5344CB8AC3E}">
@@ -6064,8 +6272,8 @@
         </p:blipFill>
         <p:spPr>
           <a:xfrm>
-            <a:off x="148092" y="3301180"/>
-            <a:ext cx="4743694" cy="3333921"/>
+            <a:off x="3716488" y="2685168"/>
+            <a:ext cx="3437451" cy="2415879"/>
           </a:xfrm>
           <a:prstGeom prst="roundRect">
             <a:avLst>
@@ -6074,7 +6282,7 @@
           </a:prstGeom>
           <a:ln>
             <a:solidFill>
-              <a:schemeClr val="tx1"/>
+              <a:schemeClr val="bg1"/>
             </a:solidFill>
           </a:ln>
           <a:effectLst/>
@@ -6108,14 +6316,13 @@
         </p:nvPicPr>
         <p:blipFill>
           <a:blip r:embed="rId3"/>
-          <a:stretch>
-            <a:fillRect/>
-          </a:stretch>
+          <a:srcRect r="4638"/>
+          <a:stretch/>
         </p:blipFill>
         <p:spPr>
           <a:xfrm>
-            <a:off x="5100704" y="3301180"/>
-            <a:ext cx="4974421" cy="3333920"/>
+            <a:off x="3627026" y="853207"/>
+            <a:ext cx="3437451" cy="2415879"/>
           </a:xfrm>
           <a:prstGeom prst="roundRect">
             <a:avLst>
@@ -6124,7 +6331,7 @@
           </a:prstGeom>
           <a:ln>
             <a:solidFill>
-              <a:schemeClr val="tx1"/>
+              <a:schemeClr val="bg1"/>
             </a:solidFill>
           </a:ln>
           <a:effectLst/>
@@ -6152,14 +6359,127 @@
         </p:blipFill>
         <p:spPr>
           <a:xfrm>
-            <a:off x="391130" y="2372097"/>
+            <a:off x="3716488" y="5101047"/>
             <a:ext cx="3667637" cy="666843"/>
           </a:xfrm>
           <a:prstGeom prst="rect">
             <a:avLst/>
           </a:prstGeom>
+          <a:ln w="3175">
+            <a:solidFill>
+              <a:schemeClr val="tx1"/>
+            </a:solidFill>
+          </a:ln>
         </p:spPr>
       </p:pic>
+      <p:sp>
+        <p:nvSpPr>
+          <p:cNvPr id="7" name="TextBox 6">
+            <a:extLst>
+              <a:ext uri="{FF2B5EF4-FFF2-40B4-BE49-F238E27FC236}">
+                <a16:creationId xmlns:a16="http://schemas.microsoft.com/office/drawing/2014/main" id="{6E557ECB-1764-81FB-14D6-1678B789ED63}"/>
+              </a:ext>
+            </a:extLst>
+          </p:cNvPr>
+          <p:cNvSpPr txBox="1"/>
+          <p:nvPr/>
+        </p:nvSpPr>
+        <p:spPr>
+          <a:xfrm>
+            <a:off x="3279086" y="919038"/>
+            <a:ext cx="455574" cy="369332"/>
+          </a:xfrm>
+          <a:prstGeom prst="rect">
+            <a:avLst/>
+          </a:prstGeom>
+          <a:noFill/>
+        </p:spPr>
+        <p:txBody>
+          <a:bodyPr wrap="none" rtlCol="0">
+            <a:spAutoFit/>
+          </a:bodyPr>
+          <a:lstStyle/>
+          <a:p>
+            <a:r>
+              <a:rPr lang="en-US" dirty="0"/>
+              <a:t>(A)</a:t>
+            </a:r>
+            <a:endParaRPr lang="en-CA" dirty="0"/>
+          </a:p>
+        </p:txBody>
+      </p:sp>
+      <p:sp>
+        <p:nvSpPr>
+          <p:cNvPr id="8" name="TextBox 7">
+            <a:extLst>
+              <a:ext uri="{FF2B5EF4-FFF2-40B4-BE49-F238E27FC236}">
+                <a16:creationId xmlns:a16="http://schemas.microsoft.com/office/drawing/2014/main" id="{A5403CC2-CCCE-703E-6506-53B8AB0C2B64}"/>
+              </a:ext>
+            </a:extLst>
+          </p:cNvPr>
+          <p:cNvSpPr txBox="1"/>
+          <p:nvPr/>
+        </p:nvSpPr>
+        <p:spPr>
+          <a:xfrm>
+            <a:off x="3281343" y="3084420"/>
+            <a:ext cx="458780" cy="369332"/>
+          </a:xfrm>
+          <a:prstGeom prst="rect">
+            <a:avLst/>
+          </a:prstGeom>
+          <a:noFill/>
+        </p:spPr>
+        <p:txBody>
+          <a:bodyPr wrap="none" rtlCol="0">
+            <a:spAutoFit/>
+          </a:bodyPr>
+          <a:lstStyle/>
+          <a:p>
+            <a:r>
+              <a:rPr lang="en-US" dirty="0"/>
+              <a:t>(B)</a:t>
+            </a:r>
+            <a:endParaRPr lang="en-CA" dirty="0"/>
+          </a:p>
+        </p:txBody>
+      </p:sp>
+      <p:sp>
+        <p:nvSpPr>
+          <p:cNvPr id="9" name="TextBox 8">
+            <a:extLst>
+              <a:ext uri="{FF2B5EF4-FFF2-40B4-BE49-F238E27FC236}">
+                <a16:creationId xmlns:a16="http://schemas.microsoft.com/office/drawing/2014/main" id="{463BD8ED-31AD-9297-4635-5F21613CAE03}"/>
+              </a:ext>
+            </a:extLst>
+          </p:cNvPr>
+          <p:cNvSpPr txBox="1"/>
+          <p:nvPr/>
+        </p:nvSpPr>
+        <p:spPr>
+          <a:xfrm>
+            <a:off x="3267064" y="4738819"/>
+            <a:ext cx="479618" cy="369332"/>
+          </a:xfrm>
+          <a:prstGeom prst="rect">
+            <a:avLst/>
+          </a:prstGeom>
+          <a:noFill/>
+        </p:spPr>
+        <p:txBody>
+          <a:bodyPr wrap="none" rtlCol="0">
+            <a:spAutoFit/>
+          </a:bodyPr>
+          <a:lstStyle/>
+          <a:p>
+            <a:r>
+              <a:rPr lang="en-US" dirty="0"/>
+              <a:t>(C)</a:t>
+            </a:r>
+            <a:endParaRPr lang="en-CA" dirty="0"/>
+          </a:p>
+        </p:txBody>
+      </p:sp>
     </p:spTree>
     <p:extLst>
       <p:ext uri="{BB962C8B-B14F-4D97-AF65-F5344CB8AC3E}">
@@ -6931,7 +7251,7 @@
           <p:nvPr>
             <p:extLst>
               <p:ext uri="{D42A27DB-BD31-4B8C-83A1-F6EECF244321}">
-                <p14:modId xmlns:p14="http://schemas.microsoft.com/office/powerpoint/2010/main" val="2095867461"/>
+                <p14:modId xmlns:p14="http://schemas.microsoft.com/office/powerpoint/2010/main" val="1020949822"/>
               </p:ext>
             </p:extLst>
           </p:nvPr>
@@ -6946,8 +7266,8 @@
           </a:graphicData>
         </a:graphic>
       </p:graphicFrame>
-      <mc:AlternateContent xmlns:mc="http://schemas.openxmlformats.org/markup-compatibility/2006">
-        <mc:Choice xmlns:a14="http://schemas.microsoft.com/office/drawing/2010/main" Requires="a14">
+      <mc:AlternateContent xmlns:mc="http://schemas.openxmlformats.org/markup-compatibility/2006" xmlns:a14="http://schemas.microsoft.com/office/drawing/2010/main">
+        <mc:Choice Requires="a14">
           <p:sp>
             <p:nvSpPr>
               <p:cNvPr id="7" name="TextBox 6">
@@ -6976,6 +7296,7 @@
               </a:bodyPr>
               <a:lstStyle/>
               <a:p>
+                <a:pPr/>
                 <a14:m>
                   <m:oMathPara xmlns:m="http://schemas.openxmlformats.org/officeDocument/2006/math">
                     <m:oMathParaPr>
@@ -7015,7 +7336,7 @@
             </p:txBody>
           </p:sp>
         </mc:Choice>
-        <mc:Fallback>
+        <mc:Fallback xmlns="">
           <p:sp>
             <p:nvSpPr>
               <p:cNvPr id="7" name="TextBox 6">
@@ -7104,8 +7425,8 @@
           </a:fontRef>
         </p:style>
       </p:cxnSp>
-      <mc:AlternateContent xmlns:mc="http://schemas.openxmlformats.org/markup-compatibility/2006">
-        <mc:Choice xmlns:a14="http://schemas.microsoft.com/office/drawing/2010/main" Requires="a14">
+      <mc:AlternateContent xmlns:mc="http://schemas.openxmlformats.org/markup-compatibility/2006" xmlns:a14="http://schemas.microsoft.com/office/drawing/2010/main">
+        <mc:Choice Requires="a14">
           <p:sp>
             <p:nvSpPr>
               <p:cNvPr id="10" name="TextBox 9">
@@ -7134,6 +7455,7 @@
               </a:bodyPr>
               <a:lstStyle/>
               <a:p>
+                <a:pPr/>
                 <a14:m>
                   <m:oMathPara xmlns:m="http://schemas.openxmlformats.org/officeDocument/2006/math">
                     <m:oMathParaPr>
@@ -7186,7 +7508,7 @@
             </p:txBody>
           </p:sp>
         </mc:Choice>
-        <mc:Fallback>
+        <mc:Fallback xmlns="">
           <p:sp>
             <p:nvSpPr>
               <p:cNvPr id="10" name="TextBox 9">
@@ -7319,8 +7641,8 @@
           </a:p>
         </p:txBody>
       </p:sp>
-      <mc:AlternateContent xmlns:mc="http://schemas.openxmlformats.org/markup-compatibility/2006">
-        <mc:Choice xmlns:a14="http://schemas.microsoft.com/office/drawing/2010/main" Requires="a14">
+      <mc:AlternateContent xmlns:mc="http://schemas.openxmlformats.org/markup-compatibility/2006" xmlns:a14="http://schemas.microsoft.com/office/drawing/2010/main">
+        <mc:Choice Requires="a14">
           <p:sp>
             <p:nvSpPr>
               <p:cNvPr id="17" name="TextBox 16">
@@ -7349,6 +7671,7 @@
               </a:bodyPr>
               <a:lstStyle/>
               <a:p>
+                <a:pPr/>
                 <a14:m>
                   <m:oMathPara xmlns:m="http://schemas.openxmlformats.org/officeDocument/2006/math">
                     <m:oMathParaPr>
@@ -7428,7 +7751,7 @@
             </p:txBody>
           </p:sp>
         </mc:Choice>
-        <mc:Fallback>
+        <mc:Fallback xmlns="">
           <p:sp>
             <p:nvSpPr>
               <p:cNvPr id="17" name="TextBox 16">
@@ -7608,8 +7931,8 @@
           </a:fontRef>
         </p:style>
       </p:cxnSp>
-      <mc:AlternateContent xmlns:mc="http://schemas.openxmlformats.org/markup-compatibility/2006">
-        <mc:Choice xmlns:a14="http://schemas.microsoft.com/office/drawing/2010/main" Requires="a14">
+      <mc:AlternateContent xmlns:mc="http://schemas.openxmlformats.org/markup-compatibility/2006" xmlns:a14="http://schemas.microsoft.com/office/drawing/2010/main">
+        <mc:Choice Requires="a14">
           <p:sp>
             <p:nvSpPr>
               <p:cNvPr id="22" name="TextBox 21">
@@ -7638,6 +7961,7 @@
               </a:bodyPr>
               <a:lstStyle/>
               <a:p>
+                <a:pPr/>
                 <a14:m>
                   <m:oMathPara xmlns:m="http://schemas.openxmlformats.org/officeDocument/2006/math">
                     <m:oMathParaPr>
@@ -7677,7 +8001,7 @@
             </p:txBody>
           </p:sp>
         </mc:Choice>
-        <mc:Fallback>
+        <mc:Fallback xmlns="">
           <p:sp>
             <p:nvSpPr>
               <p:cNvPr id="22" name="TextBox 21">
@@ -7722,8 +8046,8 @@
           </p:sp>
         </mc:Fallback>
       </mc:AlternateContent>
-      <mc:AlternateContent xmlns:mc="http://schemas.openxmlformats.org/markup-compatibility/2006">
-        <mc:Choice xmlns:a14="http://schemas.microsoft.com/office/drawing/2010/main" Requires="a14">
+      <mc:AlternateContent xmlns:mc="http://schemas.openxmlformats.org/markup-compatibility/2006" xmlns:a14="http://schemas.microsoft.com/office/drawing/2010/main">
+        <mc:Choice Requires="a14">
           <p:sp>
             <p:nvSpPr>
               <p:cNvPr id="25" name="TextBox 24">
@@ -7782,7 +8106,7 @@
             </p:txBody>
           </p:sp>
         </mc:Choice>
-        <mc:Fallback>
+        <mc:Fallback xmlns="">
           <p:sp>
             <p:nvSpPr>
               <p:cNvPr id="25" name="TextBox 24">
@@ -7844,14 +8168,14 @@
               <p:nvPr>
                 <p:extLst>
                   <p:ext uri="{D42A27DB-BD31-4B8C-83A1-F6EECF244321}">
-                    <p14:modId xmlns:p14="http://schemas.microsoft.com/office/powerpoint/2010/main" val="2163234302"/>
+                    <p14:modId xmlns:p14="http://schemas.microsoft.com/office/powerpoint/2010/main" val="1877467923"/>
                   </p:ext>
                 </p:extLst>
               </p:nvPr>
             </p:nvGraphicFramePr>
             <p:xfrm>
               <a:off x="6541652" y="3392443"/>
-              <a:ext cx="2369124" cy="1831855"/>
+              <a:ext cx="2369124" cy="1853279"/>
             </p:xfrm>
             <a:graphic>
               <a:graphicData uri="http://schemas.openxmlformats.org/drawingml/2006/table">
@@ -7961,6 +8285,7 @@
                         <a:bodyPr/>
                         <a:lstStyle/>
                         <a:p>
+                          <a:pPr/>
                           <a14:m>
                             <m:oMathPara xmlns:m="http://schemas.openxmlformats.org/officeDocument/2006/math">
                               <m:oMathParaPr>
@@ -8037,6 +8362,7 @@
                         <a:bodyPr/>
                         <a:lstStyle/>
                         <a:p>
+                          <a:pPr/>
                           <a14:m>
                             <m:oMathPara xmlns:m="http://schemas.openxmlformats.org/officeDocument/2006/math">
                               <m:oMathParaPr>
@@ -8581,10 +8907,10 @@
                                   </m:e>
                                   <m:sub>
                                     <m:r>
-                                      <a:rPr lang="en-CA" b="0" i="1" smtClean="0">
+                                      <a:rPr lang="en-US" b="0" i="1" smtClean="0">
                                         <a:latin typeface="Cambria Math" panose="02040503050406030204" pitchFamily="18" charset="0"/>
                                       </a:rPr>
-                                      <m:t>𝑖</m:t>
+                                      <m:t>𝑓</m:t>
                                     </m:r>
                                   </m:sub>
                                 </m:sSub>
@@ -8651,7 +8977,7 @@
                                 <m:sSub>
                                   <m:sSubPr>
                                     <m:ctrlPr>
-                                      <a:rPr lang="en-CA" b="0" i="1" smtClean="0">
+                                      <a:rPr lang="en-CA" sz="1400" b="0" i="1" smtClean="0">
                                         <a:solidFill>
                                           <a:schemeClr val="tx1"/>
                                         </a:solidFill>
@@ -8661,7 +8987,7 @@
                                   </m:sSubPr>
                                   <m:e>
                                     <m:r>
-                                      <a:rPr lang="en-CA" b="0" i="1" smtClean="0">
+                                      <a:rPr lang="en-CA" sz="1400" b="0" i="1" smtClean="0">
                                         <a:solidFill>
                                           <a:schemeClr val="tx1"/>
                                         </a:solidFill>
@@ -8672,7 +8998,7 @@
                                   </m:e>
                                   <m:sub>
                                     <m:r>
-                                      <a:rPr lang="en-CA" b="0" i="1" smtClean="0">
+                                      <a:rPr lang="en-US" sz="1400" b="0" i="1" smtClean="0">
                                         <a:solidFill>
                                           <a:schemeClr val="tx1"/>
                                         </a:solidFill>
@@ -8680,8 +9006,46 @@
                                       </a:rPr>
                                       <m:t>𝑖</m:t>
                                     </m:r>
+                                    <m:r>
+                                      <a:rPr lang="en-US" sz="1400" b="0" i="1" smtClean="0">
+                                        <a:solidFill>
+                                          <a:schemeClr val="tx1"/>
+                                        </a:solidFill>
+                                        <a:latin typeface="Cambria Math" panose="02040503050406030204" pitchFamily="18" charset="0"/>
+                                      </a:rPr>
+                                      <m:t> </m:t>
+                                    </m:r>
                                   </m:sub>
                                 </m:sSub>
+                                <m:r>
+                                  <a:rPr lang="en-US" sz="1400" b="0" i="1" smtClean="0">
+                                    <a:solidFill>
+                                      <a:schemeClr val="tx1"/>
+                                    </a:solidFill>
+                                    <a:latin typeface="Cambria Math" panose="02040503050406030204" pitchFamily="18" charset="0"/>
+                                  </a:rPr>
+                                  <m:t>+ </m:t>
+                                </m:r>
+                                <m:r>
+                                  <a:rPr lang="en-US" sz="1400" b="0" i="1" smtClean="0">
+                                    <a:solidFill>
+                                      <a:schemeClr val="tx1"/>
+                                    </a:solidFill>
+                                    <a:latin typeface="Cambria Math" panose="02040503050406030204" pitchFamily="18" charset="0"/>
+                                    <a:ea typeface="Cambria Math" panose="02040503050406030204" pitchFamily="18" charset="0"/>
+                                  </a:rPr>
+                                  <m:t>∆</m:t>
+                                </m:r>
+                                <m:r>
+                                  <a:rPr lang="en-US" sz="1400" b="0" i="1" smtClean="0">
+                                    <a:solidFill>
+                                      <a:schemeClr val="tx1"/>
+                                    </a:solidFill>
+                                    <a:latin typeface="Cambria Math" panose="02040503050406030204" pitchFamily="18" charset="0"/>
+                                    <a:ea typeface="Cambria Math" panose="02040503050406030204" pitchFamily="18" charset="0"/>
+                                  </a:rPr>
+                                  <m:t>𝑡</m:t>
+                                </m:r>
                               </m:oMath>
                             </m:oMathPara>
                           </a14:m>
@@ -9059,14 +9423,14 @@
               <p:nvPr>
                 <p:extLst>
                   <p:ext uri="{D42A27DB-BD31-4B8C-83A1-F6EECF244321}">
-                    <p14:modId xmlns:p14="http://schemas.microsoft.com/office/powerpoint/2010/main" val="2163234302"/>
+                    <p14:modId xmlns:p14="http://schemas.microsoft.com/office/powerpoint/2010/main" val="1877467923"/>
                   </p:ext>
                 </p:extLst>
               </p:nvPr>
             </p:nvGraphicFramePr>
             <p:xfrm>
               <a:off x="6541652" y="3392443"/>
-              <a:ext cx="2369124" cy="1831855"/>
+              <a:ext cx="2369124" cy="1853279"/>
             </p:xfrm>
             <a:graphic>
               <a:graphicData uri="http://schemas.openxmlformats.org/drawingml/2006/table">
@@ -9142,7 +9506,7 @@
                         <a:blipFill>
                           <a:blip r:embed="rId8"/>
                           <a:stretch>
-                            <a:fillRect r="-200769" b="-430000"/>
+                            <a:fillRect r="-200769" b="-435000"/>
                           </a:stretch>
                         </a:blipFill>
                       </a:tcPr>
@@ -9197,7 +9561,7 @@
                         <a:blipFill>
                           <a:blip r:embed="rId8"/>
                           <a:stretch>
-                            <a:fillRect l="-100775" r="-102326" b="-430000"/>
+                            <a:fillRect l="-100775" r="-102326" b="-435000"/>
                           </a:stretch>
                         </a:blipFill>
                       </a:tcPr>
@@ -9246,7 +9610,7 @@
                         <a:blipFill>
                           <a:blip r:embed="rId8"/>
                           <a:stretch>
-                            <a:fillRect l="-199231" r="-1538" b="-430000"/>
+                            <a:fillRect l="-199231" r="-1538" b="-435000"/>
                           </a:stretch>
                         </a:blipFill>
                       </a:tcPr>
@@ -9687,7 +10051,7 @@
                       </a:ext>
                     </a:extLst>
                   </a:tr>
-                  <a:tr h="366371">
+                  <a:tr h="387795">
                     <a:tc>
                       <a:txBody>
                         <a:bodyPr/>
@@ -9738,7 +10102,7 @@
                         <a:blipFill>
                           <a:blip r:embed="rId8"/>
                           <a:stretch>
-                            <a:fillRect t="-296721" r="-200769" b="-124590"/>
+                            <a:fillRect t="-282813" r="-200769" b="-118750"/>
                           </a:stretch>
                         </a:blipFill>
                       </a:tcPr>
@@ -9799,7 +10163,7 @@
                         <a:blipFill>
                           <a:blip r:embed="rId8"/>
                           <a:stretch>
-                            <a:fillRect l="-100775" t="-296721" r="-102326" b="-124590"/>
+                            <a:fillRect l="-100775" t="-282813" r="-102326" b="-118750"/>
                           </a:stretch>
                         </a:blipFill>
                       </a:tcPr>
@@ -9854,7 +10218,7 @@
                         <a:blipFill>
                           <a:blip r:embed="rId8"/>
                           <a:stretch>
-                            <a:fillRect l="-199231" t="-296721" r="-1538" b="-124590"/>
+                            <a:fillRect l="-199231" t="-282813" r="-1538" b="-118750"/>
                           </a:stretch>
                         </a:blipFill>
                       </a:tcPr>
@@ -10190,12 +10554,17 @@
         </p:blipFill>
         <p:spPr>
           <a:xfrm>
-            <a:off x="3294689" y="830988"/>
+            <a:off x="2758978" y="5857323"/>
             <a:ext cx="5487166" cy="600159"/>
           </a:xfrm>
           <a:prstGeom prst="rect">
             <a:avLst/>
           </a:prstGeom>
+          <a:ln w="3175">
+            <a:solidFill>
+              <a:schemeClr val="tx1"/>
+            </a:solidFill>
+          </a:ln>
         </p:spPr>
       </p:pic>
       <p:cxnSp>
@@ -10212,7 +10581,7 @@
         </p:nvCxnSpPr>
         <p:spPr>
           <a:xfrm>
-            <a:off x="2752436" y="2842759"/>
+            <a:off x="2948710" y="2870479"/>
             <a:ext cx="392548" cy="0"/>
           </a:xfrm>
           <a:prstGeom prst="straightConnector1">
@@ -10254,7 +10623,7 @@
         </p:nvSpPr>
         <p:spPr>
           <a:xfrm>
-            <a:off x="2057264" y="2704260"/>
+            <a:off x="2263320" y="2731980"/>
             <a:ext cx="720710" cy="276999"/>
           </a:xfrm>
           <a:prstGeom prst="rect">
@@ -10272,6 +10641,150 @@
               <a:rPr lang="en-CA" sz="1200" dirty="0"/>
               <a:t>Position</a:t>
             </a:r>
+          </a:p>
+        </p:txBody>
+      </p:sp>
+      <p:sp>
+        <p:nvSpPr>
+          <p:cNvPr id="2" name="TextBox 1">
+            <a:extLst>
+              <a:ext uri="{FF2B5EF4-FFF2-40B4-BE49-F238E27FC236}">
+                <a16:creationId xmlns:a16="http://schemas.microsoft.com/office/drawing/2014/main" id="{7B62D037-1D21-4472-A415-1A5D4D3050AE}"/>
+              </a:ext>
+            </a:extLst>
+          </p:cNvPr>
+          <p:cNvSpPr txBox="1"/>
+          <p:nvPr/>
+        </p:nvSpPr>
+        <p:spPr>
+          <a:xfrm>
+            <a:off x="2052097" y="1993288"/>
+            <a:ext cx="455574" cy="369332"/>
+          </a:xfrm>
+          <a:prstGeom prst="rect">
+            <a:avLst/>
+          </a:prstGeom>
+          <a:noFill/>
+        </p:spPr>
+        <p:txBody>
+          <a:bodyPr wrap="none" rtlCol="0">
+            <a:spAutoFit/>
+          </a:bodyPr>
+          <a:lstStyle/>
+          <a:p>
+            <a:r>
+              <a:rPr lang="en-US" dirty="0"/>
+              <a:t>(A)</a:t>
+            </a:r>
+            <a:endParaRPr lang="en-CA" dirty="0"/>
+          </a:p>
+        </p:txBody>
+      </p:sp>
+      <p:sp>
+        <p:nvSpPr>
+          <p:cNvPr id="4" name="TextBox 3">
+            <a:extLst>
+              <a:ext uri="{FF2B5EF4-FFF2-40B4-BE49-F238E27FC236}">
+                <a16:creationId xmlns:a16="http://schemas.microsoft.com/office/drawing/2014/main" id="{E48626D6-A000-AB31-3690-C47F86DC4525}"/>
+              </a:ext>
+            </a:extLst>
+          </p:cNvPr>
+          <p:cNvSpPr txBox="1"/>
+          <p:nvPr/>
+        </p:nvSpPr>
+        <p:spPr>
+          <a:xfrm>
+            <a:off x="2052865" y="3129052"/>
+            <a:ext cx="458780" cy="369332"/>
+          </a:xfrm>
+          <a:prstGeom prst="rect">
+            <a:avLst/>
+          </a:prstGeom>
+          <a:noFill/>
+        </p:spPr>
+        <p:txBody>
+          <a:bodyPr wrap="none" rtlCol="0">
+            <a:spAutoFit/>
+          </a:bodyPr>
+          <a:lstStyle/>
+          <a:p>
+            <a:r>
+              <a:rPr lang="en-US" dirty="0"/>
+              <a:t>(B)</a:t>
+            </a:r>
+            <a:endParaRPr lang="en-CA" dirty="0"/>
+          </a:p>
+        </p:txBody>
+      </p:sp>
+      <p:sp>
+        <p:nvSpPr>
+          <p:cNvPr id="9" name="TextBox 8">
+            <a:extLst>
+              <a:ext uri="{FF2B5EF4-FFF2-40B4-BE49-F238E27FC236}">
+                <a16:creationId xmlns:a16="http://schemas.microsoft.com/office/drawing/2014/main" id="{AA8259E5-8381-839D-235A-4C96EB5F5F25}"/>
+              </a:ext>
+            </a:extLst>
+          </p:cNvPr>
+          <p:cNvSpPr txBox="1"/>
+          <p:nvPr/>
+        </p:nvSpPr>
+        <p:spPr>
+          <a:xfrm>
+            <a:off x="5798463" y="3123860"/>
+            <a:ext cx="479618" cy="369332"/>
+          </a:xfrm>
+          <a:prstGeom prst="rect">
+            <a:avLst/>
+          </a:prstGeom>
+          <a:noFill/>
+        </p:spPr>
+        <p:txBody>
+          <a:bodyPr wrap="none" rtlCol="0">
+            <a:spAutoFit/>
+          </a:bodyPr>
+          <a:lstStyle/>
+          <a:p>
+            <a:r>
+              <a:rPr lang="en-US" dirty="0"/>
+              <a:t>(C)</a:t>
+            </a:r>
+            <a:endParaRPr lang="en-CA" dirty="0"/>
+          </a:p>
+        </p:txBody>
+      </p:sp>
+      <p:sp>
+        <p:nvSpPr>
+          <p:cNvPr id="11" name="TextBox 10">
+            <a:extLst>
+              <a:ext uri="{FF2B5EF4-FFF2-40B4-BE49-F238E27FC236}">
+                <a16:creationId xmlns:a16="http://schemas.microsoft.com/office/drawing/2014/main" id="{2F4D52F0-A9F8-01F6-4E16-2CC027DB62AA}"/>
+              </a:ext>
+            </a:extLst>
+          </p:cNvPr>
+          <p:cNvSpPr txBox="1"/>
+          <p:nvPr/>
+        </p:nvSpPr>
+        <p:spPr>
+          <a:xfrm>
+            <a:off x="2024312" y="5803705"/>
+            <a:ext cx="478016" cy="369332"/>
+          </a:xfrm>
+          <a:prstGeom prst="rect">
+            <a:avLst/>
+          </a:prstGeom>
+          <a:noFill/>
+        </p:spPr>
+        <p:txBody>
+          <a:bodyPr wrap="none" rtlCol="0">
+            <a:spAutoFit/>
+          </a:bodyPr>
+          <a:lstStyle/>
+          <a:p>
+            <a:r>
+              <a:rPr lang="en-US" dirty="0"/>
+              <a:t>(D)</a:t>
+            </a:r>
+            <a:endParaRPr lang="en-CA" dirty="0"/>
           </a:p>
         </p:txBody>
       </p:sp>

--- a/Working Documents/2026_COMPAAPM_Figures.pptx
+++ b/Working Documents/2026_COMPAAPM_Figures.pptx
@@ -6,13 +6,14 @@
   </p:sldMasterIdLst>
   <p:sldIdLst>
     <p:sldId id="258" r:id="rId2"/>
-    <p:sldId id="259" r:id="rId3"/>
-    <p:sldId id="261" r:id="rId4"/>
-    <p:sldId id="263" r:id="rId5"/>
-    <p:sldId id="264" r:id="rId6"/>
-    <p:sldId id="265" r:id="rId7"/>
-    <p:sldId id="257" r:id="rId8"/>
-    <p:sldId id="260" r:id="rId9"/>
+    <p:sldId id="266" r:id="rId3"/>
+    <p:sldId id="259" r:id="rId4"/>
+    <p:sldId id="261" r:id="rId5"/>
+    <p:sldId id="263" r:id="rId6"/>
+    <p:sldId id="264" r:id="rId7"/>
+    <p:sldId id="265" r:id="rId8"/>
+    <p:sldId id="257" r:id="rId9"/>
+    <p:sldId id="260" r:id="rId10"/>
   </p:sldIdLst>
   <p:sldSz cx="12192000" cy="6858000"/>
   <p:notesSz cx="6858000" cy="9144000"/>
@@ -2512,7 +2513,7 @@
           <a:p>
             <a:fld id="{F350ADBE-E2B5-49AB-99FC-12956E870A1F}" type="datetimeFigureOut">
               <a:rPr lang="en-CA" smtClean="0"/>
-              <a:t>19-Jan-2026</a:t>
+              <a:t>26-Jan-2026</a:t>
             </a:fld>
             <a:endParaRPr lang="en-CA"/>
           </a:p>
@@ -2712,7 +2713,7 @@
           <a:p>
             <a:fld id="{F350ADBE-E2B5-49AB-99FC-12956E870A1F}" type="datetimeFigureOut">
               <a:rPr lang="en-CA" smtClean="0"/>
-              <a:t>19-Jan-2026</a:t>
+              <a:t>26-Jan-2026</a:t>
             </a:fld>
             <a:endParaRPr lang="en-CA"/>
           </a:p>
@@ -2922,7 +2923,7 @@
           <a:p>
             <a:fld id="{F350ADBE-E2B5-49AB-99FC-12956E870A1F}" type="datetimeFigureOut">
               <a:rPr lang="en-CA" smtClean="0"/>
-              <a:t>19-Jan-2026</a:t>
+              <a:t>26-Jan-2026</a:t>
             </a:fld>
             <a:endParaRPr lang="en-CA"/>
           </a:p>
@@ -3122,7 +3123,7 @@
           <a:p>
             <a:fld id="{F350ADBE-E2B5-49AB-99FC-12956E870A1F}" type="datetimeFigureOut">
               <a:rPr lang="en-CA" smtClean="0"/>
-              <a:t>19-Jan-2026</a:t>
+              <a:t>26-Jan-2026</a:t>
             </a:fld>
             <a:endParaRPr lang="en-CA"/>
           </a:p>
@@ -3398,7 +3399,7 @@
           <a:p>
             <a:fld id="{F350ADBE-E2B5-49AB-99FC-12956E870A1F}" type="datetimeFigureOut">
               <a:rPr lang="en-CA" smtClean="0"/>
-              <a:t>19-Jan-2026</a:t>
+              <a:t>26-Jan-2026</a:t>
             </a:fld>
             <a:endParaRPr lang="en-CA"/>
           </a:p>
@@ -3666,7 +3667,7 @@
           <a:p>
             <a:fld id="{F350ADBE-E2B5-49AB-99FC-12956E870A1F}" type="datetimeFigureOut">
               <a:rPr lang="en-CA" smtClean="0"/>
-              <a:t>19-Jan-2026</a:t>
+              <a:t>26-Jan-2026</a:t>
             </a:fld>
             <a:endParaRPr lang="en-CA"/>
           </a:p>
@@ -4081,7 +4082,7 @@
           <a:p>
             <a:fld id="{F350ADBE-E2B5-49AB-99FC-12956E870A1F}" type="datetimeFigureOut">
               <a:rPr lang="en-CA" smtClean="0"/>
-              <a:t>19-Jan-2026</a:t>
+              <a:t>26-Jan-2026</a:t>
             </a:fld>
             <a:endParaRPr lang="en-CA"/>
           </a:p>
@@ -4223,7 +4224,7 @@
           <a:p>
             <a:fld id="{F350ADBE-E2B5-49AB-99FC-12956E870A1F}" type="datetimeFigureOut">
               <a:rPr lang="en-CA" smtClean="0"/>
-              <a:t>19-Jan-2026</a:t>
+              <a:t>26-Jan-2026</a:t>
             </a:fld>
             <a:endParaRPr lang="en-CA"/>
           </a:p>
@@ -4336,7 +4337,7 @@
           <a:p>
             <a:fld id="{F350ADBE-E2B5-49AB-99FC-12956E870A1F}" type="datetimeFigureOut">
               <a:rPr lang="en-CA" smtClean="0"/>
-              <a:t>19-Jan-2026</a:t>
+              <a:t>26-Jan-2026</a:t>
             </a:fld>
             <a:endParaRPr lang="en-CA"/>
           </a:p>
@@ -4649,7 +4650,7 @@
           <a:p>
             <a:fld id="{F350ADBE-E2B5-49AB-99FC-12956E870A1F}" type="datetimeFigureOut">
               <a:rPr lang="en-CA" smtClean="0"/>
-              <a:t>19-Jan-2026</a:t>
+              <a:t>26-Jan-2026</a:t>
             </a:fld>
             <a:endParaRPr lang="en-CA"/>
           </a:p>
@@ -4938,7 +4939,7 @@
           <a:p>
             <a:fld id="{F350ADBE-E2B5-49AB-99FC-12956E870A1F}" type="datetimeFigureOut">
               <a:rPr lang="en-CA" smtClean="0"/>
-              <a:t>19-Jan-2026</a:t>
+              <a:t>26-Jan-2026</a:t>
             </a:fld>
             <a:endParaRPr lang="en-CA"/>
           </a:p>
@@ -5181,7 +5182,7 @@
           <a:p>
             <a:fld id="{F350ADBE-E2B5-49AB-99FC-12956E870A1F}" type="datetimeFigureOut">
               <a:rPr lang="en-CA" smtClean="0"/>
-              <a:t>19-Jan-2026</a:t>
+              <a:t>26-Jan-2026</a:t>
             </a:fld>
             <a:endParaRPr lang="en-CA"/>
           </a:p>
@@ -5660,6 +5661,66 @@
       </p:grpSpPr>
       <p:pic>
         <p:nvPicPr>
+          <p:cNvPr id="3" name="Picture 2">
+            <a:extLst>
+              <a:ext uri="{FF2B5EF4-FFF2-40B4-BE49-F238E27FC236}">
+                <a16:creationId xmlns:a16="http://schemas.microsoft.com/office/drawing/2014/main" id="{97479648-DD8F-E525-BDB3-EB159D57CFEE}"/>
+              </a:ext>
+            </a:extLst>
+          </p:cNvPr>
+          <p:cNvPicPr>
+            <a:picLocks noChangeAspect="1"/>
+          </p:cNvPicPr>
+          <p:nvPr/>
+        </p:nvPicPr>
+        <p:blipFill>
+          <a:blip r:embed="rId2"/>
+          <a:stretch>
+            <a:fillRect/>
+          </a:stretch>
+        </p:blipFill>
+        <p:spPr>
+          <a:xfrm>
+            <a:off x="319863" y="916453"/>
+            <a:ext cx="4896102" cy="3575234"/>
+          </a:xfrm>
+          <a:prstGeom prst="rect">
+            <a:avLst/>
+          </a:prstGeom>
+        </p:spPr>
+      </p:pic>
+    </p:spTree>
+    <p:extLst>
+      <p:ext uri="{BB962C8B-B14F-4D97-AF65-F5344CB8AC3E}">
+        <p14:creationId xmlns:p14="http://schemas.microsoft.com/office/powerpoint/2010/main" val="2466149437"/>
+      </p:ext>
+    </p:extLst>
+  </p:cSld>
+  <p:clrMapOvr>
+    <a:masterClrMapping/>
+  </p:clrMapOvr>
+</p:sld>
+</file>
+
+<file path=ppt/slides/slide3.xml><?xml version="1.0" encoding="utf-8"?>
+<p:sld xmlns:a="http://schemas.openxmlformats.org/drawingml/2006/main" xmlns:r="http://schemas.openxmlformats.org/officeDocument/2006/relationships" xmlns:p="http://schemas.openxmlformats.org/presentationml/2006/main">
+  <p:cSld>
+    <p:spTree>
+      <p:nvGrpSpPr>
+        <p:cNvPr id="1" name=""/>
+        <p:cNvGrpSpPr/>
+        <p:nvPr/>
+      </p:nvGrpSpPr>
+      <p:grpSpPr>
+        <a:xfrm>
+          <a:off x="0" y="0"/>
+          <a:ext cx="0" cy="0"/>
+          <a:chOff x="0" y="0"/>
+          <a:chExt cx="0" cy="0"/>
+        </a:xfrm>
+      </p:grpSpPr>
+      <p:pic>
+        <p:nvPicPr>
           <p:cNvPr id="5" name="Picture 4">
             <a:extLst>
               <a:ext uri="{FF2B5EF4-FFF2-40B4-BE49-F238E27FC236}">
@@ -5738,7 +5799,7 @@
 </p:sld>
 </file>
 
-<file path=ppt/slides/slide3.xml><?xml version="1.0" encoding="utf-8"?>
+<file path=ppt/slides/slide4.xml><?xml version="1.0" encoding="utf-8"?>
 <p:sld xmlns:a="http://schemas.openxmlformats.org/drawingml/2006/main" xmlns:r="http://schemas.openxmlformats.org/officeDocument/2006/relationships" xmlns:p="http://schemas.openxmlformats.org/presentationml/2006/main">
   <p:cSld>
     <p:spTree>
@@ -5827,7 +5888,7 @@
 </p:sld>
 </file>
 
-<file path=ppt/slides/slide4.xml><?xml version="1.0" encoding="utf-8"?>
+<file path=ppt/slides/slide5.xml><?xml version="1.0" encoding="utf-8"?>
 <p:sld xmlns:a="http://schemas.openxmlformats.org/drawingml/2006/main" xmlns:r="http://schemas.openxmlformats.org/officeDocument/2006/relationships" xmlns:p="http://schemas.openxmlformats.org/presentationml/2006/main">
   <p:cSld>
     <p:spTree>
@@ -5893,7 +5954,7 @@
 </p:sld>
 </file>
 
-<file path=ppt/slides/slide5.xml><?xml version="1.0" encoding="utf-8"?>
+<file path=ppt/slides/slide6.xml><?xml version="1.0" encoding="utf-8"?>
 <p:sld xmlns:a="http://schemas.openxmlformats.org/drawingml/2006/main" xmlns:r="http://schemas.openxmlformats.org/officeDocument/2006/relationships" xmlns:p="http://schemas.openxmlformats.org/presentationml/2006/main">
   <p:cSld>
     <p:spTree>
@@ -5959,7 +6020,7 @@
 </p:sld>
 </file>
 
-<file path=ppt/slides/slide6.xml><?xml version="1.0" encoding="utf-8"?>
+<file path=ppt/slides/slide7.xml><?xml version="1.0" encoding="utf-8"?>
 <p:sld xmlns:a="http://schemas.openxmlformats.org/drawingml/2006/main" xmlns:r="http://schemas.openxmlformats.org/officeDocument/2006/relationships" xmlns:p="http://schemas.openxmlformats.org/presentationml/2006/main">
   <p:cSld>
     <p:spTree>
@@ -6233,7 +6294,7 @@
 </p:sld>
 </file>
 
-<file path=ppt/slides/slide7.xml><?xml version="1.0" encoding="utf-8"?>
+<file path=ppt/slides/slide8.xml><?xml version="1.0" encoding="utf-8"?>
 <p:sld xmlns:a="http://schemas.openxmlformats.org/drawingml/2006/main" xmlns:r="http://schemas.openxmlformats.org/officeDocument/2006/relationships" xmlns:p="http://schemas.openxmlformats.org/presentationml/2006/main">
   <p:cSld>
     <p:spTree>
@@ -6493,7 +6554,7 @@
 </p:sld>
 </file>
 
-<file path=ppt/slides/slide8.xml><?xml version="1.0" encoding="utf-8"?>
+<file path=ppt/slides/slide9.xml><?xml version="1.0" encoding="utf-8"?>
 <p:sld xmlns:a="http://schemas.openxmlformats.org/drawingml/2006/main" xmlns:r="http://schemas.openxmlformats.org/officeDocument/2006/relationships" xmlns:p="http://schemas.openxmlformats.org/presentationml/2006/main">
   <p:cSld>
     <p:spTree>
@@ -8151,8 +8212,8 @@
           </p:sp>
         </mc:Fallback>
       </mc:AlternateContent>
-      <mc:AlternateContent xmlns:mc="http://schemas.openxmlformats.org/markup-compatibility/2006">
-        <mc:Choice xmlns:a14="http://schemas.microsoft.com/office/drawing/2010/main" Requires="a14">
+      <mc:AlternateContent xmlns:mc="http://schemas.openxmlformats.org/markup-compatibility/2006" xmlns:a14="http://schemas.microsoft.com/office/drawing/2010/main">
+        <mc:Choice Requires="a14">
           <p:graphicFrame>
             <p:nvGraphicFramePr>
               <p:cNvPr id="28" name="Table 27">
@@ -9407,7 +9468,7 @@
             </a:graphic>
           </p:graphicFrame>
         </mc:Choice>
-        <mc:Fallback>
+        <mc:Fallback xmlns="">
           <p:graphicFrame>
             <p:nvGraphicFramePr>
               <p:cNvPr id="28" name="Table 27">

--- a/Working Documents/2026_COMPAAPM_Figures.pptx
+++ b/Working Documents/2026_COMPAAPM_Figures.pptx
@@ -2513,7 +2513,7 @@
           <a:p>
             <a:fld id="{F350ADBE-E2B5-49AB-99FC-12956E870A1F}" type="datetimeFigureOut">
               <a:rPr lang="en-CA" smtClean="0"/>
-              <a:t>26-Jan-2026</a:t>
+              <a:t>27-Jan-2026</a:t>
             </a:fld>
             <a:endParaRPr lang="en-CA"/>
           </a:p>
@@ -2713,7 +2713,7 @@
           <a:p>
             <a:fld id="{F350ADBE-E2B5-49AB-99FC-12956E870A1F}" type="datetimeFigureOut">
               <a:rPr lang="en-CA" smtClean="0"/>
-              <a:t>26-Jan-2026</a:t>
+              <a:t>27-Jan-2026</a:t>
             </a:fld>
             <a:endParaRPr lang="en-CA"/>
           </a:p>
@@ -2923,7 +2923,7 @@
           <a:p>
             <a:fld id="{F350ADBE-E2B5-49AB-99FC-12956E870A1F}" type="datetimeFigureOut">
               <a:rPr lang="en-CA" smtClean="0"/>
-              <a:t>26-Jan-2026</a:t>
+              <a:t>27-Jan-2026</a:t>
             </a:fld>
             <a:endParaRPr lang="en-CA"/>
           </a:p>
@@ -3123,7 +3123,7 @@
           <a:p>
             <a:fld id="{F350ADBE-E2B5-49AB-99FC-12956E870A1F}" type="datetimeFigureOut">
               <a:rPr lang="en-CA" smtClean="0"/>
-              <a:t>26-Jan-2026</a:t>
+              <a:t>27-Jan-2026</a:t>
             </a:fld>
             <a:endParaRPr lang="en-CA"/>
           </a:p>
@@ -3399,7 +3399,7 @@
           <a:p>
             <a:fld id="{F350ADBE-E2B5-49AB-99FC-12956E870A1F}" type="datetimeFigureOut">
               <a:rPr lang="en-CA" smtClean="0"/>
-              <a:t>26-Jan-2026</a:t>
+              <a:t>27-Jan-2026</a:t>
             </a:fld>
             <a:endParaRPr lang="en-CA"/>
           </a:p>
@@ -3667,7 +3667,7 @@
           <a:p>
             <a:fld id="{F350ADBE-E2B5-49AB-99FC-12956E870A1F}" type="datetimeFigureOut">
               <a:rPr lang="en-CA" smtClean="0"/>
-              <a:t>26-Jan-2026</a:t>
+              <a:t>27-Jan-2026</a:t>
             </a:fld>
             <a:endParaRPr lang="en-CA"/>
           </a:p>
@@ -4082,7 +4082,7 @@
           <a:p>
             <a:fld id="{F350ADBE-E2B5-49AB-99FC-12956E870A1F}" type="datetimeFigureOut">
               <a:rPr lang="en-CA" smtClean="0"/>
-              <a:t>26-Jan-2026</a:t>
+              <a:t>27-Jan-2026</a:t>
             </a:fld>
             <a:endParaRPr lang="en-CA"/>
           </a:p>
@@ -4224,7 +4224,7 @@
           <a:p>
             <a:fld id="{F350ADBE-E2B5-49AB-99FC-12956E870A1F}" type="datetimeFigureOut">
               <a:rPr lang="en-CA" smtClean="0"/>
-              <a:t>26-Jan-2026</a:t>
+              <a:t>27-Jan-2026</a:t>
             </a:fld>
             <a:endParaRPr lang="en-CA"/>
           </a:p>
@@ -4337,7 +4337,7 @@
           <a:p>
             <a:fld id="{F350ADBE-E2B5-49AB-99FC-12956E870A1F}" type="datetimeFigureOut">
               <a:rPr lang="en-CA" smtClean="0"/>
-              <a:t>26-Jan-2026</a:t>
+              <a:t>27-Jan-2026</a:t>
             </a:fld>
             <a:endParaRPr lang="en-CA"/>
           </a:p>
@@ -4650,7 +4650,7 @@
           <a:p>
             <a:fld id="{F350ADBE-E2B5-49AB-99FC-12956E870A1F}" type="datetimeFigureOut">
               <a:rPr lang="en-CA" smtClean="0"/>
-              <a:t>26-Jan-2026</a:t>
+              <a:t>27-Jan-2026</a:t>
             </a:fld>
             <a:endParaRPr lang="en-CA"/>
           </a:p>
@@ -4939,7 +4939,7 @@
           <a:p>
             <a:fld id="{F350ADBE-E2B5-49AB-99FC-12956E870A1F}" type="datetimeFigureOut">
               <a:rPr lang="en-CA" smtClean="0"/>
-              <a:t>26-Jan-2026</a:t>
+              <a:t>27-Jan-2026</a:t>
             </a:fld>
             <a:endParaRPr lang="en-CA"/>
           </a:p>
@@ -5182,7 +5182,7 @@
           <a:p>
             <a:fld id="{F350ADBE-E2B5-49AB-99FC-12956E870A1F}" type="datetimeFigureOut">
               <a:rPr lang="en-CA" smtClean="0"/>
-              <a:t>26-Jan-2026</a:t>
+              <a:t>27-Jan-2026</a:t>
             </a:fld>
             <a:endParaRPr lang="en-CA"/>
           </a:p>
@@ -5681,7 +5681,7 @@
         </p:blipFill>
         <p:spPr>
           <a:xfrm>
-            <a:off x="319863" y="916453"/>
+            <a:off x="462738" y="878353"/>
             <a:ext cx="4896102" cy="3575234"/>
           </a:xfrm>
           <a:prstGeom prst="rect">
@@ -5689,6 +5689,108 @@
           </a:prstGeom>
         </p:spPr>
       </p:pic>
+      <p:pic>
+        <p:nvPicPr>
+          <p:cNvPr id="4" name="Picture 3">
+            <a:extLst>
+              <a:ext uri="{FF2B5EF4-FFF2-40B4-BE49-F238E27FC236}">
+                <a16:creationId xmlns:a16="http://schemas.microsoft.com/office/drawing/2014/main" id="{A9A8F9F5-DA58-9A0C-8F02-A8B87A01FCEE}"/>
+              </a:ext>
+            </a:extLst>
+          </p:cNvPr>
+          <p:cNvPicPr>
+            <a:picLocks noChangeAspect="1"/>
+          </p:cNvPicPr>
+          <p:nvPr/>
+        </p:nvPicPr>
+        <p:blipFill>
+          <a:blip r:embed="rId3"/>
+          <a:stretch>
+            <a:fillRect/>
+          </a:stretch>
+        </p:blipFill>
+        <p:spPr>
+          <a:xfrm>
+            <a:off x="5358840" y="878353"/>
+            <a:ext cx="4972306" cy="3575234"/>
+          </a:xfrm>
+          <a:prstGeom prst="rect">
+            <a:avLst/>
+          </a:prstGeom>
+        </p:spPr>
+      </p:pic>
+      <p:sp>
+        <p:nvSpPr>
+          <p:cNvPr id="5" name="TextBox 4">
+            <a:extLst>
+              <a:ext uri="{FF2B5EF4-FFF2-40B4-BE49-F238E27FC236}">
+                <a16:creationId xmlns:a16="http://schemas.microsoft.com/office/drawing/2014/main" id="{535A5D6A-8DC1-7D10-DC4A-29B9E71BD739}"/>
+              </a:ext>
+            </a:extLst>
+          </p:cNvPr>
+          <p:cNvSpPr txBox="1"/>
+          <p:nvPr/>
+        </p:nvSpPr>
+        <p:spPr>
+          <a:xfrm>
+            <a:off x="545719" y="771554"/>
+            <a:ext cx="455574" cy="369332"/>
+          </a:xfrm>
+          <a:prstGeom prst="rect">
+            <a:avLst/>
+          </a:prstGeom>
+          <a:noFill/>
+        </p:spPr>
+        <p:txBody>
+          <a:bodyPr wrap="none" rtlCol="0">
+            <a:spAutoFit/>
+          </a:bodyPr>
+          <a:lstStyle/>
+          <a:p>
+            <a:r>
+              <a:rPr lang="en-US" dirty="0"/>
+              <a:t>(A)</a:t>
+            </a:r>
+            <a:endParaRPr lang="en-CA" dirty="0"/>
+          </a:p>
+        </p:txBody>
+      </p:sp>
+      <p:sp>
+        <p:nvSpPr>
+          <p:cNvPr id="6" name="TextBox 5">
+            <a:extLst>
+              <a:ext uri="{FF2B5EF4-FFF2-40B4-BE49-F238E27FC236}">
+                <a16:creationId xmlns:a16="http://schemas.microsoft.com/office/drawing/2014/main" id="{DFC5FEF9-5634-60D7-E0AD-F6AD07592D3F}"/>
+              </a:ext>
+            </a:extLst>
+          </p:cNvPr>
+          <p:cNvSpPr txBox="1"/>
+          <p:nvPr/>
+        </p:nvSpPr>
+        <p:spPr>
+          <a:xfrm>
+            <a:off x="5619164" y="771554"/>
+            <a:ext cx="455574" cy="369332"/>
+          </a:xfrm>
+          <a:prstGeom prst="rect">
+            <a:avLst/>
+          </a:prstGeom>
+          <a:noFill/>
+        </p:spPr>
+        <p:txBody>
+          <a:bodyPr wrap="none" rtlCol="0">
+            <a:spAutoFit/>
+          </a:bodyPr>
+          <a:lstStyle/>
+          <a:p>
+            <a:r>
+              <a:rPr lang="en-US" dirty="0"/>
+              <a:t>(B)</a:t>
+            </a:r>
+            <a:endParaRPr lang="en-CA" dirty="0"/>
+          </a:p>
+        </p:txBody>
+      </p:sp>
     </p:spTree>
     <p:extLst>
       <p:ext uri="{BB962C8B-B14F-4D97-AF65-F5344CB8AC3E}">

--- a/Working Documents/2026_COMPAAPM_Figures.pptx
+++ b/Working Documents/2026_COMPAAPM_Figures.pptx
@@ -1789,6 +1789,7 @@
     </c:plotArea>
     <c:plotVisOnly val="1"/>
     <c:dispBlanksAs val="gap"/>
+    <c:showDLblsOverMax val="0"/>
     <c:extLst>
       <c:ext xmlns:c16r3="http://schemas.microsoft.com/office/drawing/2017/03/chart" uri="{56B9EC1D-385E-4148-901F-78D8002777C0}">
         <c16r3:dataDisplayOptions16>
@@ -1796,7 +1797,6 @@
         </c16r3:dataDisplayOptions16>
       </c:ext>
     </c:extLst>
-    <c:showDLblsOverMax val="0"/>
   </c:chart>
   <c:spPr>
     <a:noFill/>
@@ -2513,7 +2513,7 @@
           <a:p>
             <a:fld id="{F350ADBE-E2B5-49AB-99FC-12956E870A1F}" type="datetimeFigureOut">
               <a:rPr lang="en-CA" smtClean="0"/>
-              <a:t>27-Jan-2026</a:t>
+              <a:t>20-Feb-2026</a:t>
             </a:fld>
             <a:endParaRPr lang="en-CA"/>
           </a:p>
@@ -2713,7 +2713,7 @@
           <a:p>
             <a:fld id="{F350ADBE-E2B5-49AB-99FC-12956E870A1F}" type="datetimeFigureOut">
               <a:rPr lang="en-CA" smtClean="0"/>
-              <a:t>27-Jan-2026</a:t>
+              <a:t>20-Feb-2026</a:t>
             </a:fld>
             <a:endParaRPr lang="en-CA"/>
           </a:p>
@@ -2923,7 +2923,7 @@
           <a:p>
             <a:fld id="{F350ADBE-E2B5-49AB-99FC-12956E870A1F}" type="datetimeFigureOut">
               <a:rPr lang="en-CA" smtClean="0"/>
-              <a:t>27-Jan-2026</a:t>
+              <a:t>20-Feb-2026</a:t>
             </a:fld>
             <a:endParaRPr lang="en-CA"/>
           </a:p>
@@ -3123,7 +3123,7 @@
           <a:p>
             <a:fld id="{F350ADBE-E2B5-49AB-99FC-12956E870A1F}" type="datetimeFigureOut">
               <a:rPr lang="en-CA" smtClean="0"/>
-              <a:t>27-Jan-2026</a:t>
+              <a:t>20-Feb-2026</a:t>
             </a:fld>
             <a:endParaRPr lang="en-CA"/>
           </a:p>
@@ -3399,7 +3399,7 @@
           <a:p>
             <a:fld id="{F350ADBE-E2B5-49AB-99FC-12956E870A1F}" type="datetimeFigureOut">
               <a:rPr lang="en-CA" smtClean="0"/>
-              <a:t>27-Jan-2026</a:t>
+              <a:t>20-Feb-2026</a:t>
             </a:fld>
             <a:endParaRPr lang="en-CA"/>
           </a:p>
@@ -3667,7 +3667,7 @@
           <a:p>
             <a:fld id="{F350ADBE-E2B5-49AB-99FC-12956E870A1F}" type="datetimeFigureOut">
               <a:rPr lang="en-CA" smtClean="0"/>
-              <a:t>27-Jan-2026</a:t>
+              <a:t>20-Feb-2026</a:t>
             </a:fld>
             <a:endParaRPr lang="en-CA"/>
           </a:p>
@@ -4082,7 +4082,7 @@
           <a:p>
             <a:fld id="{F350ADBE-E2B5-49AB-99FC-12956E870A1F}" type="datetimeFigureOut">
               <a:rPr lang="en-CA" smtClean="0"/>
-              <a:t>27-Jan-2026</a:t>
+              <a:t>20-Feb-2026</a:t>
             </a:fld>
             <a:endParaRPr lang="en-CA"/>
           </a:p>
@@ -4224,7 +4224,7 @@
           <a:p>
             <a:fld id="{F350ADBE-E2B5-49AB-99FC-12956E870A1F}" type="datetimeFigureOut">
               <a:rPr lang="en-CA" smtClean="0"/>
-              <a:t>27-Jan-2026</a:t>
+              <a:t>20-Feb-2026</a:t>
             </a:fld>
             <a:endParaRPr lang="en-CA"/>
           </a:p>
@@ -4337,7 +4337,7 @@
           <a:p>
             <a:fld id="{F350ADBE-E2B5-49AB-99FC-12956E870A1F}" type="datetimeFigureOut">
               <a:rPr lang="en-CA" smtClean="0"/>
-              <a:t>27-Jan-2026</a:t>
+              <a:t>20-Feb-2026</a:t>
             </a:fld>
             <a:endParaRPr lang="en-CA"/>
           </a:p>
@@ -4650,7 +4650,7 @@
           <a:p>
             <a:fld id="{F350ADBE-E2B5-49AB-99FC-12956E870A1F}" type="datetimeFigureOut">
               <a:rPr lang="en-CA" smtClean="0"/>
-              <a:t>27-Jan-2026</a:t>
+              <a:t>20-Feb-2026</a:t>
             </a:fld>
             <a:endParaRPr lang="en-CA"/>
           </a:p>
@@ -4939,7 +4939,7 @@
           <a:p>
             <a:fld id="{F350ADBE-E2B5-49AB-99FC-12956E870A1F}" type="datetimeFigureOut">
               <a:rPr lang="en-CA" smtClean="0"/>
-              <a:t>27-Jan-2026</a:t>
+              <a:t>20-Feb-2026</a:t>
             </a:fld>
             <a:endParaRPr lang="en-CA"/>
           </a:p>
@@ -5182,7 +5182,7 @@
           <a:p>
             <a:fld id="{F350ADBE-E2B5-49AB-99FC-12956E870A1F}" type="datetimeFigureOut">
               <a:rPr lang="en-CA" smtClean="0"/>
-              <a:t>27-Jan-2026</a:t>
+              <a:t>20-Feb-2026</a:t>
             </a:fld>
             <a:endParaRPr lang="en-CA"/>
           </a:p>
@@ -6550,7 +6550,7 @@
         <p:spPr>
           <a:xfrm>
             <a:off x="3279086" y="919038"/>
-            <a:ext cx="455574" cy="369332"/>
+            <a:ext cx="442172" cy="369332"/>
           </a:xfrm>
           <a:prstGeom prst="rect">
             <a:avLst/>
@@ -6565,7 +6565,7 @@
           <a:p>
             <a:r>
               <a:rPr lang="en-US" dirty="0"/>
-              <a:t>(A)</a:t>
+              <a:t>(a)</a:t>
             </a:r>
             <a:endParaRPr lang="en-CA" dirty="0"/>
           </a:p>
@@ -6586,7 +6586,7 @@
         <p:spPr>
           <a:xfrm>
             <a:off x="3281343" y="3084420"/>
-            <a:ext cx="458780" cy="369332"/>
+            <a:ext cx="449162" cy="369332"/>
           </a:xfrm>
           <a:prstGeom prst="rect">
             <a:avLst/>
@@ -6601,7 +6601,7 @@
           <a:p>
             <a:r>
               <a:rPr lang="en-US" dirty="0"/>
-              <a:t>(B)</a:t>
+              <a:t>(b)</a:t>
             </a:r>
             <a:endParaRPr lang="en-CA" dirty="0"/>
           </a:p>
@@ -6622,7 +6622,7 @@
         <p:spPr>
           <a:xfrm>
             <a:off x="3267064" y="4738819"/>
-            <a:ext cx="479618" cy="369332"/>
+            <a:ext cx="441146" cy="369332"/>
           </a:xfrm>
           <a:prstGeom prst="rect">
             <a:avLst/>
@@ -6637,7 +6637,7 @@
           <a:p>
             <a:r>
               <a:rPr lang="en-US" dirty="0"/>
-              <a:t>(C)</a:t>
+              <a:t>(c)</a:t>
             </a:r>
             <a:endParaRPr lang="en-CA" dirty="0"/>
           </a:p>
@@ -10822,7 +10822,7 @@
         <p:spPr>
           <a:xfrm>
             <a:off x="2052097" y="1993288"/>
-            <a:ext cx="455574" cy="369332"/>
+            <a:ext cx="442172" cy="369332"/>
           </a:xfrm>
           <a:prstGeom prst="rect">
             <a:avLst/>
@@ -10837,7 +10837,7 @@
           <a:p>
             <a:r>
               <a:rPr lang="en-US" dirty="0"/>
-              <a:t>(A)</a:t>
+              <a:t>(a)</a:t>
             </a:r>
             <a:endParaRPr lang="en-CA" dirty="0"/>
           </a:p>
@@ -10858,7 +10858,7 @@
         <p:spPr>
           <a:xfrm>
             <a:off x="2052865" y="3129052"/>
-            <a:ext cx="458780" cy="369332"/>
+            <a:ext cx="449162" cy="369332"/>
           </a:xfrm>
           <a:prstGeom prst="rect">
             <a:avLst/>
@@ -10873,7 +10873,7 @@
           <a:p>
             <a:r>
               <a:rPr lang="en-US" dirty="0"/>
-              <a:t>(B)</a:t>
+              <a:t>(b)</a:t>
             </a:r>
             <a:endParaRPr lang="en-CA" dirty="0"/>
           </a:p>
@@ -10894,7 +10894,7 @@
         <p:spPr>
           <a:xfrm>
             <a:off x="5798463" y="3123860"/>
-            <a:ext cx="479618" cy="369332"/>
+            <a:ext cx="441146" cy="369332"/>
           </a:xfrm>
           <a:prstGeom prst="rect">
             <a:avLst/>
@@ -10909,7 +10909,7 @@
           <a:p>
             <a:r>
               <a:rPr lang="en-US" dirty="0"/>
-              <a:t>(C)</a:t>
+              <a:t>(c)</a:t>
             </a:r>
             <a:endParaRPr lang="en-CA" dirty="0"/>
           </a:p>
@@ -10930,7 +10930,7 @@
         <p:spPr>
           <a:xfrm>
             <a:off x="2024312" y="5803705"/>
-            <a:ext cx="478016" cy="369332"/>
+            <a:ext cx="449162" cy="369332"/>
           </a:xfrm>
           <a:prstGeom prst="rect">
             <a:avLst/>
@@ -10945,7 +10945,7 @@
           <a:p>
             <a:r>
               <a:rPr lang="en-US" dirty="0"/>
-              <a:t>(D)</a:t>
+              <a:t>(d)</a:t>
             </a:r>
             <a:endParaRPr lang="en-CA" dirty="0"/>
           </a:p>

--- a/Working Documents/2026_COMPAAPM_Figures.pptx
+++ b/Working Documents/2026_COMPAAPM_Figures.pptx
@@ -2513,7 +2513,7 @@
           <a:p>
             <a:fld id="{F350ADBE-E2B5-49AB-99FC-12956E870A1F}" type="datetimeFigureOut">
               <a:rPr lang="en-CA" smtClean="0"/>
-              <a:t>20-Feb-2026</a:t>
+              <a:t>10-Apr-2026</a:t>
             </a:fld>
             <a:endParaRPr lang="en-CA"/>
           </a:p>
@@ -2713,7 +2713,7 @@
           <a:p>
             <a:fld id="{F350ADBE-E2B5-49AB-99FC-12956E870A1F}" type="datetimeFigureOut">
               <a:rPr lang="en-CA" smtClean="0"/>
-              <a:t>20-Feb-2026</a:t>
+              <a:t>10-Apr-2026</a:t>
             </a:fld>
             <a:endParaRPr lang="en-CA"/>
           </a:p>
@@ -2923,7 +2923,7 @@
           <a:p>
             <a:fld id="{F350ADBE-E2B5-49AB-99FC-12956E870A1F}" type="datetimeFigureOut">
               <a:rPr lang="en-CA" smtClean="0"/>
-              <a:t>20-Feb-2026</a:t>
+              <a:t>10-Apr-2026</a:t>
             </a:fld>
             <a:endParaRPr lang="en-CA"/>
           </a:p>
@@ -3123,7 +3123,7 @@
           <a:p>
             <a:fld id="{F350ADBE-E2B5-49AB-99FC-12956E870A1F}" type="datetimeFigureOut">
               <a:rPr lang="en-CA" smtClean="0"/>
-              <a:t>20-Feb-2026</a:t>
+              <a:t>10-Apr-2026</a:t>
             </a:fld>
             <a:endParaRPr lang="en-CA"/>
           </a:p>
@@ -3399,7 +3399,7 @@
           <a:p>
             <a:fld id="{F350ADBE-E2B5-49AB-99FC-12956E870A1F}" type="datetimeFigureOut">
               <a:rPr lang="en-CA" smtClean="0"/>
-              <a:t>20-Feb-2026</a:t>
+              <a:t>10-Apr-2026</a:t>
             </a:fld>
             <a:endParaRPr lang="en-CA"/>
           </a:p>
@@ -3667,7 +3667,7 @@
           <a:p>
             <a:fld id="{F350ADBE-E2B5-49AB-99FC-12956E870A1F}" type="datetimeFigureOut">
               <a:rPr lang="en-CA" smtClean="0"/>
-              <a:t>20-Feb-2026</a:t>
+              <a:t>10-Apr-2026</a:t>
             </a:fld>
             <a:endParaRPr lang="en-CA"/>
           </a:p>
@@ -4082,7 +4082,7 @@
           <a:p>
             <a:fld id="{F350ADBE-E2B5-49AB-99FC-12956E870A1F}" type="datetimeFigureOut">
               <a:rPr lang="en-CA" smtClean="0"/>
-              <a:t>20-Feb-2026</a:t>
+              <a:t>10-Apr-2026</a:t>
             </a:fld>
             <a:endParaRPr lang="en-CA"/>
           </a:p>
@@ -4224,7 +4224,7 @@
           <a:p>
             <a:fld id="{F350ADBE-E2B5-49AB-99FC-12956E870A1F}" type="datetimeFigureOut">
               <a:rPr lang="en-CA" smtClean="0"/>
-              <a:t>20-Feb-2026</a:t>
+              <a:t>10-Apr-2026</a:t>
             </a:fld>
             <a:endParaRPr lang="en-CA"/>
           </a:p>
@@ -4337,7 +4337,7 @@
           <a:p>
             <a:fld id="{F350ADBE-E2B5-49AB-99FC-12956E870A1F}" type="datetimeFigureOut">
               <a:rPr lang="en-CA" smtClean="0"/>
-              <a:t>20-Feb-2026</a:t>
+              <a:t>10-Apr-2026</a:t>
             </a:fld>
             <a:endParaRPr lang="en-CA"/>
           </a:p>
@@ -4650,7 +4650,7 @@
           <a:p>
             <a:fld id="{F350ADBE-E2B5-49AB-99FC-12956E870A1F}" type="datetimeFigureOut">
               <a:rPr lang="en-CA" smtClean="0"/>
-              <a:t>20-Feb-2026</a:t>
+              <a:t>10-Apr-2026</a:t>
             </a:fld>
             <a:endParaRPr lang="en-CA"/>
           </a:p>
@@ -4939,7 +4939,7 @@
           <a:p>
             <a:fld id="{F350ADBE-E2B5-49AB-99FC-12956E870A1F}" type="datetimeFigureOut">
               <a:rPr lang="en-CA" smtClean="0"/>
-              <a:t>20-Feb-2026</a:t>
+              <a:t>10-Apr-2026</a:t>
             </a:fld>
             <a:endParaRPr lang="en-CA"/>
           </a:p>
@@ -5182,7 +5182,7 @@
           <a:p>
             <a:fld id="{F350ADBE-E2B5-49AB-99FC-12956E870A1F}" type="datetimeFigureOut">
               <a:rPr lang="en-CA" smtClean="0"/>
-              <a:t>20-Feb-2026</a:t>
+              <a:t>10-Apr-2026</a:t>
             </a:fld>
             <a:endParaRPr lang="en-CA"/>
           </a:p>
@@ -6740,7 +6740,7 @@
           <p:nvPr>
             <p:extLst>
               <p:ext uri="{D42A27DB-BD31-4B8C-83A1-F6EECF244321}">
-                <p14:modId xmlns:p14="http://schemas.microsoft.com/office/powerpoint/2010/main" val="598246970"/>
+                <p14:modId xmlns:p14="http://schemas.microsoft.com/office/powerpoint/2010/main" val="1959742452"/>
               </p:ext>
             </p:extLst>
           </p:nvPr>
@@ -6756,546 +6756,15 @@
                 <a:tableStyleId>{5C22544A-7EE6-4342-B048-85BDC9FD1C3A}</a:tableStyleId>
               </a:tblPr>
               <a:tblGrid>
-                <a:gridCol w="648393">
+                <a:gridCol w="6483930">
                   <a:extLst>
                     <a:ext uri="{9D8B030D-6E8A-4147-A177-3AD203B41FA5}">
                       <a16:colId xmlns:a16="http://schemas.microsoft.com/office/drawing/2014/main" val="2331374839"/>
                     </a:ext>
                   </a:extLst>
                 </a:gridCol>
-                <a:gridCol w="648393">
-                  <a:extLst>
-                    <a:ext uri="{9D8B030D-6E8A-4147-A177-3AD203B41FA5}">
-                      <a16:colId xmlns:a16="http://schemas.microsoft.com/office/drawing/2014/main" val="3047030589"/>
-                    </a:ext>
-                  </a:extLst>
-                </a:gridCol>
-                <a:gridCol w="648393">
-                  <a:extLst>
-                    <a:ext uri="{9D8B030D-6E8A-4147-A177-3AD203B41FA5}">
-                      <a16:colId xmlns:a16="http://schemas.microsoft.com/office/drawing/2014/main" val="2837905681"/>
-                    </a:ext>
-                  </a:extLst>
-                </a:gridCol>
-                <a:gridCol w="648393">
-                  <a:extLst>
-                    <a:ext uri="{9D8B030D-6E8A-4147-A177-3AD203B41FA5}">
-                      <a16:colId xmlns:a16="http://schemas.microsoft.com/office/drawing/2014/main" val="2543869212"/>
-                    </a:ext>
-                  </a:extLst>
-                </a:gridCol>
-                <a:gridCol w="648393">
-                  <a:extLst>
-                    <a:ext uri="{9D8B030D-6E8A-4147-A177-3AD203B41FA5}">
-                      <a16:colId xmlns:a16="http://schemas.microsoft.com/office/drawing/2014/main" val="2243421271"/>
-                    </a:ext>
-                  </a:extLst>
-                </a:gridCol>
-                <a:gridCol w="648393">
-                  <a:extLst>
-                    <a:ext uri="{9D8B030D-6E8A-4147-A177-3AD203B41FA5}">
-                      <a16:colId xmlns:a16="http://schemas.microsoft.com/office/drawing/2014/main" val="183586060"/>
-                    </a:ext>
-                  </a:extLst>
-                </a:gridCol>
-                <a:gridCol w="648393">
-                  <a:extLst>
-                    <a:ext uri="{9D8B030D-6E8A-4147-A177-3AD203B41FA5}">
-                      <a16:colId xmlns:a16="http://schemas.microsoft.com/office/drawing/2014/main" val="1151400591"/>
-                    </a:ext>
-                  </a:extLst>
-                </a:gridCol>
-                <a:gridCol w="648393">
-                  <a:extLst>
-                    <a:ext uri="{9D8B030D-6E8A-4147-A177-3AD203B41FA5}">
-                      <a16:colId xmlns:a16="http://schemas.microsoft.com/office/drawing/2014/main" val="2814794531"/>
-                    </a:ext>
-                  </a:extLst>
-                </a:gridCol>
-                <a:gridCol w="648393">
-                  <a:extLst>
-                    <a:ext uri="{9D8B030D-6E8A-4147-A177-3AD203B41FA5}">
-                      <a16:colId xmlns:a16="http://schemas.microsoft.com/office/drawing/2014/main" val="1306673768"/>
-                    </a:ext>
-                  </a:extLst>
-                </a:gridCol>
-                <a:gridCol w="648393">
-                  <a:extLst>
-                    <a:ext uri="{9D8B030D-6E8A-4147-A177-3AD203B41FA5}">
-                      <a16:colId xmlns:a16="http://schemas.microsoft.com/office/drawing/2014/main" val="2401572614"/>
-                    </a:ext>
-                  </a:extLst>
-                </a:gridCol>
               </a:tblGrid>
               <a:tr h="628844">
-                <a:tc>
-                  <a:txBody>
-                    <a:bodyPr/>
-                    <a:lstStyle/>
-                    <a:p>
-                      <a:endParaRPr lang="en-CA">
-                        <a:solidFill>
-                          <a:schemeClr val="tx1"/>
-                        </a:solidFill>
-                      </a:endParaRPr>
-                    </a:p>
-                  </a:txBody>
-                  <a:tcPr>
-                    <a:lnL w="12700" cap="flat" cmpd="sng" algn="ctr">
-                      <a:solidFill>
-                        <a:schemeClr val="tx1"/>
-                      </a:solidFill>
-                      <a:prstDash val="solid"/>
-                      <a:round/>
-                      <a:headEnd type="none" w="med" len="med"/>
-                      <a:tailEnd type="none" w="med" len="med"/>
-                    </a:lnL>
-                    <a:lnR w="12700" cap="flat" cmpd="sng" algn="ctr">
-                      <a:solidFill>
-                        <a:schemeClr val="tx1"/>
-                      </a:solidFill>
-                      <a:prstDash val="solid"/>
-                      <a:round/>
-                      <a:headEnd type="none" w="med" len="med"/>
-                      <a:tailEnd type="none" w="med" len="med"/>
-                    </a:lnR>
-                    <a:lnT w="12700" cap="flat" cmpd="sng" algn="ctr">
-                      <a:solidFill>
-                        <a:schemeClr val="tx1"/>
-                      </a:solidFill>
-                      <a:prstDash val="solid"/>
-                      <a:round/>
-                      <a:headEnd type="none" w="med" len="med"/>
-                      <a:tailEnd type="none" w="med" len="med"/>
-                    </a:lnT>
-                    <a:lnB w="12700" cap="flat" cmpd="sng" algn="ctr">
-                      <a:solidFill>
-                        <a:schemeClr val="tx1"/>
-                      </a:solidFill>
-                      <a:prstDash val="solid"/>
-                      <a:round/>
-                      <a:headEnd type="none" w="med" len="med"/>
-                      <a:tailEnd type="none" w="med" len="med"/>
-                    </a:lnB>
-                    <a:noFill/>
-                  </a:tcPr>
-                </a:tc>
-                <a:tc>
-                  <a:txBody>
-                    <a:bodyPr/>
-                    <a:lstStyle/>
-                    <a:p>
-                      <a:endParaRPr lang="en-CA" dirty="0">
-                        <a:solidFill>
-                          <a:schemeClr val="tx1"/>
-                        </a:solidFill>
-                      </a:endParaRPr>
-                    </a:p>
-                  </a:txBody>
-                  <a:tcPr>
-                    <a:lnL w="12700" cap="flat" cmpd="sng" algn="ctr">
-                      <a:solidFill>
-                        <a:schemeClr val="tx1"/>
-                      </a:solidFill>
-                      <a:prstDash val="solid"/>
-                      <a:round/>
-                      <a:headEnd type="none" w="med" len="med"/>
-                      <a:tailEnd type="none" w="med" len="med"/>
-                    </a:lnL>
-                    <a:lnR w="12700" cap="flat" cmpd="sng" algn="ctr">
-                      <a:solidFill>
-                        <a:schemeClr val="tx1"/>
-                      </a:solidFill>
-                      <a:prstDash val="solid"/>
-                      <a:round/>
-                      <a:headEnd type="none" w="med" len="med"/>
-                      <a:tailEnd type="none" w="med" len="med"/>
-                    </a:lnR>
-                    <a:lnT w="12700" cap="flat" cmpd="sng" algn="ctr">
-                      <a:solidFill>
-                        <a:schemeClr val="tx1"/>
-                      </a:solidFill>
-                      <a:prstDash val="solid"/>
-                      <a:round/>
-                      <a:headEnd type="none" w="med" len="med"/>
-                      <a:tailEnd type="none" w="med" len="med"/>
-                    </a:lnT>
-                    <a:lnB w="12700" cap="flat" cmpd="sng" algn="ctr">
-                      <a:solidFill>
-                        <a:schemeClr val="tx1"/>
-                      </a:solidFill>
-                      <a:prstDash val="solid"/>
-                      <a:round/>
-                      <a:headEnd type="none" w="med" len="med"/>
-                      <a:tailEnd type="none" w="med" len="med"/>
-                    </a:lnB>
-                    <a:noFill/>
-                  </a:tcPr>
-                </a:tc>
-                <a:tc>
-                  <a:txBody>
-                    <a:bodyPr/>
-                    <a:lstStyle/>
-                    <a:p>
-                      <a:endParaRPr lang="en-CA" dirty="0">
-                        <a:solidFill>
-                          <a:schemeClr val="tx1"/>
-                        </a:solidFill>
-                      </a:endParaRPr>
-                    </a:p>
-                  </a:txBody>
-                  <a:tcPr>
-                    <a:lnL w="12700" cap="flat" cmpd="sng" algn="ctr">
-                      <a:solidFill>
-                        <a:schemeClr val="tx1"/>
-                      </a:solidFill>
-                      <a:prstDash val="solid"/>
-                      <a:round/>
-                      <a:headEnd type="none" w="med" len="med"/>
-                      <a:tailEnd type="none" w="med" len="med"/>
-                    </a:lnL>
-                    <a:lnR w="12700" cap="flat" cmpd="sng" algn="ctr">
-                      <a:solidFill>
-                        <a:schemeClr val="tx1"/>
-                      </a:solidFill>
-                      <a:prstDash val="solid"/>
-                      <a:round/>
-                      <a:headEnd type="none" w="med" len="med"/>
-                      <a:tailEnd type="none" w="med" len="med"/>
-                    </a:lnR>
-                    <a:lnT w="12700" cap="flat" cmpd="sng" algn="ctr">
-                      <a:solidFill>
-                        <a:schemeClr val="tx1"/>
-                      </a:solidFill>
-                      <a:prstDash val="solid"/>
-                      <a:round/>
-                      <a:headEnd type="none" w="med" len="med"/>
-                      <a:tailEnd type="none" w="med" len="med"/>
-                    </a:lnT>
-                    <a:lnB w="12700" cap="flat" cmpd="sng" algn="ctr">
-                      <a:solidFill>
-                        <a:schemeClr val="tx1"/>
-                      </a:solidFill>
-                      <a:prstDash val="solid"/>
-                      <a:round/>
-                      <a:headEnd type="none" w="med" len="med"/>
-                      <a:tailEnd type="none" w="med" len="med"/>
-                    </a:lnB>
-                    <a:noFill/>
-                  </a:tcPr>
-                </a:tc>
-                <a:tc>
-                  <a:txBody>
-                    <a:bodyPr/>
-                    <a:lstStyle/>
-                    <a:p>
-                      <a:endParaRPr lang="en-CA">
-                        <a:solidFill>
-                          <a:schemeClr val="tx1"/>
-                        </a:solidFill>
-                      </a:endParaRPr>
-                    </a:p>
-                  </a:txBody>
-                  <a:tcPr>
-                    <a:lnL w="12700" cap="flat" cmpd="sng" algn="ctr">
-                      <a:solidFill>
-                        <a:schemeClr val="tx1"/>
-                      </a:solidFill>
-                      <a:prstDash val="solid"/>
-                      <a:round/>
-                      <a:headEnd type="none" w="med" len="med"/>
-                      <a:tailEnd type="none" w="med" len="med"/>
-                    </a:lnL>
-                    <a:lnR w="12700" cap="flat" cmpd="sng" algn="ctr">
-                      <a:solidFill>
-                        <a:schemeClr val="tx1"/>
-                      </a:solidFill>
-                      <a:prstDash val="solid"/>
-                      <a:round/>
-                      <a:headEnd type="none" w="med" len="med"/>
-                      <a:tailEnd type="none" w="med" len="med"/>
-                    </a:lnR>
-                    <a:lnT w="12700" cap="flat" cmpd="sng" algn="ctr">
-                      <a:solidFill>
-                        <a:schemeClr val="tx1"/>
-                      </a:solidFill>
-                      <a:prstDash val="solid"/>
-                      <a:round/>
-                      <a:headEnd type="none" w="med" len="med"/>
-                      <a:tailEnd type="none" w="med" len="med"/>
-                    </a:lnT>
-                    <a:lnB w="12700" cap="flat" cmpd="sng" algn="ctr">
-                      <a:solidFill>
-                        <a:schemeClr val="tx1"/>
-                      </a:solidFill>
-                      <a:prstDash val="solid"/>
-                      <a:round/>
-                      <a:headEnd type="none" w="med" len="med"/>
-                      <a:tailEnd type="none" w="med" len="med"/>
-                    </a:lnB>
-                    <a:noFill/>
-                  </a:tcPr>
-                </a:tc>
-                <a:tc>
-                  <a:txBody>
-                    <a:bodyPr/>
-                    <a:lstStyle/>
-                    <a:p>
-                      <a:endParaRPr lang="en-CA" dirty="0">
-                        <a:solidFill>
-                          <a:schemeClr val="tx1"/>
-                        </a:solidFill>
-                      </a:endParaRPr>
-                    </a:p>
-                  </a:txBody>
-                  <a:tcPr>
-                    <a:lnL w="12700" cap="flat" cmpd="sng" algn="ctr">
-                      <a:solidFill>
-                        <a:schemeClr val="tx1"/>
-                      </a:solidFill>
-                      <a:prstDash val="solid"/>
-                      <a:round/>
-                      <a:headEnd type="none" w="med" len="med"/>
-                      <a:tailEnd type="none" w="med" len="med"/>
-                    </a:lnL>
-                    <a:lnR w="12700" cap="flat" cmpd="sng" algn="ctr">
-                      <a:solidFill>
-                        <a:schemeClr val="tx1"/>
-                      </a:solidFill>
-                      <a:prstDash val="solid"/>
-                      <a:round/>
-                      <a:headEnd type="none" w="med" len="med"/>
-                      <a:tailEnd type="none" w="med" len="med"/>
-                    </a:lnR>
-                    <a:lnT w="12700" cap="flat" cmpd="sng" algn="ctr">
-                      <a:solidFill>
-                        <a:schemeClr val="tx1"/>
-                      </a:solidFill>
-                      <a:prstDash val="solid"/>
-                      <a:round/>
-                      <a:headEnd type="none" w="med" len="med"/>
-                      <a:tailEnd type="none" w="med" len="med"/>
-                    </a:lnT>
-                    <a:lnB w="12700" cap="flat" cmpd="sng" algn="ctr">
-                      <a:solidFill>
-                        <a:schemeClr val="tx1"/>
-                      </a:solidFill>
-                      <a:prstDash val="solid"/>
-                      <a:round/>
-                      <a:headEnd type="none" w="med" len="med"/>
-                      <a:tailEnd type="none" w="med" len="med"/>
-                    </a:lnB>
-                    <a:noFill/>
-                  </a:tcPr>
-                </a:tc>
-                <a:tc>
-                  <a:txBody>
-                    <a:bodyPr/>
-                    <a:lstStyle/>
-                    <a:p>
-                      <a:endParaRPr lang="en-CA" dirty="0">
-                        <a:solidFill>
-                          <a:schemeClr val="tx1"/>
-                        </a:solidFill>
-                      </a:endParaRPr>
-                    </a:p>
-                  </a:txBody>
-                  <a:tcPr>
-                    <a:lnL w="12700" cap="flat" cmpd="sng" algn="ctr">
-                      <a:solidFill>
-                        <a:schemeClr val="tx1"/>
-                      </a:solidFill>
-                      <a:prstDash val="solid"/>
-                      <a:round/>
-                      <a:headEnd type="none" w="med" len="med"/>
-                      <a:tailEnd type="none" w="med" len="med"/>
-                    </a:lnL>
-                    <a:lnR w="12700" cap="flat" cmpd="sng" algn="ctr">
-                      <a:solidFill>
-                        <a:schemeClr val="tx1"/>
-                      </a:solidFill>
-                      <a:prstDash val="solid"/>
-                      <a:round/>
-                      <a:headEnd type="none" w="med" len="med"/>
-                      <a:tailEnd type="none" w="med" len="med"/>
-                    </a:lnR>
-                    <a:lnT w="12700" cap="flat" cmpd="sng" algn="ctr">
-                      <a:solidFill>
-                        <a:schemeClr val="tx1"/>
-                      </a:solidFill>
-                      <a:prstDash val="solid"/>
-                      <a:round/>
-                      <a:headEnd type="none" w="med" len="med"/>
-                      <a:tailEnd type="none" w="med" len="med"/>
-                    </a:lnT>
-                    <a:lnB w="12700" cap="flat" cmpd="sng" algn="ctr">
-                      <a:solidFill>
-                        <a:schemeClr val="tx1"/>
-                      </a:solidFill>
-                      <a:prstDash val="solid"/>
-                      <a:round/>
-                      <a:headEnd type="none" w="med" len="med"/>
-                      <a:tailEnd type="none" w="med" len="med"/>
-                    </a:lnB>
-                    <a:noFill/>
-                  </a:tcPr>
-                </a:tc>
-                <a:tc>
-                  <a:txBody>
-                    <a:bodyPr/>
-                    <a:lstStyle/>
-                    <a:p>
-                      <a:endParaRPr lang="en-CA">
-                        <a:solidFill>
-                          <a:schemeClr val="tx1"/>
-                        </a:solidFill>
-                      </a:endParaRPr>
-                    </a:p>
-                  </a:txBody>
-                  <a:tcPr>
-                    <a:lnL w="12700" cap="flat" cmpd="sng" algn="ctr">
-                      <a:solidFill>
-                        <a:schemeClr val="tx1"/>
-                      </a:solidFill>
-                      <a:prstDash val="solid"/>
-                      <a:round/>
-                      <a:headEnd type="none" w="med" len="med"/>
-                      <a:tailEnd type="none" w="med" len="med"/>
-                    </a:lnL>
-                    <a:lnR w="12700" cap="flat" cmpd="sng" algn="ctr">
-                      <a:solidFill>
-                        <a:schemeClr val="tx1"/>
-                      </a:solidFill>
-                      <a:prstDash val="solid"/>
-                      <a:round/>
-                      <a:headEnd type="none" w="med" len="med"/>
-                      <a:tailEnd type="none" w="med" len="med"/>
-                    </a:lnR>
-                    <a:lnT w="12700" cap="flat" cmpd="sng" algn="ctr">
-                      <a:solidFill>
-                        <a:schemeClr val="tx1"/>
-                      </a:solidFill>
-                      <a:prstDash val="solid"/>
-                      <a:round/>
-                      <a:headEnd type="none" w="med" len="med"/>
-                      <a:tailEnd type="none" w="med" len="med"/>
-                    </a:lnT>
-                    <a:lnB w="12700" cap="flat" cmpd="sng" algn="ctr">
-                      <a:solidFill>
-                        <a:schemeClr val="tx1"/>
-                      </a:solidFill>
-                      <a:prstDash val="solid"/>
-                      <a:round/>
-                      <a:headEnd type="none" w="med" len="med"/>
-                      <a:tailEnd type="none" w="med" len="med"/>
-                    </a:lnB>
-                    <a:noFill/>
-                  </a:tcPr>
-                </a:tc>
-                <a:tc>
-                  <a:txBody>
-                    <a:bodyPr/>
-                    <a:lstStyle/>
-                    <a:p>
-                      <a:endParaRPr lang="en-CA">
-                        <a:solidFill>
-                          <a:schemeClr val="tx1"/>
-                        </a:solidFill>
-                      </a:endParaRPr>
-                    </a:p>
-                  </a:txBody>
-                  <a:tcPr>
-                    <a:lnL w="12700" cap="flat" cmpd="sng" algn="ctr">
-                      <a:solidFill>
-                        <a:schemeClr val="tx1"/>
-                      </a:solidFill>
-                      <a:prstDash val="solid"/>
-                      <a:round/>
-                      <a:headEnd type="none" w="med" len="med"/>
-                      <a:tailEnd type="none" w="med" len="med"/>
-                    </a:lnL>
-                    <a:lnR w="12700" cap="flat" cmpd="sng" algn="ctr">
-                      <a:solidFill>
-                        <a:schemeClr val="tx1"/>
-                      </a:solidFill>
-                      <a:prstDash val="solid"/>
-                      <a:round/>
-                      <a:headEnd type="none" w="med" len="med"/>
-                      <a:tailEnd type="none" w="med" len="med"/>
-                    </a:lnR>
-                    <a:lnT w="12700" cap="flat" cmpd="sng" algn="ctr">
-                      <a:solidFill>
-                        <a:schemeClr val="tx1"/>
-                      </a:solidFill>
-                      <a:prstDash val="solid"/>
-                      <a:round/>
-                      <a:headEnd type="none" w="med" len="med"/>
-                      <a:tailEnd type="none" w="med" len="med"/>
-                    </a:lnT>
-                    <a:lnB w="12700" cap="flat" cmpd="sng" algn="ctr">
-                      <a:solidFill>
-                        <a:schemeClr val="tx1"/>
-                      </a:solidFill>
-                      <a:prstDash val="solid"/>
-                      <a:round/>
-                      <a:headEnd type="none" w="med" len="med"/>
-                      <a:tailEnd type="none" w="med" len="med"/>
-                    </a:lnB>
-                    <a:noFill/>
-                  </a:tcPr>
-                </a:tc>
-                <a:tc>
-                  <a:txBody>
-                    <a:bodyPr/>
-                    <a:lstStyle/>
-                    <a:p>
-                      <a:endParaRPr lang="en-CA" dirty="0">
-                        <a:solidFill>
-                          <a:schemeClr val="tx1"/>
-                        </a:solidFill>
-                      </a:endParaRPr>
-                    </a:p>
-                  </a:txBody>
-                  <a:tcPr>
-                    <a:lnL w="12700" cap="flat" cmpd="sng" algn="ctr">
-                      <a:solidFill>
-                        <a:schemeClr val="tx1"/>
-                      </a:solidFill>
-                      <a:prstDash val="solid"/>
-                      <a:round/>
-                      <a:headEnd type="none" w="med" len="med"/>
-                      <a:tailEnd type="none" w="med" len="med"/>
-                    </a:lnL>
-                    <a:lnR w="12700" cap="flat" cmpd="sng" algn="ctr">
-                      <a:solidFill>
-                        <a:schemeClr val="tx1"/>
-                      </a:solidFill>
-                      <a:prstDash val="solid"/>
-                      <a:round/>
-                      <a:headEnd type="none" w="med" len="med"/>
-                      <a:tailEnd type="none" w="med" len="med"/>
-                    </a:lnR>
-                    <a:lnT w="12700" cap="flat" cmpd="sng" algn="ctr">
-                      <a:solidFill>
-                        <a:schemeClr val="tx1"/>
-                      </a:solidFill>
-                      <a:prstDash val="solid"/>
-                      <a:round/>
-                      <a:headEnd type="none" w="med" len="med"/>
-                      <a:tailEnd type="none" w="med" len="med"/>
-                    </a:lnT>
-                    <a:lnB w="12700" cap="flat" cmpd="sng" algn="ctr">
-                      <a:solidFill>
-                        <a:schemeClr val="tx1"/>
-                      </a:solidFill>
-                      <a:prstDash val="solid"/>
-                      <a:round/>
-                      <a:headEnd type="none" w="med" len="med"/>
-                      <a:tailEnd type="none" w="med" len="med"/>
-                    </a:lnB>
-                    <a:noFill/>
-                  </a:tcPr>
-                </a:tc>
                 <a:tc>
                   <a:txBody>
                     <a:bodyPr/>
@@ -8314,8 +7783,8 @@
           </p:sp>
         </mc:Fallback>
       </mc:AlternateContent>
-      <mc:AlternateContent xmlns:mc="http://schemas.openxmlformats.org/markup-compatibility/2006" xmlns:a14="http://schemas.microsoft.com/office/drawing/2010/main">
-        <mc:Choice Requires="a14">
+      <mc:AlternateContent xmlns:mc="http://schemas.openxmlformats.org/markup-compatibility/2006">
+        <mc:Choice xmlns:a14="http://schemas.microsoft.com/office/drawing/2010/main" Requires="a14">
           <p:graphicFrame>
             <p:nvGraphicFramePr>
               <p:cNvPr id="28" name="Table 27">
@@ -8331,14 +7800,14 @@
               <p:nvPr>
                 <p:extLst>
                   <p:ext uri="{D42A27DB-BD31-4B8C-83A1-F6EECF244321}">
-                    <p14:modId xmlns:p14="http://schemas.microsoft.com/office/powerpoint/2010/main" val="1877467923"/>
+                    <p14:modId xmlns:p14="http://schemas.microsoft.com/office/powerpoint/2010/main" val="3812806497"/>
                   </p:ext>
                 </p:extLst>
               </p:nvPr>
             </p:nvGraphicFramePr>
             <p:xfrm>
-              <a:off x="6541652" y="3392443"/>
-              <a:ext cx="2369124" cy="1853279"/>
+              <a:off x="6541651" y="3392443"/>
+              <a:ext cx="3065193" cy="2105564"/>
             </p:xfrm>
             <a:graphic>
               <a:graphicData uri="http://schemas.openxmlformats.org/drawingml/2006/table">
@@ -8347,21 +7816,21 @@
                     <a:tableStyleId>{5C22544A-7EE6-4342-B048-85BDC9FD1C3A}</a:tableStyleId>
                   </a:tblPr>
                   <a:tblGrid>
-                    <a:gridCol w="789708">
+                    <a:gridCol w="1021731">
                       <a:extLst>
                         <a:ext uri="{9D8B030D-6E8A-4147-A177-3AD203B41FA5}">
                           <a16:colId xmlns:a16="http://schemas.microsoft.com/office/drawing/2014/main" val="3638430088"/>
                         </a:ext>
                       </a:extLst>
                     </a:gridCol>
-                    <a:gridCol w="789708">
+                    <a:gridCol w="1021731">
                       <a:extLst>
                         <a:ext uri="{9D8B030D-6E8A-4147-A177-3AD203B41FA5}">
                           <a16:colId xmlns:a16="http://schemas.microsoft.com/office/drawing/2014/main" val="2870050223"/>
                         </a:ext>
                       </a:extLst>
                     </a:gridCol>
-                    <a:gridCol w="789708">
+                    <a:gridCol w="1021731">
                       <a:extLst>
                         <a:ext uri="{9D8B030D-6E8A-4147-A177-3AD203B41FA5}">
                           <a16:colId xmlns:a16="http://schemas.microsoft.com/office/drawing/2014/main" val="3677307559"/>
@@ -8383,13 +7852,53 @@
                               </m:oMathParaPr>
                               <m:oMath xmlns:m="http://schemas.openxmlformats.org/officeDocument/2006/math">
                                 <m:r>
-                                  <a:rPr lang="en-CA" i="1" smtClean="0">
+                                  <a:rPr lang="en-US" b="0" i="1" smtClean="0">
                                     <a:solidFill>
                                       <a:schemeClr val="tx1"/>
                                     </a:solidFill>
                                     <a:latin typeface="Cambria Math" panose="02040503050406030204" pitchFamily="18" charset="0"/>
+                                    <a:ea typeface="Cambria Math" panose="02040503050406030204" pitchFamily="18" charset="0"/>
                                   </a:rPr>
-                                  <m:t>𝑥</m:t>
+                                  <m:t>𝑣𝑜𝑥𝑒𝑙</m:t>
+                                </m:r>
+                                <m:r>
+                                  <a:rPr lang="en-US" b="0" i="1" smtClean="0">
+                                    <a:solidFill>
+                                      <a:schemeClr val="tx1"/>
+                                    </a:solidFill>
+                                    <a:latin typeface="Cambria Math" panose="02040503050406030204" pitchFamily="18" charset="0"/>
+                                    <a:ea typeface="Cambria Math" panose="02040503050406030204" pitchFamily="18" charset="0"/>
+                                  </a:rPr>
+                                  <m:t> </m:t>
+                                </m:r>
+                              </m:oMath>
+                            </m:oMathPara>
+                          </a14:m>
+                          <a:endParaRPr lang="en-US" b="0" i="1" dirty="0">
+                            <a:solidFill>
+                              <a:schemeClr val="tx1"/>
+                            </a:solidFill>
+                            <a:latin typeface="Cambria Math" panose="02040503050406030204" pitchFamily="18" charset="0"/>
+                            <a:ea typeface="Cambria Math" panose="02040503050406030204" pitchFamily="18" charset="0"/>
+                          </a:endParaRPr>
+                        </a:p>
+                        <a:p>
+                          <a:pPr algn="ctr"/>
+                          <a14:m>
+                            <m:oMathPara xmlns:m="http://schemas.openxmlformats.org/officeDocument/2006/math">
+                              <m:oMathParaPr>
+                                <m:jc m:val="center"/>
+                              </m:oMathParaPr>
+                              <m:oMath xmlns:m="http://schemas.openxmlformats.org/officeDocument/2006/math">
+                                <m:r>
+                                  <a:rPr lang="en-US" b="0" i="1" smtClean="0">
+                                    <a:solidFill>
+                                      <a:schemeClr val="tx1"/>
+                                    </a:solidFill>
+                                    <a:latin typeface="Cambria Math" panose="02040503050406030204" pitchFamily="18" charset="0"/>
+                                    <a:ea typeface="Cambria Math" panose="02040503050406030204" pitchFamily="18" charset="0"/>
+                                  </a:rPr>
+                                  <m:t>𝑖𝑛𝑑𝑒𝑥</m:t>
                                 </m:r>
                               </m:oMath>
                             </m:oMathPara>
@@ -8403,7 +7912,7 @@
                           </a:endParaRPr>
                         </a:p>
                       </a:txBody>
-                      <a:tcPr>
+                      <a:tcPr anchor="ctr">
                         <a:lnL w="12700" cmpd="sng">
                           <a:noFill/>
                         </a:lnL>
@@ -8448,33 +7957,31 @@
                         <a:bodyPr/>
                         <a:lstStyle/>
                         <a:p>
-                          <a:pPr/>
+                          <a:pPr algn="ctr"/>
                           <a14:m>
-                            <m:oMathPara xmlns:m="http://schemas.openxmlformats.org/officeDocument/2006/math">
-                              <m:oMathParaPr>
-                                <m:jc m:val="centerGroup"/>
-                              </m:oMathParaPr>
-                              <m:oMath xmlns:m="http://schemas.openxmlformats.org/officeDocument/2006/math">
-                                <m:r>
-                                  <a:rPr lang="en-CA" b="0" i="1" smtClean="0">
-                                    <a:solidFill>
-                                      <a:schemeClr val="tx1"/>
-                                    </a:solidFill>
-                                    <a:latin typeface="Cambria Math" panose="02040503050406030204" pitchFamily="18" charset="0"/>
-                                  </a:rPr>
-                                  <m:t>𝑡</m:t>
-                                </m:r>
-                              </m:oMath>
-                            </m:oMathPara>
+                            <m:oMath xmlns:m="http://schemas.openxmlformats.org/officeDocument/2006/math">
+                              <m:r>
+                                <a:rPr lang="en-CA" b="0" i="1" smtClean="0">
+                                  <a:solidFill>
+                                    <a:schemeClr val="tx1"/>
+                                  </a:solidFill>
+                                  <a:latin typeface="Cambria Math" panose="02040503050406030204" pitchFamily="18" charset="0"/>
+                                </a:rPr>
+                                <m:t>𝑡</m:t>
+                              </m:r>
+                            </m:oMath>
                           </a14:m>
-                          <a:endParaRPr lang="en-CA" b="0" dirty="0">
-                            <a:solidFill>
-                              <a:schemeClr val="tx1"/>
-                            </a:solidFill>
-                          </a:endParaRPr>
+                          <a:r>
+                            <a:rPr lang="en-CA" b="0" dirty="0">
+                              <a:solidFill>
+                                <a:schemeClr val="tx1"/>
+                              </a:solidFill>
+                            </a:rPr>
+                            <a:t> </a:t>
+                          </a:r>
                         </a:p>
                       </a:txBody>
-                      <a:tcPr>
+                      <a:tcPr anchor="ctr">
                         <a:lnL w="19050" cap="flat" cmpd="sng" algn="ctr">
                           <a:solidFill>
                             <a:schemeClr val="tx1"/>
@@ -8525,45 +8032,31 @@
                         <a:bodyPr/>
                         <a:lstStyle/>
                         <a:p>
-                          <a:pPr/>
+                          <a:pPr algn="ctr"/>
                           <a14:m>
-                            <m:oMathPara xmlns:m="http://schemas.openxmlformats.org/officeDocument/2006/math">
-                              <m:oMathParaPr>
-                                <m:jc m:val="centerGroup"/>
-                              </m:oMathParaPr>
-                              <m:oMath xmlns:m="http://schemas.openxmlformats.org/officeDocument/2006/math">
-                                <m:r>
-                                  <m:rPr>
-                                    <m:sty m:val="p"/>
-                                  </m:rPr>
-                                  <a:rPr lang="en-CA" b="0" i="0" smtClean="0">
-                                    <a:solidFill>
-                                      <a:schemeClr val="tx1"/>
-                                    </a:solidFill>
-                                    <a:latin typeface="Cambria Math" panose="02040503050406030204" pitchFamily="18" charset="0"/>
-                                  </a:rPr>
-                                  <m:t>Δ</m:t>
-                                </m:r>
-                                <m:r>
-                                  <a:rPr lang="en-CA" b="0" i="1" smtClean="0">
-                                    <a:solidFill>
-                                      <a:schemeClr val="tx1"/>
-                                    </a:solidFill>
-                                    <a:latin typeface="Cambria Math" panose="02040503050406030204" pitchFamily="18" charset="0"/>
-                                  </a:rPr>
-                                  <m:t>𝑑</m:t>
-                                </m:r>
-                              </m:oMath>
-                            </m:oMathPara>
+                            <m:oMath xmlns:m="http://schemas.openxmlformats.org/officeDocument/2006/math">
+                              <m:r>
+                                <a:rPr lang="en-US" b="0" i="1" smtClean="0">
+                                  <a:solidFill>
+                                    <a:schemeClr val="tx1"/>
+                                  </a:solidFill>
+                                  <a:latin typeface="Cambria Math" panose="02040503050406030204" pitchFamily="18" charset="0"/>
+                                </a:rPr>
+                                <m:t>𝑑</m:t>
+                              </m:r>
+                            </m:oMath>
                           </a14:m>
-                          <a:endParaRPr lang="en-CA" b="0" dirty="0">
-                            <a:solidFill>
-                              <a:schemeClr val="tx1"/>
-                            </a:solidFill>
-                          </a:endParaRPr>
+                          <a:r>
+                            <a:rPr lang="en-CA" b="0" dirty="0">
+                              <a:solidFill>
+                                <a:schemeClr val="tx1"/>
+                              </a:solidFill>
+                            </a:rPr>
+                            <a:t> </a:t>
+                          </a:r>
                         </a:p>
                       </a:txBody>
-                      <a:tcPr>
+                      <a:tcPr anchor="ctr">
                         <a:lnL w="19050" cap="flat" cmpd="sng" algn="ctr">
                           <a:solidFill>
                             <a:schemeClr val="tx1"/>
@@ -9052,31 +8545,18 @@
                                 <m:jc m:val="centerGroup"/>
                               </m:oMathParaPr>
                               <m:oMath xmlns:m="http://schemas.openxmlformats.org/officeDocument/2006/math">
-                                <m:sSub>
-                                  <m:sSubPr>
-                                    <m:ctrlPr>
-                                      <a:rPr lang="en-CA" i="1" smtClean="0">
-                                        <a:latin typeface="Cambria Math" panose="02040503050406030204" pitchFamily="18" charset="0"/>
-                                      </a:rPr>
-                                    </m:ctrlPr>
-                                  </m:sSubPr>
-                                  <m:e>
-                                    <m:r>
-                                      <a:rPr lang="en-CA" i="1" smtClean="0">
-                                        <a:latin typeface="Cambria Math" panose="02040503050406030204" pitchFamily="18" charset="0"/>
-                                      </a:rPr>
-                                      <m:t>𝑥</m:t>
-                                    </m:r>
-                                  </m:e>
-                                  <m:sub>
-                                    <m:r>
-                                      <a:rPr lang="en-US" b="0" i="1" smtClean="0">
-                                        <a:latin typeface="Cambria Math" panose="02040503050406030204" pitchFamily="18" charset="0"/>
-                                      </a:rPr>
-                                      <m:t>𝑓</m:t>
-                                    </m:r>
-                                  </m:sub>
-                                </m:sSub>
+                                <m:r>
+                                  <a:rPr lang="en-US" i="1" smtClean="0">
+                                    <a:latin typeface="Cambria Math" panose="02040503050406030204" pitchFamily="18" charset="0"/>
+                                  </a:rPr>
+                                  <m:t>𝑉</m:t>
+                                </m:r>
+                                <m:r>
+                                  <a:rPr lang="en-US" b="0" i="1" smtClean="0">
+                                    <a:latin typeface="Cambria Math" panose="02040503050406030204" pitchFamily="18" charset="0"/>
+                                  </a:rPr>
+                                  <m:t>𝑂𝐼</m:t>
+                                </m:r>
                               </m:oMath>
                             </m:oMathPara>
                           </a14:m>
@@ -9570,7 +9050,7 @@
             </a:graphic>
           </p:graphicFrame>
         </mc:Choice>
-        <mc:Fallback xmlns="">
+        <mc:Fallback>
           <p:graphicFrame>
             <p:nvGraphicFramePr>
               <p:cNvPr id="28" name="Table 27">
@@ -9586,14 +9066,14 @@
               <p:nvPr>
                 <p:extLst>
                   <p:ext uri="{D42A27DB-BD31-4B8C-83A1-F6EECF244321}">
-                    <p14:modId xmlns:p14="http://schemas.microsoft.com/office/powerpoint/2010/main" val="1877467923"/>
+                    <p14:modId xmlns:p14="http://schemas.microsoft.com/office/powerpoint/2010/main" val="3812806497"/>
                   </p:ext>
                 </p:extLst>
               </p:nvPr>
             </p:nvGraphicFramePr>
             <p:xfrm>
-              <a:off x="6541652" y="3392443"/>
-              <a:ext cx="2369124" cy="1853279"/>
+              <a:off x="6541651" y="3392443"/>
+              <a:ext cx="3065193" cy="2105564"/>
             </p:xfrm>
             <a:graphic>
               <a:graphicData uri="http://schemas.openxmlformats.org/drawingml/2006/table">
@@ -9602,21 +9082,21 @@
                     <a:tableStyleId>{5C22544A-7EE6-4342-B048-85BDC9FD1C3A}</a:tableStyleId>
                   </a:tblPr>
                   <a:tblGrid>
-                    <a:gridCol w="789708">
+                    <a:gridCol w="1021731">
                       <a:extLst>
                         <a:ext uri="{9D8B030D-6E8A-4147-A177-3AD203B41FA5}">
                           <a16:colId xmlns:a16="http://schemas.microsoft.com/office/drawing/2014/main" val="3638430088"/>
                         </a:ext>
                       </a:extLst>
                     </a:gridCol>
-                    <a:gridCol w="789708">
+                    <a:gridCol w="1021731">
                       <a:extLst>
                         <a:ext uri="{9D8B030D-6E8A-4147-A177-3AD203B41FA5}">
                           <a16:colId xmlns:a16="http://schemas.microsoft.com/office/drawing/2014/main" val="2870050223"/>
                         </a:ext>
                       </a:extLst>
                     </a:gridCol>
-                    <a:gridCol w="789708">
+                    <a:gridCol w="1021731">
                       <a:extLst>
                         <a:ext uri="{9D8B030D-6E8A-4147-A177-3AD203B41FA5}">
                           <a16:colId xmlns:a16="http://schemas.microsoft.com/office/drawing/2014/main" val="3677307559"/>
@@ -9624,7 +9104,7 @@
                       </a:extLst>
                     </a:gridCol>
                   </a:tblGrid>
-                  <a:tr h="366371">
+                  <a:tr h="640080">
                     <a:tc>
                       <a:txBody>
                         <a:bodyPr/>
@@ -9633,7 +9113,7 @@
                           <a:endParaRPr lang="en-US"/>
                         </a:p>
                       </a:txBody>
-                      <a:tcPr>
+                      <a:tcPr anchor="ctr">
                         <a:lnL w="12700" cmpd="sng">
                           <a:noFill/>
                         </a:lnL>
@@ -9669,7 +9149,7 @@
                         <a:blipFill>
                           <a:blip r:embed="rId8"/>
                           <a:stretch>
-                            <a:fillRect r="-200769" b="-435000"/>
+                            <a:fillRect r="-200595" b="-245714"/>
                           </a:stretch>
                         </a:blipFill>
                       </a:tcPr>
@@ -9682,7 +9162,7 @@
                           <a:endParaRPr lang="en-US"/>
                         </a:p>
                       </a:txBody>
-                      <a:tcPr>
+                      <a:tcPr anchor="ctr">
                         <a:lnL w="19050" cap="flat" cmpd="sng" algn="ctr">
                           <a:solidFill>
                             <a:schemeClr val="tx1"/>
@@ -9724,7 +9204,7 @@
                         <a:blipFill>
                           <a:blip r:embed="rId8"/>
                           <a:stretch>
-                            <a:fillRect l="-100775" r="-102326" b="-435000"/>
+                            <a:fillRect l="-100599" r="-101796" b="-245714"/>
                           </a:stretch>
                         </a:blipFill>
                       </a:tcPr>
@@ -9737,7 +9217,7 @@
                           <a:endParaRPr lang="en-US"/>
                         </a:p>
                       </a:txBody>
-                      <a:tcPr>
+                      <a:tcPr anchor="ctr">
                         <a:lnL w="19050" cap="flat" cmpd="sng" algn="ctr">
                           <a:solidFill>
                             <a:schemeClr val="tx1"/>
@@ -9773,7 +9253,7 @@
                         <a:blipFill>
                           <a:blip r:embed="rId8"/>
                           <a:stretch>
-                            <a:fillRect l="-199231" r="-1538" b="-435000"/>
+                            <a:fillRect l="-199405" r="-1190" b="-245714"/>
                           </a:stretch>
                         </a:blipFill>
                       </a:tcPr>
@@ -10214,7 +9694,7 @@
                       </a:ext>
                     </a:extLst>
                   </a:tr>
-                  <a:tr h="387795">
+                  <a:tr h="366371">
                     <a:tc>
                       <a:txBody>
                         <a:bodyPr/>
@@ -10265,7 +9745,7 @@
                         <a:blipFill>
                           <a:blip r:embed="rId8"/>
                           <a:stretch>
-                            <a:fillRect t="-282813" r="-200769" b="-118750"/>
+                            <a:fillRect t="-376667" r="-200595" b="-128333"/>
                           </a:stretch>
                         </a:blipFill>
                       </a:tcPr>
@@ -10326,7 +9806,7 @@
                         <a:blipFill>
                           <a:blip r:embed="rId8"/>
                           <a:stretch>
-                            <a:fillRect l="-100775" t="-282813" r="-102326" b="-118750"/>
+                            <a:fillRect l="-100599" t="-376667" r="-101796" b="-128333"/>
                           </a:stretch>
                         </a:blipFill>
                       </a:tcPr>
@@ -10381,7 +9861,7 @@
                         <a:blipFill>
                           <a:blip r:embed="rId8"/>
                           <a:stretch>
-                            <a:fillRect l="-199231" t="-282813" r="-1538" b="-118750"/>
+                            <a:fillRect l="-199405" t="-376667" r="-1190" b="-128333"/>
                           </a:stretch>
                         </a:blipFill>
                       </a:tcPr>
@@ -10635,11 +10115,14 @@
         </p:nvSpPr>
         <p:spPr>
           <a:xfrm rot="5400000">
-            <a:off x="7604955" y="2014371"/>
-            <a:ext cx="242518" cy="2458924"/>
+            <a:off x="7930539" y="1688787"/>
+            <a:ext cx="242518" cy="3110092"/>
           </a:xfrm>
           <a:prstGeom prst="leftBrace">
-            <a:avLst/>
+            <a:avLst>
+              <a:gd name="adj1" fmla="val 8333"/>
+              <a:gd name="adj2" fmla="val 60330"/>
+            </a:avLst>
           </a:prstGeom>
         </p:spPr>
         <p:style>
@@ -10723,6 +10206,9 @@
           <a:prstGeom prst="rect">
             <a:avLst/>
           </a:prstGeom>
+          <a:solidFill>
+            <a:schemeClr val="bg1"/>
+          </a:solidFill>
           <a:ln w="3175">
             <a:solidFill>
               <a:schemeClr val="tx1"/>
@@ -10951,6 +10437,100 @@
           </a:p>
         </p:txBody>
       </p:sp>
+      <p:sp>
+        <p:nvSpPr>
+          <p:cNvPr id="15" name="Rectangle 14">
+            <a:extLst>
+              <a:ext uri="{FF2B5EF4-FFF2-40B4-BE49-F238E27FC236}">
+                <a16:creationId xmlns:a16="http://schemas.microsoft.com/office/drawing/2014/main" id="{E40BE39A-4224-9323-38CC-ED4A6AAB1999}"/>
+              </a:ext>
+            </a:extLst>
+          </p:cNvPr>
+          <p:cNvSpPr/>
+          <p:nvPr/>
+        </p:nvSpPr>
+        <p:spPr>
+          <a:xfrm>
+            <a:off x="2792627" y="5914768"/>
+            <a:ext cx="5305168" cy="511343"/>
+          </a:xfrm>
+          <a:prstGeom prst="rect">
+            <a:avLst/>
+          </a:prstGeom>
+          <a:solidFill>
+            <a:schemeClr val="bg1"/>
+          </a:solidFill>
+          <a:ln>
+            <a:solidFill>
+              <a:schemeClr val="bg1"/>
+            </a:solidFill>
+          </a:ln>
+        </p:spPr>
+        <p:style>
+          <a:lnRef idx="2">
+            <a:schemeClr val="accent1">
+              <a:shade val="15000"/>
+            </a:schemeClr>
+          </a:lnRef>
+          <a:fillRef idx="1">
+            <a:schemeClr val="accent1"/>
+          </a:fillRef>
+          <a:effectRef idx="0">
+            <a:schemeClr val="accent1"/>
+          </a:effectRef>
+          <a:fontRef idx="minor">
+            <a:schemeClr val="lt1"/>
+          </a:fontRef>
+        </p:style>
+        <p:txBody>
+          <a:bodyPr rtlCol="0" anchor="ctr"/>
+          <a:lstStyle/>
+          <a:p>
+            <a:pPr algn="ctr"/>
+            <a:endParaRPr lang="en-CA"/>
+          </a:p>
+        </p:txBody>
+      </p:sp>
+      <p:pic>
+        <p:nvPicPr>
+          <p:cNvPr id="12" name="Picture 2">
+            <a:extLst>
+              <a:ext uri="{FF2B5EF4-FFF2-40B4-BE49-F238E27FC236}">
+                <a16:creationId xmlns:a16="http://schemas.microsoft.com/office/drawing/2014/main" id="{E4690C23-0FC8-6C52-8DC6-AB26F439CFC2}"/>
+              </a:ext>
+            </a:extLst>
+          </p:cNvPr>
+          <p:cNvPicPr>
+            <a:picLocks noChangeAspect="1" noChangeArrowheads="1"/>
+          </p:cNvPicPr>
+          <p:nvPr/>
+        </p:nvPicPr>
+        <p:blipFill>
+          <a:blip r:embed="rId11">
+            <a:extLst>
+              <a:ext uri="{28A0092B-C50C-407E-A947-70E740481C1C}">
+                <a14:useLocalDpi xmlns:a14="http://schemas.microsoft.com/office/drawing/2010/main" val="0"/>
+              </a:ext>
+            </a:extLst>
+          </a:blip>
+          <a:srcRect/>
+          <a:stretch>
+            <a:fillRect/>
+          </a:stretch>
+        </p:blipFill>
+        <p:spPr bwMode="auto">
+          <a:xfrm>
+            <a:off x="2792627" y="5980282"/>
+            <a:ext cx="5380006" cy="354240"/>
+          </a:xfrm>
+          <a:prstGeom prst="rect">
+            <a:avLst/>
+          </a:prstGeom>
+          <a:solidFill>
+            <a:schemeClr val="bg1"/>
+          </a:solidFill>
+        </p:spPr>
+      </p:pic>
     </p:spTree>
     <p:extLst>
       <p:ext uri="{BB962C8B-B14F-4D97-AF65-F5344CB8AC3E}">
